--- a/slides/english_research_intro.pptx
+++ b/slides/english_research_intro.pptx
@@ -115,25 +115,25 @@
   <p:extLst>
     <p:ext uri="{521415D9-36F7-43E2-AB2F-B90AF26B5E84}">
       <p14:sectionLst xmlns:p14="http://schemas.microsoft.com/office/powerpoint/2010/main">
-        <p14:section name="Intro" id="{f3553e90-8c6c-af18-ee99-24909bace07d}">
+        <p14:section name="Overview" id="{46db539d-e296-6513-1d45-571434484eef}">
           <p14:sldIdLst>
             <p14:sldId id="256"/>
             <p14:sldId id="257"/>
           </p14:sldIdLst>
         </p14:section>
-        <p14:section name="Undergraduate" id="{08aa4442-b25a-be51-bf23-17cb86e5bdb7}">
+        <p14:section name="Undergraduate" id="{78571636-cb7e-0d80-df89-d1cfb1d4bfae}">
           <p14:sldIdLst>
             <p14:sldId id="258"/>
             <p14:sldId id="259"/>
             <p14:sldId id="260"/>
           </p14:sldIdLst>
         </p14:section>
-        <p14:section name="Bridge" id="{2864f201-1b67-0a59-79a6-880561316c29}">
+        <p14:section name="Bridge" id="{d0e11926-0dfe-f616-5598-48d459b5de57}">
           <p14:sldIdLst>
             <p14:sldId id="261"/>
           </p14:sldIdLst>
         </p14:section>
-        <p14:section name="Master's" id="{4cbfa416-1303-960a-9182-02854d9bf4ba}">
+        <p14:section name="Master's" id="{fcbe5ac4-9a1f-3337-5b74-e67a563a3649}">
           <p14:sldIdLst>
             <p14:sldId id="262"/>
             <p14:sldId id="263"/>
@@ -163,7 +163,7 @@
             <a:pPr>
               <a:defRPr sz="1200" b="0" i="0" u="none" strike="noStrike">
                 <a:solidFill>
-                  <a:srgbClr val="14213D"/>
+                  <a:srgbClr val="1A1A1A"/>
                 </a:solidFill>
                 <a:latin typeface="+mn-lt"/>
               </a:defRPr>
@@ -171,11 +171,11 @@
             <a:r>
               <a:rPr sz="1200" b="0" i="0" u="none" strike="noStrike">
                 <a:solidFill>
-                  <a:srgbClr val="14213D"/>
+                  <a:srgbClr val="1A1A1A"/>
                 </a:solidFill>
                 <a:latin typeface="+mn-lt"/>
               </a:rPr>
-              <a:t>BERTScore vs. actual utterances (axis starts at 0.60)</a:t>
+              <a:t>BERTScore against what participants actually said</a:t>
             </a:r>
           </a:p>
         </c:rich>
@@ -206,7 +206,7 @@
           </c:tx>
           <c:spPr>
             <a:solidFill>
-              <a:srgbClr val="6B7280"/>
+              <a:srgbClr val="999999"/>
             </a:solidFill>
             <a:effectLst/>
           </c:spPr>
@@ -220,7 +220,7 @@
                 <a:pPr>
                   <a:defRPr b="0" i="0" strike="noStrike" sz="1000" u="none">
                     <a:solidFill>
-                      <a:srgbClr val="1F2937"/>
+                      <a:srgbClr val="1A1A1A"/>
                     </a:solidFill>
                     <a:latin typeface="+mn-lt"/>
                   </a:defRPr>
@@ -295,7 +295,7 @@
           </c:tx>
           <c:spPr>
             <a:solidFill>
-              <a:srgbClr val="0F8B8D"/>
+              <a:srgbClr val="0017C1"/>
             </a:solidFill>
             <a:effectLst/>
           </c:spPr>
@@ -309,7 +309,7 @@
                 <a:pPr>
                   <a:defRPr b="0" i="0" strike="noStrike" sz="1000" u="none">
                     <a:solidFill>
-                      <a:srgbClr val="1F2937"/>
+                      <a:srgbClr val="1A1A1A"/>
                     </a:solidFill>
                     <a:latin typeface="+mn-lt"/>
                   </a:defRPr>
@@ -377,7 +377,7 @@
               <a:pPr>
                 <a:defRPr b="0" i="0" strike="noStrike" sz="1000" u="none">
                   <a:solidFill>
-                    <a:srgbClr val="1F2937"/>
+                    <a:srgbClr val="1A1A1A"/>
                   </a:solidFill>
                   <a:latin typeface="+mn-lt"/>
                 </a:defRPr>
@@ -392,7 +392,7 @@
           <c:showBubbleSize val="0"/>
           <c:showLeaderLines val="0"/>
         </c:dLbls>
-        <c:gapWidth val="150"/>
+        <c:gapWidth val="60"/>
         <c:overlap val="0"/>
         <c:axId val="2094734554"/>
         <c:axId val="2094734552"/>
@@ -405,6 +405,35 @@
         </c:scaling>
         <c:delete val="0"/>
         <c:axPos val="b"/>
+        <c:title>
+          <c:tx>
+            <c:rich>
+              <a:bodyPr/>
+              <a:lstStyle/>
+              <a:p>
+                <a:pPr>
+                  <a:defRPr sz="1000" b="0" i="0" u="none" strike="noStrike">
+                    <a:solidFill>
+                      <a:srgbClr val="626264"/>
+                    </a:solidFill>
+                    <a:latin typeface="+mn-lt"/>
+                  </a:defRPr>
+                </a:pPr>
+                <a:r>
+                  <a:rPr sz="1000" b="0" i="0" u="none" strike="noStrike">
+                    <a:solidFill>
+                      <a:srgbClr val="626264"/>
+                    </a:solidFill>
+                    <a:latin typeface="+mn-lt"/>
+                  </a:rPr>
+                  <a:t>Condition (A = e-commerce, B = video streaming)</a:t>
+                </a:r>
+              </a:p>
+            </c:rich>
+          </c:tx>
+          <c:layout/>
+          <c:overlay val="0"/>
+        </c:title>
         <c:numFmt formatCode="General" sourceLinked="1"/>
         <c:majorTickMark val="out"/>
         <c:minorTickMark val="none"/>
@@ -425,7 +454,7 @@
             <a:pPr>
               <a:defRPr sz="1100" b="0" i="0" u="none" strike="noStrike">
                 <a:solidFill>
-                  <a:srgbClr val="1F2937"/>
+                  <a:srgbClr val="1A1A1A"/>
                 </a:solidFill>
                 <a:latin typeface="+mn-lt"/>
               </a:defRPr>
@@ -443,8 +472,8 @@
         <c:axId val="2094734552"/>
         <c:scaling>
           <c:orientation val="minMax"/>
-          <c:max val="0.71"/>
-          <c:min val="0.6"/>
+          <c:max val="1"/>
+          <c:min val="0"/>
         </c:scaling>
         <c:delete val="0"/>
         <c:axPos val="l"/>
@@ -452,14 +481,43 @@
           <c:spPr>
             <a:ln w="6350" cap="flat">
               <a:solidFill>
-                <a:srgbClr val="D9DEE5"/>
+                <a:srgbClr val="E5E5E5"/>
               </a:solidFill>
               <a:prstDash val="solid"/>
               <a:round/>
             </a:ln>
           </c:spPr>
         </c:majorGridlines>
-        <c:numFmt formatCode="0.00" sourceLinked="0"/>
+        <c:title>
+          <c:tx>
+            <c:rich>
+              <a:bodyPr/>
+              <a:lstStyle/>
+              <a:p>
+                <a:pPr>
+                  <a:defRPr sz="1000" b="0" i="0" u="none" strike="noStrike">
+                    <a:solidFill>
+                      <a:srgbClr val="626264"/>
+                    </a:solidFill>
+                    <a:latin typeface="+mn-lt"/>
+                  </a:defRPr>
+                </a:pPr>
+                <a:r>
+                  <a:rPr sz="1000" b="0" i="0" u="none" strike="noStrike">
+                    <a:solidFill>
+                      <a:srgbClr val="626264"/>
+                    </a:solidFill>
+                    <a:latin typeface="+mn-lt"/>
+                  </a:rPr>
+                  <a:t>BERTScore</a:t>
+                </a:r>
+              </a:p>
+            </c:rich>
+          </c:tx>
+          <c:layout/>
+          <c:overlay val="0"/>
+        </c:title>
+        <c:numFmt formatCode="0.0" sourceLinked="0"/>
         <c:majorTickMark val="out"/>
         <c:minorTickMark val="none"/>
         <c:tickLblPos val="nextTo"/>
@@ -479,7 +537,7 @@
             <a:pPr>
               <a:defRPr sz="1000" b="0" i="0" u="none" strike="noStrike">
                 <a:solidFill>
-                  <a:srgbClr val="6B7280"/>
+                  <a:srgbClr val="626264"/>
                 </a:solidFill>
                 <a:latin typeface="+mn-lt"/>
               </a:defRPr>
@@ -490,7 +548,7 @@
         <c:crossAx val="2094734554"/>
         <c:crosses val="autoZero"/>
         <c:crossBetween val="between"/>
-        <c:majorUnit val="0.02"/>
+        <c:majorUnit val="0.2"/>
       </c:valAx>
       <c:spPr>
         <a:noFill/>
@@ -501,7 +559,7 @@
       </c:spPr>
     </c:plotArea>
     <c:legend>
-      <c:legendPos val="b"/>
+      <c:legendPos val="t"/>
       <c:overlay val="0"/>
       <c:txPr>
         <a:bodyPr/>
@@ -510,7 +568,7 @@
           <a:pPr>
             <a:defRPr sz="1100">
               <a:solidFill>
-                <a:srgbClr val="1F2937"/>
+                <a:srgbClr val="1A1A1A"/>
               </a:solidFill>
               <a:latin typeface="+mn-lt"/>
               <a:cs typeface="+mn-lt"/>
@@ -1709,7 +1767,7 @@
 
 <file path=ppt/slideLayouts/slideLayout2.xml><?xml version="1.0" encoding="utf-8"?>
 <p:sldLayout xmlns:a="http://schemas.openxmlformats.org/drawingml/2006/main" xmlns:r="http://schemas.openxmlformats.org/officeDocument/2006/relationships" xmlns:p="http://schemas.openxmlformats.org/presentationml/2006/main" preserve="1">
-  <p:cSld name="TITLE_DARK">
+  <p:cSld name="COVER">
     <p:bg>
       <p:bgPr>
         <a:solidFill>
@@ -1745,7 +1803,7 @@
     <p:bg>
       <p:bgPr>
         <a:solidFill>
-          <a:schemeClr val="bg2"/>
+          <a:schemeClr val="bg1"/>
         </a:solidFill>
       </p:bgPr>
     </p:bg>
@@ -1771,8 +1829,8 @@
         </p:nvSpPr>
         <p:spPr>
           <a:xfrm>
-            <a:off x="457200" y="4828032"/>
-            <a:ext cx="5486400" cy="228600"/>
+            <a:off x="6949440" y="4800600"/>
+            <a:ext cx="1280160" cy="228600"/>
           </a:xfrm>
           <a:prstGeom prst="rect">
             <a:avLst/>
@@ -1784,16 +1842,16 @@
           <a:bodyPr wrap="square" lIns="0" tIns="0" rIns="0" bIns="0" rtlCol="0" anchor="ctr"/>
           <a:lstStyle/>
           <a:p>
-            <a:pPr indent="0" marL="0">
+            <a:pPr algn="r" indent="0" marL="0">
               <a:buNone/>
             </a:pPr>
             <a:r>
               <a:rPr lang="en-US" sz="900" dirty="0">
                 <a:solidFill>
-                  <a:schemeClr val="accent3"/>
-                </a:solidFill>
-              </a:rPr>
-              <a:t>Understanding Why Users Hesitate · R. Ikeda</a:t>
+                  <a:schemeClr val="tx2"/>
+                </a:solidFill>
+              </a:rPr>
+              <a:t>Reina Ikeda</a:t>
             </a:r>
             <a:endParaRPr lang="en-US" sz="900" dirty="0"/>
           </a:p>
@@ -1811,8 +1869,8 @@
         </p:nvSpPr>
         <p:spPr>
           <a:xfrm>
-            <a:off x="8229600" y="4828032"/>
-            <a:ext cx="457200" cy="228600"/>
+            <a:off x="8321040" y="4800600"/>
+            <a:ext cx="365760" cy="228600"/>
           </a:xfrm>
           <a:prstGeom prst="rect">
             <a:avLst/>
@@ -1829,7 +1887,7 @@
             <a:lvl1pPr>
               <a:defRPr sz="900">
                 <a:solidFill>
-                  <a:schemeClr val="accent3"/>
+                  <a:schemeClr val="tx1"/>
                 </a:solidFill>
               </a:defRPr>
             </a:lvl1pPr>
@@ -1881,8 +1939,8 @@
         </p:nvSpPr>
         <p:spPr>
           <a:xfrm>
-            <a:off x="8229600" y="4828032"/>
-            <a:ext cx="457200" cy="228600"/>
+            <a:off x="8321040" y="4800600"/>
+            <a:ext cx="365760" cy="228600"/>
           </a:xfrm>
           <a:prstGeom prst="rect">
             <a:avLst/>
@@ -1899,7 +1957,7 @@
             <a:lvl1pPr>
               <a:defRPr sz="900">
                 <a:solidFill>
-                  <a:schemeClr val="accent3"/>
+                  <a:schemeClr val="tx1"/>
                 </a:solidFill>
               </a:defRPr>
             </a:lvl1pPr>
@@ -2195,26 +2253,132 @@
       </p:grpSpPr>
       <p:sp>
         <p:nvSpPr>
-          <p:cNvPr id="2" name="Gaze ring outer"/>
+          <p:cNvPr id="2" name="Affiliation"/>
+          <p:cNvSpPr txBox="1"/>
+          <p:nvPr/>
+        </p:nvSpPr>
+        <p:spPr>
+          <a:xfrm>
+            <a:off x="182880" y="182880"/>
+            <a:ext cx="4572000" cy="274320"/>
+          </a:xfrm>
+          <a:prstGeom prst="rect">
+            <a:avLst/>
+          </a:prstGeom>
+          <a:noFill/>
+          <a:ln/>
+        </p:spPr>
+        <p:txBody>
+          <a:bodyPr wrap="square" lIns="0" tIns="0" rIns="0" bIns="0" rtlCol="0" anchor="ctr"/>
+          <a:lstStyle/>
+          <a:p>
+            <a:pPr indent="0" marL="0">
+              <a:buNone/>
+            </a:pPr>
+            <a:r>
+              <a:rPr lang="en-US" sz="1200" b="1" dirty="0">
+                <a:solidFill>
+                  <a:schemeClr val="bg1"/>
+                </a:solidFill>
+              </a:rPr>
+              <a:t>Tokyo Metropolitan University</a:t>
+            </a:r>
+            <a:endParaRPr lang="en-US" sz="1200" dirty="0"/>
+          </a:p>
+        </p:txBody>
+      </p:sp>
+      <p:sp>
+        <p:nvSpPr>
+          <p:cNvPr id="3" name="Title"/>
+          <p:cNvSpPr txBox="1"/>
+          <p:nvPr/>
+        </p:nvSpPr>
+        <p:spPr>
+          <a:xfrm>
+            <a:off x="914400" y="1325880"/>
+            <a:ext cx="7498080" cy="1371600"/>
+          </a:xfrm>
+          <a:prstGeom prst="rect">
+            <a:avLst/>
+          </a:prstGeom>
+          <a:noFill/>
+          <a:ln/>
+        </p:spPr>
+        <p:txBody>
+          <a:bodyPr wrap="square" lIns="0" tIns="0" rIns="0" bIns="0" rtlCol="0" anchor="ctr"/>
+          <a:lstStyle/>
+          <a:p>
+            <a:pPr indent="0" marL="0">
+              <a:buNone/>
+            </a:pPr>
+            <a:r>
+              <a:rPr lang="en-US" sz="4000" dirty="0">
+                <a:solidFill>
+                  <a:schemeClr val="bg1"/>
+                </a:solidFill>
+              </a:rPr>
+              <a:t>Understanding Why Users Hesitate</a:t>
+            </a:r>
+            <a:endParaRPr lang="en-US" sz="4000" dirty="0"/>
+          </a:p>
+        </p:txBody>
+      </p:sp>
+      <p:sp>
+        <p:nvSpPr>
+          <p:cNvPr id="4" name="Subtitle"/>
+          <p:cNvSpPr txBox="1"/>
+          <p:nvPr/>
+        </p:nvSpPr>
+        <p:spPr>
+          <a:xfrm>
+            <a:off x="914400" y="2743200"/>
+            <a:ext cx="7315200" cy="411480"/>
+          </a:xfrm>
+          <a:prstGeom prst="rect">
+            <a:avLst/>
+          </a:prstGeom>
+          <a:noFill/>
+          <a:ln/>
+        </p:spPr>
+        <p:txBody>
+          <a:bodyPr wrap="square" lIns="0" tIns="0" rIns="0" bIns="0" rtlCol="0" anchor="ctr"/>
+          <a:lstStyle/>
+          <a:p>
+            <a:pPr indent="0" marL="0">
+              <a:buNone/>
+            </a:pPr>
+            <a:r>
+              <a:rPr lang="en-US" sz="2000" dirty="0">
+                <a:solidFill>
+                  <a:schemeClr val="bg1"/>
+                </a:solidFill>
+              </a:rPr>
+              <a:t>From think-aloud prediction to LLM-based gaze interpretation</a:t>
+            </a:r>
+            <a:endParaRPr lang="en-US" sz="2000" dirty="0"/>
+          </a:p>
+        </p:txBody>
+      </p:sp>
+      <p:sp>
+        <p:nvSpPr>
+          <p:cNvPr id="5" name="Byline box"/>
           <p:cNvSpPr/>
           <p:nvPr/>
         </p:nvSpPr>
         <p:spPr>
           <a:xfrm>
-            <a:off x="6766560" y="-1097280"/>
-            <a:ext cx="4023360" cy="4023360"/>
-          </a:xfrm>
-          <a:prstGeom prst="ellipse">
+            <a:off x="914400" y="3657600"/>
+            <a:ext cx="2971800" cy="457200"/>
+          </a:xfrm>
+          <a:prstGeom prst="rect">
             <a:avLst/>
           </a:prstGeom>
           <a:solidFill>
-            <a:schemeClr val="accent1">
-              <a:alpha val="30000"/>
-            </a:schemeClr>
+            <a:schemeClr val="tx2"/>
           </a:solidFill>
           <a:ln w="12700">
             <a:solidFill>
-              <a:schemeClr val="accent1"/>
+              <a:schemeClr val="bg1"/>
             </a:solidFill>
             <a:prstDash val="solid"/>
           </a:ln>
@@ -2222,116 +2386,14 @@
       </p:sp>
       <p:sp>
         <p:nvSpPr>
-          <p:cNvPr id="3" name="Gaze ring inner"/>
-          <p:cNvSpPr/>
-          <p:nvPr/>
-        </p:nvSpPr>
-        <p:spPr>
-          <a:xfrm>
-            <a:off x="7589520" y="-274320"/>
-            <a:ext cx="2377440" cy="2377440"/>
-          </a:xfrm>
-          <a:prstGeom prst="ellipse">
-            <a:avLst/>
-          </a:prstGeom>
-          <a:solidFill>
-            <a:schemeClr val="accent2">
-              <a:alpha val="45000"/>
-            </a:schemeClr>
-          </a:solidFill>
-          <a:ln w="12700">
-            <a:solidFill>
-              <a:schemeClr val="accent2"/>
-            </a:solidFill>
-            <a:prstDash val="solid"/>
-          </a:ln>
-        </p:spPr>
-      </p:sp>
-      <p:sp>
-        <p:nvSpPr>
-          <p:cNvPr id="4" name="Title"/>
-          <p:cNvSpPr txBox="1"/>
-          <p:nvPr/>
-        </p:nvSpPr>
-        <p:spPr>
-          <a:xfrm>
-            <a:off x="548640" y="1097280"/>
-            <a:ext cx="7498080" cy="1371600"/>
-          </a:xfrm>
-          <a:prstGeom prst="rect">
-            <a:avLst/>
-          </a:prstGeom>
-          <a:noFill/>
-          <a:ln/>
-        </p:spPr>
-        <p:txBody>
-          <a:bodyPr wrap="square" lIns="0" tIns="0" rIns="0" bIns="0" rtlCol="0" anchor="t"/>
-          <a:lstStyle/>
-          <a:p>
-            <a:pPr indent="0" marL="0">
-              <a:buNone/>
-            </a:pPr>
-            <a:r>
-              <a:rPr lang="en-US" sz="3600" b="1" dirty="0">
-                <a:solidFill>
-                  <a:schemeClr val="bg1"/>
-                </a:solidFill>
-                <a:latin typeface="Georgia" pitchFamily="34" charset="0"/>
-                <a:ea typeface="Georgia" pitchFamily="34" charset="-122"/>
-                <a:cs typeface="Georgia" pitchFamily="34" charset="-120"/>
-              </a:rPr>
-              <a:t>Understanding Why Users Hesitate</a:t>
-            </a:r>
-            <a:endParaRPr lang="en-US" sz="3600" dirty="0"/>
-          </a:p>
-        </p:txBody>
-      </p:sp>
-      <p:sp>
-        <p:nvSpPr>
-          <p:cNvPr id="5" name="Subtitle"/>
-          <p:cNvSpPr txBox="1"/>
-          <p:nvPr/>
-        </p:nvSpPr>
-        <p:spPr>
-          <a:xfrm>
-            <a:off x="548640" y="2651760"/>
-            <a:ext cx="6949440" cy="731520"/>
-          </a:xfrm>
-          <a:prstGeom prst="rect">
-            <a:avLst/>
-          </a:prstGeom>
-          <a:noFill/>
-          <a:ln/>
-        </p:spPr>
-        <p:txBody>
-          <a:bodyPr wrap="square" lIns="0" tIns="0" rIns="0" bIns="0" rtlCol="0" anchor="t"/>
-          <a:lstStyle/>
-          <a:p>
-            <a:pPr indent="0" marL="0">
-              <a:buNone/>
-            </a:pPr>
-            <a:r>
-              <a:rPr lang="en-US" sz="2000" dirty="0">
-                <a:solidFill>
-                  <a:schemeClr val="accent6"/>
-                </a:solidFill>
-              </a:rPr>
-              <a:t>From think-aloud prediction to LLM-based gaze interpretation</a:t>
-            </a:r>
-            <a:endParaRPr lang="en-US" sz="2000" dirty="0"/>
-          </a:p>
-        </p:txBody>
-      </p:sp>
-      <p:sp>
-        <p:nvSpPr>
           <p:cNvPr id="6" name="Byline"/>
           <p:cNvSpPr txBox="1"/>
           <p:nvPr/>
         </p:nvSpPr>
         <p:spPr>
           <a:xfrm>
-            <a:off x="548640" y="4114800"/>
-            <a:ext cx="7315200" cy="320040"/>
+            <a:off x="914400" y="3657600"/>
+            <a:ext cx="2971800" cy="457200"/>
           </a:xfrm>
           <a:prstGeom prst="rect">
             <a:avLst/>
@@ -2343,18 +2405,18 @@
           <a:bodyPr wrap="square" lIns="0" tIns="0" rIns="0" bIns="0" rtlCol="0" anchor="ctr"/>
           <a:lstStyle/>
           <a:p>
-            <a:pPr indent="0" marL="0">
-              <a:buNone/>
-            </a:pPr>
-            <a:r>
-              <a:rPr lang="en-US" sz="1400" dirty="0">
+            <a:pPr algn="ctr" indent="0" marL="0">
+              <a:buNone/>
+            </a:pPr>
+            <a:r>
+              <a:rPr lang="en-US" sz="1300" dirty="0">
                 <a:solidFill>
                   <a:schemeClr val="bg1"/>
                 </a:solidFill>
               </a:rPr>
-              <a:t>Reina Ikeda · Master's student (1st year), Tokyo Metropolitan University</a:t>
-            </a:r>
-            <a:endParaRPr lang="en-US" sz="1400" dirty="0"/>
+              <a:t>Reina Ikeda · Master's student, 1st year</a:t>
+            </a:r>
+            <a:endParaRPr lang="en-US" sz="1300" dirty="0"/>
           </a:p>
         </p:txBody>
       </p:sp>
@@ -2385,14 +2447,50 @@
       </p:grpSpPr>
       <p:sp>
         <p:nvSpPr>
-          <p:cNvPr id="2" name="Text 0"/>
+          <p:cNvPr id="2" name="Section label"/>
+          <p:cNvSpPr txBox="1"/>
+          <p:nvPr/>
+        </p:nvSpPr>
+        <p:spPr>
+          <a:xfrm>
+            <a:off x="457200" y="219456"/>
+            <a:ext cx="5486400" cy="237744"/>
+          </a:xfrm>
+          <a:prstGeom prst="rect">
+            <a:avLst/>
+          </a:prstGeom>
+          <a:noFill/>
+          <a:ln/>
+        </p:spPr>
+        <p:txBody>
+          <a:bodyPr wrap="square" lIns="0" tIns="0" rIns="0" bIns="0" rtlCol="0" anchor="ctr"/>
+          <a:lstStyle/>
+          <a:p>
+            <a:pPr indent="0" marL="0">
+              <a:buNone/>
+            </a:pPr>
+            <a:r>
+              <a:rPr lang="en-US" sz="1200" b="1" dirty="0">
+                <a:solidFill>
+                  <a:schemeClr val="tx2"/>
+                </a:solidFill>
+              </a:rPr>
+              <a:t>Overview</a:t>
+            </a:r>
+            <a:endParaRPr lang="en-US" sz="1200" dirty="0"/>
+          </a:p>
+        </p:txBody>
+      </p:sp>
+      <p:sp>
+        <p:nvSpPr>
+          <p:cNvPr id="3" name="Text 1"/>
           <p:cNvSpPr/>
           <p:nvPr/>
         </p:nvSpPr>
         <p:spPr>
           <a:xfrm>
-            <a:off x="457200" y="274320"/>
-            <a:ext cx="8229600" cy="685800"/>
+            <a:off x="457200" y="457200"/>
+            <a:ext cx="8229600" cy="594360"/>
           </a:xfrm>
           <a:prstGeom prst="rect">
             <a:avLst/>
@@ -2408,40 +2506,388 @@
               <a:buNone/>
             </a:pPr>
             <a:r>
-              <a:rPr lang="en-US" sz="2200" b="1" dirty="0">
+              <a:rPr lang="en-US" sz="2600" b="1" dirty="0">
                 <a:solidFill>
                   <a:schemeClr val="tx2"/>
                 </a:solidFill>
-                <a:latin typeface="Georgia" pitchFamily="34" charset="0"/>
-                <a:ea typeface="Georgia" pitchFamily="34" charset="-122"/>
-                <a:cs typeface="Georgia" pitchFamily="34" charset="-120"/>
               </a:rPr>
               <a:t>Think-aloud explains why, but at a cost</a:t>
             </a:r>
-            <a:endParaRPr lang="en-US" sz="2200" dirty="0"/>
-          </a:p>
-        </p:txBody>
-      </p:sp>
-      <p:sp>
-        <p:nvSpPr>
-          <p:cNvPr id="4" name="Card Problem"/>
+            <a:endParaRPr lang="en-US" sz="2600" dirty="0"/>
+          </a:p>
+        </p:txBody>
+      </p:sp>
+      <p:sp>
+        <p:nvSpPr>
+          <p:cNvPr id="5" name="Problem card"/>
           <p:cNvSpPr/>
           <p:nvPr/>
         </p:nvSpPr>
         <p:spPr>
           <a:xfrm>
-            <a:off x="457200" y="1234440"/>
-            <a:ext cx="2560320" cy="2926080"/>
-          </a:xfrm>
-          <a:prstGeom prst="rect">
-            <a:avLst/>
+            <a:off x="457200" y="1325880"/>
+            <a:ext cx="2514600" cy="3017520"/>
+          </a:xfrm>
+          <a:prstGeom prst="roundRect">
+            <a:avLst>
+              <a:gd name="adj" fmla="val 2909"/>
+            </a:avLst>
+          </a:prstGeom>
+          <a:solidFill>
+            <a:schemeClr val="bg2"/>
+          </a:solidFill>
+          <a:ln w="9525">
+            <a:solidFill>
+              <a:srgbClr val="CCCCCC"/>
+            </a:solidFill>
+            <a:prstDash val="solid"/>
+          </a:ln>
+        </p:spPr>
+      </p:sp>
+      <p:sp>
+        <p:nvSpPr>
+          <p:cNvPr id="6" name="Problem text"/>
+          <p:cNvSpPr txBox="1"/>
+          <p:nvPr/>
+        </p:nvSpPr>
+        <p:spPr>
+          <a:xfrm>
+            <a:off x="594360" y="1463040"/>
+            <a:ext cx="2240280" cy="2743200"/>
+          </a:xfrm>
+          <a:prstGeom prst="rect">
+            <a:avLst/>
+          </a:prstGeom>
+          <a:noFill/>
+          <a:ln/>
+        </p:spPr>
+        <p:txBody>
+          <a:bodyPr wrap="square" lIns="1016" tIns="1016" rIns="1016" bIns="1016" rtlCol="0" anchor="t"/>
+          <a:lstStyle/>
+          <a:p>
+            <a:pPr indent="0" marL="0">
+              <a:buNone/>
+            </a:pPr>
+            <a:r>
+              <a:rPr lang="en-US" sz="1800" b="1" dirty="0">
+                <a:solidFill>
+                  <a:schemeClr val="tx2"/>
+                </a:solidFill>
+              </a:rPr>
+              <a:t>Problem</a:t>
+            </a:r>
+            <a:endParaRPr lang="en-US" sz="1400" dirty="0"/>
+          </a:p>
+          <a:p>
+            <a:pPr indent="0" marL="0">
+              <a:buNone/>
+            </a:pPr>
+            <a:r>
+              <a:rPr lang="en-US" sz="600" b="1" dirty="0">
+                <a:solidFill>
+                  <a:schemeClr val="tx1"/>
+                </a:solidFill>
+              </a:rPr>
+              <a:t> </a:t>
+            </a:r>
+            <a:endParaRPr lang="en-US" sz="1400" dirty="0"/>
+          </a:p>
+          <a:p>
+            <a:pPr indent="0" marL="0">
+              <a:buNone/>
+            </a:pPr>
+            <a:r>
+              <a:rPr lang="en-US" sz="1500" b="1" dirty="0">
+                <a:solidFill>
+                  <a:schemeClr val="tx1"/>
+                </a:solidFill>
+              </a:rPr>
+              <a:t>Think-aloud shows why users struggle.</a:t>
+            </a:r>
+            <a:endParaRPr lang="en-US" sz="1400" dirty="0"/>
+          </a:p>
+          <a:p>
+            <a:pPr indent="0" marL="0">
+              <a:buNone/>
+            </a:pPr>
+            <a:r>
+              <a:rPr lang="en-US" sz="600" b="1" dirty="0">
+                <a:solidFill>
+                  <a:schemeClr val="tx1"/>
+                </a:solidFill>
+              </a:rPr>
+              <a:t> </a:t>
+            </a:r>
+            <a:endParaRPr lang="en-US" sz="1400" dirty="0"/>
+          </a:p>
+          <a:p>
+            <a:pPr indent="0" marL="0">
+              <a:buNone/>
+            </a:pPr>
+            <a:r>
+              <a:rPr lang="en-US" sz="1400" dirty="0">
+                <a:solidFill>
+                  <a:schemeClr val="accent3"/>
+                </a:solidFill>
+              </a:rPr>
+              <a:t>But talking while acting is a burden and can change natural behavior.</a:t>
+            </a:r>
+            <a:endParaRPr lang="en-US" sz="1400" dirty="0"/>
+          </a:p>
+        </p:txBody>
+      </p:sp>
+      <p:sp>
+        <p:nvSpPr>
+          <p:cNvPr id="7" name="Arrow problem-idea"/>
+          <p:cNvSpPr/>
+          <p:nvPr/>
+        </p:nvSpPr>
+        <p:spPr>
+          <a:xfrm>
+            <a:off x="3017520" y="2834640"/>
+            <a:ext cx="365760" cy="0"/>
+          </a:xfrm>
+          <a:prstGeom prst="line">
+            <a:avLst/>
+          </a:prstGeom>
+          <a:noFill/>
+          <a:ln w="15875">
+            <a:solidFill>
+              <a:schemeClr val="tx1"/>
+            </a:solidFill>
+            <a:prstDash val="solid"/>
+            <a:tailEnd type="triangle"/>
+          </a:ln>
+        </p:spPr>
+      </p:sp>
+      <p:sp>
+        <p:nvSpPr>
+          <p:cNvPr id="8" name="Idea card"/>
+          <p:cNvSpPr/>
+          <p:nvPr/>
+        </p:nvSpPr>
+        <p:spPr>
+          <a:xfrm>
+            <a:off x="3429000" y="1325880"/>
+            <a:ext cx="2514600" cy="3017520"/>
+          </a:xfrm>
+          <a:prstGeom prst="roundRect">
+            <a:avLst>
+              <a:gd name="adj" fmla="val 2909"/>
+            </a:avLst>
+          </a:prstGeom>
+          <a:solidFill>
+            <a:schemeClr val="accent6"/>
+          </a:solidFill>
+          <a:ln w="9525">
+            <a:solidFill>
+              <a:schemeClr val="accent5"/>
+            </a:solidFill>
+            <a:prstDash val="solid"/>
+          </a:ln>
+        </p:spPr>
+      </p:sp>
+      <p:sp>
+        <p:nvSpPr>
+          <p:cNvPr id="9" name="Idea text"/>
+          <p:cNvSpPr txBox="1"/>
+          <p:nvPr/>
+        </p:nvSpPr>
+        <p:spPr>
+          <a:xfrm>
+            <a:off x="3566160" y="1463040"/>
+            <a:ext cx="2240280" cy="2743200"/>
+          </a:xfrm>
+          <a:prstGeom prst="rect">
+            <a:avLst/>
+          </a:prstGeom>
+          <a:noFill/>
+          <a:ln/>
+        </p:spPr>
+        <p:txBody>
+          <a:bodyPr wrap="square" lIns="1016" tIns="1016" rIns="1016" bIns="1016" rtlCol="0" anchor="t"/>
+          <a:lstStyle/>
+          <a:p>
+            <a:pPr indent="0" marL="0">
+              <a:buNone/>
+            </a:pPr>
+            <a:r>
+              <a:rPr lang="en-US" sz="1800" b="1" dirty="0">
+                <a:solidFill>
+                  <a:schemeClr val="tx2"/>
+                </a:solidFill>
+              </a:rPr>
+              <a:t>Idea</a:t>
+            </a:r>
+            <a:endParaRPr lang="en-US" sz="1400" dirty="0"/>
+          </a:p>
+          <a:p>
+            <a:pPr indent="0" marL="0">
+              <a:buNone/>
+            </a:pPr>
+            <a:r>
+              <a:rPr lang="en-US" sz="600" b="1" dirty="0">
+                <a:solidFill>
+                  <a:schemeClr val="tx1"/>
+                </a:solidFill>
+              </a:rPr>
+              <a:t> </a:t>
+            </a:r>
+            <a:endParaRPr lang="en-US" sz="1400" dirty="0"/>
+          </a:p>
+          <a:p>
+            <a:pPr indent="0" marL="0">
+              <a:buNone/>
+            </a:pPr>
+            <a:r>
+              <a:rPr lang="en-US" sz="1500" b="1" dirty="0">
+                <a:solidFill>
+                  <a:schemeClr val="tx1"/>
+                </a:solidFill>
+              </a:rPr>
+              <a:t>Gaze + UI information + LLM</a:t>
+            </a:r>
+            <a:endParaRPr lang="en-US" sz="1400" dirty="0"/>
+          </a:p>
+          <a:p>
+            <a:pPr indent="0" marL="0">
+              <a:buNone/>
+            </a:pPr>
+            <a:r>
+              <a:rPr lang="en-US" sz="600" b="1" dirty="0">
+                <a:solidFill>
+                  <a:schemeClr val="tx1"/>
+                </a:solidFill>
+              </a:rPr>
+              <a:t> </a:t>
+            </a:r>
+            <a:endParaRPr lang="en-US" sz="1400" dirty="0"/>
+          </a:p>
+          <a:p>
+            <a:pPr indent="0" marL="0">
+              <a:buNone/>
+            </a:pPr>
+            <a:r>
+              <a:rPr lang="en-US" sz="1400" dirty="0">
+                <a:solidFill>
+                  <a:schemeClr val="accent3"/>
+                </a:solidFill>
+              </a:rPr>
+              <a:t>Understand hesitation without asking users to speak.</a:t>
+            </a:r>
+            <a:endParaRPr lang="en-US" sz="1400" dirty="0"/>
+          </a:p>
+        </p:txBody>
+      </p:sp>
+      <p:sp>
+        <p:nvSpPr>
+          <p:cNvPr id="10" name="Arrow idea-stages"/>
+          <p:cNvSpPr/>
+          <p:nvPr/>
+        </p:nvSpPr>
+        <p:spPr>
+          <a:xfrm>
+            <a:off x="5989320" y="2834640"/>
+            <a:ext cx="365760" cy="0"/>
+          </a:xfrm>
+          <a:prstGeom prst="line">
+            <a:avLst/>
+          </a:prstGeom>
+          <a:noFill/>
+          <a:ln w="15875">
+            <a:solidFill>
+              <a:schemeClr val="tx1"/>
+            </a:solidFill>
+            <a:prstDash val="solid"/>
+            <a:tailEnd type="triangle"/>
+          </a:ln>
+        </p:spPr>
+      </p:sp>
+      <p:sp>
+        <p:nvSpPr>
+          <p:cNvPr id="11" name="Stages card"/>
+          <p:cNvSpPr/>
+          <p:nvPr/>
+        </p:nvSpPr>
+        <p:spPr>
+          <a:xfrm>
+            <a:off x="6400800" y="1325880"/>
+            <a:ext cx="2286000" cy="3017520"/>
+          </a:xfrm>
+          <a:prstGeom prst="roundRect">
+            <a:avLst>
+              <a:gd name="adj" fmla="val 3200"/>
+            </a:avLst>
+          </a:prstGeom>
+          <a:solidFill>
+            <a:schemeClr val="bg2"/>
+          </a:solidFill>
+          <a:ln w="9525">
+            <a:solidFill>
+              <a:srgbClr val="CCCCCC"/>
+            </a:solidFill>
+            <a:prstDash val="solid"/>
+          </a:ln>
+        </p:spPr>
+      </p:sp>
+      <p:sp>
+        <p:nvSpPr>
+          <p:cNvPr id="12" name="Stages label"/>
+          <p:cNvSpPr txBox="1"/>
+          <p:nvPr/>
+        </p:nvSpPr>
+        <p:spPr>
+          <a:xfrm>
+            <a:off x="6537960" y="1463040"/>
+            <a:ext cx="2011680" cy="320040"/>
+          </a:xfrm>
+          <a:prstGeom prst="rect">
+            <a:avLst/>
+          </a:prstGeom>
+          <a:noFill/>
+          <a:ln/>
+        </p:spPr>
+        <p:txBody>
+          <a:bodyPr wrap="square" lIns="1016" tIns="1016" rIns="1016" bIns="1016" rtlCol="0" anchor="t"/>
+          <a:lstStyle/>
+          <a:p>
+            <a:pPr indent="0" marL="0">
+              <a:buNone/>
+            </a:pPr>
+            <a:r>
+              <a:rPr lang="en-US" sz="1800" b="1" dirty="0">
+                <a:solidFill>
+                  <a:schemeClr val="tx2"/>
+                </a:solidFill>
+              </a:rPr>
+              <a:t>Two stages</a:t>
+            </a:r>
+            <a:endParaRPr lang="en-US" sz="1800" dirty="0"/>
+          </a:p>
+        </p:txBody>
+      </p:sp>
+      <p:sp>
+        <p:nvSpPr>
+          <p:cNvPr id="13" name="Stage 1"/>
+          <p:cNvSpPr/>
+          <p:nvPr/>
+        </p:nvSpPr>
+        <p:spPr>
+          <a:xfrm>
+            <a:off x="6537960" y="1965960"/>
+            <a:ext cx="2011680" cy="960120"/>
+          </a:xfrm>
+          <a:prstGeom prst="roundRect">
+            <a:avLst>
+              <a:gd name="adj" fmla="val 7619"/>
+            </a:avLst>
           </a:prstGeom>
           <a:solidFill>
             <a:schemeClr val="bg1"/>
           </a:solidFill>
-          <a:ln w="12700">
+          <a:ln w="9525">
             <a:solidFill>
-              <a:schemeClr val="bg2"/>
+              <a:srgbClr val="CCCCCC"/>
             </a:solidFill>
             <a:prstDash val="solid"/>
           </a:ln>
@@ -2449,14 +2895,14 @@
       </p:sp>
       <p:sp>
         <p:nvSpPr>
-          <p:cNvPr id="5" name="Label Problem"/>
+          <p:cNvPr id="14" name="Stage 1 text"/>
           <p:cNvSpPr txBox="1"/>
           <p:nvPr/>
         </p:nvSpPr>
         <p:spPr>
           <a:xfrm>
-            <a:off x="640080" y="1371600"/>
-            <a:ext cx="2194560" cy="274320"/>
+            <a:off x="6583680" y="1965960"/>
+            <a:ext cx="1920240" cy="960120"/>
           </a:xfrm>
           <a:prstGeom prst="rect">
             <a:avLst/>
@@ -2465,44 +2911,84 @@
           <a:ln/>
         </p:spPr>
         <p:txBody>
-          <a:bodyPr wrap="square" lIns="0" tIns="0" rIns="0" bIns="0" rtlCol="0" anchor="ctr"/>
-          <a:lstStyle/>
-          <a:p>
-            <a:pPr indent="0" marL="0">
-              <a:buNone/>
-            </a:pPr>
-            <a:r>
-              <a:rPr lang="en-US" sz="1200" b="1" spc="200" kern="0" dirty="0">
-                <a:solidFill>
-                  <a:schemeClr val="accent1"/>
-                </a:solidFill>
-              </a:rPr>
-              <a:t>PROBLEM</a:t>
-            </a:r>
-            <a:endParaRPr lang="en-US" sz="1200" dirty="0"/>
-          </a:p>
-        </p:txBody>
-      </p:sp>
-      <p:sp>
-        <p:nvSpPr>
-          <p:cNvPr id="6" name="Card Idea"/>
+          <a:bodyPr wrap="square" lIns="1016" tIns="1016" rIns="1016" bIns="1016" rtlCol="0" anchor="ctr"/>
+          <a:lstStyle/>
+          <a:p>
+            <a:pPr indent="0" marL="0">
+              <a:buNone/>
+            </a:pPr>
+            <a:r>
+              <a:rPr lang="en-US" sz="1400" b="1" dirty="0">
+                <a:solidFill>
+                  <a:schemeClr val="tx1"/>
+                </a:solidFill>
+              </a:rPr>
+              <a:t>Undergraduate</a:t>
+            </a:r>
+            <a:endParaRPr lang="en-US" sz="1400" dirty="0"/>
+          </a:p>
+          <a:p>
+            <a:pPr indent="0" marL="0">
+              <a:buNone/>
+            </a:pPr>
+            <a:r>
+              <a:rPr lang="en-US" sz="1300" dirty="0">
+                <a:solidFill>
+                  <a:schemeClr val="accent3"/>
+                </a:solidFill>
+              </a:rPr>
+              <a:t>Predict think-aloud</a:t>
+            </a:r>
+            <a:endParaRPr lang="en-US" sz="1400" dirty="0"/>
+          </a:p>
+        </p:txBody>
+      </p:sp>
+      <p:sp>
+        <p:nvSpPr>
+          <p:cNvPr id="15" name="Stage arrow"/>
           <p:cNvSpPr/>
           <p:nvPr/>
         </p:nvSpPr>
         <p:spPr>
           <a:xfrm>
-            <a:off x="3291840" y="1234440"/>
-            <a:ext cx="2560320" cy="2926080"/>
-          </a:xfrm>
-          <a:prstGeom prst="rect">
-            <a:avLst/>
+            <a:off x="7543800" y="2971800"/>
+            <a:ext cx="0" cy="320040"/>
+          </a:xfrm>
+          <a:prstGeom prst="line">
+            <a:avLst/>
+          </a:prstGeom>
+          <a:noFill/>
+          <a:ln w="15875">
+            <a:solidFill>
+              <a:schemeClr val="tx1"/>
+            </a:solidFill>
+            <a:prstDash val="solid"/>
+            <a:tailEnd type="triangle"/>
+          </a:ln>
+        </p:spPr>
+      </p:sp>
+      <p:sp>
+        <p:nvSpPr>
+          <p:cNvPr id="16" name="Stage 2"/>
+          <p:cNvSpPr/>
+          <p:nvPr/>
+        </p:nvSpPr>
+        <p:spPr>
+          <a:xfrm>
+            <a:off x="6537960" y="3337560"/>
+            <a:ext cx="2011680" cy="914400"/>
+          </a:xfrm>
+          <a:prstGeom prst="roundRect">
+            <a:avLst>
+              <a:gd name="adj" fmla="val 8000"/>
+            </a:avLst>
           </a:prstGeom>
           <a:solidFill>
-            <a:schemeClr val="bg1"/>
+            <a:schemeClr val="tx2"/>
           </a:solidFill>
-          <a:ln w="12700">
+          <a:ln w="9525">
             <a:solidFill>
-              <a:schemeClr val="bg2"/>
+              <a:schemeClr val="tx2"/>
             </a:solidFill>
             <a:prstDash val="solid"/>
           </a:ln>
@@ -2510,14 +2996,14 @@
       </p:sp>
       <p:sp>
         <p:nvSpPr>
-          <p:cNvPr id="7" name="Label Idea"/>
+          <p:cNvPr id="17" name="Stage 2 text"/>
           <p:cNvSpPr txBox="1"/>
           <p:nvPr/>
         </p:nvSpPr>
         <p:spPr>
           <a:xfrm>
-            <a:off x="3474720" y="1371600"/>
-            <a:ext cx="2194560" cy="274320"/>
+            <a:off x="6583680" y="3337560"/>
+            <a:ext cx="1920240" cy="914400"/>
           </a:xfrm>
           <a:prstGeom prst="rect">
             <a:avLst/>
@@ -2526,256 +3012,6 @@
           <a:ln/>
         </p:spPr>
         <p:txBody>
-          <a:bodyPr wrap="square" lIns="0" tIns="0" rIns="0" bIns="0" rtlCol="0" anchor="ctr"/>
-          <a:lstStyle/>
-          <a:p>
-            <a:pPr indent="0" marL="0">
-              <a:buNone/>
-            </a:pPr>
-            <a:r>
-              <a:rPr lang="en-US" sz="1200" b="1" spc="200" kern="0" dirty="0">
-                <a:solidFill>
-                  <a:schemeClr val="accent1"/>
-                </a:solidFill>
-              </a:rPr>
-              <a:t>IDEA</a:t>
-            </a:r>
-            <a:endParaRPr lang="en-US" sz="1200" dirty="0"/>
-          </a:p>
-        </p:txBody>
-      </p:sp>
-      <p:sp>
-        <p:nvSpPr>
-          <p:cNvPr id="8" name="Card Two stages"/>
-          <p:cNvSpPr/>
-          <p:nvPr/>
-        </p:nvSpPr>
-        <p:spPr>
-          <a:xfrm>
-            <a:off x="6126480" y="1234440"/>
-            <a:ext cx="2560320" cy="2926080"/>
-          </a:xfrm>
-          <a:prstGeom prst="rect">
-            <a:avLst/>
-          </a:prstGeom>
-          <a:solidFill>
-            <a:schemeClr val="bg1"/>
-          </a:solidFill>
-          <a:ln w="12700">
-            <a:solidFill>
-              <a:schemeClr val="bg2"/>
-            </a:solidFill>
-            <a:prstDash val="solid"/>
-          </a:ln>
-        </p:spPr>
-      </p:sp>
-      <p:sp>
-        <p:nvSpPr>
-          <p:cNvPr id="9" name="Label Two stages"/>
-          <p:cNvSpPr txBox="1"/>
-          <p:nvPr/>
-        </p:nvSpPr>
-        <p:spPr>
-          <a:xfrm>
-            <a:off x="6309360" y="1371600"/>
-            <a:ext cx="2194560" cy="274320"/>
-          </a:xfrm>
-          <a:prstGeom prst="rect">
-            <a:avLst/>
-          </a:prstGeom>
-          <a:noFill/>
-          <a:ln/>
-        </p:spPr>
-        <p:txBody>
-          <a:bodyPr wrap="square" lIns="0" tIns="0" rIns="0" bIns="0" rtlCol="0" anchor="ctr"/>
-          <a:lstStyle/>
-          <a:p>
-            <a:pPr indent="0" marL="0">
-              <a:buNone/>
-            </a:pPr>
-            <a:r>
-              <a:rPr lang="en-US" sz="1200" b="1" spc="200" kern="0" dirty="0">
-                <a:solidFill>
-                  <a:schemeClr val="accent1"/>
-                </a:solidFill>
-              </a:rPr>
-              <a:t>TWO STAGES</a:t>
-            </a:r>
-            <a:endParaRPr lang="en-US" sz="1200" dirty="0"/>
-          </a:p>
-        </p:txBody>
-      </p:sp>
-      <p:sp>
-        <p:nvSpPr>
-          <p:cNvPr id="10" name="Problem body"/>
-          <p:cNvSpPr txBox="1"/>
-          <p:nvPr/>
-        </p:nvSpPr>
-        <p:spPr>
-          <a:xfrm>
-            <a:off x="640080" y="1737360"/>
-            <a:ext cx="2194560" cy="2286000"/>
-          </a:xfrm>
-          <a:prstGeom prst="rect">
-            <a:avLst/>
-          </a:prstGeom>
-          <a:noFill/>
-          <a:ln/>
-        </p:spPr>
-        <p:txBody>
-          <a:bodyPr wrap="square" lIns="1016" tIns="1016" rIns="1016" bIns="1016" rtlCol="0" anchor="t"/>
-          <a:lstStyle/>
-          <a:p>
-            <a:pPr indent="0" marL="0">
-              <a:buNone/>
-            </a:pPr>
-            <a:r>
-              <a:rPr lang="en-US" sz="1600" b="1" dirty="0">
-                <a:solidFill>
-                  <a:schemeClr val="tx1"/>
-                </a:solidFill>
-              </a:rPr>
-              <a:t>Think-aloud shows why users struggle.</a:t>
-            </a:r>
-            <a:endParaRPr lang="en-US" sz="1300" dirty="0"/>
-          </a:p>
-          <a:p>
-            <a:pPr indent="0" marL="0">
-              <a:buNone/>
-            </a:pPr>
-            <a:r>
-              <a:rPr lang="en-US" sz="800" dirty="0">
-                <a:solidFill>
-                  <a:schemeClr val="tx1"/>
-                </a:solidFill>
-              </a:rPr>
-              <a:t> </a:t>
-            </a:r>
-            <a:endParaRPr lang="en-US" sz="1300" dirty="0"/>
-          </a:p>
-          <a:p>
-            <a:pPr indent="0" marL="0">
-              <a:buNone/>
-            </a:pPr>
-            <a:r>
-              <a:rPr lang="en-US" sz="1400" dirty="0">
-                <a:solidFill>
-                  <a:schemeClr val="tx1"/>
-                </a:solidFill>
-              </a:rPr>
-              <a:t>But talking while acting is a burden and can change natural behavior.</a:t>
-            </a:r>
-            <a:endParaRPr lang="en-US" sz="1300" dirty="0"/>
-          </a:p>
-        </p:txBody>
-      </p:sp>
-      <p:sp>
-        <p:nvSpPr>
-          <p:cNvPr id="11" name="Idea body"/>
-          <p:cNvSpPr txBox="1"/>
-          <p:nvPr/>
-        </p:nvSpPr>
-        <p:spPr>
-          <a:xfrm>
-            <a:off x="3474720" y="1737360"/>
-            <a:ext cx="2194560" cy="2286000"/>
-          </a:xfrm>
-          <a:prstGeom prst="rect">
-            <a:avLst/>
-          </a:prstGeom>
-          <a:noFill/>
-          <a:ln/>
-        </p:spPr>
-        <p:txBody>
-          <a:bodyPr wrap="square" lIns="1016" tIns="1016" rIns="1016" bIns="1016" rtlCol="0" anchor="t"/>
-          <a:lstStyle/>
-          <a:p>
-            <a:pPr indent="0" marL="0">
-              <a:buNone/>
-            </a:pPr>
-            <a:r>
-              <a:rPr lang="en-US" sz="1600" b="1" dirty="0">
-                <a:solidFill>
-                  <a:schemeClr val="tx1"/>
-                </a:solidFill>
-              </a:rPr>
-              <a:t>Gaze + UI information + LLM</a:t>
-            </a:r>
-            <a:endParaRPr lang="en-US" sz="1300" dirty="0"/>
-          </a:p>
-          <a:p>
-            <a:pPr indent="0" marL="0">
-              <a:buNone/>
-            </a:pPr>
-            <a:r>
-              <a:rPr lang="en-US" sz="800" dirty="0">
-                <a:solidFill>
-                  <a:schemeClr val="tx1"/>
-                </a:solidFill>
-              </a:rPr>
-              <a:t> </a:t>
-            </a:r>
-            <a:endParaRPr lang="en-US" sz="1300" dirty="0"/>
-          </a:p>
-          <a:p>
-            <a:pPr indent="0" marL="0">
-              <a:buNone/>
-            </a:pPr>
-            <a:r>
-              <a:rPr lang="en-US" sz="1400" dirty="0">
-                <a:solidFill>
-                  <a:schemeClr val="tx1"/>
-                </a:solidFill>
-              </a:rPr>
-              <a:t>Understand hesitation without asking users to speak.</a:t>
-            </a:r>
-            <a:endParaRPr lang="en-US" sz="1300" dirty="0"/>
-          </a:p>
-        </p:txBody>
-      </p:sp>
-      <p:sp>
-        <p:nvSpPr>
-          <p:cNvPr id="12" name="Stage 1"/>
-          <p:cNvSpPr/>
-          <p:nvPr/>
-        </p:nvSpPr>
-        <p:spPr>
-          <a:xfrm>
-            <a:off x="6309360" y="1783080"/>
-            <a:ext cx="2194560" cy="1005840"/>
-          </a:xfrm>
-          <a:prstGeom prst="rect">
-            <a:avLst/>
-          </a:prstGeom>
-          <a:solidFill>
-            <a:schemeClr val="accent6"/>
-          </a:solidFill>
-          <a:ln w="12700">
-            <a:solidFill>
-              <a:schemeClr val="bg2"/>
-            </a:solidFill>
-            <a:prstDash val="solid"/>
-          </a:ln>
-        </p:spPr>
-      </p:sp>
-      <p:sp>
-        <p:nvSpPr>
-          <p:cNvPr id="13" name="Stage 1 text"/>
-          <p:cNvSpPr txBox="1"/>
-          <p:nvPr/>
-        </p:nvSpPr>
-        <p:spPr>
-          <a:xfrm>
-            <a:off x="6400800" y="1828800"/>
-            <a:ext cx="2011680" cy="914400"/>
-          </a:xfrm>
-          <a:prstGeom prst="rect">
-            <a:avLst/>
-          </a:prstGeom>
-          <a:noFill/>
-          <a:ln/>
-        </p:spPr>
-        <p:txBody>
           <a:bodyPr wrap="square" lIns="1016" tIns="1016" rIns="1016" bIns="1016" rtlCol="0" anchor="ctr"/>
           <a:lstStyle/>
           <a:p>
@@ -2783,14 +3019,14 @@
               <a:buNone/>
             </a:pPr>
             <a:r>
-              <a:rPr lang="en-US" sz="1500" b="1" dirty="0">
-                <a:solidFill>
-                  <a:schemeClr val="tx1"/>
-                </a:solidFill>
-              </a:rPr>
-              <a:t>Undergraduate</a:t>
-            </a:r>
-            <a:endParaRPr lang="en-US" sz="1500" dirty="0"/>
+              <a:rPr lang="en-US" sz="1400" b="1" dirty="0">
+                <a:solidFill>
+                  <a:schemeClr val="bg1"/>
+                </a:solidFill>
+              </a:rPr>
+              <a:t>Master's</a:t>
+            </a:r>
+            <a:endParaRPr lang="en-US" sz="1400" dirty="0"/>
           </a:p>
           <a:p>
             <a:pPr indent="0" marL="0">
@@ -2799,112 +3035,12 @@
             <a:r>
               <a:rPr lang="en-US" sz="1300" dirty="0">
                 <a:solidFill>
-                  <a:schemeClr val="tx1"/>
-                </a:solidFill>
-              </a:rPr>
-              <a:t>Predict think-aloud</a:t>
-            </a:r>
-            <a:endParaRPr lang="en-US" sz="1500" dirty="0"/>
-          </a:p>
-        </p:txBody>
-      </p:sp>
-      <p:sp>
-        <p:nvSpPr>
-          <p:cNvPr id="14" name="Stage arrow"/>
-          <p:cNvSpPr/>
-          <p:nvPr/>
-        </p:nvSpPr>
-        <p:spPr>
-          <a:xfrm>
-            <a:off x="7269480" y="2834640"/>
-            <a:ext cx="274320" cy="320040"/>
-          </a:xfrm>
-          <a:prstGeom prst="downArrow">
-            <a:avLst/>
-          </a:prstGeom>
-          <a:solidFill>
-            <a:schemeClr val="accent3"/>
-          </a:solidFill>
-          <a:ln w="12700">
-            <a:solidFill>
-              <a:schemeClr val="accent3"/>
-            </a:solidFill>
-            <a:prstDash val="solid"/>
-          </a:ln>
-        </p:spPr>
-      </p:sp>
-      <p:sp>
-        <p:nvSpPr>
-          <p:cNvPr id="15" name="Stage 2"/>
-          <p:cNvSpPr/>
-          <p:nvPr/>
-        </p:nvSpPr>
-        <p:spPr>
-          <a:xfrm>
-            <a:off x="6309360" y="3200400"/>
-            <a:ext cx="2194560" cy="914400"/>
-          </a:xfrm>
-          <a:prstGeom prst="rect">
-            <a:avLst/>
-          </a:prstGeom>
-          <a:solidFill>
-            <a:schemeClr val="accent2"/>
-          </a:solidFill>
-          <a:ln w="12700">
-            <a:solidFill>
-              <a:schemeClr val="bg2"/>
-            </a:solidFill>
-            <a:prstDash val="solid"/>
-          </a:ln>
-        </p:spPr>
-      </p:sp>
-      <p:sp>
-        <p:nvSpPr>
-          <p:cNvPr id="16" name="Stage 2 text"/>
-          <p:cNvSpPr txBox="1"/>
-          <p:nvPr/>
-        </p:nvSpPr>
-        <p:spPr>
-          <a:xfrm>
-            <a:off x="6400800" y="3246120"/>
-            <a:ext cx="2011680" cy="822960"/>
-          </a:xfrm>
-          <a:prstGeom prst="rect">
-            <a:avLst/>
-          </a:prstGeom>
-          <a:noFill/>
-          <a:ln/>
-        </p:spPr>
-        <p:txBody>
-          <a:bodyPr wrap="square" lIns="1016" tIns="1016" rIns="1016" bIns="1016" rtlCol="0" anchor="ctr"/>
-          <a:lstStyle/>
-          <a:p>
-            <a:pPr indent="0" marL="0">
-              <a:buNone/>
-            </a:pPr>
-            <a:r>
-              <a:rPr lang="en-US" sz="1500" b="1" dirty="0">
-                <a:solidFill>
-                  <a:schemeClr val="tx2"/>
-                </a:solidFill>
-              </a:rPr>
-              <a:t>Master's</a:t>
-            </a:r>
-            <a:endParaRPr lang="en-US" sz="1500" dirty="0"/>
-          </a:p>
-          <a:p>
-            <a:pPr indent="0" marL="0">
-              <a:buNone/>
-            </a:pPr>
-            <a:r>
-              <a:rPr lang="en-US" sz="1300" dirty="0">
-                <a:solidFill>
-                  <a:schemeClr val="tx2"/>
+                  <a:schemeClr val="bg1"/>
                 </a:solidFill>
               </a:rPr>
               <a:t>Explain where and why</a:t>
             </a:r>
-            <a:endParaRPr lang="en-US" sz="1500" dirty="0"/>
+            <a:endParaRPr lang="en-US" sz="1400" dirty="0"/>
           </a:p>
         </p:txBody>
       </p:sp>
@@ -2920,8 +3056,8 @@
         </p:nvSpPr>
         <p:spPr>
           <a:xfrm>
-            <a:off x="8229600" y="4828032"/>
-            <a:ext cx="457200" cy="228600"/>
+            <a:off x="8321040" y="4800600"/>
+            <a:ext cx="365760" cy="228600"/>
           </a:xfrm>
           <a:prstGeom prst="rect">
             <a:avLst/>
@@ -2938,7 +3074,7 @@
             <a:lvl1pPr>
               <a:defRPr sz="900">
                 <a:solidFill>
-                  <a:schemeClr val="accent3"/>
+                  <a:schemeClr val="tx1"/>
                 </a:solidFill>
               </a:defRPr>
             </a:lvl1pPr>
@@ -2980,14 +3116,50 @@
       </p:grpSpPr>
       <p:sp>
         <p:nvSpPr>
-          <p:cNvPr id="2" name="Text 0"/>
+          <p:cNvPr id="2" name="Section label"/>
+          <p:cNvSpPr txBox="1"/>
+          <p:nvPr/>
+        </p:nvSpPr>
+        <p:spPr>
+          <a:xfrm>
+            <a:off x="457200" y="219456"/>
+            <a:ext cx="5486400" cy="237744"/>
+          </a:xfrm>
+          <a:prstGeom prst="rect">
+            <a:avLst/>
+          </a:prstGeom>
+          <a:noFill/>
+          <a:ln/>
+        </p:spPr>
+        <p:txBody>
+          <a:bodyPr wrap="square" lIns="0" tIns="0" rIns="0" bIns="0" rtlCol="0" anchor="ctr"/>
+          <a:lstStyle/>
+          <a:p>
+            <a:pPr indent="0" marL="0">
+              <a:buNone/>
+            </a:pPr>
+            <a:r>
+              <a:rPr lang="en-US" sz="1200" b="1" dirty="0">
+                <a:solidFill>
+                  <a:schemeClr val="tx2"/>
+                </a:solidFill>
+              </a:rPr>
+              <a:t>Undergraduate · 1/3</a:t>
+            </a:r>
+            <a:endParaRPr lang="en-US" sz="1200" dirty="0"/>
+          </a:p>
+        </p:txBody>
+      </p:sp>
+      <p:sp>
+        <p:nvSpPr>
+          <p:cNvPr id="3" name="Text 1"/>
           <p:cNvSpPr/>
           <p:nvPr/>
         </p:nvSpPr>
         <p:spPr>
           <a:xfrm>
-            <a:off x="457200" y="274320"/>
-            <a:ext cx="8229600" cy="685800"/>
+            <a:off x="457200" y="457200"/>
+            <a:ext cx="8229600" cy="594360"/>
           </a:xfrm>
           <a:prstGeom prst="rect">
             <a:avLst/>
@@ -3003,15 +3175,277 @@
               <a:buNone/>
             </a:pPr>
             <a:r>
+              <a:rPr lang="en-US" sz="2600" b="1" dirty="0">
+                <a:solidFill>
+                  <a:schemeClr val="tx2"/>
+                </a:solidFill>
+              </a:rPr>
+              <a:t>EsTA predicts think-aloud from gaze + UI</a:t>
+            </a:r>
+            <a:endParaRPr lang="en-US" sz="2600" dirty="0"/>
+          </a:p>
+        </p:txBody>
+      </p:sp>
+      <p:sp>
+        <p:nvSpPr>
+          <p:cNvPr id="5" name="Gaze card"/>
+          <p:cNvSpPr/>
+          <p:nvPr/>
+        </p:nvSpPr>
+        <p:spPr>
+          <a:xfrm>
+            <a:off x="457200" y="1280160"/>
+            <a:ext cx="2651760" cy="1097280"/>
+          </a:xfrm>
+          <a:prstGeom prst="roundRect">
+            <a:avLst>
+              <a:gd name="adj" fmla="val 6667"/>
+            </a:avLst>
+          </a:prstGeom>
+          <a:solidFill>
+            <a:schemeClr val="bg2"/>
+          </a:solidFill>
+          <a:ln w="9525">
+            <a:solidFill>
+              <a:srgbClr val="CCCCCC"/>
+            </a:solidFill>
+            <a:prstDash val="solid"/>
+          </a:ln>
+        </p:spPr>
+      </p:sp>
+      <p:sp>
+        <p:nvSpPr>
+          <p:cNvPr id="6" name="Gaze text"/>
+          <p:cNvSpPr txBox="1"/>
+          <p:nvPr/>
+        </p:nvSpPr>
+        <p:spPr>
+          <a:xfrm>
+            <a:off x="548640" y="1280160"/>
+            <a:ext cx="2468880" cy="1097280"/>
+          </a:xfrm>
+          <a:prstGeom prst="rect">
+            <a:avLst/>
+          </a:prstGeom>
+          <a:noFill/>
+          <a:ln/>
+        </p:spPr>
+        <p:txBody>
+          <a:bodyPr wrap="square" lIns="1016" tIns="1016" rIns="1016" bIns="1016" rtlCol="0" anchor="ctr"/>
+          <a:lstStyle/>
+          <a:p>
+            <a:pPr indent="0" marL="0">
+              <a:buNone/>
+            </a:pPr>
+            <a:r>
+              <a:rPr lang="en-US" sz="1400" b="1" dirty="0">
+                <a:solidFill>
+                  <a:schemeClr val="tx1"/>
+                </a:solidFill>
+              </a:rPr>
+              <a:t>Gaze (Tobii, 120 Hz)</a:t>
+            </a:r>
+            <a:endParaRPr lang="en-US" sz="1400" dirty="0"/>
+          </a:p>
+          <a:p>
+            <a:pPr indent="0" marL="0">
+              <a:buNone/>
+            </a:pPr>
+            <a:r>
+              <a:rPr lang="en-US" sz="1300" dirty="0">
+                <a:solidFill>
+                  <a:schemeClr val="accent3"/>
+                </a:solidFill>
+              </a:rPr>
+              <a:t>fixations · saccades · pupil size</a:t>
+            </a:r>
+            <a:endParaRPr lang="en-US" sz="1400" dirty="0"/>
+          </a:p>
+        </p:txBody>
+      </p:sp>
+      <p:sp>
+        <p:nvSpPr>
+          <p:cNvPr id="7" name="UI card"/>
+          <p:cNvSpPr/>
+          <p:nvPr/>
+        </p:nvSpPr>
+        <p:spPr>
+          <a:xfrm>
+            <a:off x="457200" y="2560320"/>
+            <a:ext cx="2651760" cy="1097280"/>
+          </a:xfrm>
+          <a:prstGeom prst="roundRect">
+            <a:avLst>
+              <a:gd name="adj" fmla="val 6667"/>
+            </a:avLst>
+          </a:prstGeom>
+          <a:solidFill>
+            <a:schemeClr val="bg2"/>
+          </a:solidFill>
+          <a:ln w="9525">
+            <a:solidFill>
+              <a:srgbClr val="CCCCCC"/>
+            </a:solidFill>
+            <a:prstDash val="solid"/>
+          </a:ln>
+        </p:spPr>
+      </p:sp>
+      <p:sp>
+        <p:nvSpPr>
+          <p:cNvPr id="8" name="UI text"/>
+          <p:cNvSpPr txBox="1"/>
+          <p:nvPr/>
+        </p:nvSpPr>
+        <p:spPr>
+          <a:xfrm>
+            <a:off x="548640" y="2560320"/>
+            <a:ext cx="2468880" cy="1097280"/>
+          </a:xfrm>
+          <a:prstGeom prst="rect">
+            <a:avLst/>
+          </a:prstGeom>
+          <a:noFill/>
+          <a:ln/>
+        </p:spPr>
+        <p:txBody>
+          <a:bodyPr wrap="square" lIns="1016" tIns="1016" rIns="1016" bIns="1016" rtlCol="0" anchor="ctr"/>
+          <a:lstStyle/>
+          <a:p>
+            <a:pPr indent="0" marL="0">
+              <a:buNone/>
+            </a:pPr>
+            <a:r>
+              <a:rPr lang="en-US" sz="1400" b="1" dirty="0">
+                <a:solidFill>
+                  <a:schemeClr val="tx1"/>
+                </a:solidFill>
+              </a:rPr>
+              <a:t>UI information</a:t>
+            </a:r>
+            <a:endParaRPr lang="en-US" sz="1400" dirty="0"/>
+          </a:p>
+          <a:p>
+            <a:pPr indent="0" marL="0">
+              <a:buNone/>
+            </a:pPr>
+            <a:r>
+              <a:rPr lang="en-US" sz="1300" dirty="0">
+                <a:solidFill>
+                  <a:schemeClr val="accent3"/>
+                </a:solidFill>
+              </a:rPr>
+              <a:t>element coordinates · HTML</a:t>
+            </a:r>
+            <a:endParaRPr lang="en-US" sz="1400" dirty="0"/>
+          </a:p>
+        </p:txBody>
+      </p:sp>
+      <p:sp>
+        <p:nvSpPr>
+          <p:cNvPr id="9" name="Gaze to LLM"/>
+          <p:cNvSpPr/>
+          <p:nvPr/>
+        </p:nvSpPr>
+        <p:spPr>
+          <a:xfrm>
+            <a:off x="3154680" y="1828800"/>
+            <a:ext cx="548640" cy="411480"/>
+          </a:xfrm>
+          <a:prstGeom prst="line">
+            <a:avLst/>
+          </a:prstGeom>
+          <a:noFill/>
+          <a:ln w="15875">
+            <a:solidFill>
+              <a:schemeClr val="tx1"/>
+            </a:solidFill>
+            <a:prstDash val="solid"/>
+            <a:tailEnd type="triangle"/>
+          </a:ln>
+        </p:spPr>
+      </p:sp>
+      <p:sp>
+        <p:nvSpPr>
+          <p:cNvPr id="10" name="UI to LLM"/>
+          <p:cNvSpPr/>
+          <p:nvPr/>
+        </p:nvSpPr>
+        <p:spPr>
+          <a:xfrm>
+            <a:off x="3154680" y="3108960"/>
+            <a:ext cx="548640" cy="-411480"/>
+          </a:xfrm>
+          <a:prstGeom prst="line">
+            <a:avLst/>
+          </a:prstGeom>
+          <a:noFill/>
+          <a:ln w="15875">
+            <a:solidFill>
+              <a:schemeClr val="tx1"/>
+            </a:solidFill>
+            <a:prstDash val="solid"/>
+            <a:tailEnd type="triangle"/>
+          </a:ln>
+        </p:spPr>
+      </p:sp>
+      <p:sp>
+        <p:nvSpPr>
+          <p:cNvPr id="11" name="LLM card"/>
+          <p:cNvSpPr/>
+          <p:nvPr/>
+        </p:nvSpPr>
+        <p:spPr>
+          <a:xfrm>
+            <a:off x="3749040" y="1828800"/>
+            <a:ext cx="1554480" cy="1280160"/>
+          </a:xfrm>
+          <a:prstGeom prst="roundRect">
+            <a:avLst>
+              <a:gd name="adj" fmla="val 5714"/>
+            </a:avLst>
+          </a:prstGeom>
+          <a:solidFill>
+            <a:schemeClr val="tx2"/>
+          </a:solidFill>
+          <a:ln w="9525">
+            <a:solidFill>
+              <a:schemeClr val="tx2"/>
+            </a:solidFill>
+            <a:prstDash val="solid"/>
+          </a:ln>
+        </p:spPr>
+      </p:sp>
+      <p:sp>
+        <p:nvSpPr>
+          <p:cNvPr id="12" name="LLM text"/>
+          <p:cNvSpPr txBox="1"/>
+          <p:nvPr/>
+        </p:nvSpPr>
+        <p:spPr>
+          <a:xfrm>
+            <a:off x="3749040" y="1828800"/>
+            <a:ext cx="1554480" cy="1280160"/>
+          </a:xfrm>
+          <a:prstGeom prst="rect">
+            <a:avLst/>
+          </a:prstGeom>
+          <a:noFill/>
+          <a:ln/>
+        </p:spPr>
+        <p:txBody>
+          <a:bodyPr wrap="square" lIns="1016" tIns="1016" rIns="1016" bIns="1016" rtlCol="0" anchor="ctr"/>
+          <a:lstStyle/>
+          <a:p>
+            <a:pPr algn="ctr" indent="0" marL="0">
+              <a:buNone/>
+            </a:pPr>
+            <a:r>
               <a:rPr lang="en-US" sz="2200" b="1" dirty="0">
                 <a:solidFill>
-                  <a:schemeClr val="tx2"/>
-                </a:solidFill>
-                <a:latin typeface="Georgia" pitchFamily="34" charset="0"/>
-                <a:ea typeface="Georgia" pitchFamily="34" charset="-122"/>
-                <a:cs typeface="Georgia" pitchFamily="34" charset="-120"/>
-              </a:rPr>
-              <a:t>Undergraduate (1/3): EsTA predicts think-aloud</a:t>
+                  <a:schemeClr val="bg1"/>
+                </a:solidFill>
+              </a:rPr>
+              <a:t>GPT-4</a:t>
             </a:r>
             <a:endParaRPr lang="en-US" sz="2200" dirty="0"/>
           </a:p>
@@ -3019,24 +3453,50 @@
       </p:sp>
       <p:sp>
         <p:nvSpPr>
-          <p:cNvPr id="4" name="Gaze box"/>
+          <p:cNvPr id="13" name="LLM to output"/>
           <p:cNvSpPr/>
           <p:nvPr/>
         </p:nvSpPr>
         <p:spPr>
           <a:xfrm>
-            <a:off x="457200" y="1280160"/>
-            <a:ext cx="2468880" cy="1005840"/>
-          </a:xfrm>
-          <a:prstGeom prst="rect">
-            <a:avLst/>
+            <a:off x="5349240" y="2468880"/>
+            <a:ext cx="411480" cy="0"/>
+          </a:xfrm>
+          <a:prstGeom prst="line">
+            <a:avLst/>
+          </a:prstGeom>
+          <a:noFill/>
+          <a:ln w="15875">
+            <a:solidFill>
+              <a:schemeClr val="tx1"/>
+            </a:solidFill>
+            <a:prstDash val="solid"/>
+            <a:tailEnd type="triangle"/>
+          </a:ln>
+        </p:spPr>
+      </p:sp>
+      <p:sp>
+        <p:nvSpPr>
+          <p:cNvPr id="14" name="Output card"/>
+          <p:cNvSpPr/>
+          <p:nvPr/>
+        </p:nvSpPr>
+        <p:spPr>
+          <a:xfrm>
+            <a:off x="5806440" y="1737360"/>
+            <a:ext cx="2880360" cy="1463040"/>
+          </a:xfrm>
+          <a:prstGeom prst="roundRect">
+            <a:avLst>
+              <a:gd name="adj" fmla="val 5000"/>
+            </a:avLst>
           </a:prstGeom>
           <a:solidFill>
             <a:schemeClr val="accent6"/>
           </a:solidFill>
-          <a:ln w="12700">
+          <a:ln w="9525">
             <a:solidFill>
-              <a:schemeClr val="bg2"/>
+              <a:schemeClr val="accent5"/>
             </a:solidFill>
             <a:prstDash val="solid"/>
           </a:ln>
@@ -3044,14 +3504,14 @@
       </p:sp>
       <p:sp>
         <p:nvSpPr>
-          <p:cNvPr id="5" name="Gaze text"/>
+          <p:cNvPr id="15" name="Output text"/>
           <p:cNvSpPr txBox="1"/>
           <p:nvPr/>
         </p:nvSpPr>
         <p:spPr>
           <a:xfrm>
-            <a:off x="548640" y="1325880"/>
-            <a:ext cx="2286000" cy="914400"/>
+            <a:off x="5897880" y="1737360"/>
+            <a:ext cx="2697480" cy="1463040"/>
           </a:xfrm>
           <a:prstGeom prst="rect">
             <a:avLst/>
@@ -3067,51 +3527,53 @@
               <a:buNone/>
             </a:pPr>
             <a:r>
-              <a:rPr lang="en-US" sz="1300" b="1" dirty="0">
-                <a:solidFill>
-                  <a:schemeClr val="tx1"/>
-                </a:solidFill>
-              </a:rPr>
-              <a:t>Gaze (Tobii, 120 Hz)</a:t>
-            </a:r>
-            <a:endParaRPr lang="en-US" sz="1300" dirty="0"/>
-          </a:p>
-          <a:p>
-            <a:pPr indent="0" marL="0">
-              <a:buNone/>
-            </a:pPr>
-            <a:r>
-              <a:rPr lang="en-US" sz="1200" dirty="0">
-                <a:solidFill>
-                  <a:schemeClr val="tx1"/>
-                </a:solidFill>
-              </a:rPr>
-              <a:t>fixations · saccades · pupil size</a:t>
-            </a:r>
-            <a:endParaRPr lang="en-US" sz="1300" dirty="0"/>
-          </a:p>
-        </p:txBody>
-      </p:sp>
-      <p:sp>
-        <p:nvSpPr>
-          <p:cNvPr id="6" name="UI box"/>
+              <a:rPr lang="en-US" sz="1400" b="1" dirty="0">
+                <a:solidFill>
+                  <a:schemeClr val="tx2"/>
+                </a:solidFill>
+              </a:rPr>
+              <a:t>Predicted think-aloud</a:t>
+            </a:r>
+            <a:endParaRPr lang="en-US" sz="1400" dirty="0"/>
+          </a:p>
+          <a:p>
+            <a:pPr indent="0" marL="0">
+              <a:buNone/>
+            </a:pPr>
+            <a:r>
+              <a:rPr lang="en-US" sz="1300" dirty="0">
+                <a:solidFill>
+                  <a:schemeClr val="accent3"/>
+                </a:solidFill>
+              </a:rPr>
+              <a:t>natural text, including doubt</a:t>
+            </a:r>
+            <a:endParaRPr lang="en-US" sz="1400" dirty="0"/>
+          </a:p>
+        </p:txBody>
+      </p:sp>
+      <p:sp>
+        <p:nvSpPr>
+          <p:cNvPr id="16" name="Baseline card"/>
           <p:cNvSpPr/>
           <p:nvPr/>
         </p:nvSpPr>
         <p:spPr>
           <a:xfrm>
-            <a:off x="457200" y="2468880"/>
-            <a:ext cx="2468880" cy="1005840"/>
-          </a:xfrm>
-          <a:prstGeom prst="rect">
-            <a:avLst/>
+            <a:off x="457200" y="3840480"/>
+            <a:ext cx="4023360" cy="777240"/>
+          </a:xfrm>
+          <a:prstGeom prst="roundRect">
+            <a:avLst>
+              <a:gd name="adj" fmla="val 9412"/>
+            </a:avLst>
           </a:prstGeom>
           <a:solidFill>
-            <a:schemeClr val="accent6"/>
+            <a:schemeClr val="bg1"/>
           </a:solidFill>
-          <a:ln w="12700">
+          <a:ln w="9525">
             <a:solidFill>
-              <a:schemeClr val="bg2"/>
+              <a:srgbClr val="CCCCCC"/>
             </a:solidFill>
             <a:prstDash val="solid"/>
           </a:ln>
@@ -3119,14 +3581,14 @@
       </p:sp>
       <p:sp>
         <p:nvSpPr>
-          <p:cNvPr id="7" name="UI text"/>
+          <p:cNvPr id="17" name="Baseline text"/>
           <p:cNvSpPr txBox="1"/>
           <p:nvPr/>
         </p:nvSpPr>
         <p:spPr>
           <a:xfrm>
-            <a:off x="548640" y="2514600"/>
-            <a:ext cx="2286000" cy="914400"/>
+            <a:off x="548640" y="3840480"/>
+            <a:ext cx="3840480" cy="777240"/>
           </a:xfrm>
           <a:prstGeom prst="rect">
             <a:avLst/>
@@ -3142,51 +3604,50 @@
               <a:buNone/>
             </a:pPr>
             <a:r>
-              <a:rPr lang="en-US" sz="1300" b="1" dirty="0">
+              <a:rPr lang="en-US" sz="1400" b="1" dirty="0">
+                <a:solidFill>
+                  <a:schemeClr val="accent4"/>
+                </a:solidFill>
+              </a:rPr>
+              <a:t>Baseline InTA: </a:t>
+            </a:r>
+            <a:pPr indent="0" marL="0">
+              <a:buNone/>
+            </a:pPr>
+            <a:r>
+              <a:rPr lang="en-US" sz="1400" dirty="0">
                 <a:solidFill>
                   <a:schemeClr val="tx1"/>
                 </a:solidFill>
               </a:rPr>
-              <a:t>UI information</a:t>
-            </a:r>
-            <a:endParaRPr lang="en-US" sz="1300" dirty="0"/>
-          </a:p>
-          <a:p>
-            <a:pPr indent="0" marL="0">
-              <a:buNone/>
-            </a:pPr>
-            <a:r>
-              <a:rPr lang="en-US" sz="1200" dirty="0">
-                <a:solidFill>
-                  <a:schemeClr val="tx1"/>
-                </a:solidFill>
-              </a:rPr>
-              <a:t>element coordinates · HTML</a:t>
-            </a:r>
-            <a:endParaRPr lang="en-US" sz="1300" dirty="0"/>
-          </a:p>
-        </p:txBody>
-      </p:sp>
-      <p:sp>
-        <p:nvSpPr>
-          <p:cNvPr id="8" name="Arrow in"/>
+              <a:t>UI information only, no gaze</a:t>
+            </a:r>
+            <a:endParaRPr lang="en-US" sz="1400" dirty="0"/>
+          </a:p>
+        </p:txBody>
+      </p:sp>
+      <p:sp>
+        <p:nvSpPr>
+          <p:cNvPr id="18" name="Study card"/>
           <p:cNvSpPr/>
           <p:nvPr/>
         </p:nvSpPr>
         <p:spPr>
           <a:xfrm>
-            <a:off x="3063240" y="2331720"/>
-            <a:ext cx="365760" cy="274320"/>
-          </a:xfrm>
-          <a:prstGeom prst="rightArrow">
-            <a:avLst/>
+            <a:off x="4663440" y="3840480"/>
+            <a:ext cx="4023360" cy="777240"/>
+          </a:xfrm>
+          <a:prstGeom prst="roundRect">
+            <a:avLst>
+              <a:gd name="adj" fmla="val 9412"/>
+            </a:avLst>
           </a:prstGeom>
           <a:solidFill>
-            <a:schemeClr val="accent3"/>
+            <a:schemeClr val="bg1"/>
           </a:solidFill>
-          <a:ln w="12700">
+          <a:ln w="9525">
             <a:solidFill>
-              <a:schemeClr val="accent3"/>
+              <a:srgbClr val="CCCCCC"/>
             </a:solidFill>
             <a:prstDash val="solid"/>
           </a:ln>
@@ -3194,39 +3655,14 @@
       </p:sp>
       <p:sp>
         <p:nvSpPr>
-          <p:cNvPr id="9" name="LLM box"/>
-          <p:cNvSpPr/>
-          <p:nvPr/>
-        </p:nvSpPr>
-        <p:spPr>
-          <a:xfrm>
-            <a:off x="3566160" y="1737360"/>
-            <a:ext cx="1737360" cy="1188720"/>
-          </a:xfrm>
-          <a:prstGeom prst="rect">
-            <a:avLst/>
-          </a:prstGeom>
-          <a:solidFill>
-            <a:schemeClr val="tx2"/>
-          </a:solidFill>
-          <a:ln w="12700">
-            <a:solidFill>
-              <a:schemeClr val="bg2"/>
-            </a:solidFill>
-            <a:prstDash val="solid"/>
-          </a:ln>
-        </p:spPr>
-      </p:sp>
-      <p:sp>
-        <p:nvSpPr>
-          <p:cNvPr id="10" name="LLM text"/>
+          <p:cNvPr id="19" name="Study text"/>
           <p:cNvSpPr txBox="1"/>
           <p:nvPr/>
         </p:nvSpPr>
         <p:spPr>
           <a:xfrm>
-            <a:off x="3566160" y="1737360"/>
-            <a:ext cx="1737360" cy="1188720"/>
+            <a:off x="4754880" y="3840480"/>
+            <a:ext cx="3840480" cy="777240"/>
           </a:xfrm>
           <a:prstGeom prst="rect">
             <a:avLst/>
@@ -3238,95 +3674,6 @@
           <a:bodyPr wrap="square" lIns="1016" tIns="1016" rIns="1016" bIns="1016" rtlCol="0" anchor="ctr"/>
           <a:lstStyle/>
           <a:p>
-            <a:pPr algn="ctr" indent="0" marL="0">
-              <a:buNone/>
-            </a:pPr>
-            <a:r>
-              <a:rPr lang="en-US" sz="2200" b="1" dirty="0">
-                <a:solidFill>
-                  <a:schemeClr val="bg1"/>
-                </a:solidFill>
-                <a:latin typeface="Georgia" pitchFamily="34" charset="0"/>
-                <a:ea typeface="Georgia" pitchFamily="34" charset="-122"/>
-                <a:cs typeface="Georgia" pitchFamily="34" charset="-120"/>
-              </a:rPr>
-              <a:t>GPT-4</a:t>
-            </a:r>
-            <a:endParaRPr lang="en-US" sz="2200" dirty="0"/>
-          </a:p>
-        </p:txBody>
-      </p:sp>
-      <p:sp>
-        <p:nvSpPr>
-          <p:cNvPr id="11" name="Arrow out"/>
-          <p:cNvSpPr/>
-          <p:nvPr/>
-        </p:nvSpPr>
-        <p:spPr>
-          <a:xfrm>
-            <a:off x="5440680" y="2194560"/>
-            <a:ext cx="365760" cy="274320"/>
-          </a:xfrm>
-          <a:prstGeom prst="rightArrow">
-            <a:avLst/>
-          </a:prstGeom>
-          <a:solidFill>
-            <a:schemeClr val="accent3"/>
-          </a:solidFill>
-          <a:ln w="12700">
-            <a:solidFill>
-              <a:schemeClr val="accent3"/>
-            </a:solidFill>
-            <a:prstDash val="solid"/>
-          </a:ln>
-        </p:spPr>
-      </p:sp>
-      <p:sp>
-        <p:nvSpPr>
-          <p:cNvPr id="12" name="Output box"/>
-          <p:cNvSpPr/>
-          <p:nvPr/>
-        </p:nvSpPr>
-        <p:spPr>
-          <a:xfrm>
-            <a:off x="5943600" y="1737360"/>
-            <a:ext cx="2743200" cy="1188720"/>
-          </a:xfrm>
-          <a:prstGeom prst="rect">
-            <a:avLst/>
-          </a:prstGeom>
-          <a:solidFill>
-            <a:schemeClr val="accent2"/>
-          </a:solidFill>
-          <a:ln w="12700">
-            <a:solidFill>
-              <a:schemeClr val="bg2"/>
-            </a:solidFill>
-            <a:prstDash val="solid"/>
-          </a:ln>
-        </p:spPr>
-      </p:sp>
-      <p:sp>
-        <p:nvSpPr>
-          <p:cNvPr id="13" name="Output text"/>
-          <p:cNvSpPr txBox="1"/>
-          <p:nvPr/>
-        </p:nvSpPr>
-        <p:spPr>
-          <a:xfrm>
-            <a:off x="6035040" y="1783080"/>
-            <a:ext cx="2560320" cy="1097280"/>
-          </a:xfrm>
-          <a:prstGeom prst="rect">
-            <a:avLst/>
-          </a:prstGeom>
-          <a:noFill/>
-          <a:ln/>
-        </p:spPr>
-        <p:txBody>
-          <a:bodyPr wrap="square" lIns="1016" tIns="1016" rIns="1016" bIns="1016" rtlCol="0" anchor="ctr"/>
-          <a:lstStyle/>
-          <a:p>
             <a:pPr indent="0" marL="0">
               <a:buNone/>
             </a:pPr>
@@ -3336,82 +3683,7 @@
                   <a:schemeClr val="tx2"/>
                 </a:solidFill>
               </a:rPr>
-              <a:t>Predicted think-aloud</a:t>
-            </a:r>
-            <a:endParaRPr lang="en-US" sz="1300" dirty="0"/>
-          </a:p>
-          <a:p>
-            <a:pPr indent="0" marL="0">
-              <a:buNone/>
-            </a:pPr>
-            <a:r>
-              <a:rPr lang="en-US" sz="1200" dirty="0">
-                <a:solidFill>
-                  <a:schemeClr val="tx2"/>
-                </a:solidFill>
-              </a:rPr>
-              <a:t>natural text, including doubt</a:t>
-            </a:r>
-            <a:endParaRPr lang="en-US" sz="1300" dirty="0"/>
-          </a:p>
-        </p:txBody>
-      </p:sp>
-      <p:sp>
-        <p:nvSpPr>
-          <p:cNvPr id="14" name="Baseline note"/>
-          <p:cNvSpPr/>
-          <p:nvPr/>
-        </p:nvSpPr>
-        <p:spPr>
-          <a:xfrm>
-            <a:off x="457200" y="3703320"/>
-            <a:ext cx="8229600" cy="868680"/>
-          </a:xfrm>
-          <a:prstGeom prst="rect">
-            <a:avLst/>
-          </a:prstGeom>
-          <a:solidFill>
-            <a:schemeClr val="bg1"/>
-          </a:solidFill>
-          <a:ln w="12700">
-            <a:solidFill>
-              <a:schemeClr val="bg2"/>
-            </a:solidFill>
-            <a:prstDash val="solid"/>
-          </a:ln>
-        </p:spPr>
-      </p:sp>
-      <p:sp>
-        <p:nvSpPr>
-          <p:cNvPr id="15" name="Baseline text"/>
-          <p:cNvSpPr txBox="1"/>
-          <p:nvPr/>
-        </p:nvSpPr>
-        <p:spPr>
-          <a:xfrm>
-            <a:off x="594360" y="3749040"/>
-            <a:ext cx="7955280" cy="777240"/>
-          </a:xfrm>
-          <a:prstGeom prst="rect">
-            <a:avLst/>
-          </a:prstGeom>
-          <a:noFill/>
-          <a:ln/>
-        </p:spPr>
-        <p:txBody>
-          <a:bodyPr wrap="square" lIns="1016" tIns="1016" rIns="1016" bIns="1016" rtlCol="0" anchor="ctr"/>
-          <a:lstStyle/>
-          <a:p>
-            <a:pPr indent="0" marL="0">
-              <a:buNone/>
-            </a:pPr>
-            <a:r>
-              <a:rPr lang="en-US" sz="1300" b="1" dirty="0">
-                <a:solidFill>
-                  <a:schemeClr val="accent4"/>
-                </a:solidFill>
-              </a:rPr>
-              <a:t>Baseline InTA: </a:t>
+              <a:t>Study: </a:t>
             </a:r>
             <a:pPr indent="0" marL="0">
               <a:buNone/>
@@ -3422,29 +3694,7 @@
                   <a:schemeClr val="tx1"/>
                 </a:solidFill>
               </a:rPr>
-              <a:t>UI information only (no gaze).   </a:t>
-            </a:r>
-            <a:pPr indent="0" marL="0">
-              <a:buNone/>
-            </a:pPr>
-            <a:r>
-              <a:rPr lang="en-US" sz="1300" b="1" dirty="0">
-                <a:solidFill>
-                  <a:schemeClr val="accent1"/>
-                </a:solidFill>
-              </a:rPr>
-              <a:t>Study: </a:t>
-            </a:r>
-            <a:pPr indent="0" marL="0">
-              <a:buNone/>
-            </a:pPr>
-            <a:r>
-              <a:rPr lang="en-US" sz="1300" dirty="0">
-                <a:solidFill>
-                  <a:schemeClr val="tx1"/>
-                </a:solidFill>
-              </a:rPr>
-              <a:t>20 students × 4 conditions (Good/Bad UI × shopping/video). Bad UIs violate Nielsen's heuristics.</a:t>
+              <a:t>20 students × 4 conditions (Good/Bad UI × shopping/video)</a:t>
             </a:r>
             <a:endParaRPr lang="en-US" sz="1300" dirty="0"/>
           </a:p>
@@ -3462,8 +3712,8 @@
         </p:nvSpPr>
         <p:spPr>
           <a:xfrm>
-            <a:off x="8229600" y="4828032"/>
-            <a:ext cx="457200" cy="228600"/>
+            <a:off x="8321040" y="4800600"/>
+            <a:ext cx="365760" cy="228600"/>
           </a:xfrm>
           <a:prstGeom prst="rect">
             <a:avLst/>
@@ -3480,7 +3730,7 @@
             <a:lvl1pPr>
               <a:defRPr sz="900">
                 <a:solidFill>
-                  <a:schemeClr val="accent3"/>
+                  <a:schemeClr val="tx1"/>
                 </a:solidFill>
               </a:defRPr>
             </a:lvl1pPr>
@@ -3522,14 +3772,50 @@
       </p:grpSpPr>
       <p:sp>
         <p:nvSpPr>
-          <p:cNvPr id="2" name="Text 0"/>
+          <p:cNvPr id="2" name="Section label"/>
+          <p:cNvSpPr txBox="1"/>
+          <p:nvPr/>
+        </p:nvSpPr>
+        <p:spPr>
+          <a:xfrm>
+            <a:off x="457200" y="219456"/>
+            <a:ext cx="5486400" cy="237744"/>
+          </a:xfrm>
+          <a:prstGeom prst="rect">
+            <a:avLst/>
+          </a:prstGeom>
+          <a:noFill/>
+          <a:ln/>
+        </p:spPr>
+        <p:txBody>
+          <a:bodyPr wrap="square" lIns="0" tIns="0" rIns="0" bIns="0" rtlCol="0" anchor="ctr"/>
+          <a:lstStyle/>
+          <a:p>
+            <a:pPr indent="0" marL="0">
+              <a:buNone/>
+            </a:pPr>
+            <a:r>
+              <a:rPr lang="en-US" sz="1200" b="1" dirty="0">
+                <a:solidFill>
+                  <a:schemeClr val="tx2"/>
+                </a:solidFill>
+              </a:rPr>
+              <a:t>Undergraduate · 2/3</a:t>
+            </a:r>
+            <a:endParaRPr lang="en-US" sz="1200" dirty="0"/>
+          </a:p>
+        </p:txBody>
+      </p:sp>
+      <p:sp>
+        <p:nvSpPr>
+          <p:cNvPr id="3" name="Text 1"/>
           <p:cNvSpPr/>
           <p:nvPr/>
         </p:nvSpPr>
         <p:spPr>
           <a:xfrm>
-            <a:off x="457200" y="274320"/>
-            <a:ext cx="8229600" cy="685800"/>
+            <a:off x="457200" y="457200"/>
+            <a:ext cx="8229600" cy="594360"/>
           </a:xfrm>
           <a:prstGeom prst="rect">
             <a:avLst/>
@@ -3545,29 +3831,26 @@
               <a:buNone/>
             </a:pPr>
             <a:r>
-              <a:rPr lang="en-US" sz="2200" b="1" dirty="0">
+              <a:rPr lang="en-US" sz="2600" b="1" dirty="0">
                 <a:solidFill>
                   <a:schemeClr val="tx2"/>
                 </a:solidFill>
-                <a:latin typeface="Georgia" pitchFamily="34" charset="0"/>
-                <a:ea typeface="Georgia" pitchFamily="34" charset="-122"/>
-                <a:cs typeface="Georgia" pitchFamily="34" charset="-120"/>
-              </a:rPr>
-              <a:t>Undergraduate (2/3): similar, but EsTA says more</a:t>
-            </a:r>
-            <a:endParaRPr lang="en-US" sz="2200" dirty="0"/>
+              </a:rPr>
+              <a:t>Close to real speech, but EsTA says more</a:t>
+            </a:r>
+            <a:endParaRPr lang="en-US" sz="2600" dirty="0"/>
           </a:p>
         </p:txBody>
       </p:sp>
       <p:graphicFrame>
         <p:nvGraphicFramePr>
-          <p:cNvPr id="4" name="Chart 0" descr=""/>
+          <p:cNvPr id="5" name="Chart 0" descr=""/>
           <p:cNvGraphicFramePr/>
           <p:nvPr/>
         </p:nvGraphicFramePr>
         <p:xfrm>
-          <a:off x="365760" y="1143000"/>
-          <a:ext cx="5394960" cy="3337560"/>
+          <a:off x="365760" y="1188720"/>
+          <a:ext cx="5394960" cy="3520440"/>
         </p:xfrm>
         <a:graphic xmlns:a="http://schemas.openxmlformats.org/drawingml/2006/main">
           <a:graphicData uri="http://schemas.openxmlformats.org/drawingml/2006/chart">
@@ -3577,24 +3860,26 @@
       </p:graphicFrame>
       <p:sp>
         <p:nvSpPr>
-          <p:cNvPr id="5" name="Callout 1"/>
+          <p:cNvPr id="6" name="Callout 1"/>
           <p:cNvSpPr/>
           <p:nvPr/>
         </p:nvSpPr>
         <p:spPr>
           <a:xfrm>
             <a:off x="6035040" y="1280160"/>
-            <a:ext cx="2651760" cy="914400"/>
-          </a:xfrm>
-          <a:prstGeom prst="rect">
-            <a:avLst/>
+            <a:ext cx="2651760" cy="960120"/>
+          </a:xfrm>
+          <a:prstGeom prst="roundRect">
+            <a:avLst>
+              <a:gd name="adj" fmla="val 7619"/>
+            </a:avLst>
           </a:prstGeom>
           <a:solidFill>
-            <a:schemeClr val="bg1"/>
+            <a:schemeClr val="bg2"/>
           </a:solidFill>
-          <a:ln w="12700">
+          <a:ln w="9525">
             <a:solidFill>
-              <a:schemeClr val="bg2"/>
+              <a:srgbClr val="CCCCCC"/>
             </a:solidFill>
             <a:prstDash val="solid"/>
           </a:ln>
@@ -3602,14 +3887,14 @@
       </p:sp>
       <p:sp>
         <p:nvSpPr>
-          <p:cNvPr id="6" name="Callout 1 text"/>
+          <p:cNvPr id="7" name="Callout 1 text"/>
           <p:cNvSpPr txBox="1"/>
           <p:nvPr/>
         </p:nvSpPr>
         <p:spPr>
           <a:xfrm>
-            <a:off x="6126480" y="1325880"/>
-            <a:ext cx="2468880" cy="822960"/>
+            <a:off x="6126480" y="1280160"/>
+            <a:ext cx="2468880" cy="960120"/>
           </a:xfrm>
           <a:prstGeom prst="rect">
             <a:avLst/>
@@ -3627,12 +3912,12 @@
             <a:r>
               <a:rPr lang="en-US" sz="1800" b="1" dirty="0">
                 <a:solidFill>
-                  <a:schemeClr val="accent1"/>
+                  <a:schemeClr val="tx2"/>
                 </a:solidFill>
               </a:rPr>
               <a:t>All above 0.617</a:t>
             </a:r>
-            <a:endParaRPr lang="en-US" sz="1300" dirty="0"/>
+            <a:endParaRPr lang="en-US" sz="1400" dirty="0"/>
           </a:p>
           <a:p>
             <a:pPr indent="0" marL="0">
@@ -3641,35 +3926,37 @@
             <a:r>
               <a:rPr lang="en-US" sz="1200" dirty="0">
                 <a:solidFill>
-                  <a:schemeClr val="tx1"/>
+                  <a:schemeClr val="accent3"/>
                 </a:solidFill>
               </a:rPr>
               <a:t>WMT24 benchmark, every condition</a:t>
             </a:r>
-            <a:endParaRPr lang="en-US" sz="1300" dirty="0"/>
-          </a:p>
-        </p:txBody>
-      </p:sp>
-      <p:sp>
-        <p:nvSpPr>
-          <p:cNvPr id="7" name="Callout 2"/>
+            <a:endParaRPr lang="en-US" sz="1400" dirty="0"/>
+          </a:p>
+        </p:txBody>
+      </p:sp>
+      <p:sp>
+        <p:nvSpPr>
+          <p:cNvPr id="8" name="Callout 2"/>
           <p:cNvSpPr/>
           <p:nvPr/>
         </p:nvSpPr>
         <p:spPr>
           <a:xfrm>
-            <a:off x="6035040" y="2377440"/>
-            <a:ext cx="2651760" cy="914400"/>
-          </a:xfrm>
-          <a:prstGeom prst="rect">
-            <a:avLst/>
+            <a:off x="6035040" y="2423160"/>
+            <a:ext cx="2651760" cy="960120"/>
+          </a:xfrm>
+          <a:prstGeom prst="roundRect">
+            <a:avLst>
+              <a:gd name="adj" fmla="val 7619"/>
+            </a:avLst>
           </a:prstGeom>
           <a:solidFill>
-            <a:schemeClr val="bg1"/>
+            <a:schemeClr val="bg2"/>
           </a:solidFill>
-          <a:ln w="12700">
+          <a:ln w="9525">
             <a:solidFill>
-              <a:schemeClr val="bg2"/>
+              <a:srgbClr val="CCCCCC"/>
             </a:solidFill>
             <a:prstDash val="solid"/>
           </a:ln>
@@ -3677,14 +3964,14 @@
       </p:sp>
       <p:sp>
         <p:nvSpPr>
-          <p:cNvPr id="8" name="Callout 2 text"/>
+          <p:cNvPr id="9" name="Callout 2 text"/>
           <p:cNvSpPr txBox="1"/>
           <p:nvPr/>
         </p:nvSpPr>
         <p:spPr>
           <a:xfrm>
             <a:off x="6126480" y="2423160"/>
-            <a:ext cx="2468880" cy="822960"/>
+            <a:ext cx="2468880" cy="960120"/>
           </a:xfrm>
           <a:prstGeom prst="rect">
             <a:avLst/>
@@ -3702,49 +3989,51 @@
             <a:r>
               <a:rPr lang="en-US" sz="1800" b="1" dirty="0">
                 <a:solidFill>
+                  <a:schemeClr val="tx2"/>
+                </a:solidFill>
+              </a:rPr>
+              <a:t>EsTA lower in 3 of 4</a:t>
+            </a:r>
+            <a:endParaRPr lang="en-US" sz="1400" dirty="0"/>
+          </a:p>
+          <a:p>
+            <a:pPr indent="0" marL="0">
+              <a:buNone/>
+            </a:pPr>
+            <a:r>
+              <a:rPr lang="en-US" sz="1200" dirty="0">
+                <a:solidFill>
                   <a:schemeClr val="accent3"/>
                 </a:solidFill>
               </a:rPr>
-              <a:t>EsTA lower in 3 of 4</a:t>
-            </a:r>
-            <a:endParaRPr lang="en-US" sz="1300" dirty="0"/>
-          </a:p>
-          <a:p>
-            <a:pPr indent="0" marL="0">
-              <a:buNone/>
-            </a:pPr>
-            <a:r>
-              <a:rPr lang="en-US" sz="1200" dirty="0">
-                <a:solidFill>
-                  <a:schemeClr val="tx1"/>
-                </a:solidFill>
-              </a:rPr>
               <a:t>Good A, Bad A, Good B</a:t>
             </a:r>
-            <a:endParaRPr lang="en-US" sz="1300" dirty="0"/>
-          </a:p>
-        </p:txBody>
-      </p:sp>
-      <p:sp>
-        <p:nvSpPr>
-          <p:cNvPr id="9" name="Callout 3"/>
+            <a:endParaRPr lang="en-US" sz="1400" dirty="0"/>
+          </a:p>
+        </p:txBody>
+      </p:sp>
+      <p:sp>
+        <p:nvSpPr>
+          <p:cNvPr id="10" name="Callout 3"/>
           <p:cNvSpPr/>
           <p:nvPr/>
         </p:nvSpPr>
         <p:spPr>
           <a:xfrm>
-            <a:off x="6035040" y="3474720"/>
+            <a:off x="6035040" y="3566160"/>
             <a:ext cx="2651760" cy="1097280"/>
           </a:xfrm>
-          <a:prstGeom prst="rect">
-            <a:avLst/>
+          <a:prstGeom prst="roundRect">
+            <a:avLst>
+              <a:gd name="adj" fmla="val 6667"/>
+            </a:avLst>
           </a:prstGeom>
           <a:solidFill>
-            <a:schemeClr val="accent2"/>
+            <a:schemeClr val="accent6"/>
           </a:solidFill>
-          <a:ln w="12700">
+          <a:ln w="9525">
             <a:solidFill>
-              <a:schemeClr val="bg2"/>
+              <a:schemeClr val="accent5"/>
             </a:solidFill>
             <a:prstDash val="solid"/>
           </a:ln>
@@ -3752,14 +4041,14 @@
       </p:sp>
       <p:sp>
         <p:nvSpPr>
-          <p:cNvPr id="10" name="Callout 3 text"/>
+          <p:cNvPr id="11" name="Callout 3 text"/>
           <p:cNvSpPr txBox="1"/>
           <p:nvPr/>
         </p:nvSpPr>
         <p:spPr>
           <a:xfrm>
-            <a:off x="6126480" y="3520440"/>
-            <a:ext cx="2468880" cy="1005840"/>
+            <a:off x="6126480" y="3566160"/>
+            <a:ext cx="2468880" cy="1097280"/>
           </a:xfrm>
           <a:prstGeom prst="rect">
             <a:avLst/>
@@ -3780,9 +4069,9 @@
                   <a:schemeClr val="tx2"/>
                 </a:solidFill>
               </a:rPr>
-              <a:t>Why? "Saying too much"</a:t>
-            </a:r>
-            <a:endParaRPr lang="en-US" sz="1300" dirty="0"/>
+              <a:t>Why? “Saying too much”</a:t>
+            </a:r>
+            <a:endParaRPr lang="en-US" sz="1400" dirty="0"/>
           </a:p>
           <a:p>
             <a:pPr indent="0" marL="0">
@@ -3791,48 +4080,12 @@
             <a:r>
               <a:rPr lang="en-US" sz="1200" dirty="0">
                 <a:solidFill>
-                  <a:schemeClr val="tx2"/>
+                  <a:schemeClr val="tx1"/>
                 </a:solidFill>
               </a:rPr>
               <a:t>EsTA wrote thoughts users never voiced.</a:t>
             </a:r>
-            <a:endParaRPr lang="en-US" sz="1300" dirty="0"/>
-          </a:p>
-        </p:txBody>
-      </p:sp>
-      <p:sp>
-        <p:nvSpPr>
-          <p:cNvPr id="11" name="Axis note"/>
-          <p:cNvSpPr txBox="1"/>
-          <p:nvPr/>
-        </p:nvSpPr>
-        <p:spPr>
-          <a:xfrm>
-            <a:off x="457200" y="4572000"/>
-            <a:ext cx="5029200" cy="228600"/>
-          </a:xfrm>
-          <a:prstGeom prst="rect">
-            <a:avLst/>
-          </a:prstGeom>
-          <a:noFill/>
-          <a:ln/>
-        </p:spPr>
-        <p:txBody>
-          <a:bodyPr wrap="square" lIns="0" tIns="0" rIns="0" bIns="0" rtlCol="0" anchor="t"/>
-          <a:lstStyle/>
-          <a:p>
-            <a:pPr indent="0" marL="0">
-              <a:buNone/>
-            </a:pPr>
-            <a:r>
-              <a:rPr lang="en-US" sz="900" dirty="0">
-                <a:solidFill>
-                  <a:schemeClr val="accent3"/>
-                </a:solidFill>
-              </a:rPr>
-              <a:t>A = e-commerce, B = video streaming</a:t>
-            </a:r>
-            <a:endParaRPr lang="en-US" sz="900" dirty="0"/>
+            <a:endParaRPr lang="en-US" sz="1400" dirty="0"/>
           </a:p>
         </p:txBody>
       </p:sp>
@@ -3848,8 +4101,8 @@
         </p:nvSpPr>
         <p:spPr>
           <a:xfrm>
-            <a:off x="8229600" y="4828032"/>
-            <a:ext cx="457200" cy="228600"/>
+            <a:off x="8321040" y="4800600"/>
+            <a:ext cx="365760" cy="228600"/>
           </a:xfrm>
           <a:prstGeom prst="rect">
             <a:avLst/>
@@ -3866,7 +4119,7 @@
             <a:lvl1pPr>
               <a:defRPr sz="900">
                 <a:solidFill>
-                  <a:schemeClr val="accent3"/>
+                  <a:schemeClr val="tx1"/>
                 </a:solidFill>
               </a:defRPr>
             </a:lvl1pPr>
@@ -3908,14 +4161,50 @@
       </p:grpSpPr>
       <p:sp>
         <p:nvSpPr>
-          <p:cNvPr id="2" name="Text 0"/>
+          <p:cNvPr id="2" name="Section label"/>
+          <p:cNvSpPr txBox="1"/>
+          <p:nvPr/>
+        </p:nvSpPr>
+        <p:spPr>
+          <a:xfrm>
+            <a:off x="457200" y="219456"/>
+            <a:ext cx="5486400" cy="237744"/>
+          </a:xfrm>
+          <a:prstGeom prst="rect">
+            <a:avLst/>
+          </a:prstGeom>
+          <a:noFill/>
+          <a:ln/>
+        </p:spPr>
+        <p:txBody>
+          <a:bodyPr wrap="square" lIns="0" tIns="0" rIns="0" bIns="0" rtlCol="0" anchor="ctr"/>
+          <a:lstStyle/>
+          <a:p>
+            <a:pPr indent="0" marL="0">
+              <a:buNone/>
+            </a:pPr>
+            <a:r>
+              <a:rPr lang="en-US" sz="1200" b="1" dirty="0">
+                <a:solidFill>
+                  <a:schemeClr val="tx2"/>
+                </a:solidFill>
+              </a:rPr>
+              <a:t>Undergraduate · 3/3</a:t>
+            </a:r>
+            <a:endParaRPr lang="en-US" sz="1200" dirty="0"/>
+          </a:p>
+        </p:txBody>
+      </p:sp>
+      <p:sp>
+        <p:nvSpPr>
+          <p:cNvPr id="3" name="Text 1"/>
           <p:cNvSpPr/>
           <p:nvPr/>
         </p:nvSpPr>
         <p:spPr>
           <a:xfrm>
-            <a:off x="457200" y="274320"/>
-            <a:ext cx="8229600" cy="685800"/>
+            <a:off x="457200" y="457200"/>
+            <a:ext cx="8229600" cy="594360"/>
           </a:xfrm>
           <a:prstGeom prst="rect">
             <a:avLst/>
@@ -3931,40 +4220,39 @@
               <a:buNone/>
             </a:pPr>
             <a:r>
-              <a:rPr lang="en-US" sz="2200" b="1" dirty="0">
+              <a:rPr lang="en-US" sz="2600" b="1" dirty="0">
                 <a:solidFill>
                   <a:schemeClr val="tx2"/>
                 </a:solidFill>
-                <a:latin typeface="Georgia" pitchFamily="34" charset="0"/>
-                <a:ea typeface="Georgia" pitchFamily="34" charset="-122"/>
-                <a:cs typeface="Georgia" pitchFamily="34" charset="-120"/>
-              </a:rPr>
-              <a:t>Undergraduate (3/3): gaze recovered an unspoken calculation</a:t>
-            </a:r>
-            <a:endParaRPr lang="en-US" sz="2200" dirty="0"/>
-          </a:p>
-        </p:txBody>
-      </p:sp>
-      <p:sp>
-        <p:nvSpPr>
-          <p:cNvPr id="4" name="Quote card 1"/>
+              </a:rPr>
+              <a:t>Gaze recovered an unspoken calculation</a:t>
+            </a:r>
+            <a:endParaRPr lang="en-US" sz="2600" dirty="0"/>
+          </a:p>
+        </p:txBody>
+      </p:sp>
+      <p:sp>
+        <p:nvSpPr>
+          <p:cNvPr id="5" name="Quote card 1"/>
           <p:cNvSpPr/>
           <p:nvPr/>
         </p:nvSpPr>
         <p:spPr>
           <a:xfrm>
             <a:off x="457200" y="1280160"/>
-            <a:ext cx="2651760" cy="2377440"/>
-          </a:xfrm>
-          <a:prstGeom prst="rect">
-            <a:avLst/>
+            <a:ext cx="2651760" cy="2286000"/>
+          </a:xfrm>
+          <a:prstGeom prst="roundRect">
+            <a:avLst>
+              <a:gd name="adj" fmla="val 3200"/>
+            </a:avLst>
           </a:prstGeom>
           <a:solidFill>
-            <a:schemeClr val="bg1"/>
+            <a:schemeClr val="bg2"/>
           </a:solidFill>
-          <a:ln w="12700">
+          <a:ln w="9525">
             <a:solidFill>
-              <a:schemeClr val="bg2"/>
+              <a:srgbClr val="CCCCCC"/>
             </a:solidFill>
             <a:prstDash val="solid"/>
           </a:ln>
@@ -3972,24 +4260,98 @@
       </p:sp>
       <p:sp>
         <p:nvSpPr>
-          <p:cNvPr id="5" name="Quote head 1"/>
+          <p:cNvPr id="6" name="Quote label 1"/>
+          <p:cNvSpPr txBox="1"/>
+          <p:nvPr/>
+        </p:nvSpPr>
+        <p:spPr>
+          <a:xfrm>
+            <a:off x="566928" y="1371600"/>
+            <a:ext cx="2432304" cy="365760"/>
+          </a:xfrm>
+          <a:prstGeom prst="rect">
+            <a:avLst/>
+          </a:prstGeom>
+          <a:noFill/>
+          <a:ln/>
+        </p:spPr>
+        <p:txBody>
+          <a:bodyPr wrap="square" lIns="1016" tIns="1016" rIns="1016" bIns="1016" rtlCol="0" anchor="t"/>
+          <a:lstStyle/>
+          <a:p>
+            <a:pPr indent="0" marL="0">
+              <a:buNone/>
+            </a:pPr>
+            <a:r>
+              <a:rPr lang="en-US" sz="1500" b="1" dirty="0">
+                <a:solidFill>
+                  <a:schemeClr val="tx1"/>
+                </a:solidFill>
+              </a:rPr>
+              <a:t>Actual utterance</a:t>
+            </a:r>
+            <a:endParaRPr lang="en-US" sz="1500" dirty="0"/>
+          </a:p>
+        </p:txBody>
+      </p:sp>
+      <p:sp>
+        <p:nvSpPr>
+          <p:cNvPr id="7" name="Quote body 1"/>
+          <p:cNvSpPr txBox="1"/>
+          <p:nvPr/>
+        </p:nvSpPr>
+        <p:spPr>
+          <a:xfrm>
+            <a:off x="566928" y="1828800"/>
+            <a:ext cx="2432304" cy="1645920"/>
+          </a:xfrm>
+          <a:prstGeom prst="rect">
+            <a:avLst/>
+          </a:prstGeom>
+          <a:noFill/>
+          <a:ln/>
+        </p:spPr>
+        <p:txBody>
+          <a:bodyPr wrap="square" lIns="1016" tIns="1016" rIns="1016" bIns="1016" rtlCol="0" anchor="t"/>
+          <a:lstStyle/>
+          <a:p>
+            <a:pPr indent="0" marL="0">
+              <a:buNone/>
+            </a:pPr>
+            <a:r>
+              <a:rPr lang="en-US" sz="1600" i="1" dirty="0">
+                <a:solidFill>
+                  <a:schemeClr val="tx1"/>
+                </a:solidFill>
+              </a:rPr>
+              <a:t>“Now I have all four items, so let me check the cart.”</a:t>
+            </a:r>
+            <a:endParaRPr lang="en-US" sz="1600" dirty="0"/>
+          </a:p>
+        </p:txBody>
+      </p:sp>
+      <p:sp>
+        <p:nvSpPr>
+          <p:cNvPr id="8" name="Quote card 2"/>
           <p:cNvSpPr/>
           <p:nvPr/>
         </p:nvSpPr>
         <p:spPr>
           <a:xfrm>
-            <a:off x="457200" y="1280160"/>
-            <a:ext cx="2651760" cy="411480"/>
-          </a:xfrm>
-          <a:prstGeom prst="rect">
-            <a:avLst/>
+            <a:off x="3246120" y="1280160"/>
+            <a:ext cx="2651760" cy="2286000"/>
+          </a:xfrm>
+          <a:prstGeom prst="roundRect">
+            <a:avLst>
+              <a:gd name="adj" fmla="val 3200"/>
+            </a:avLst>
           </a:prstGeom>
           <a:solidFill>
-            <a:schemeClr val="accent3"/>
+            <a:schemeClr val="bg2"/>
           </a:solidFill>
-          <a:ln w="12700">
+          <a:ln w="9525">
             <a:solidFill>
-              <a:schemeClr val="accent3"/>
+              <a:srgbClr val="CCCCCC"/>
             </a:solidFill>
             <a:prstDash val="solid"/>
           </a:ln>
@@ -3997,14 +4359,14 @@
       </p:sp>
       <p:sp>
         <p:nvSpPr>
-          <p:cNvPr id="6" name="Quote label 1"/>
+          <p:cNvPr id="9" name="Quote label 2"/>
           <p:cNvSpPr txBox="1"/>
           <p:nvPr/>
         </p:nvSpPr>
         <p:spPr>
           <a:xfrm>
-            <a:off x="548640" y="1280160"/>
-            <a:ext cx="2468880" cy="411480"/>
+            <a:off x="3355848" y="1371600"/>
+            <a:ext cx="2432304" cy="365760"/>
           </a:xfrm>
           <a:prstGeom prst="rect">
             <a:avLst/>
@@ -4013,34 +4375,34 @@
           <a:ln/>
         </p:spPr>
         <p:txBody>
-          <a:bodyPr wrap="square" lIns="1016" tIns="1016" rIns="1016" bIns="1016" rtlCol="0" anchor="ctr"/>
-          <a:lstStyle/>
-          <a:p>
-            <a:pPr indent="0" marL="0">
-              <a:buNone/>
-            </a:pPr>
-            <a:r>
-              <a:rPr lang="en-US" sz="1200" b="1" dirty="0">
-                <a:solidFill>
-                  <a:schemeClr val="bg1"/>
-                </a:solidFill>
-              </a:rPr>
-              <a:t>ACTUAL UTTERANCE</a:t>
-            </a:r>
-            <a:endParaRPr lang="en-US" sz="1200" dirty="0"/>
-          </a:p>
-        </p:txBody>
-      </p:sp>
-      <p:sp>
-        <p:nvSpPr>
-          <p:cNvPr id="7" name="Quote body 1"/>
+          <a:bodyPr wrap="square" lIns="1016" tIns="1016" rIns="1016" bIns="1016" rtlCol="0" anchor="t"/>
+          <a:lstStyle/>
+          <a:p>
+            <a:pPr indent="0" marL="0">
+              <a:buNone/>
+            </a:pPr>
+            <a:r>
+              <a:rPr lang="en-US" sz="1500" b="1" dirty="0">
+                <a:solidFill>
+                  <a:schemeClr val="tx1"/>
+                </a:solidFill>
+              </a:rPr>
+              <a:t>InTA (UI only)</a:t>
+            </a:r>
+            <a:endParaRPr lang="en-US" sz="1500" dirty="0"/>
+          </a:p>
+        </p:txBody>
+      </p:sp>
+      <p:sp>
+        <p:nvSpPr>
+          <p:cNvPr id="10" name="Quote body 2"/>
           <p:cNvSpPr txBox="1"/>
           <p:nvPr/>
         </p:nvSpPr>
         <p:spPr>
           <a:xfrm>
-            <a:off x="548640" y="1828800"/>
-            <a:ext cx="2468880" cy="1737360"/>
+            <a:off x="3355848" y="1828800"/>
+            <a:ext cx="2432304" cy="1645920"/>
           </a:xfrm>
           <a:prstGeom prst="rect">
             <a:avLst/>
@@ -4056,60 +4418,37 @@
               <a:buNone/>
             </a:pPr>
             <a:r>
-              <a:rPr lang="en-US" sz="1500" i="1" dirty="0">
+              <a:rPr lang="en-US" sz="1600" i="1" dirty="0">
                 <a:solidFill>
                   <a:schemeClr val="tx1"/>
                 </a:solidFill>
               </a:rPr>
-              <a:t>“Now I have all four items, so let me check the cart.”</a:t>
-            </a:r>
-            <a:endParaRPr lang="en-US" sz="1500" dirty="0"/>
-          </a:p>
-        </p:txBody>
-      </p:sp>
-      <p:sp>
-        <p:nvSpPr>
-          <p:cNvPr id="8" name="Quote card 2"/>
+              <a:t>“…items complete, I’ll check the budget later.”</a:t>
+            </a:r>
+            <a:endParaRPr lang="en-US" sz="1600" dirty="0"/>
+          </a:p>
+        </p:txBody>
+      </p:sp>
+      <p:sp>
+        <p:nvSpPr>
+          <p:cNvPr id="11" name="Quote card 3"/>
           <p:cNvSpPr/>
           <p:nvPr/>
         </p:nvSpPr>
         <p:spPr>
           <a:xfrm>
-            <a:off x="3246120" y="1280160"/>
-            <a:ext cx="2651760" cy="2377440"/>
-          </a:xfrm>
-          <a:prstGeom prst="rect">
-            <a:avLst/>
+            <a:off x="6035040" y="1280160"/>
+            <a:ext cx="2651760" cy="2286000"/>
+          </a:xfrm>
+          <a:prstGeom prst="roundRect">
+            <a:avLst>
+              <a:gd name="adj" fmla="val 3200"/>
+            </a:avLst>
           </a:prstGeom>
           <a:solidFill>
-            <a:schemeClr val="bg1"/>
+            <a:schemeClr val="accent6"/>
           </a:solidFill>
-          <a:ln w="12700">
-            <a:solidFill>
-              <a:schemeClr val="bg2"/>
-            </a:solidFill>
-            <a:prstDash val="solid"/>
-          </a:ln>
-        </p:spPr>
-      </p:sp>
-      <p:sp>
-        <p:nvSpPr>
-          <p:cNvPr id="9" name="Quote head 2"/>
-          <p:cNvSpPr/>
-          <p:nvPr/>
-        </p:nvSpPr>
-        <p:spPr>
-          <a:xfrm>
-            <a:off x="3246120" y="1280160"/>
-            <a:ext cx="2651760" cy="411480"/>
-          </a:xfrm>
-          <a:prstGeom prst="rect">
-            <a:avLst/>
-          </a:prstGeom>
-          <a:solidFill>
-            <a:schemeClr val="accent5"/>
-          </a:solidFill>
-          <a:ln w="12700">
+          <a:ln w="9525">
             <a:solidFill>
               <a:schemeClr val="accent5"/>
             </a:solidFill>
@@ -4119,14 +4458,14 @@
       </p:sp>
       <p:sp>
         <p:nvSpPr>
-          <p:cNvPr id="10" name="Quote label 2"/>
+          <p:cNvPr id="12" name="Quote label 3"/>
           <p:cNvSpPr txBox="1"/>
           <p:nvPr/>
         </p:nvSpPr>
         <p:spPr>
           <a:xfrm>
-            <a:off x="3337560" y="1280160"/>
-            <a:ext cx="2468880" cy="411480"/>
+            <a:off x="6144768" y="1371600"/>
+            <a:ext cx="2432304" cy="365760"/>
           </a:xfrm>
           <a:prstGeom prst="rect">
             <a:avLst/>
@@ -4135,34 +4474,34 @@
           <a:ln/>
         </p:spPr>
         <p:txBody>
-          <a:bodyPr wrap="square" lIns="1016" tIns="1016" rIns="1016" bIns="1016" rtlCol="0" anchor="ctr"/>
-          <a:lstStyle/>
-          <a:p>
-            <a:pPr indent="0" marL="0">
-              <a:buNone/>
-            </a:pPr>
-            <a:r>
-              <a:rPr lang="en-US" sz="1200" b="1" dirty="0">
-                <a:solidFill>
-                  <a:schemeClr val="bg1"/>
-                </a:solidFill>
-              </a:rPr>
-              <a:t>InTA (UI only)</a:t>
-            </a:r>
-            <a:endParaRPr lang="en-US" sz="1200" dirty="0"/>
-          </a:p>
-        </p:txBody>
-      </p:sp>
-      <p:sp>
-        <p:nvSpPr>
-          <p:cNvPr id="11" name="Quote body 2"/>
+          <a:bodyPr wrap="square" lIns="1016" tIns="1016" rIns="1016" bIns="1016" rtlCol="0" anchor="t"/>
+          <a:lstStyle/>
+          <a:p>
+            <a:pPr indent="0" marL="0">
+              <a:buNone/>
+            </a:pPr>
+            <a:r>
+              <a:rPr lang="en-US" sz="1500" b="1" dirty="0">
+                <a:solidFill>
+                  <a:schemeClr val="tx2"/>
+                </a:solidFill>
+              </a:rPr>
+              <a:t>EsTA (gaze + UI)</a:t>
+            </a:r>
+            <a:endParaRPr lang="en-US" sz="1500" dirty="0"/>
+          </a:p>
+        </p:txBody>
+      </p:sp>
+      <p:sp>
+        <p:nvSpPr>
+          <p:cNvPr id="13" name="Quote body 3"/>
           <p:cNvSpPr txBox="1"/>
           <p:nvPr/>
         </p:nvSpPr>
         <p:spPr>
           <a:xfrm>
-            <a:off x="3337560" y="1828800"/>
-            <a:ext cx="2468880" cy="1737360"/>
+            <a:off x="6144768" y="1828800"/>
+            <a:ext cx="2432304" cy="1645920"/>
           </a:xfrm>
           <a:prstGeom prst="rect">
             <a:avLst/>
@@ -4178,37 +4517,39 @@
               <a:buNone/>
             </a:pPr>
             <a:r>
-              <a:rPr lang="en-US" sz="1500" i="1" dirty="0">
+              <a:rPr lang="en-US" sz="1600" i="1" dirty="0">
                 <a:solidFill>
                   <a:schemeClr val="tx1"/>
                 </a:solidFill>
               </a:rPr>
-              <a:t>“…items complete, I’ll check the budget later.”</a:t>
-            </a:r>
-            <a:endParaRPr lang="en-US" sz="1500" dirty="0"/>
-          </a:p>
-        </p:txBody>
-      </p:sp>
-      <p:sp>
-        <p:nvSpPr>
-          <p:cNvPr id="12" name="Quote card 3"/>
+              <a:t>“…¥12,400, plus ¥500 shipping makes ¥12,900, within the ¥14,000 budget.”</a:t>
+            </a:r>
+            <a:endParaRPr lang="en-US" sz="1600" dirty="0"/>
+          </a:p>
+        </p:txBody>
+      </p:sp>
+      <p:sp>
+        <p:nvSpPr>
+          <p:cNvPr id="14" name="Takeaway card"/>
           <p:cNvSpPr/>
           <p:nvPr/>
         </p:nvSpPr>
         <p:spPr>
           <a:xfrm>
-            <a:off x="6035040" y="1280160"/>
-            <a:ext cx="2651760" cy="2377440"/>
-          </a:xfrm>
-          <a:prstGeom prst="rect">
-            <a:avLst/>
+            <a:off x="457200" y="3749040"/>
+            <a:ext cx="8229600" cy="548640"/>
+          </a:xfrm>
+          <a:prstGeom prst="roundRect">
+            <a:avLst>
+              <a:gd name="adj" fmla="val 13333"/>
+            </a:avLst>
           </a:prstGeom>
           <a:solidFill>
-            <a:schemeClr val="bg1"/>
+            <a:schemeClr val="tx2"/>
           </a:solidFill>
-          <a:ln w="12700">
+          <a:ln w="9525">
             <a:solidFill>
-              <a:schemeClr val="bg2"/>
+              <a:schemeClr val="tx2"/>
             </a:solidFill>
             <a:prstDash val="solid"/>
           </a:ln>
@@ -4216,39 +4557,14 @@
       </p:sp>
       <p:sp>
         <p:nvSpPr>
-          <p:cNvPr id="13" name="Quote head 3"/>
-          <p:cNvSpPr/>
-          <p:nvPr/>
-        </p:nvSpPr>
-        <p:spPr>
-          <a:xfrm>
-            <a:off x="6035040" y="1280160"/>
-            <a:ext cx="2651760" cy="411480"/>
-          </a:xfrm>
-          <a:prstGeom prst="rect">
-            <a:avLst/>
-          </a:prstGeom>
-          <a:solidFill>
-            <a:schemeClr val="accent1"/>
-          </a:solidFill>
-          <a:ln w="12700">
-            <a:solidFill>
-              <a:schemeClr val="accent1"/>
-            </a:solidFill>
-            <a:prstDash val="solid"/>
-          </a:ln>
-        </p:spPr>
-      </p:sp>
-      <p:sp>
-        <p:nvSpPr>
-          <p:cNvPr id="14" name="Quote label 3"/>
+          <p:cNvPr id="15" name="Takeaway text"/>
           <p:cNvSpPr txBox="1"/>
           <p:nvPr/>
         </p:nvSpPr>
         <p:spPr>
           <a:xfrm>
-            <a:off x="6126480" y="1280160"/>
-            <a:ext cx="2468880" cy="411480"/>
+            <a:off x="594360" y="3749040"/>
+            <a:ext cx="7955280" cy="548640"/>
           </a:xfrm>
           <a:prstGeom prst="rect">
             <a:avLst/>
@@ -4264,48 +4580,12 @@
               <a:buNone/>
             </a:pPr>
             <a:r>
-              <a:rPr lang="en-US" sz="1200" b="1" dirty="0">
+              <a:rPr lang="en-US" sz="1500" b="1" dirty="0">
                 <a:solidFill>
                   <a:schemeClr val="bg1"/>
                 </a:solidFill>
               </a:rPr>
-              <a:t>EsTA (gaze + UI)</a:t>
-            </a:r>
-            <a:endParaRPr lang="en-US" sz="1200" dirty="0"/>
-          </a:p>
-        </p:txBody>
-      </p:sp>
-      <p:sp>
-        <p:nvSpPr>
-          <p:cNvPr id="15" name="Quote body 3"/>
-          <p:cNvSpPr txBox="1"/>
-          <p:nvPr/>
-        </p:nvSpPr>
-        <p:spPr>
-          <a:xfrm>
-            <a:off x="6126480" y="1828800"/>
-            <a:ext cx="2468880" cy="1737360"/>
-          </a:xfrm>
-          <a:prstGeom prst="rect">
-            <a:avLst/>
-          </a:prstGeom>
-          <a:noFill/>
-          <a:ln/>
-        </p:spPr>
-        <p:txBody>
-          <a:bodyPr wrap="square" lIns="1016" tIns="1016" rIns="1016" bIns="1016" rtlCol="0" anchor="t"/>
-          <a:lstStyle/>
-          <a:p>
-            <a:pPr indent="0" marL="0">
-              <a:buNone/>
-            </a:pPr>
-            <a:r>
-              <a:rPr lang="en-US" sz="1500" i="1" dirty="0">
-                <a:solidFill>
-                  <a:schemeClr val="tx1"/>
-                </a:solidFill>
-              </a:rPr>
-              <a:t>“…¥12,400, plus ¥500 shipping makes ¥12,900, within the ¥14,000 budget.”</a:t>
+              <a:t>Gaze moving through the prices matched the unspoken budget check.</a:t>
             </a:r>
             <a:endParaRPr lang="en-US" sz="1500" dirty="0"/>
           </a:p>
@@ -4313,68 +4593,7 @@
       </p:sp>
       <p:sp>
         <p:nvSpPr>
-          <p:cNvPr id="16" name="Takeaway"/>
-          <p:cNvSpPr/>
-          <p:nvPr/>
-        </p:nvSpPr>
-        <p:spPr>
-          <a:xfrm>
-            <a:off x="457200" y="3840480"/>
-            <a:ext cx="8229600" cy="457200"/>
-          </a:xfrm>
-          <a:prstGeom prst="rect">
-            <a:avLst/>
-          </a:prstGeom>
-          <a:solidFill>
-            <a:schemeClr val="accent6"/>
-          </a:solidFill>
-          <a:ln w="12700">
-            <a:solidFill>
-              <a:schemeClr val="bg2"/>
-            </a:solidFill>
-            <a:prstDash val="solid"/>
-          </a:ln>
-        </p:spPr>
-      </p:sp>
-      <p:sp>
-        <p:nvSpPr>
-          <p:cNvPr id="17" name="Takeaway text"/>
-          <p:cNvSpPr txBox="1"/>
-          <p:nvPr/>
-        </p:nvSpPr>
-        <p:spPr>
-          <a:xfrm>
-            <a:off x="548640" y="3840480"/>
-            <a:ext cx="8046720" cy="457200"/>
-          </a:xfrm>
-          <a:prstGeom prst="rect">
-            <a:avLst/>
-          </a:prstGeom>
-          <a:noFill/>
-          <a:ln/>
-        </p:spPr>
-        <p:txBody>
-          <a:bodyPr wrap="square" lIns="1016" tIns="1016" rIns="1016" bIns="1016" rtlCol="0" anchor="ctr"/>
-          <a:lstStyle/>
-          <a:p>
-            <a:pPr indent="0" marL="0">
-              <a:buNone/>
-            </a:pPr>
-            <a:r>
-              <a:rPr lang="en-US" sz="1400" b="1" dirty="0">
-                <a:solidFill>
-                  <a:schemeClr val="tx2"/>
-                </a:solidFill>
-              </a:rPr>
-              <a:t>Gaze moving through the prices matched the unspoken budget check.</a:t>
-            </a:r>
-            <a:endParaRPr lang="en-US" sz="1400" dirty="0"/>
-          </a:p>
-        </p:txBody>
-      </p:sp>
-      <p:sp>
-        <p:nvSpPr>
-          <p:cNvPr id="18" name="Venue"/>
+          <p:cNvPr id="16" name="Venue"/>
           <p:cNvSpPr txBox="1"/>
           <p:nvPr/>
         </p:nvSpPr>
@@ -4420,8 +4639,8 @@
         </p:nvSpPr>
         <p:spPr>
           <a:xfrm>
-            <a:off x="8229600" y="4828032"/>
-            <a:ext cx="457200" cy="228600"/>
+            <a:off x="8321040" y="4800600"/>
+            <a:ext cx="365760" cy="228600"/>
           </a:xfrm>
           <a:prstGeom prst="rect">
             <a:avLst/>
@@ -4438,7 +4657,7 @@
             <a:lvl1pPr>
               <a:defRPr sz="900">
                 <a:solidFill>
-                  <a:schemeClr val="accent3"/>
+                  <a:schemeClr val="tx1"/>
                 </a:solidFill>
               </a:defRPr>
             </a:lvl1pPr>
@@ -4480,14 +4699,50 @@
       </p:grpSpPr>
       <p:sp>
         <p:nvSpPr>
-          <p:cNvPr id="2" name="Text 0"/>
+          <p:cNvPr id="2" name="Section label"/>
+          <p:cNvSpPr txBox="1"/>
+          <p:nvPr/>
+        </p:nvSpPr>
+        <p:spPr>
+          <a:xfrm>
+            <a:off x="457200" y="219456"/>
+            <a:ext cx="5486400" cy="237744"/>
+          </a:xfrm>
+          <a:prstGeom prst="rect">
+            <a:avLst/>
+          </a:prstGeom>
+          <a:noFill/>
+          <a:ln/>
+        </p:spPr>
+        <p:txBody>
+          <a:bodyPr wrap="square" lIns="0" tIns="0" rIns="0" bIns="0" rtlCol="0" anchor="ctr"/>
+          <a:lstStyle/>
+          <a:p>
+            <a:pPr indent="0" marL="0">
+              <a:buNone/>
+            </a:pPr>
+            <a:r>
+              <a:rPr lang="en-US" sz="1200" b="1" dirty="0">
+                <a:solidFill>
+                  <a:schemeClr val="tx2"/>
+                </a:solidFill>
+              </a:rPr>
+              <a:t>Bridge</a:t>
+            </a:r>
+            <a:endParaRPr lang="en-US" sz="1200" dirty="0"/>
+          </a:p>
+        </p:txBody>
+      </p:sp>
+      <p:sp>
+        <p:nvSpPr>
+          <p:cNvPr id="3" name="Text 1"/>
           <p:cNvSpPr/>
           <p:nvPr/>
         </p:nvSpPr>
         <p:spPr>
           <a:xfrm>
-            <a:off x="457200" y="274320"/>
-            <a:ext cx="8229600" cy="685800"/>
+            <a:off x="457200" y="457200"/>
+            <a:ext cx="8229600" cy="594360"/>
           </a:xfrm>
           <a:prstGeom prst="rect">
             <a:avLst/>
@@ -4503,40 +4758,111 @@
               <a:buNone/>
             </a:pPr>
             <a:r>
-              <a:rPr lang="en-US" sz="2200" b="1" dirty="0">
+              <a:rPr lang="en-US" sz="2600" b="1" dirty="0">
                 <a:solidFill>
                   <a:schemeClr val="tx2"/>
                 </a:solidFill>
-                <a:latin typeface="Georgia" pitchFamily="34" charset="0"/>
-                <a:ea typeface="Georgia" pitchFamily="34" charset="-122"/>
-                <a:cs typeface="Georgia" pitchFamily="34" charset="-120"/>
-              </a:rPr>
-              <a:t>Bridge: from “saying too much” to a measurable goal</a:t>
-            </a:r>
-            <a:endParaRPr lang="en-US" sz="2200" dirty="0"/>
-          </a:p>
-        </p:txBody>
-      </p:sp>
-      <p:sp>
-        <p:nvSpPr>
-          <p:cNvPr id="4" name="Challenge 1"/>
+              </a:rPr>
+              <a:t>From “saying too much” to a measurable goal</a:t>
+            </a:r>
+            <a:endParaRPr lang="en-US" sz="2600" dirty="0"/>
+          </a:p>
+        </p:txBody>
+      </p:sp>
+      <p:sp>
+        <p:nvSpPr>
+          <p:cNvPr id="5" name="Left header"/>
+          <p:cNvSpPr txBox="1"/>
+          <p:nvPr/>
+        </p:nvSpPr>
+        <p:spPr>
+          <a:xfrm>
+            <a:off x="457200" y="1188720"/>
+            <a:ext cx="3474720" cy="274320"/>
+          </a:xfrm>
+          <a:prstGeom prst="rect">
+            <a:avLst/>
+          </a:prstGeom>
+          <a:noFill/>
+          <a:ln/>
+        </p:spPr>
+        <p:txBody>
+          <a:bodyPr wrap="square" lIns="0" tIns="0" rIns="0" bIns="0" rtlCol="0" anchor="t"/>
+          <a:lstStyle/>
+          <a:p>
+            <a:pPr indent="0" marL="0">
+              <a:buNone/>
+            </a:pPr>
+            <a:r>
+              <a:rPr lang="en-US" sz="1300" b="1" dirty="0">
+                <a:solidFill>
+                  <a:schemeClr val="accent3"/>
+                </a:solidFill>
+              </a:rPr>
+              <a:t>Challenges from the thesis</a:t>
+            </a:r>
+            <a:endParaRPr lang="en-US" sz="1300" dirty="0"/>
+          </a:p>
+        </p:txBody>
+      </p:sp>
+      <p:sp>
+        <p:nvSpPr>
+          <p:cNvPr id="6" name="Right header"/>
+          <p:cNvSpPr txBox="1"/>
+          <p:nvPr/>
+        </p:nvSpPr>
+        <p:spPr>
+          <a:xfrm>
+            <a:off x="4754880" y="1188720"/>
+            <a:ext cx="3931920" cy="274320"/>
+          </a:xfrm>
+          <a:prstGeom prst="rect">
+            <a:avLst/>
+          </a:prstGeom>
+          <a:noFill/>
+          <a:ln/>
+        </p:spPr>
+        <p:txBody>
+          <a:bodyPr wrap="square" lIns="0" tIns="0" rIns="0" bIns="0" rtlCol="0" anchor="t"/>
+          <a:lstStyle/>
+          <a:p>
+            <a:pPr indent="0" marL="0">
+              <a:buNone/>
+            </a:pPr>
+            <a:r>
+              <a:rPr lang="en-US" sz="1300" b="1" dirty="0">
+                <a:solidFill>
+                  <a:schemeClr val="tx2"/>
+                </a:solidFill>
+              </a:rPr>
+              <a:t>Master's research</a:t>
+            </a:r>
+            <a:endParaRPr lang="en-US" sz="1300" dirty="0"/>
+          </a:p>
+        </p:txBody>
+      </p:sp>
+      <p:sp>
+        <p:nvSpPr>
+          <p:cNvPr id="7" name="Challenge 1"/>
           <p:cNvSpPr/>
           <p:nvPr/>
         </p:nvSpPr>
         <p:spPr>
           <a:xfrm>
-            <a:off x="457200" y="1280160"/>
-            <a:ext cx="3291840" cy="1325880"/>
-          </a:xfrm>
-          <a:prstGeom prst="rect">
-            <a:avLst/>
+            <a:off x="457200" y="1554480"/>
+            <a:ext cx="3474720" cy="1280160"/>
+          </a:xfrm>
+          <a:prstGeom prst="roundRect">
+            <a:avLst>
+              <a:gd name="adj" fmla="val 5714"/>
+            </a:avLst>
           </a:prstGeom>
           <a:solidFill>
-            <a:schemeClr val="bg1"/>
+            <a:schemeClr val="bg2"/>
           </a:solidFill>
-          <a:ln w="12700">
+          <a:ln w="9525">
             <a:solidFill>
-              <a:schemeClr val="bg2"/>
+              <a:srgbClr val="CCCCCC"/>
             </a:solidFill>
             <a:prstDash val="solid"/>
           </a:ln>
@@ -4544,14 +4870,14 @@
       </p:sp>
       <p:sp>
         <p:nvSpPr>
-          <p:cNvPr id="5" name="Challenge 1 text"/>
+          <p:cNvPr id="8" name="Challenge 1 text"/>
           <p:cNvSpPr txBox="1"/>
           <p:nvPr/>
         </p:nvSpPr>
         <p:spPr>
           <a:xfrm>
-            <a:off x="548640" y="1325880"/>
-            <a:ext cx="3108960" cy="1234440"/>
+            <a:off x="594360" y="1554480"/>
+            <a:ext cx="3200400" cy="1280160"/>
           </a:xfrm>
           <a:prstGeom prst="rect">
             <a:avLst/>
@@ -4567,20 +4893,6 @@
               <a:buNone/>
             </a:pPr>
             <a:r>
-              <a:rPr lang="en-US" sz="1200" b="1" dirty="0">
-                <a:solidFill>
-                  <a:schemeClr val="accent4"/>
-                </a:solidFill>
-              </a:rPr>
-              <a:t>Challenge 1</a:t>
-            </a:r>
-            <a:endParaRPr lang="en-US" sz="1300" dirty="0"/>
-          </a:p>
-          <a:p>
-            <a:pPr indent="0" marL="0">
-              <a:buNone/>
-            </a:pPr>
-            <a:r>
               <a:rPr lang="en-US" sz="2000" b="1" dirty="0">
                 <a:solidFill>
                   <a:schemeClr val="tx1"/>
@@ -4588,44 +4900,46 @@
               </a:rPr>
               <a:t>Overstatement</a:t>
             </a:r>
-            <a:endParaRPr lang="en-US" sz="1300" dirty="0"/>
-          </a:p>
-          <a:p>
-            <a:pPr indent="0" marL="0">
-              <a:buNone/>
-            </a:pPr>
-            <a:r>
-              <a:rPr lang="en-US" sz="1300" dirty="0">
-                <a:solidFill>
-                  <a:schemeClr val="tx1"/>
+            <a:endParaRPr lang="en-US" sz="1400" dirty="0"/>
+          </a:p>
+          <a:p>
+            <a:pPr indent="0" marL="0">
+              <a:buNone/>
+            </a:pPr>
+            <a:r>
+              <a:rPr lang="en-US" sz="1400" dirty="0">
+                <a:solidFill>
+                  <a:schemeClr val="accent3"/>
                 </a:solidFill>
               </a:rPr>
               <a:t>The model sometimes says too much.</a:t>
             </a:r>
-            <a:endParaRPr lang="en-US" sz="1300" dirty="0"/>
-          </a:p>
-        </p:txBody>
-      </p:sp>
-      <p:sp>
-        <p:nvSpPr>
-          <p:cNvPr id="6" name="Challenge 2"/>
+            <a:endParaRPr lang="en-US" sz="1400" dirty="0"/>
+          </a:p>
+        </p:txBody>
+      </p:sp>
+      <p:sp>
+        <p:nvSpPr>
+          <p:cNvPr id="9" name="Challenge 2"/>
           <p:cNvSpPr/>
           <p:nvPr/>
         </p:nvSpPr>
         <p:spPr>
           <a:xfrm>
-            <a:off x="457200" y="2834640"/>
-            <a:ext cx="3291840" cy="1325880"/>
-          </a:xfrm>
-          <a:prstGeom prst="rect">
-            <a:avLst/>
+            <a:off x="457200" y="3017520"/>
+            <a:ext cx="3474720" cy="1280160"/>
+          </a:xfrm>
+          <a:prstGeom prst="roundRect">
+            <a:avLst>
+              <a:gd name="adj" fmla="val 5714"/>
+            </a:avLst>
           </a:prstGeom>
           <a:solidFill>
-            <a:schemeClr val="bg1"/>
+            <a:schemeClr val="bg2"/>
           </a:solidFill>
-          <a:ln w="12700">
+          <a:ln w="9525">
             <a:solidFill>
-              <a:schemeClr val="bg2"/>
+              <a:srgbClr val="CCCCCC"/>
             </a:solidFill>
             <a:prstDash val="solid"/>
           </a:ln>
@@ -4633,14 +4947,14 @@
       </p:sp>
       <p:sp>
         <p:nvSpPr>
-          <p:cNvPr id="7" name="Challenge 2 text"/>
+          <p:cNvPr id="10" name="Challenge 2 text"/>
           <p:cNvSpPr txBox="1"/>
           <p:nvPr/>
         </p:nvSpPr>
         <p:spPr>
           <a:xfrm>
-            <a:off x="548640" y="2880360"/>
-            <a:ext cx="3108960" cy="1234440"/>
+            <a:off x="594360" y="3017520"/>
+            <a:ext cx="3200400" cy="1280160"/>
           </a:xfrm>
           <a:prstGeom prst="rect">
             <a:avLst/>
@@ -4656,20 +4970,6 @@
               <a:buNone/>
             </a:pPr>
             <a:r>
-              <a:rPr lang="en-US" sz="1200" b="1" dirty="0">
-                <a:solidFill>
-                  <a:schemeClr val="accent4"/>
-                </a:solidFill>
-              </a:rPr>
-              <a:t>Challenge 2</a:t>
-            </a:r>
-            <a:endParaRPr lang="en-US" sz="1300" dirty="0"/>
-          </a:p>
-          <a:p>
-            <a:pPr indent="0" marL="0">
-              <a:buNone/>
-            </a:pPr>
-            <a:r>
               <a:rPr lang="en-US" sz="2000" b="1" dirty="0">
                 <a:solidFill>
                   <a:schemeClr val="tx1"/>
@@ -4677,44 +4977,94 @@
               </a:rPr>
               <a:t>Time order</a:t>
             </a:r>
-            <a:endParaRPr lang="en-US" sz="1300" dirty="0"/>
-          </a:p>
-          <a:p>
-            <a:pPr indent="0" marL="0">
-              <a:buNone/>
-            </a:pPr>
-            <a:r>
-              <a:rPr lang="en-US" sz="1300" dirty="0">
-                <a:solidFill>
-                  <a:schemeClr val="tx1"/>
+            <a:endParaRPr lang="en-US" sz="1400" dirty="0"/>
+          </a:p>
+          <a:p>
+            <a:pPr indent="0" marL="0">
+              <a:buNone/>
+            </a:pPr>
+            <a:r>
+              <a:rPr lang="en-US" sz="1400" dirty="0">
+                <a:solidFill>
+                  <a:schemeClr val="accent3"/>
                 </a:solidFill>
               </a:rPr>
               <a:t>Weakly handled in the thesis.</a:t>
             </a:r>
-            <a:endParaRPr lang="en-US" sz="1300" dirty="0"/>
-          </a:p>
-        </p:txBody>
-      </p:sp>
-      <p:sp>
-        <p:nvSpPr>
-          <p:cNvPr id="8" name="Bridge arrow"/>
+            <a:endParaRPr lang="en-US" sz="1400" dirty="0"/>
+          </a:p>
+        </p:txBody>
+      </p:sp>
+      <p:sp>
+        <p:nvSpPr>
+          <p:cNvPr id="11" name="Arrow goal"/>
           <p:cNvSpPr/>
           <p:nvPr/>
         </p:nvSpPr>
         <p:spPr>
           <a:xfrm>
-            <a:off x="3931920" y="2606040"/>
-            <a:ext cx="548640" cy="274320"/>
-          </a:xfrm>
-          <a:prstGeom prst="rightArrow">
-            <a:avLst/>
+            <a:off x="4023360" y="2194560"/>
+            <a:ext cx="640080" cy="0"/>
+          </a:xfrm>
+          <a:prstGeom prst="line">
+            <a:avLst/>
+          </a:prstGeom>
+          <a:noFill/>
+          <a:ln w="15875">
+            <a:solidFill>
+              <a:schemeClr val="tx1"/>
+            </a:solidFill>
+            <a:prstDash val="solid"/>
+            <a:tailEnd type="triangle"/>
+          </a:ln>
+        </p:spPr>
+      </p:sp>
+      <p:sp>
+        <p:nvSpPr>
+          <p:cNvPr id="12" name="Arrow eval"/>
+          <p:cNvSpPr/>
+          <p:nvPr/>
+        </p:nvSpPr>
+        <p:spPr>
+          <a:xfrm>
+            <a:off x="4023360" y="3657600"/>
+            <a:ext cx="640080" cy="0"/>
+          </a:xfrm>
+          <a:prstGeom prst="line">
+            <a:avLst/>
+          </a:prstGeom>
+          <a:noFill/>
+          <a:ln w="15875">
+            <a:solidFill>
+              <a:schemeClr val="tx1"/>
+            </a:solidFill>
+            <a:prstDash val="solid"/>
+            <a:tailEnd type="triangle"/>
+          </a:ln>
+        </p:spPr>
+      </p:sp>
+      <p:sp>
+        <p:nvSpPr>
+          <p:cNvPr id="13" name="New goal"/>
+          <p:cNvSpPr/>
+          <p:nvPr/>
+        </p:nvSpPr>
+        <p:spPr>
+          <a:xfrm>
+            <a:off x="4754880" y="1554480"/>
+            <a:ext cx="3931920" cy="1280160"/>
+          </a:xfrm>
+          <a:prstGeom prst="roundRect">
+            <a:avLst>
+              <a:gd name="adj" fmla="val 5714"/>
+            </a:avLst>
           </a:prstGeom>
           <a:solidFill>
-            <a:schemeClr val="accent3"/>
+            <a:schemeClr val="accent6"/>
           </a:solidFill>
-          <a:ln w="12700">
+          <a:ln w="9525">
             <a:solidFill>
-              <a:schemeClr val="accent3"/>
+              <a:schemeClr val="accent5"/>
             </a:solidFill>
             <a:prstDash val="solid"/>
           </a:ln>
@@ -4722,24 +5072,90 @@
       </p:sp>
       <p:sp>
         <p:nvSpPr>
-          <p:cNvPr id="9" name="New goal"/>
+          <p:cNvPr id="14" name="New goal text"/>
+          <p:cNvSpPr txBox="1"/>
+          <p:nvPr/>
+        </p:nvSpPr>
+        <p:spPr>
+          <a:xfrm>
+            <a:off x="4892040" y="1554480"/>
+            <a:ext cx="3657600" cy="1280160"/>
+          </a:xfrm>
+          <a:prstGeom prst="rect">
+            <a:avLst/>
+          </a:prstGeom>
+          <a:noFill/>
+          <a:ln/>
+        </p:spPr>
+        <p:txBody>
+          <a:bodyPr wrap="square" lIns="1016" tIns="1016" rIns="1016" bIns="1016" rtlCol="0" anchor="ctr"/>
+          <a:lstStyle/>
+          <a:p>
+            <a:pPr indent="0" marL="0">
+              <a:buNone/>
+            </a:pPr>
+            <a:r>
+              <a:rPr lang="en-US" sz="1200" b="1" dirty="0">
+                <a:solidFill>
+                  <a:schemeClr val="tx2"/>
+                </a:solidFill>
+              </a:rPr>
+              <a:t>New goal</a:t>
+            </a:r>
+            <a:endParaRPr lang="en-US" sz="1400" dirty="0"/>
+          </a:p>
+          <a:p>
+            <a:pPr indent="0" marL="0">
+              <a:buNone/>
+            </a:pPr>
+            <a:r>
+              <a:rPr lang="en-US" sz="1800" b="1" dirty="0">
+                <a:solidFill>
+                  <a:schemeClr val="tx1"/>
+                </a:solidFill>
+              </a:rPr>
+              <a:t>Explain what users struggle with</a:t>
+            </a:r>
+            <a:endParaRPr lang="en-US" sz="1400" dirty="0"/>
+          </a:p>
+          <a:p>
+            <a:pPr indent="0" marL="0">
+              <a:buNone/>
+            </a:pPr>
+            <a:r>
+              <a:rPr lang="en-US" sz="1400" dirty="0">
+                <a:solidFill>
+                  <a:schemeClr val="accent3"/>
+                </a:solidFill>
+              </a:rPr>
+              <a:t>where, when and why</a:t>
+            </a:r>
+            <a:endParaRPr lang="en-US" sz="1400" dirty="0"/>
+          </a:p>
+        </p:txBody>
+      </p:sp>
+      <p:sp>
+        <p:nvSpPr>
+          <p:cNvPr id="15" name="New evaluation"/>
           <p:cNvSpPr/>
           <p:nvPr/>
         </p:nvSpPr>
         <p:spPr>
           <a:xfrm>
-            <a:off x="4663440" y="1280160"/>
-            <a:ext cx="4023360" cy="1325880"/>
-          </a:xfrm>
-          <a:prstGeom prst="rect">
-            <a:avLst/>
+            <a:off x="4754880" y="3017520"/>
+            <a:ext cx="3931920" cy="1280160"/>
+          </a:xfrm>
+          <a:prstGeom prst="roundRect">
+            <a:avLst>
+              <a:gd name="adj" fmla="val 5714"/>
+            </a:avLst>
           </a:prstGeom>
           <a:solidFill>
-            <a:schemeClr val="accent1"/>
+            <a:schemeClr val="accent6"/>
           </a:solidFill>
-          <a:ln w="12700">
+          <a:ln w="9525">
             <a:solidFill>
-              <a:schemeClr val="bg2"/>
+              <a:schemeClr val="accent5"/>
             </a:solidFill>
             <a:prstDash val="solid"/>
           </a:ln>
@@ -4747,14 +5163,14 @@
       </p:sp>
       <p:sp>
         <p:nvSpPr>
-          <p:cNvPr id="10" name="New goal text"/>
+          <p:cNvPr id="16" name="New evaluation text"/>
           <p:cNvSpPr txBox="1"/>
           <p:nvPr/>
         </p:nvSpPr>
         <p:spPr>
           <a:xfrm>
-            <a:off x="4754880" y="1325880"/>
-            <a:ext cx="3840480" cy="1234440"/>
+            <a:off x="4892040" y="3017520"/>
+            <a:ext cx="3657600" cy="1280160"/>
           </a:xfrm>
           <a:prstGeom prst="rect">
             <a:avLst/>
@@ -4772,12 +5188,12 @@
             <a:r>
               <a:rPr lang="en-US" sz="1200" b="1" dirty="0">
                 <a:solidFill>
-                  <a:schemeClr val="accent6"/>
-                </a:solidFill>
-              </a:rPr>
-              <a:t>New goal</a:t>
-            </a:r>
-            <a:endParaRPr lang="en-US" sz="1300" dirty="0"/>
+                  <a:schemeClr val="tx2"/>
+                </a:solidFill>
+              </a:rPr>
+              <a:t>New evaluation</a:t>
+            </a:r>
+            <a:endParaRPr lang="en-US" sz="1400" dirty="0"/>
           </a:p>
           <a:p>
             <a:pPr indent="0" marL="0">
@@ -4786,115 +5202,26 @@
             <a:r>
               <a:rPr lang="en-US" sz="1800" b="1" dirty="0">
                 <a:solidFill>
-                  <a:schemeClr val="bg1"/>
-                </a:solidFill>
-              </a:rPr>
-              <a:t>Explain what users struggle with</a:t>
-            </a:r>
-            <a:endParaRPr lang="en-US" sz="1300" dirty="0"/>
-          </a:p>
-          <a:p>
-            <a:pPr indent="0" marL="0">
-              <a:buNone/>
-            </a:pPr>
-            <a:r>
-              <a:rPr lang="en-US" sz="1300" dirty="0">
-                <a:solidFill>
-                  <a:schemeClr val="bg1"/>
-                </a:solidFill>
-              </a:rPr>
-              <a:t>where, when and why</a:t>
-            </a:r>
-            <a:endParaRPr lang="en-US" sz="1300" dirty="0"/>
-          </a:p>
-        </p:txBody>
-      </p:sp>
-      <p:sp>
-        <p:nvSpPr>
-          <p:cNvPr id="11" name="New evaluation"/>
-          <p:cNvSpPr/>
-          <p:nvPr/>
-        </p:nvSpPr>
-        <p:spPr>
-          <a:xfrm>
-            <a:off x="4663440" y="2834640"/>
-            <a:ext cx="4023360" cy="1325880"/>
-          </a:xfrm>
-          <a:prstGeom prst="rect">
-            <a:avLst/>
-          </a:prstGeom>
-          <a:solidFill>
-            <a:schemeClr val="accent2"/>
-          </a:solidFill>
-          <a:ln w="12700">
-            <a:solidFill>
-              <a:schemeClr val="bg2"/>
-            </a:solidFill>
-            <a:prstDash val="solid"/>
-          </a:ln>
-        </p:spPr>
-      </p:sp>
-      <p:sp>
-        <p:nvSpPr>
-          <p:cNvPr id="12" name="New evaluation text"/>
-          <p:cNvSpPr txBox="1"/>
-          <p:nvPr/>
-        </p:nvSpPr>
-        <p:spPr>
-          <a:xfrm>
-            <a:off x="4754880" y="2880360"/>
-            <a:ext cx="3840480" cy="1234440"/>
-          </a:xfrm>
-          <a:prstGeom prst="rect">
-            <a:avLst/>
-          </a:prstGeom>
-          <a:noFill/>
-          <a:ln/>
-        </p:spPr>
-        <p:txBody>
-          <a:bodyPr wrap="square" lIns="1016" tIns="1016" rIns="1016" bIns="1016" rtlCol="0" anchor="ctr"/>
-          <a:lstStyle/>
-          <a:p>
-            <a:pPr indent="0" marL="0">
-              <a:buNone/>
-            </a:pPr>
-            <a:r>
-              <a:rPr lang="en-US" sz="1200" b="1" dirty="0">
-                <a:solidFill>
-                  <a:schemeClr val="tx2"/>
-                </a:solidFill>
-              </a:rPr>
-              <a:t>New evaluation</a:t>
-            </a:r>
-            <a:endParaRPr lang="en-US" sz="1300" dirty="0"/>
-          </a:p>
-          <a:p>
-            <a:pPr indent="0" marL="0">
-              <a:buNone/>
-            </a:pPr>
-            <a:r>
-              <a:rPr lang="en-US" sz="1800" b="1" dirty="0">
-                <a:solidFill>
-                  <a:schemeClr val="tx2"/>
+                  <a:schemeClr val="tx1"/>
                 </a:solidFill>
               </a:rPr>
               <a:t>Check against human key points</a:t>
             </a:r>
-            <a:endParaRPr lang="en-US" sz="1300" dirty="0"/>
-          </a:p>
-          <a:p>
-            <a:pPr indent="0" marL="0">
-              <a:buNone/>
-            </a:pPr>
-            <a:r>
-              <a:rPr lang="en-US" sz="1300" dirty="0">
-                <a:solidFill>
-                  <a:schemeClr val="tx2"/>
+            <a:endParaRPr lang="en-US" sz="1400" dirty="0"/>
+          </a:p>
+          <a:p>
+            <a:pPr indent="0" marL="0">
+              <a:buNone/>
+            </a:pPr>
+            <a:r>
+              <a:rPr lang="en-US" sz="1400" b="1" dirty="0">
+                <a:solidFill>
+                  <a:schemeClr val="accent4"/>
                 </a:solidFill>
               </a:rPr>
               <a:t>“Saying too much” → over-claim rate</a:t>
             </a:r>
-            <a:endParaRPr lang="en-US" sz="1300" dirty="0"/>
+            <a:endParaRPr lang="en-US" sz="1400" dirty="0"/>
           </a:p>
         </p:txBody>
       </p:sp>
@@ -4910,8 +5237,8 @@
         </p:nvSpPr>
         <p:spPr>
           <a:xfrm>
-            <a:off x="8229600" y="4828032"/>
-            <a:ext cx="457200" cy="228600"/>
+            <a:off x="8321040" y="4800600"/>
+            <a:ext cx="365760" cy="228600"/>
           </a:xfrm>
           <a:prstGeom prst="rect">
             <a:avLst/>
@@ -4928,7 +5255,7 @@
             <a:lvl1pPr>
               <a:defRPr sz="900">
                 <a:solidFill>
-                  <a:schemeClr val="accent3"/>
+                  <a:schemeClr val="tx1"/>
                 </a:solidFill>
               </a:defRPr>
             </a:lvl1pPr>
@@ -4970,14 +5297,50 @@
       </p:grpSpPr>
       <p:sp>
         <p:nvSpPr>
-          <p:cNvPr id="2" name="Text 0"/>
+          <p:cNvPr id="2" name="Section label"/>
+          <p:cNvSpPr txBox="1"/>
+          <p:nvPr/>
+        </p:nvSpPr>
+        <p:spPr>
+          <a:xfrm>
+            <a:off x="457200" y="219456"/>
+            <a:ext cx="5486400" cy="237744"/>
+          </a:xfrm>
+          <a:prstGeom prst="rect">
+            <a:avLst/>
+          </a:prstGeom>
+          <a:noFill/>
+          <a:ln/>
+        </p:spPr>
+        <p:txBody>
+          <a:bodyPr wrap="square" lIns="0" tIns="0" rIns="0" bIns="0" rtlCol="0" anchor="ctr"/>
+          <a:lstStyle/>
+          <a:p>
+            <a:pPr indent="0" marL="0">
+              <a:buNone/>
+            </a:pPr>
+            <a:r>
+              <a:rPr lang="en-US" sz="1200" b="1" dirty="0">
+                <a:solidFill>
+                  <a:schemeClr val="tx2"/>
+                </a:solidFill>
+              </a:rPr>
+              <a:t>Master's · 1/3</a:t>
+            </a:r>
+            <a:endParaRPr lang="en-US" sz="1200" dirty="0"/>
+          </a:p>
+        </p:txBody>
+      </p:sp>
+      <p:sp>
+        <p:nvSpPr>
+          <p:cNvPr id="3" name="Text 1"/>
           <p:cNvSpPr/>
           <p:nvPr/>
         </p:nvSpPr>
         <p:spPr>
           <a:xfrm>
-            <a:off x="457200" y="274320"/>
-            <a:ext cx="8229600" cy="685800"/>
+            <a:off x="457200" y="457200"/>
+            <a:ext cx="8229600" cy="594360"/>
           </a:xfrm>
           <a:prstGeom prst="rect">
             <a:avLst/>
@@ -4993,15 +5356,277 @@
               <a:buNone/>
             </a:pPr>
             <a:r>
+              <a:rPr lang="en-US" sz="2600" b="1" dirty="0">
+                <a:solidFill>
+                  <a:schemeClr val="tx2"/>
+                </a:solidFill>
+              </a:rPr>
+              <a:t>A tool that explains, checked against humans</a:t>
+            </a:r>
+            <a:endParaRPr lang="en-US" sz="2600" dirty="0"/>
+          </a:p>
+        </p:txBody>
+      </p:sp>
+      <p:sp>
+        <p:nvSpPr>
+          <p:cNvPr id="5" name="Input gaze"/>
+          <p:cNvSpPr/>
+          <p:nvPr/>
+        </p:nvSpPr>
+        <p:spPr>
+          <a:xfrm>
+            <a:off x="457200" y="1280160"/>
+            <a:ext cx="2377440" cy="1097280"/>
+          </a:xfrm>
+          <a:prstGeom prst="roundRect">
+            <a:avLst>
+              <a:gd name="adj" fmla="val 6667"/>
+            </a:avLst>
+          </a:prstGeom>
+          <a:solidFill>
+            <a:schemeClr val="bg2"/>
+          </a:solidFill>
+          <a:ln w="9525">
+            <a:solidFill>
+              <a:srgbClr val="CCCCCC"/>
+            </a:solidFill>
+            <a:prstDash val="solid"/>
+          </a:ln>
+        </p:spPr>
+      </p:sp>
+      <p:sp>
+        <p:nvSpPr>
+          <p:cNvPr id="6" name="Input gaze text"/>
+          <p:cNvSpPr txBox="1"/>
+          <p:nvPr/>
+        </p:nvSpPr>
+        <p:spPr>
+          <a:xfrm>
+            <a:off x="530352" y="1280160"/>
+            <a:ext cx="2240280" cy="1097280"/>
+          </a:xfrm>
+          <a:prstGeom prst="rect">
+            <a:avLst/>
+          </a:prstGeom>
+          <a:noFill/>
+          <a:ln/>
+        </p:spPr>
+        <p:txBody>
+          <a:bodyPr wrap="square" lIns="1016" tIns="1016" rIns="1016" bIns="1016" rtlCol="0" anchor="ctr"/>
+          <a:lstStyle/>
+          <a:p>
+            <a:pPr indent="0" marL="0">
+              <a:buNone/>
+            </a:pPr>
+            <a:r>
+              <a:rPr lang="en-US" sz="1400" b="1" dirty="0">
+                <a:solidFill>
+                  <a:schemeClr val="tx1"/>
+                </a:solidFill>
+              </a:rPr>
+              <a:t>Gaze metrics</a:t>
+            </a:r>
+            <a:endParaRPr lang="en-US" sz="1400" dirty="0"/>
+          </a:p>
+          <a:p>
+            <a:pPr indent="0" marL="0">
+              <a:buNone/>
+            </a:pPr>
+            <a:r>
+              <a:rPr lang="en-US" sz="1200" dirty="0">
+                <a:solidFill>
+                  <a:schemeClr val="accent3"/>
+                </a:solidFill>
+              </a:rPr>
+              <a:t>dwell time · visits, per technique, Good vs. Bad</a:t>
+            </a:r>
+            <a:endParaRPr lang="en-US" sz="1400" dirty="0"/>
+          </a:p>
+        </p:txBody>
+      </p:sp>
+      <p:sp>
+        <p:nvSpPr>
+          <p:cNvPr id="7" name="Input UI"/>
+          <p:cNvSpPr/>
+          <p:nvPr/>
+        </p:nvSpPr>
+        <p:spPr>
+          <a:xfrm>
+            <a:off x="457200" y="2560320"/>
+            <a:ext cx="2377440" cy="1097280"/>
+          </a:xfrm>
+          <a:prstGeom prst="roundRect">
+            <a:avLst>
+              <a:gd name="adj" fmla="val 6667"/>
+            </a:avLst>
+          </a:prstGeom>
+          <a:solidFill>
+            <a:schemeClr val="bg2"/>
+          </a:solidFill>
+          <a:ln w="9525">
+            <a:solidFill>
+              <a:srgbClr val="CCCCCC"/>
+            </a:solidFill>
+            <a:prstDash val="solid"/>
+          </a:ln>
+        </p:spPr>
+      </p:sp>
+      <p:sp>
+        <p:nvSpPr>
+          <p:cNvPr id="8" name="Input UI text"/>
+          <p:cNvSpPr txBox="1"/>
+          <p:nvPr/>
+        </p:nvSpPr>
+        <p:spPr>
+          <a:xfrm>
+            <a:off x="530352" y="2560320"/>
+            <a:ext cx="2240280" cy="1097280"/>
+          </a:xfrm>
+          <a:prstGeom prst="rect">
+            <a:avLst/>
+          </a:prstGeom>
+          <a:noFill/>
+          <a:ln/>
+        </p:spPr>
+        <p:txBody>
+          <a:bodyPr wrap="square" lIns="1016" tIns="1016" rIns="1016" bIns="1016" rtlCol="0" anchor="ctr"/>
+          <a:lstStyle/>
+          <a:p>
+            <a:pPr indent="0" marL="0">
+              <a:buNone/>
+            </a:pPr>
+            <a:r>
+              <a:rPr lang="en-US" sz="1400" b="1" dirty="0">
+                <a:solidFill>
+                  <a:schemeClr val="tx1"/>
+                </a:solidFill>
+              </a:rPr>
+              <a:t>UI structure</a:t>
+            </a:r>
+            <a:endParaRPr lang="en-US" sz="1400" dirty="0"/>
+          </a:p>
+          <a:p>
+            <a:pPr indent="0" marL="0">
+              <a:buNone/>
+            </a:pPr>
+            <a:r>
+              <a:rPr lang="en-US" sz="1200" dirty="0">
+                <a:solidFill>
+                  <a:schemeClr val="accent3"/>
+                </a:solidFill>
+              </a:rPr>
+              <a:t>screen ↔ technique · HTML/CSS · task</a:t>
+            </a:r>
+            <a:endParaRPr lang="en-US" sz="1400" dirty="0"/>
+          </a:p>
+        </p:txBody>
+      </p:sp>
+      <p:sp>
+        <p:nvSpPr>
+          <p:cNvPr id="9" name="Gaze to LLM"/>
+          <p:cNvSpPr/>
+          <p:nvPr/>
+        </p:nvSpPr>
+        <p:spPr>
+          <a:xfrm>
+            <a:off x="2880360" y="1828800"/>
+            <a:ext cx="365760" cy="274320"/>
+          </a:xfrm>
+          <a:prstGeom prst="line">
+            <a:avLst/>
+          </a:prstGeom>
+          <a:noFill/>
+          <a:ln w="15875">
+            <a:solidFill>
+              <a:schemeClr val="tx1"/>
+            </a:solidFill>
+            <a:prstDash val="solid"/>
+            <a:tailEnd type="triangle"/>
+          </a:ln>
+        </p:spPr>
+      </p:sp>
+      <p:sp>
+        <p:nvSpPr>
+          <p:cNvPr id="10" name="UI to LLM"/>
+          <p:cNvSpPr/>
+          <p:nvPr/>
+        </p:nvSpPr>
+        <p:spPr>
+          <a:xfrm>
+            <a:off x="2880360" y="3108960"/>
+            <a:ext cx="365760" cy="-274320"/>
+          </a:xfrm>
+          <a:prstGeom prst="line">
+            <a:avLst/>
+          </a:prstGeom>
+          <a:noFill/>
+          <a:ln w="15875">
+            <a:solidFill>
+              <a:schemeClr val="tx1"/>
+            </a:solidFill>
+            <a:prstDash val="solid"/>
+            <a:tailEnd type="triangle"/>
+          </a:ln>
+        </p:spPr>
+      </p:sp>
+      <p:sp>
+        <p:nvSpPr>
+          <p:cNvPr id="11" name="LLM"/>
+          <p:cNvSpPr/>
+          <p:nvPr/>
+        </p:nvSpPr>
+        <p:spPr>
+          <a:xfrm>
+            <a:off x="3291840" y="1828800"/>
+            <a:ext cx="1097280" cy="1280160"/>
+          </a:xfrm>
+          <a:prstGeom prst="roundRect">
+            <a:avLst>
+              <a:gd name="adj" fmla="val 6667"/>
+            </a:avLst>
+          </a:prstGeom>
+          <a:solidFill>
+            <a:schemeClr val="tx2"/>
+          </a:solidFill>
+          <a:ln w="9525">
+            <a:solidFill>
+              <a:schemeClr val="tx2"/>
+            </a:solidFill>
+            <a:prstDash val="solid"/>
+          </a:ln>
+        </p:spPr>
+      </p:sp>
+      <p:sp>
+        <p:nvSpPr>
+          <p:cNvPr id="12" name="LLM text"/>
+          <p:cNvSpPr txBox="1"/>
+          <p:nvPr/>
+        </p:nvSpPr>
+        <p:spPr>
+          <a:xfrm>
+            <a:off x="3291840" y="1828800"/>
+            <a:ext cx="1097280" cy="1280160"/>
+          </a:xfrm>
+          <a:prstGeom prst="rect">
+            <a:avLst/>
+          </a:prstGeom>
+          <a:noFill/>
+          <a:ln/>
+        </p:spPr>
+        <p:txBody>
+          <a:bodyPr wrap="square" lIns="1016" tIns="1016" rIns="1016" bIns="1016" rtlCol="0" anchor="ctr"/>
+          <a:lstStyle/>
+          <a:p>
+            <a:pPr algn="ctr" indent="0" marL="0">
+              <a:buNone/>
+            </a:pPr>
+            <a:r>
               <a:rPr lang="en-US" sz="2200" b="1" dirty="0">
                 <a:solidFill>
-                  <a:schemeClr val="tx2"/>
-                </a:solidFill>
-                <a:latin typeface="Georgia" pitchFamily="34" charset="0"/>
-                <a:ea typeface="Georgia" pitchFamily="34" charset="-122"/>
-                <a:cs typeface="Georgia" pitchFamily="34" charset="-120"/>
-              </a:rPr>
-              <a:t>Master's (1/3): a tool that explains, checked against humans</a:t>
+                  <a:schemeClr val="bg1"/>
+                </a:solidFill>
+              </a:rPr>
+              <a:t>LLM</a:t>
             </a:r>
             <a:endParaRPr lang="en-US" sz="2200" dirty="0"/>
           </a:p>
@@ -5009,24 +5634,50 @@
       </p:sp>
       <p:sp>
         <p:nvSpPr>
-          <p:cNvPr id="4" name="Input gaze"/>
+          <p:cNvPr id="13" name="LLM to output"/>
           <p:cNvSpPr/>
           <p:nvPr/>
         </p:nvSpPr>
         <p:spPr>
           <a:xfrm>
-            <a:off x="457200" y="1234440"/>
-            <a:ext cx="2377440" cy="1051560"/>
-          </a:xfrm>
-          <a:prstGeom prst="rect">
-            <a:avLst/>
+            <a:off x="4434840" y="2468880"/>
+            <a:ext cx="320040" cy="0"/>
+          </a:xfrm>
+          <a:prstGeom prst="line">
+            <a:avLst/>
+          </a:prstGeom>
+          <a:noFill/>
+          <a:ln w="15875">
+            <a:solidFill>
+              <a:schemeClr val="tx1"/>
+            </a:solidFill>
+            <a:prstDash val="solid"/>
+            <a:tailEnd type="triangle"/>
+          </a:ln>
+        </p:spPr>
+      </p:sp>
+      <p:sp>
+        <p:nvSpPr>
+          <p:cNvPr id="14" name="Output"/>
+          <p:cNvSpPr/>
+          <p:nvPr/>
+        </p:nvSpPr>
+        <p:spPr>
+          <a:xfrm>
+            <a:off x="4800600" y="1280160"/>
+            <a:ext cx="2194560" cy="2377440"/>
+          </a:xfrm>
+          <a:prstGeom prst="roundRect">
+            <a:avLst>
+              <a:gd name="adj" fmla="val 3333"/>
+            </a:avLst>
           </a:prstGeom>
           <a:solidFill>
             <a:schemeClr val="accent6"/>
           </a:solidFill>
-          <a:ln w="12700">
+          <a:ln w="9525">
             <a:solidFill>
-              <a:schemeClr val="bg2"/>
+              <a:schemeClr val="accent5"/>
             </a:solidFill>
             <a:prstDash val="solid"/>
           </a:ln>
@@ -5034,14 +5685,14 @@
       </p:sp>
       <p:sp>
         <p:nvSpPr>
-          <p:cNvPr id="5" name="Input gaze text"/>
+          <p:cNvPr id="15" name="Output text"/>
           <p:cNvSpPr txBox="1"/>
           <p:nvPr/>
         </p:nvSpPr>
         <p:spPr>
           <a:xfrm>
-            <a:off x="502920" y="1261872"/>
-            <a:ext cx="2286000" cy="1005840"/>
+            <a:off x="4873752" y="1280160"/>
+            <a:ext cx="2057400" cy="2377440"/>
           </a:xfrm>
           <a:prstGeom prst="rect">
             <a:avLst/>
@@ -5057,51 +5708,106 @@
               <a:buNone/>
             </a:pPr>
             <a:r>
-              <a:rPr lang="en-US" sz="1300" b="1" dirty="0">
+              <a:rPr lang="en-US" sz="1400" b="1" dirty="0">
+                <a:solidFill>
+                  <a:schemeClr val="tx2"/>
+                </a:solidFill>
+              </a:rPr>
+              <a:t>Output</a:t>
+            </a:r>
+            <a:endParaRPr lang="en-US" sz="1400" dirty="0"/>
+          </a:p>
+          <a:p>
+            <a:pPr indent="0" marL="0">
+              <a:buNone/>
+            </a:pPr>
+            <a:r>
+              <a:rPr lang="en-US" sz="1200" dirty="0">
                 <a:solidFill>
                   <a:schemeClr val="tx1"/>
                 </a:solidFill>
               </a:rPr>
-              <a:t>Gaze metrics</a:t>
-            </a:r>
-            <a:endParaRPr lang="en-US" sz="1300" dirty="0"/>
-          </a:p>
-          <a:p>
-            <a:pPr indent="0" marL="0">
-              <a:buNone/>
-            </a:pPr>
-            <a:r>
-              <a:rPr lang="en-US" sz="1100" dirty="0">
+              <a:t>Per technique: which element, which screen, why it caused trouble</a:t>
+            </a:r>
+            <a:endParaRPr lang="en-US" sz="1400" dirty="0"/>
+          </a:p>
+          <a:p>
+            <a:pPr indent="0" marL="0">
+              <a:buNone/>
+            </a:pPr>
+            <a:r>
+              <a:rPr lang="en-US" sz="1200" dirty="0">
                 <a:solidFill>
                   <a:schemeClr val="tx1"/>
                 </a:solidFill>
               </a:rPr>
-              <a:t>dwell time · visits, per technique, Good vs. Bad</a:t>
-            </a:r>
-            <a:endParaRPr lang="en-US" sz="1300" dirty="0"/>
-          </a:p>
-        </p:txBody>
-      </p:sp>
-      <p:sp>
-        <p:nvSpPr>
-          <p:cNvPr id="6" name="Input UI"/>
+              <a:t>+ summary</a:t>
+            </a:r>
+            <a:endParaRPr lang="en-US" sz="1400" dirty="0"/>
+          </a:p>
+          <a:p>
+            <a:pPr indent="0" marL="0">
+              <a:buNone/>
+            </a:pPr>
+            <a:r>
+              <a:rPr lang="en-US" sz="1200" dirty="0">
+                <a:solidFill>
+                  <a:schemeClr val="tx1"/>
+                </a:solidFill>
+              </a:rPr>
+              <a:t>+ suggestions</a:t>
+            </a:r>
+            <a:endParaRPr lang="en-US" sz="1400" dirty="0"/>
+          </a:p>
+        </p:txBody>
+      </p:sp>
+      <p:sp>
+        <p:nvSpPr>
+          <p:cNvPr id="16" name="Compare arrow"/>
           <p:cNvSpPr/>
           <p:nvPr/>
         </p:nvSpPr>
         <p:spPr>
           <a:xfrm>
-            <a:off x="457200" y="2468880"/>
-            <a:ext cx="2377440" cy="1051560"/>
-          </a:xfrm>
-          <a:prstGeom prst="rect">
-            <a:avLst/>
+            <a:off x="7040880" y="2468880"/>
+            <a:ext cx="365760" cy="0"/>
+          </a:xfrm>
+          <a:prstGeom prst="line">
+            <a:avLst/>
+          </a:prstGeom>
+          <a:noFill/>
+          <a:ln w="15875">
+            <a:solidFill>
+              <a:schemeClr val="tx1"/>
+            </a:solidFill>
+            <a:prstDash val="dash"/>
+            <a:headEnd type="triangle"/>
+            <a:tailEnd type="triangle"/>
+          </a:ln>
+        </p:spPr>
+      </p:sp>
+      <p:sp>
+        <p:nvSpPr>
+          <p:cNvPr id="17" name="Human key points"/>
+          <p:cNvSpPr/>
+          <p:nvPr/>
+        </p:nvSpPr>
+        <p:spPr>
+          <a:xfrm>
+            <a:off x="7452360" y="1280160"/>
+            <a:ext cx="1234440" cy="2377440"/>
+          </a:xfrm>
+          <a:prstGeom prst="roundRect">
+            <a:avLst>
+              <a:gd name="adj" fmla="val 5926"/>
+            </a:avLst>
           </a:prstGeom>
           <a:solidFill>
-            <a:schemeClr val="accent6"/>
+            <a:schemeClr val="bg1"/>
           </a:solidFill>
-          <a:ln w="12700">
+          <a:ln w="9525">
             <a:solidFill>
-              <a:schemeClr val="bg2"/>
+              <a:srgbClr val="CCCCCC"/>
             </a:solidFill>
             <a:prstDash val="solid"/>
           </a:ln>
@@ -5109,14 +5815,14 @@
       </p:sp>
       <p:sp>
         <p:nvSpPr>
-          <p:cNvPr id="7" name="Input UI text"/>
+          <p:cNvPr id="18" name="Human key points text"/>
           <p:cNvSpPr txBox="1"/>
           <p:nvPr/>
         </p:nvSpPr>
         <p:spPr>
           <a:xfrm>
-            <a:off x="502920" y="2496312"/>
-            <a:ext cx="2286000" cy="1005840"/>
+            <a:off x="7470648" y="1280160"/>
+            <a:ext cx="1197864" cy="2377440"/>
           </a:xfrm>
           <a:prstGeom prst="rect">
             <a:avLst/>
@@ -5128,7 +5834,7 @@
           <a:bodyPr wrap="square" lIns="1016" tIns="1016" rIns="1016" bIns="1016" rtlCol="0" anchor="ctr"/>
           <a:lstStyle/>
           <a:p>
-            <a:pPr indent="0" marL="0">
+            <a:pPr algn="ctr" indent="0" marL="0">
               <a:buNone/>
             </a:pPr>
             <a:r>
@@ -5137,46 +5843,76 @@
                   <a:schemeClr val="tx1"/>
                 </a:solidFill>
               </a:rPr>
-              <a:t>UI structure</a:t>
-            </a:r>
-            <a:endParaRPr lang="en-US" sz="1300" dirty="0"/>
-          </a:p>
-          <a:p>
-            <a:pPr indent="0" marL="0">
-              <a:buNone/>
-            </a:pPr>
-            <a:r>
-              <a:rPr lang="en-US" sz="1100" dirty="0">
-                <a:solidFill>
-                  <a:schemeClr val="tx1"/>
-                </a:solidFill>
-              </a:rPr>
-              <a:t>screen ↔ technique · HTML/CSS · task</a:t>
-            </a:r>
-            <a:endParaRPr lang="en-US" sz="1300" dirty="0"/>
-          </a:p>
-        </p:txBody>
-      </p:sp>
-      <p:sp>
-        <p:nvSpPr>
-          <p:cNvPr id="8" name="Arrow 1"/>
+              <a:t>Human key points</a:t>
+            </a:r>
+            <a:endParaRPr lang="en-US" sz="1400" dirty="0"/>
+          </a:p>
+          <a:p>
+            <a:pPr algn="ctr" indent="0" marL="0">
+              <a:buNone/>
+            </a:pPr>
+            <a:r>
+              <a:rPr lang="en-US" sz="1200" dirty="0">
+                <a:solidFill>
+                  <a:schemeClr val="accent3"/>
+                </a:solidFill>
+              </a:rPr>
+              <a:t>Where</a:t>
+            </a:r>
+            <a:endParaRPr lang="en-US" sz="1400" dirty="0"/>
+          </a:p>
+          <a:p>
+            <a:pPr algn="ctr" indent="0" marL="0">
+              <a:buNone/>
+            </a:pPr>
+            <a:r>
+              <a:rPr lang="en-US" sz="1200" dirty="0">
+                <a:solidFill>
+                  <a:schemeClr val="accent3"/>
+                </a:solidFill>
+              </a:rPr>
+              <a:t>When</a:t>
+            </a:r>
+            <a:endParaRPr lang="en-US" sz="1400" dirty="0"/>
+          </a:p>
+          <a:p>
+            <a:pPr algn="ctr" indent="0" marL="0">
+              <a:buNone/>
+            </a:pPr>
+            <a:r>
+              <a:rPr lang="en-US" sz="1200" dirty="0">
+                <a:solidFill>
+                  <a:schemeClr val="accent3"/>
+                </a:solidFill>
+              </a:rPr>
+              <a:t>Why</a:t>
+            </a:r>
+            <a:endParaRPr lang="en-US" sz="1400" dirty="0"/>
+          </a:p>
+        </p:txBody>
+      </p:sp>
+      <p:sp>
+        <p:nvSpPr>
+          <p:cNvPr id="19" name="Metrics strip"/>
           <p:cNvSpPr/>
           <p:nvPr/>
         </p:nvSpPr>
         <p:spPr>
           <a:xfrm>
-            <a:off x="2926080" y="2286000"/>
-            <a:ext cx="320040" cy="274320"/>
-          </a:xfrm>
-          <a:prstGeom prst="rightArrow">
-            <a:avLst/>
+            <a:off x="457200" y="3840480"/>
+            <a:ext cx="8229600" cy="777240"/>
+          </a:xfrm>
+          <a:prstGeom prst="roundRect">
+            <a:avLst>
+              <a:gd name="adj" fmla="val 9412"/>
+            </a:avLst>
           </a:prstGeom>
           <a:solidFill>
-            <a:schemeClr val="accent3"/>
+            <a:schemeClr val="bg2"/>
           </a:solidFill>
-          <a:ln w="12700">
+          <a:ln w="9525">
             <a:solidFill>
-              <a:schemeClr val="accent3"/>
+              <a:srgbClr val="CCCCCC"/>
             </a:solidFill>
             <a:prstDash val="solid"/>
           </a:ln>
@@ -5184,39 +5920,14 @@
       </p:sp>
       <p:sp>
         <p:nvSpPr>
-          <p:cNvPr id="9" name="LLM"/>
-          <p:cNvSpPr/>
-          <p:nvPr/>
-        </p:nvSpPr>
-        <p:spPr>
-          <a:xfrm>
-            <a:off x="3337560" y="1737360"/>
-            <a:ext cx="1188720" cy="1188720"/>
-          </a:xfrm>
-          <a:prstGeom prst="rect">
-            <a:avLst/>
-          </a:prstGeom>
-          <a:solidFill>
-            <a:schemeClr val="tx2"/>
-          </a:solidFill>
-          <a:ln w="12700">
-            <a:solidFill>
-              <a:schemeClr val="bg2"/>
-            </a:solidFill>
-            <a:prstDash val="solid"/>
-          </a:ln>
-        </p:spPr>
-      </p:sp>
-      <p:sp>
-        <p:nvSpPr>
-          <p:cNvPr id="10" name="LLM text"/>
+          <p:cNvPr id="20" name="Metrics text"/>
           <p:cNvSpPr txBox="1"/>
           <p:nvPr/>
         </p:nvSpPr>
         <p:spPr>
           <a:xfrm>
-            <a:off x="3337560" y="1737360"/>
-            <a:ext cx="1188720" cy="1188720"/>
+            <a:off x="594360" y="3840480"/>
+            <a:ext cx="7955280" cy="777240"/>
           </a:xfrm>
           <a:prstGeom prst="rect">
             <a:avLst/>
@@ -5228,360 +5939,40 @@
           <a:bodyPr wrap="square" lIns="1016" tIns="1016" rIns="1016" bIns="1016" rtlCol="0" anchor="ctr"/>
           <a:lstStyle/>
           <a:p>
-            <a:pPr algn="ctr" indent="0" marL="0">
-              <a:buNone/>
-            </a:pPr>
-            <a:r>
-              <a:rPr lang="en-US" sz="2200" b="1" dirty="0">
-                <a:solidFill>
-                  <a:schemeClr val="bg1"/>
-                </a:solidFill>
-                <a:latin typeface="Georgia" pitchFamily="34" charset="0"/>
-                <a:ea typeface="Georgia" pitchFamily="34" charset="-122"/>
-                <a:cs typeface="Georgia" pitchFamily="34" charset="-120"/>
-              </a:rPr>
-              <a:t>LLM</a:t>
-            </a:r>
-            <a:endParaRPr lang="en-US" sz="2200" dirty="0"/>
-          </a:p>
-        </p:txBody>
-      </p:sp>
-      <p:sp>
-        <p:nvSpPr>
-          <p:cNvPr id="11" name="Arrow 2"/>
-          <p:cNvSpPr/>
-          <p:nvPr/>
-        </p:nvSpPr>
-        <p:spPr>
-          <a:xfrm>
-            <a:off x="4617720" y="2194560"/>
-            <a:ext cx="320040" cy="274320"/>
-          </a:xfrm>
-          <a:prstGeom prst="rightArrow">
-            <a:avLst/>
-          </a:prstGeom>
-          <a:solidFill>
-            <a:schemeClr val="accent3"/>
-          </a:solidFill>
-          <a:ln w="12700">
-            <a:solidFill>
-              <a:schemeClr val="accent3"/>
-            </a:solidFill>
-            <a:prstDash val="solid"/>
-          </a:ln>
-        </p:spPr>
-      </p:sp>
-      <p:sp>
-        <p:nvSpPr>
-          <p:cNvPr id="12" name="Output"/>
-          <p:cNvSpPr/>
-          <p:nvPr/>
-        </p:nvSpPr>
-        <p:spPr>
-          <a:xfrm>
-            <a:off x="5029200" y="1234440"/>
-            <a:ext cx="2011680" cy="2286000"/>
-          </a:xfrm>
-          <a:prstGeom prst="rect">
-            <a:avLst/>
-          </a:prstGeom>
-          <a:solidFill>
-            <a:schemeClr val="accent2"/>
-          </a:solidFill>
-          <a:ln w="12700">
-            <a:solidFill>
-              <a:schemeClr val="bg2"/>
-            </a:solidFill>
-            <a:prstDash val="solid"/>
-          </a:ln>
-        </p:spPr>
-      </p:sp>
-      <p:sp>
-        <p:nvSpPr>
-          <p:cNvPr id="13" name="Output text"/>
-          <p:cNvSpPr txBox="1"/>
-          <p:nvPr/>
-        </p:nvSpPr>
-        <p:spPr>
-          <a:xfrm>
-            <a:off x="5074920" y="1280160"/>
-            <a:ext cx="1920240" cy="2194560"/>
-          </a:xfrm>
-          <a:prstGeom prst="rect">
-            <a:avLst/>
-          </a:prstGeom>
-          <a:noFill/>
-          <a:ln/>
-        </p:spPr>
-        <p:txBody>
-          <a:bodyPr wrap="square" lIns="1016" tIns="1016" rIns="1016" bIns="1016" rtlCol="0" anchor="ctr"/>
-          <a:lstStyle/>
-          <a:p>
-            <a:pPr indent="0" marL="0">
-              <a:buNone/>
-            </a:pPr>
-            <a:r>
-              <a:rPr lang="en-US" sz="1300" b="1" dirty="0">
+            <a:pPr indent="0" marL="0">
+              <a:buNone/>
+            </a:pPr>
+            <a:r>
+              <a:rPr lang="en-US" sz="1500" b="1" dirty="0">
                 <a:solidFill>
                   <a:schemeClr val="tx2"/>
                 </a:solidFill>
               </a:rPr>
-              <a:t>Output</a:t>
-            </a:r>
-            <a:endParaRPr lang="en-US" sz="1300" dirty="0"/>
-          </a:p>
-          <a:p>
-            <a:pPr indent="0" marL="0">
-              <a:buNone/>
-            </a:pPr>
-            <a:r>
-              <a:rPr lang="en-US" sz="1200" dirty="0">
-                <a:solidFill>
-                  <a:schemeClr val="tx2"/>
-                </a:solidFill>
-              </a:rPr>
-              <a:t>Per technique: which element, which screen, why it caused trouble</a:t>
-            </a:r>
-            <a:endParaRPr lang="en-US" sz="1300" dirty="0"/>
-          </a:p>
-          <a:p>
-            <a:pPr indent="0" marL="0">
-              <a:buNone/>
-            </a:pPr>
-            <a:r>
-              <a:rPr lang="en-US" sz="1200" dirty="0">
-                <a:solidFill>
-                  <a:schemeClr val="tx2"/>
-                </a:solidFill>
-              </a:rPr>
-              <a:t>+ summary</a:t>
-            </a:r>
-            <a:endParaRPr lang="en-US" sz="1300" dirty="0"/>
-          </a:p>
-          <a:p>
-            <a:pPr indent="0" marL="0">
-              <a:buNone/>
-            </a:pPr>
-            <a:r>
-              <a:rPr lang="en-US" sz="1200" dirty="0">
-                <a:solidFill>
-                  <a:schemeClr val="tx2"/>
-                </a:solidFill>
-              </a:rPr>
-              <a:t>+ suggestions</a:t>
-            </a:r>
-            <a:endParaRPr lang="en-US" sz="1300" dirty="0"/>
-          </a:p>
-        </p:txBody>
-      </p:sp>
-      <p:sp>
-        <p:nvSpPr>
-          <p:cNvPr id="14" name="Arrow 3"/>
-          <p:cNvSpPr/>
-          <p:nvPr/>
-        </p:nvSpPr>
-        <p:spPr>
-          <a:xfrm>
-            <a:off x="7132320" y="2194560"/>
-            <a:ext cx="320040" cy="274320"/>
-          </a:xfrm>
-          <a:prstGeom prst="rightArrow">
-            <a:avLst/>
-          </a:prstGeom>
-          <a:solidFill>
-            <a:schemeClr val="accent3"/>
-          </a:solidFill>
-          <a:ln w="12700">
-            <a:solidFill>
-              <a:schemeClr val="accent3"/>
-            </a:solidFill>
-            <a:prstDash val="solid"/>
-          </a:ln>
-        </p:spPr>
-      </p:sp>
-      <p:sp>
-        <p:nvSpPr>
-          <p:cNvPr id="15" name="Human key points"/>
-          <p:cNvSpPr/>
-          <p:nvPr/>
-        </p:nvSpPr>
-        <p:spPr>
-          <a:xfrm>
-            <a:off x="7543800" y="1234440"/>
-            <a:ext cx="1143000" cy="2286000"/>
-          </a:xfrm>
-          <a:prstGeom prst="rect">
-            <a:avLst/>
-          </a:prstGeom>
-          <a:solidFill>
-            <a:schemeClr val="bg1"/>
-          </a:solidFill>
-          <a:ln w="12700">
-            <a:solidFill>
-              <a:schemeClr val="accent4"/>
-            </a:solidFill>
-            <a:prstDash val="solid"/>
-          </a:ln>
-        </p:spPr>
-      </p:sp>
-      <p:sp>
-        <p:nvSpPr>
-          <p:cNvPr id="16" name="Human key points text"/>
-          <p:cNvSpPr txBox="1"/>
-          <p:nvPr/>
-        </p:nvSpPr>
-        <p:spPr>
-          <a:xfrm>
-            <a:off x="7571232" y="1280160"/>
-            <a:ext cx="1097280" cy="2194560"/>
-          </a:xfrm>
-          <a:prstGeom prst="rect">
-            <a:avLst/>
-          </a:prstGeom>
-          <a:noFill/>
-          <a:ln/>
-        </p:spPr>
-        <p:txBody>
-          <a:bodyPr wrap="square" lIns="1016" tIns="1016" rIns="1016" bIns="1016" rtlCol="0" anchor="ctr"/>
-          <a:lstStyle/>
-          <a:p>
-            <a:pPr algn="ctr" indent="0" marL="0">
-              <a:buNone/>
-            </a:pPr>
-            <a:r>
-              <a:rPr lang="en-US" sz="1200" b="1" dirty="0">
+              <a:t>Metrics: </a:t>
+            </a:r>
+            <a:pPr indent="0" marL="0">
+              <a:buNone/>
+            </a:pPr>
+            <a:r>
+              <a:rPr lang="en-US" sz="1500" dirty="0">
                 <a:solidFill>
                   <a:schemeClr val="tx1"/>
                 </a:solidFill>
               </a:rPr>
-              <a:t>Human key points</a:t>
-            </a:r>
-            <a:endParaRPr lang="en-US" sz="1200" dirty="0"/>
-          </a:p>
-          <a:p>
-            <a:pPr algn="ctr" indent="0" marL="0">
-              <a:buNone/>
-            </a:pPr>
-            <a:r>
-              <a:rPr lang="en-US" sz="1100" dirty="0">
-                <a:solidFill>
-                  <a:schemeClr val="tx1"/>
-                </a:solidFill>
-              </a:rPr>
-              <a:t>Where</a:t>
-            </a:r>
-            <a:endParaRPr lang="en-US" sz="1200" dirty="0"/>
-          </a:p>
-          <a:p>
-            <a:pPr algn="ctr" indent="0" marL="0">
-              <a:buNone/>
-            </a:pPr>
-            <a:r>
-              <a:rPr lang="en-US" sz="1100" dirty="0">
-                <a:solidFill>
-                  <a:schemeClr val="tx1"/>
-                </a:solidFill>
-              </a:rPr>
-              <a:t>When</a:t>
-            </a:r>
-            <a:endParaRPr lang="en-US" sz="1200" dirty="0"/>
-          </a:p>
-          <a:p>
-            <a:pPr algn="ctr" indent="0" marL="0">
-              <a:buNone/>
-            </a:pPr>
-            <a:r>
-              <a:rPr lang="en-US" sz="1100" dirty="0">
-                <a:solidFill>
-                  <a:schemeClr val="tx1"/>
-                </a:solidFill>
-              </a:rPr>
-              <a:t>Why</a:t>
-            </a:r>
-            <a:endParaRPr lang="en-US" sz="1200" dirty="0"/>
-          </a:p>
-        </p:txBody>
-      </p:sp>
-      <p:sp>
-        <p:nvSpPr>
-          <p:cNvPr id="17" name="Metrics strip"/>
-          <p:cNvSpPr/>
-          <p:nvPr/>
-        </p:nvSpPr>
-        <p:spPr>
-          <a:xfrm>
-            <a:off x="457200" y="3749040"/>
-            <a:ext cx="8229600" cy="777240"/>
-          </a:xfrm>
-          <a:prstGeom prst="rect">
-            <a:avLst/>
-          </a:prstGeom>
-          <a:solidFill>
-            <a:schemeClr val="bg1"/>
-          </a:solidFill>
-          <a:ln w="12700">
-            <a:solidFill>
-              <a:schemeClr val="bg2"/>
-            </a:solidFill>
-            <a:prstDash val="solid"/>
-          </a:ln>
-        </p:spPr>
-      </p:sp>
-      <p:sp>
-        <p:nvSpPr>
-          <p:cNvPr id="18" name="Metrics text"/>
-          <p:cNvSpPr txBox="1"/>
-          <p:nvPr/>
-        </p:nvSpPr>
-        <p:spPr>
-          <a:xfrm>
-            <a:off x="594360" y="3767328"/>
-            <a:ext cx="7955280" cy="731520"/>
-          </a:xfrm>
-          <a:prstGeom prst="rect">
-            <a:avLst/>
-          </a:prstGeom>
-          <a:noFill/>
-          <a:ln/>
-        </p:spPr>
-        <p:txBody>
-          <a:bodyPr wrap="square" lIns="1016" tIns="1016" rIns="1016" bIns="1016" rtlCol="0" anchor="ctr"/>
-          <a:lstStyle/>
-          <a:p>
-            <a:pPr indent="0" marL="0">
-              <a:buNone/>
-            </a:pPr>
-            <a:r>
-              <a:rPr lang="en-US" sz="1400" b="1" dirty="0">
-                <a:solidFill>
-                  <a:schemeClr val="accent1"/>
-                </a:solidFill>
-              </a:rPr>
-              <a:t>Metrics: </a:t>
-            </a:r>
-            <a:pPr indent="0" marL="0">
-              <a:buNone/>
-            </a:pPr>
-            <a:r>
-              <a:rPr lang="en-US" sz="1400" dirty="0">
-                <a:solidFill>
-                  <a:schemeClr val="tx1"/>
-                </a:solidFill>
-              </a:rPr>
-              <a:t>recall, and over-claim rate.  </a:t>
-            </a:r>
-            <a:pPr indent="0" marL="0">
-              <a:buNone/>
-            </a:pPr>
-            <a:r>
-              <a:rPr lang="en-US" sz="1400" b="1" dirty="0">
+              <a:t>recall and over-claim rate.   </a:t>
+            </a:r>
+            <a:pPr indent="0" marL="0">
+              <a:buNone/>
+            </a:pPr>
+            <a:r>
+              <a:rPr lang="en-US" sz="1500" b="1" dirty="0">
                 <a:solidFill>
                   <a:schemeClr val="accent4"/>
                 </a:solidFill>
               </a:rPr>
               <a:t>Key points are never given to the LLM.</a:t>
             </a:r>
-            <a:endParaRPr lang="en-US" sz="1400" dirty="0"/>
+            <a:endParaRPr lang="en-US" sz="1500" dirty="0"/>
           </a:p>
         </p:txBody>
       </p:sp>
@@ -5597,8 +5988,8 @@
         </p:nvSpPr>
         <p:spPr>
           <a:xfrm>
-            <a:off x="8229600" y="4828032"/>
-            <a:ext cx="457200" cy="228600"/>
+            <a:off x="8321040" y="4800600"/>
+            <a:ext cx="365760" cy="228600"/>
           </a:xfrm>
           <a:prstGeom prst="rect">
             <a:avLst/>
@@ -5615,7 +6006,7 @@
             <a:lvl1pPr>
               <a:defRPr sz="900">
                 <a:solidFill>
-                  <a:schemeClr val="accent3"/>
+                  <a:schemeClr val="tx1"/>
                 </a:solidFill>
               </a:defRPr>
             </a:lvl1pPr>
@@ -5657,14 +6048,50 @@
       </p:grpSpPr>
       <p:sp>
         <p:nvSpPr>
-          <p:cNvPr id="2" name="Text 0"/>
+          <p:cNvPr id="2" name="Section label"/>
+          <p:cNvSpPr txBox="1"/>
+          <p:nvPr/>
+        </p:nvSpPr>
+        <p:spPr>
+          <a:xfrm>
+            <a:off x="457200" y="219456"/>
+            <a:ext cx="5486400" cy="237744"/>
+          </a:xfrm>
+          <a:prstGeom prst="rect">
+            <a:avLst/>
+          </a:prstGeom>
+          <a:noFill/>
+          <a:ln/>
+        </p:spPr>
+        <p:txBody>
+          <a:bodyPr wrap="square" lIns="0" tIns="0" rIns="0" bIns="0" rtlCol="0" anchor="ctr"/>
+          <a:lstStyle/>
+          <a:p>
+            <a:pPr indent="0" marL="0">
+              <a:buNone/>
+            </a:pPr>
+            <a:r>
+              <a:rPr lang="en-US" sz="1200" b="1" dirty="0">
+                <a:solidFill>
+                  <a:schemeClr val="tx2"/>
+                </a:solidFill>
+              </a:rPr>
+              <a:t>Master's · 2/3</a:t>
+            </a:r>
+            <a:endParaRPr lang="en-US" sz="1200" dirty="0"/>
+          </a:p>
+        </p:txBody>
+      </p:sp>
+      <p:sp>
+        <p:nvSpPr>
+          <p:cNvPr id="3" name="Text 1"/>
           <p:cNvSpPr/>
           <p:nvPr/>
         </p:nvSpPr>
         <p:spPr>
           <a:xfrm>
-            <a:off x="457200" y="274320"/>
-            <a:ext cx="8229600" cy="685800"/>
+            <a:off x="457200" y="457200"/>
+            <a:ext cx="8229600" cy="594360"/>
           </a:xfrm>
           <a:prstGeom prst="rect">
             <a:avLst/>
@@ -5680,40 +6107,64 @@
               <a:buNone/>
             </a:pPr>
             <a:r>
-              <a:rPr lang="en-US" sz="2200" b="1" dirty="0">
+              <a:rPr lang="en-US" sz="2600" b="1" dirty="0">
                 <a:solidFill>
                   <a:schemeClr val="tx2"/>
                 </a:solidFill>
-                <a:latin typeface="Georgia" pitchFamily="34" charset="0"/>
-                <a:ea typeface="Georgia" pitchFamily="34" charset="-122"/>
-                <a:cs typeface="Georgia" pitchFamily="34" charset="-120"/>
-              </a:rPr>
-              <a:t>Master's (2/3): five literature-grounded bad-UI techniques</a:t>
-            </a:r>
-            <a:endParaRPr lang="en-US" sz="2200" dirty="0"/>
-          </a:p>
-        </p:txBody>
-      </p:sp>
-      <p:sp>
-        <p:nvSpPr>
-          <p:cNvPr id="4" name="Technique card T1"/>
+              </a:rPr>
+              <a:t>Five literature-grounded bad-UI techniques</a:t>
+            </a:r>
+            <a:endParaRPr lang="en-US" sz="2600" dirty="0"/>
+          </a:p>
+        </p:txBody>
+      </p:sp>
+      <p:sp>
+        <p:nvSpPr>
+          <p:cNvPr id="5" name="Technique card T1"/>
           <p:cNvSpPr/>
           <p:nvPr/>
         </p:nvSpPr>
         <p:spPr>
           <a:xfrm>
             <a:off x="457200" y="1234440"/>
-            <a:ext cx="1536192" cy="2103120"/>
-          </a:xfrm>
-          <a:prstGeom prst="rect">
-            <a:avLst/>
+            <a:ext cx="1554480" cy="2103120"/>
+          </a:xfrm>
+          <a:prstGeom prst="roundRect">
+            <a:avLst>
+              <a:gd name="adj" fmla="val 4706"/>
+            </a:avLst>
           </a:prstGeom>
           <a:solidFill>
-            <a:schemeClr val="bg1"/>
+            <a:schemeClr val="bg2"/>
+          </a:solidFill>
+          <a:ln w="9525">
+            <a:solidFill>
+              <a:srgbClr val="CCCCCC"/>
+            </a:solidFill>
+            <a:prstDash val="solid"/>
+          </a:ln>
+        </p:spPr>
+      </p:sp>
+      <p:sp>
+        <p:nvSpPr>
+          <p:cNvPr id="6" name="Badge T1"/>
+          <p:cNvSpPr/>
+          <p:nvPr/>
+        </p:nvSpPr>
+        <p:spPr>
+          <a:xfrm>
+            <a:off x="566928" y="1371600"/>
+            <a:ext cx="457200" cy="457200"/>
+          </a:xfrm>
+          <a:prstGeom prst="ellipse">
+            <a:avLst/>
+          </a:prstGeom>
+          <a:solidFill>
+            <a:schemeClr val="tx2"/>
           </a:solidFill>
           <a:ln w="12700">
             <a:solidFill>
-              <a:schemeClr val="bg2"/>
+              <a:schemeClr val="tx2"/>
             </a:solidFill>
             <a:prstDash val="solid"/>
           </a:ln>
@@ -5721,8 +6172,8 @@
       </p:sp>
       <p:sp>
         <p:nvSpPr>
-          <p:cNvPr id="5" name="Badge T1"/>
-          <p:cNvSpPr/>
+          <p:cNvPr id="7" name="Badge text T1"/>
+          <p:cNvSpPr txBox="1"/>
           <p:nvPr/>
         </p:nvSpPr>
         <p:spPr>
@@ -5730,15 +6181,150 @@
             <a:off x="566928" y="1371600"/>
             <a:ext cx="457200" cy="457200"/>
           </a:xfrm>
+          <a:prstGeom prst="rect">
+            <a:avLst/>
+          </a:prstGeom>
+          <a:noFill/>
+          <a:ln/>
+        </p:spPr>
+        <p:txBody>
+          <a:bodyPr wrap="square" lIns="0" tIns="0" rIns="0" bIns="0" rtlCol="0" anchor="ctr"/>
+          <a:lstStyle/>
+          <a:p>
+            <a:pPr algn="ctr" indent="0" marL="0">
+              <a:buNone/>
+            </a:pPr>
+            <a:r>
+              <a:rPr lang="en-US" sz="1300" b="1" dirty="0">
+                <a:solidFill>
+                  <a:schemeClr val="bg1"/>
+                </a:solidFill>
+              </a:rPr>
+              <a:t>T1</a:t>
+            </a:r>
+            <a:endParaRPr lang="en-US" sz="1300" dirty="0"/>
+          </a:p>
+        </p:txBody>
+      </p:sp>
+      <p:sp>
+        <p:nvSpPr>
+          <p:cNvPr id="8" name="Technique name T1"/>
+          <p:cNvSpPr txBox="1"/>
+          <p:nvPr/>
+        </p:nvSpPr>
+        <p:spPr>
+          <a:xfrm>
+            <a:off x="502920" y="1920240"/>
+            <a:ext cx="1463040" cy="731520"/>
+          </a:xfrm>
+          <a:prstGeom prst="rect">
+            <a:avLst/>
+          </a:prstGeom>
+          <a:noFill/>
+          <a:ln/>
+        </p:spPr>
+        <p:txBody>
+          <a:bodyPr wrap="square" lIns="1016" tIns="1016" rIns="1016" bIns="1016" rtlCol="0" anchor="t"/>
+          <a:lstStyle/>
+          <a:p>
+            <a:pPr indent="0" marL="0">
+              <a:buNone/>
+            </a:pPr>
+            <a:r>
+              <a:rPr lang="en-US" sz="1400" b="1" dirty="0">
+                <a:solidFill>
+                  <a:schemeClr val="tx1"/>
+                </a:solidFill>
+              </a:rPr>
+              <a:t>Similar-name decoys</a:t>
+            </a:r>
+            <a:endParaRPr lang="en-US" sz="1400" dirty="0"/>
+          </a:p>
+        </p:txBody>
+      </p:sp>
+      <p:sp>
+        <p:nvSpPr>
+          <p:cNvPr id="9" name="Technique ref T1"/>
+          <p:cNvSpPr txBox="1"/>
+          <p:nvPr/>
+        </p:nvSpPr>
+        <p:spPr>
+          <a:xfrm>
+            <a:off x="502920" y="2697480"/>
+            <a:ext cx="1463040" cy="594360"/>
+          </a:xfrm>
+          <a:prstGeom prst="rect">
+            <a:avLst/>
+          </a:prstGeom>
+          <a:noFill/>
+          <a:ln/>
+        </p:spPr>
+        <p:txBody>
+          <a:bodyPr wrap="square" lIns="1016" tIns="1016" rIns="1016" bIns="1016" rtlCol="0" anchor="t"/>
+          <a:lstStyle/>
+          <a:p>
+            <a:pPr indent="0" marL="0">
+              <a:buNone/>
+            </a:pPr>
+            <a:r>
+              <a:rPr lang="en-US" sz="1100" dirty="0">
+                <a:solidFill>
+                  <a:schemeClr val="accent3"/>
+                </a:solidFill>
+              </a:rPr>
+              <a:t>Duncan &amp; Humphreys 1989</a:t>
+            </a:r>
+            <a:endParaRPr lang="en-US" sz="1100" dirty="0"/>
+          </a:p>
+        </p:txBody>
+      </p:sp>
+      <p:sp>
+        <p:nvSpPr>
+          <p:cNvPr id="10" name="Technique card T2"/>
+          <p:cNvSpPr/>
+          <p:nvPr/>
+        </p:nvSpPr>
+        <p:spPr>
+          <a:xfrm>
+            <a:off x="2125980" y="1234440"/>
+            <a:ext cx="1554480" cy="2103120"/>
+          </a:xfrm>
+          <a:prstGeom prst="roundRect">
+            <a:avLst>
+              <a:gd name="adj" fmla="val 4706"/>
+            </a:avLst>
+          </a:prstGeom>
+          <a:solidFill>
+            <a:schemeClr val="bg2"/>
+          </a:solidFill>
+          <a:ln w="9525">
+            <a:solidFill>
+              <a:srgbClr val="CCCCCC"/>
+            </a:solidFill>
+            <a:prstDash val="solid"/>
+          </a:ln>
+        </p:spPr>
+      </p:sp>
+      <p:sp>
+        <p:nvSpPr>
+          <p:cNvPr id="11" name="Badge T2"/>
+          <p:cNvSpPr/>
+          <p:nvPr/>
+        </p:nvSpPr>
+        <p:spPr>
+          <a:xfrm>
+            <a:off x="2235708" y="1371600"/>
+            <a:ext cx="457200" cy="457200"/>
+          </a:xfrm>
           <a:prstGeom prst="ellipse">
             <a:avLst/>
           </a:prstGeom>
           <a:solidFill>
-            <a:schemeClr val="accent1"/>
+            <a:schemeClr val="tx2"/>
           </a:solidFill>
           <a:ln w="12700">
             <a:solidFill>
-              <a:schemeClr val="accent1"/>
+              <a:schemeClr val="tx2"/>
             </a:solidFill>
             <a:prstDash val="solid"/>
           </a:ln>
@@ -5746,13 +6332,13 @@
       </p:sp>
       <p:sp>
         <p:nvSpPr>
-          <p:cNvPr id="6" name="Badge text T1"/>
+          <p:cNvPr id="12" name="Badge text T2"/>
           <p:cNvSpPr txBox="1"/>
           <p:nvPr/>
         </p:nvSpPr>
         <p:spPr>
           <a:xfrm>
-            <a:off x="566928" y="1371600"/>
+            <a:off x="2235708" y="1371600"/>
             <a:ext cx="457200" cy="457200"/>
           </a:xfrm>
           <a:prstGeom prst="rect">
@@ -5774,7 +6360,7 @@
                   <a:schemeClr val="bg1"/>
                 </a:solidFill>
               </a:rPr>
-              <a:t>T1</a:t>
+              <a:t>T2</a:t>
             </a:r>
             <a:endParaRPr lang="en-US" sz="1300" dirty="0"/>
           </a:p>
@@ -5782,14 +6368,14 @@
       </p:sp>
       <p:sp>
         <p:nvSpPr>
-          <p:cNvPr id="7" name="Technique name T1"/>
+          <p:cNvPr id="13" name="Technique name T2"/>
           <p:cNvSpPr txBox="1"/>
           <p:nvPr/>
         </p:nvSpPr>
         <p:spPr>
           <a:xfrm>
-            <a:off x="502920" y="1920240"/>
-            <a:ext cx="1444752" cy="731520"/>
+            <a:off x="2171700" y="1920240"/>
+            <a:ext cx="1463040" cy="731520"/>
           </a:xfrm>
           <a:prstGeom prst="rect">
             <a:avLst/>
@@ -5810,7 +6396,7 @@
                   <a:schemeClr val="tx1"/>
                 </a:solidFill>
               </a:rPr>
-              <a:t>Similar-name decoys</a:t>
+              <a:t>Decorative noise</a:t>
             </a:r>
             <a:endParaRPr lang="en-US" sz="1400" dirty="0"/>
           </a:p>
@@ -5818,14 +6404,14 @@
       </p:sp>
       <p:sp>
         <p:nvSpPr>
-          <p:cNvPr id="8" name="Technique ref T1"/>
+          <p:cNvPr id="14" name="Technique ref T2"/>
           <p:cNvSpPr txBox="1"/>
           <p:nvPr/>
         </p:nvSpPr>
         <p:spPr>
           <a:xfrm>
-            <a:off x="502920" y="2697480"/>
-            <a:ext cx="1444752" cy="594360"/>
+            <a:off x="2171700" y="2697480"/>
+            <a:ext cx="1463040" cy="594360"/>
           </a:xfrm>
           <a:prstGeom prst="rect">
             <a:avLst/>
@@ -5841,37 +6427,64 @@
               <a:buNone/>
             </a:pPr>
             <a:r>
-              <a:rPr lang="en-US" sz="1050" dirty="0">
+              <a:rPr lang="en-US" sz="1100" dirty="0">
                 <a:solidFill>
                   <a:schemeClr val="accent3"/>
                 </a:solidFill>
               </a:rPr>
-              <a:t>Duncan &amp; Humphreys 1989</a:t>
-            </a:r>
-            <a:endParaRPr lang="en-US" sz="1050" dirty="0"/>
-          </a:p>
-        </p:txBody>
-      </p:sp>
-      <p:sp>
-        <p:nvSpPr>
-          <p:cNvPr id="9" name="Technique card T2"/>
+              <a:t>Burke et al. 2005</a:t>
+            </a:r>
+            <a:endParaRPr lang="en-US" sz="1100" dirty="0"/>
+          </a:p>
+        </p:txBody>
+      </p:sp>
+      <p:sp>
+        <p:nvSpPr>
+          <p:cNvPr id="15" name="Technique card T3"/>
           <p:cNvSpPr/>
           <p:nvPr/>
         </p:nvSpPr>
         <p:spPr>
           <a:xfrm>
-            <a:off x="2130552" y="1234440"/>
-            <a:ext cx="1536192" cy="2103120"/>
-          </a:xfrm>
-          <a:prstGeom prst="rect">
-            <a:avLst/>
+            <a:off x="3794760" y="1234440"/>
+            <a:ext cx="1554480" cy="2103120"/>
+          </a:xfrm>
+          <a:prstGeom prst="roundRect">
+            <a:avLst>
+              <a:gd name="adj" fmla="val 4706"/>
+            </a:avLst>
           </a:prstGeom>
           <a:solidFill>
-            <a:schemeClr val="bg1"/>
+            <a:schemeClr val="bg2"/>
+          </a:solidFill>
+          <a:ln w="9525">
+            <a:solidFill>
+              <a:srgbClr val="CCCCCC"/>
+            </a:solidFill>
+            <a:prstDash val="solid"/>
+          </a:ln>
+        </p:spPr>
+      </p:sp>
+      <p:sp>
+        <p:nvSpPr>
+          <p:cNvPr id="16" name="Badge T3"/>
+          <p:cNvSpPr/>
+          <p:nvPr/>
+        </p:nvSpPr>
+        <p:spPr>
+          <a:xfrm>
+            <a:off x="3904488" y="1371600"/>
+            <a:ext cx="457200" cy="457200"/>
+          </a:xfrm>
+          <a:prstGeom prst="ellipse">
+            <a:avLst/>
+          </a:prstGeom>
+          <a:solidFill>
+            <a:schemeClr val="tx2"/>
           </a:solidFill>
           <a:ln w="12700">
             <a:solidFill>
-              <a:schemeClr val="bg2"/>
+              <a:schemeClr val="tx2"/>
             </a:solidFill>
             <a:prstDash val="solid"/>
           </a:ln>
@@ -5879,24 +6492,159 @@
       </p:sp>
       <p:sp>
         <p:nvSpPr>
-          <p:cNvPr id="10" name="Badge T2"/>
+          <p:cNvPr id="17" name="Badge text T3"/>
+          <p:cNvSpPr txBox="1"/>
+          <p:nvPr/>
+        </p:nvSpPr>
+        <p:spPr>
+          <a:xfrm>
+            <a:off x="3904488" y="1371600"/>
+            <a:ext cx="457200" cy="457200"/>
+          </a:xfrm>
+          <a:prstGeom prst="rect">
+            <a:avLst/>
+          </a:prstGeom>
+          <a:noFill/>
+          <a:ln/>
+        </p:spPr>
+        <p:txBody>
+          <a:bodyPr wrap="square" lIns="0" tIns="0" rIns="0" bIns="0" rtlCol="0" anchor="ctr"/>
+          <a:lstStyle/>
+          <a:p>
+            <a:pPr algn="ctr" indent="0" marL="0">
+              <a:buNone/>
+            </a:pPr>
+            <a:r>
+              <a:rPr lang="en-US" sz="1300" b="1" dirty="0">
+                <a:solidFill>
+                  <a:schemeClr val="bg1"/>
+                </a:solidFill>
+              </a:rPr>
+              <a:t>T3</a:t>
+            </a:r>
+            <a:endParaRPr lang="en-US" sz="1300" dirty="0"/>
+          </a:p>
+        </p:txBody>
+      </p:sp>
+      <p:sp>
+        <p:nvSpPr>
+          <p:cNvPr id="18" name="Technique name T3"/>
+          <p:cNvSpPr txBox="1"/>
+          <p:nvPr/>
+        </p:nvSpPr>
+        <p:spPr>
+          <a:xfrm>
+            <a:off x="3840480" y="1920240"/>
+            <a:ext cx="1463040" cy="731520"/>
+          </a:xfrm>
+          <a:prstGeom prst="rect">
+            <a:avLst/>
+          </a:prstGeom>
+          <a:noFill/>
+          <a:ln/>
+        </p:spPr>
+        <p:txBody>
+          <a:bodyPr wrap="square" lIns="1016" tIns="1016" rIns="1016" bIns="1016" rtlCol="0" anchor="t"/>
+          <a:lstStyle/>
+          <a:p>
+            <a:pPr indent="0" marL="0">
+              <a:buNone/>
+            </a:pPr>
+            <a:r>
+              <a:rPr lang="en-US" sz="1400" b="1" dirty="0">
+                <a:solidFill>
+                  <a:schemeClr val="tx1"/>
+                </a:solidFill>
+              </a:rPr>
+              <a:t>Shifting button positions</a:t>
+            </a:r>
+            <a:endParaRPr lang="en-US" sz="1400" dirty="0"/>
+          </a:p>
+        </p:txBody>
+      </p:sp>
+      <p:sp>
+        <p:nvSpPr>
+          <p:cNvPr id="19" name="Technique ref T3"/>
+          <p:cNvSpPr txBox="1"/>
+          <p:nvPr/>
+        </p:nvSpPr>
+        <p:spPr>
+          <a:xfrm>
+            <a:off x="3840480" y="2697480"/>
+            <a:ext cx="1463040" cy="594360"/>
+          </a:xfrm>
+          <a:prstGeom prst="rect">
+            <a:avLst/>
+          </a:prstGeom>
+          <a:noFill/>
+          <a:ln/>
+        </p:spPr>
+        <p:txBody>
+          <a:bodyPr wrap="square" lIns="1016" tIns="1016" rIns="1016" bIns="1016" rtlCol="0" anchor="t"/>
+          <a:lstStyle/>
+          <a:p>
+            <a:pPr indent="0" marL="0">
+              <a:buNone/>
+            </a:pPr>
+            <a:r>
+              <a:rPr lang="en-US" sz="1100" dirty="0">
+                <a:solidFill>
+                  <a:schemeClr val="accent3"/>
+                </a:solidFill>
+              </a:rPr>
+              <a:t>McCarthy et al. 2003</a:t>
+            </a:r>
+            <a:endParaRPr lang="en-US" sz="1100" dirty="0"/>
+          </a:p>
+        </p:txBody>
+      </p:sp>
+      <p:sp>
+        <p:nvSpPr>
+          <p:cNvPr id="20" name="Technique card T4"/>
           <p:cNvSpPr/>
           <p:nvPr/>
         </p:nvSpPr>
         <p:spPr>
           <a:xfrm>
-            <a:off x="2240280" y="1371600"/>
+            <a:off x="5463540" y="1234440"/>
+            <a:ext cx="1554480" cy="2103120"/>
+          </a:xfrm>
+          <a:prstGeom prst="roundRect">
+            <a:avLst>
+              <a:gd name="adj" fmla="val 4706"/>
+            </a:avLst>
+          </a:prstGeom>
+          <a:solidFill>
+            <a:schemeClr val="bg2"/>
+          </a:solidFill>
+          <a:ln w="9525">
+            <a:solidFill>
+              <a:srgbClr val="CCCCCC"/>
+            </a:solidFill>
+            <a:prstDash val="solid"/>
+          </a:ln>
+        </p:spPr>
+      </p:sp>
+      <p:sp>
+        <p:nvSpPr>
+          <p:cNvPr id="21" name="Badge T4"/>
+          <p:cNvSpPr/>
+          <p:nvPr/>
+        </p:nvSpPr>
+        <p:spPr>
+          <a:xfrm>
+            <a:off x="5573268" y="1371600"/>
             <a:ext cx="457200" cy="457200"/>
           </a:xfrm>
           <a:prstGeom prst="ellipse">
             <a:avLst/>
           </a:prstGeom>
           <a:solidFill>
-            <a:schemeClr val="accent1"/>
+            <a:schemeClr val="tx2"/>
           </a:solidFill>
           <a:ln w="12700">
             <a:solidFill>
-              <a:schemeClr val="accent1"/>
+              <a:schemeClr val="tx2"/>
             </a:solidFill>
             <a:prstDash val="solid"/>
           </a:ln>
@@ -5904,13 +6652,13 @@
       </p:sp>
       <p:sp>
         <p:nvSpPr>
-          <p:cNvPr id="11" name="Badge text T2"/>
+          <p:cNvPr id="22" name="Badge text T4"/>
           <p:cNvSpPr txBox="1"/>
           <p:nvPr/>
         </p:nvSpPr>
         <p:spPr>
           <a:xfrm>
-            <a:off x="2240280" y="1371600"/>
+            <a:off x="5573268" y="1371600"/>
             <a:ext cx="457200" cy="457200"/>
           </a:xfrm>
           <a:prstGeom prst="rect">
@@ -5932,7 +6680,7 @@
                   <a:schemeClr val="bg1"/>
                 </a:solidFill>
               </a:rPr>
-              <a:t>T2</a:t>
+              <a:t>T4</a:t>
             </a:r>
             <a:endParaRPr lang="en-US" sz="1300" dirty="0"/>
           </a:p>
@@ -5940,14 +6688,14 @@
       </p:sp>
       <p:sp>
         <p:nvSpPr>
-          <p:cNvPr id="12" name="Technique name T2"/>
+          <p:cNvPr id="23" name="Technique name T4"/>
           <p:cNvSpPr txBox="1"/>
           <p:nvPr/>
         </p:nvSpPr>
         <p:spPr>
           <a:xfrm>
-            <a:off x="2176272" y="1920240"/>
-            <a:ext cx="1444752" cy="731520"/>
+            <a:off x="5509260" y="1920240"/>
+            <a:ext cx="1463040" cy="731520"/>
           </a:xfrm>
           <a:prstGeom prst="rect">
             <a:avLst/>
@@ -5968,7 +6716,7 @@
                   <a:schemeClr val="tx1"/>
                 </a:solidFill>
               </a:rPr>
-              <a:t>Decorative noise</a:t>
+              <a:t>Inconsistent design</a:t>
             </a:r>
             <a:endParaRPr lang="en-US" sz="1400" dirty="0"/>
           </a:p>
@@ -5976,14 +6724,14 @@
       </p:sp>
       <p:sp>
         <p:nvSpPr>
-          <p:cNvPr id="13" name="Technique ref T2"/>
+          <p:cNvPr id="24" name="Technique ref T4"/>
           <p:cNvSpPr txBox="1"/>
           <p:nvPr/>
         </p:nvSpPr>
         <p:spPr>
           <a:xfrm>
-            <a:off x="2176272" y="2697480"/>
-            <a:ext cx="1444752" cy="594360"/>
+            <a:off x="5509260" y="2697480"/>
+            <a:ext cx="1463040" cy="594360"/>
           </a:xfrm>
           <a:prstGeom prst="rect">
             <a:avLst/>
@@ -5999,37 +6747,64 @@
               <a:buNone/>
             </a:pPr>
             <a:r>
-              <a:rPr lang="en-US" sz="1050" dirty="0">
+              <a:rPr lang="en-US" sz="1100" dirty="0">
                 <a:solidFill>
                   <a:schemeClr val="accent3"/>
                 </a:solidFill>
               </a:rPr>
-              <a:t>Burke et al. 2005</a:t>
-            </a:r>
-            <a:endParaRPr lang="en-US" sz="1050" dirty="0"/>
-          </a:p>
-        </p:txBody>
-      </p:sp>
-      <p:sp>
-        <p:nvSpPr>
-          <p:cNvPr id="14" name="Technique card T3"/>
+              <a:t>Mendel 2010/2012 etc.</a:t>
+            </a:r>
+            <a:endParaRPr lang="en-US" sz="1100" dirty="0"/>
+          </a:p>
+        </p:txBody>
+      </p:sp>
+      <p:sp>
+        <p:nvSpPr>
+          <p:cNvPr id="25" name="Technique card T5"/>
           <p:cNvSpPr/>
           <p:nvPr/>
         </p:nvSpPr>
         <p:spPr>
           <a:xfrm>
-            <a:off x="3803904" y="1234440"/>
-            <a:ext cx="1536192" cy="2103120"/>
-          </a:xfrm>
-          <a:prstGeom prst="rect">
-            <a:avLst/>
+            <a:off x="7132320" y="1234440"/>
+            <a:ext cx="1554480" cy="2103120"/>
+          </a:xfrm>
+          <a:prstGeom prst="roundRect">
+            <a:avLst>
+              <a:gd name="adj" fmla="val 4706"/>
+            </a:avLst>
           </a:prstGeom>
           <a:solidFill>
-            <a:schemeClr val="bg1"/>
+            <a:schemeClr val="bg2"/>
+          </a:solidFill>
+          <a:ln w="9525">
+            <a:solidFill>
+              <a:srgbClr val="CCCCCC"/>
+            </a:solidFill>
+            <a:prstDash val="solid"/>
+          </a:ln>
+        </p:spPr>
+      </p:sp>
+      <p:sp>
+        <p:nvSpPr>
+          <p:cNvPr id="26" name="Badge T5"/>
+          <p:cNvSpPr/>
+          <p:nvPr/>
+        </p:nvSpPr>
+        <p:spPr>
+          <a:xfrm>
+            <a:off x="7242048" y="1371600"/>
+            <a:ext cx="457200" cy="457200"/>
+          </a:xfrm>
+          <a:prstGeom prst="ellipse">
+            <a:avLst/>
+          </a:prstGeom>
+          <a:solidFill>
+            <a:schemeClr val="tx2"/>
           </a:solidFill>
           <a:ln w="12700">
             <a:solidFill>
-              <a:schemeClr val="bg2"/>
+              <a:schemeClr val="tx2"/>
             </a:solidFill>
             <a:prstDash val="solid"/>
           </a:ln>
@@ -6037,24 +6812,134 @@
       </p:sp>
       <p:sp>
         <p:nvSpPr>
-          <p:cNvPr id="15" name="Badge T3"/>
+          <p:cNvPr id="27" name="Badge text T5"/>
+          <p:cNvSpPr txBox="1"/>
+          <p:nvPr/>
+        </p:nvSpPr>
+        <p:spPr>
+          <a:xfrm>
+            <a:off x="7242048" y="1371600"/>
+            <a:ext cx="457200" cy="457200"/>
+          </a:xfrm>
+          <a:prstGeom prst="rect">
+            <a:avLst/>
+          </a:prstGeom>
+          <a:noFill/>
+          <a:ln/>
+        </p:spPr>
+        <p:txBody>
+          <a:bodyPr wrap="square" lIns="0" tIns="0" rIns="0" bIns="0" rtlCol="0" anchor="ctr"/>
+          <a:lstStyle/>
+          <a:p>
+            <a:pPr algn="ctr" indent="0" marL="0">
+              <a:buNone/>
+            </a:pPr>
+            <a:r>
+              <a:rPr lang="en-US" sz="1300" b="1" dirty="0">
+                <a:solidFill>
+                  <a:schemeClr val="bg1"/>
+                </a:solidFill>
+              </a:rPr>
+              <a:t>T5</a:t>
+            </a:r>
+            <a:endParaRPr lang="en-US" sz="1300" dirty="0"/>
+          </a:p>
+        </p:txBody>
+      </p:sp>
+      <p:sp>
+        <p:nvSpPr>
+          <p:cNvPr id="28" name="Technique name T5"/>
+          <p:cNvSpPr txBox="1"/>
+          <p:nvPr/>
+        </p:nvSpPr>
+        <p:spPr>
+          <a:xfrm>
+            <a:off x="7178040" y="1920240"/>
+            <a:ext cx="1463040" cy="731520"/>
+          </a:xfrm>
+          <a:prstGeom prst="rect">
+            <a:avLst/>
+          </a:prstGeom>
+          <a:noFill/>
+          <a:ln/>
+        </p:spPr>
+        <p:txBody>
+          <a:bodyPr wrap="square" lIns="1016" tIns="1016" rIns="1016" bIns="1016" rtlCol="0" anchor="t"/>
+          <a:lstStyle/>
+          <a:p>
+            <a:pPr indent="0" marL="0">
+              <a:buNone/>
+            </a:pPr>
+            <a:r>
+              <a:rPr lang="en-US" sz="1400" b="1" dirty="0">
+                <a:solidFill>
+                  <a:schemeClr val="tx1"/>
+                </a:solidFill>
+              </a:rPr>
+              <a:t>Low-contrast progress indicator</a:t>
+            </a:r>
+            <a:endParaRPr lang="en-US" sz="1400" dirty="0"/>
+          </a:p>
+        </p:txBody>
+      </p:sp>
+      <p:sp>
+        <p:nvSpPr>
+          <p:cNvPr id="29" name="Technique ref T5"/>
+          <p:cNvSpPr txBox="1"/>
+          <p:nvPr/>
+        </p:nvSpPr>
+        <p:spPr>
+          <a:xfrm>
+            <a:off x="7178040" y="2697480"/>
+            <a:ext cx="1463040" cy="594360"/>
+          </a:xfrm>
+          <a:prstGeom prst="rect">
+            <a:avLst/>
+          </a:prstGeom>
+          <a:noFill/>
+          <a:ln/>
+        </p:spPr>
+        <p:txBody>
+          <a:bodyPr wrap="square" lIns="1016" tIns="1016" rIns="1016" bIns="1016" rtlCol="0" anchor="t"/>
+          <a:lstStyle/>
+          <a:p>
+            <a:pPr indent="0" marL="0">
+              <a:buNone/>
+            </a:pPr>
+            <a:r>
+              <a:rPr lang="en-US" sz="1100" dirty="0">
+                <a:solidFill>
+                  <a:schemeClr val="accent3"/>
+                </a:solidFill>
+              </a:rPr>
+              <a:t>Yu et al. 2022; Legge et al. 1997</a:t>
+            </a:r>
+            <a:endParaRPr lang="en-US" sz="1100" dirty="0"/>
+          </a:p>
+        </p:txBody>
+      </p:sp>
+      <p:sp>
+        <p:nvSpPr>
+          <p:cNvPr id="30" name="Fact 1"/>
           <p:cNvSpPr/>
           <p:nvPr/>
         </p:nvSpPr>
         <p:spPr>
           <a:xfrm>
-            <a:off x="3913632" y="1371600"/>
-            <a:ext cx="457200" cy="457200"/>
-          </a:xfrm>
-          <a:prstGeom prst="ellipse">
-            <a:avLst/>
+            <a:off x="457200" y="3566160"/>
+            <a:ext cx="1947672" cy="1051560"/>
+          </a:xfrm>
+          <a:prstGeom prst="roundRect">
+            <a:avLst>
+              <a:gd name="adj" fmla="val 6957"/>
+            </a:avLst>
           </a:prstGeom>
           <a:solidFill>
-            <a:schemeClr val="accent1"/>
+            <a:schemeClr val="accent6"/>
           </a:solidFill>
-          <a:ln w="12700">
+          <a:ln w="9525">
             <a:solidFill>
-              <a:schemeClr val="accent1"/>
+              <a:schemeClr val="accent5"/>
             </a:solidFill>
             <a:prstDash val="solid"/>
           </a:ln>
@@ -6062,14 +6947,14 @@
       </p:sp>
       <p:sp>
         <p:nvSpPr>
-          <p:cNvPr id="16" name="Badge text T3"/>
+          <p:cNvPr id="31" name="Fact num 1"/>
           <p:cNvSpPr txBox="1"/>
           <p:nvPr/>
         </p:nvSpPr>
         <p:spPr>
           <a:xfrm>
-            <a:off x="3913632" y="1371600"/>
-            <a:ext cx="457200" cy="457200"/>
+            <a:off x="502920" y="3566160"/>
+            <a:ext cx="685800" cy="1051560"/>
           </a:xfrm>
           <a:prstGeom prst="rect">
             <a:avLst/>
@@ -6078,34 +6963,34 @@
           <a:ln/>
         </p:spPr>
         <p:txBody>
-          <a:bodyPr wrap="square" lIns="0" tIns="0" rIns="0" bIns="0" rtlCol="0" anchor="ctr"/>
-          <a:lstStyle/>
-          <a:p>
-            <a:pPr algn="ctr" indent="0" marL="0">
-              <a:buNone/>
-            </a:pPr>
-            <a:r>
-              <a:rPr lang="en-US" sz="1300" b="1" dirty="0">
-                <a:solidFill>
-                  <a:schemeClr val="bg1"/>
-                </a:solidFill>
-              </a:rPr>
-              <a:t>T3</a:t>
-            </a:r>
-            <a:endParaRPr lang="en-US" sz="1300" dirty="0"/>
-          </a:p>
-        </p:txBody>
-      </p:sp>
-      <p:sp>
-        <p:nvSpPr>
-          <p:cNvPr id="17" name="Technique name T3"/>
+          <a:bodyPr wrap="square" lIns="1016" tIns="1016" rIns="1016" bIns="1016" rtlCol="0" anchor="ctr"/>
+          <a:lstStyle/>
+          <a:p>
+            <a:pPr indent="0" marL="0">
+              <a:buNone/>
+            </a:pPr>
+            <a:r>
+              <a:rPr lang="en-US" sz="3000" b="1" dirty="0">
+                <a:solidFill>
+                  <a:schemeClr val="tx2"/>
+                </a:solidFill>
+              </a:rPr>
+              <a:t>7</a:t>
+            </a:r>
+            <a:endParaRPr lang="en-US" sz="3000" dirty="0"/>
+          </a:p>
+        </p:txBody>
+      </p:sp>
+      <p:sp>
+        <p:nvSpPr>
+          <p:cNvPr id="32" name="Fact label 1"/>
           <p:cNvSpPr txBox="1"/>
           <p:nvPr/>
         </p:nvSpPr>
         <p:spPr>
           <a:xfrm>
-            <a:off x="3849624" y="1920240"/>
-            <a:ext cx="1444752" cy="731520"/>
+            <a:off x="1188720" y="3566160"/>
+            <a:ext cx="1188720" cy="1051560"/>
           </a:xfrm>
           <a:prstGeom prst="rect">
             <a:avLst/>
@@ -6114,80 +6999,46 @@
           <a:ln/>
         </p:spPr>
         <p:txBody>
-          <a:bodyPr wrap="square" lIns="1016" tIns="1016" rIns="1016" bIns="1016" rtlCol="0" anchor="t"/>
-          <a:lstStyle/>
-          <a:p>
-            <a:pPr indent="0" marL="0">
-              <a:buNone/>
-            </a:pPr>
-            <a:r>
-              <a:rPr lang="en-US" sz="1400" b="1" dirty="0">
+          <a:bodyPr wrap="square" lIns="1016" tIns="1016" rIns="1016" bIns="1016" rtlCol="0" anchor="ctr"/>
+          <a:lstStyle/>
+          <a:p>
+            <a:pPr indent="0" marL="0">
+              <a:buNone/>
+            </a:pPr>
+            <a:r>
+              <a:rPr lang="en-US" sz="1200" dirty="0">
                 <a:solidFill>
                   <a:schemeClr val="tx1"/>
                 </a:solidFill>
               </a:rPr>
-              <a:t>Shifting button positions</a:t>
-            </a:r>
-            <a:endParaRPr lang="en-US" sz="1400" dirty="0"/>
-          </a:p>
-        </p:txBody>
-      </p:sp>
-      <p:sp>
-        <p:nvSpPr>
-          <p:cNvPr id="18" name="Technique ref T3"/>
-          <p:cNvSpPr txBox="1"/>
-          <p:nvPr/>
-        </p:nvSpPr>
-        <p:spPr>
-          <a:xfrm>
-            <a:off x="3849624" y="2697480"/>
-            <a:ext cx="1444752" cy="594360"/>
-          </a:xfrm>
-          <a:prstGeom prst="rect">
-            <a:avLst/>
-          </a:prstGeom>
-          <a:noFill/>
-          <a:ln/>
-        </p:spPr>
-        <p:txBody>
-          <a:bodyPr wrap="square" lIns="1016" tIns="1016" rIns="1016" bIns="1016" rtlCol="0" anchor="t"/>
-          <a:lstStyle/>
-          <a:p>
-            <a:pPr indent="0" marL="0">
-              <a:buNone/>
-            </a:pPr>
-            <a:r>
-              <a:rPr lang="en-US" sz="1050" dirty="0">
-                <a:solidFill>
-                  <a:schemeClr val="accent3"/>
-                </a:solidFill>
-              </a:rPr>
-              <a:t>McCarthy et al. 2003</a:t>
-            </a:r>
-            <a:endParaRPr lang="en-US" sz="1050" dirty="0"/>
-          </a:p>
-        </p:txBody>
-      </p:sp>
-      <p:sp>
-        <p:nvSpPr>
-          <p:cNvPr id="19" name="Technique card T4"/>
+              <a:t>versions per site: G, B-T1…T5, B-all</a:t>
+            </a:r>
+            <a:endParaRPr lang="en-US" sz="1200" dirty="0"/>
+          </a:p>
+        </p:txBody>
+      </p:sp>
+      <p:sp>
+        <p:nvSpPr>
+          <p:cNvPr id="33" name="Fact 2"/>
           <p:cNvSpPr/>
           <p:nvPr/>
         </p:nvSpPr>
         <p:spPr>
           <a:xfrm>
-            <a:off x="5477256" y="1234440"/>
-            <a:ext cx="1536192" cy="2103120"/>
-          </a:xfrm>
-          <a:prstGeom prst="rect">
-            <a:avLst/>
+            <a:off x="2542032" y="3566160"/>
+            <a:ext cx="1947672" cy="1051560"/>
+          </a:xfrm>
+          <a:prstGeom prst="roundRect">
+            <a:avLst>
+              <a:gd name="adj" fmla="val 6957"/>
+            </a:avLst>
           </a:prstGeom>
           <a:solidFill>
-            <a:schemeClr val="bg1"/>
+            <a:schemeClr val="accent6"/>
           </a:solidFill>
-          <a:ln w="12700">
+          <a:ln w="9525">
             <a:solidFill>
-              <a:schemeClr val="bg2"/>
+              <a:schemeClr val="accent5"/>
             </a:solidFill>
             <a:prstDash val="solid"/>
           </a:ln>
@@ -6195,24 +7046,98 @@
       </p:sp>
       <p:sp>
         <p:nvSpPr>
-          <p:cNvPr id="20" name="Badge T4"/>
+          <p:cNvPr id="34" name="Fact num 2"/>
+          <p:cNvSpPr txBox="1"/>
+          <p:nvPr/>
+        </p:nvSpPr>
+        <p:spPr>
+          <a:xfrm>
+            <a:off x="2587752" y="3566160"/>
+            <a:ext cx="685800" cy="1051560"/>
+          </a:xfrm>
+          <a:prstGeom prst="rect">
+            <a:avLst/>
+          </a:prstGeom>
+          <a:noFill/>
+          <a:ln/>
+        </p:spPr>
+        <p:txBody>
+          <a:bodyPr wrap="square" lIns="1016" tIns="1016" rIns="1016" bIns="1016" rtlCol="0" anchor="ctr"/>
+          <a:lstStyle/>
+          <a:p>
+            <a:pPr indent="0" marL="0">
+              <a:buNone/>
+            </a:pPr>
+            <a:r>
+              <a:rPr lang="en-US" sz="3000" b="1" dirty="0">
+                <a:solidFill>
+                  <a:schemeClr val="tx2"/>
+                </a:solidFill>
+              </a:rPr>
+              <a:t>2</a:t>
+            </a:r>
+            <a:endParaRPr lang="en-US" sz="3000" dirty="0"/>
+          </a:p>
+        </p:txBody>
+      </p:sp>
+      <p:sp>
+        <p:nvSpPr>
+          <p:cNvPr id="35" name="Fact label 2"/>
+          <p:cNvSpPr txBox="1"/>
+          <p:nvPr/>
+        </p:nvSpPr>
+        <p:spPr>
+          <a:xfrm>
+            <a:off x="3273552" y="3566160"/>
+            <a:ext cx="1188720" cy="1051560"/>
+          </a:xfrm>
+          <a:prstGeom prst="rect">
+            <a:avLst/>
+          </a:prstGeom>
+          <a:noFill/>
+          <a:ln/>
+        </p:spPr>
+        <p:txBody>
+          <a:bodyPr wrap="square" lIns="1016" tIns="1016" rIns="1016" bIns="1016" rtlCol="0" anchor="ctr"/>
+          <a:lstStyle/>
+          <a:p>
+            <a:pPr indent="0" marL="0">
+              <a:buNone/>
+            </a:pPr>
+            <a:r>
+              <a:rPr lang="en-US" sz="1200" dirty="0">
+                <a:solidFill>
+                  <a:schemeClr val="tx1"/>
+                </a:solidFill>
+              </a:rPr>
+              <a:t>genres: shopping, job search</a:t>
+            </a:r>
+            <a:endParaRPr lang="en-US" sz="1200" dirty="0"/>
+          </a:p>
+        </p:txBody>
+      </p:sp>
+      <p:sp>
+        <p:nvSpPr>
+          <p:cNvPr id="36" name="Fact 3"/>
           <p:cNvSpPr/>
           <p:nvPr/>
         </p:nvSpPr>
         <p:spPr>
           <a:xfrm>
-            <a:off x="5586984" y="1371600"/>
-            <a:ext cx="457200" cy="457200"/>
-          </a:xfrm>
-          <a:prstGeom prst="ellipse">
-            <a:avLst/>
+            <a:off x="4626864" y="3566160"/>
+            <a:ext cx="1947672" cy="1051560"/>
+          </a:xfrm>
+          <a:prstGeom prst="roundRect">
+            <a:avLst>
+              <a:gd name="adj" fmla="val 6957"/>
+            </a:avLst>
           </a:prstGeom>
           <a:solidFill>
-            <a:schemeClr val="accent1"/>
+            <a:schemeClr val="accent6"/>
           </a:solidFill>
-          <a:ln w="12700">
+          <a:ln w="9525">
             <a:solidFill>
-              <a:schemeClr val="accent1"/>
+              <a:schemeClr val="accent5"/>
             </a:solidFill>
             <a:prstDash val="solid"/>
           </a:ln>
@@ -6220,14 +7145,14 @@
       </p:sp>
       <p:sp>
         <p:nvSpPr>
-          <p:cNvPr id="21" name="Badge text T4"/>
+          <p:cNvPr id="37" name="Fact num 3"/>
           <p:cNvSpPr txBox="1"/>
           <p:nvPr/>
         </p:nvSpPr>
         <p:spPr>
           <a:xfrm>
-            <a:off x="5586984" y="1371600"/>
-            <a:ext cx="457200" cy="457200"/>
+            <a:off x="4672584" y="3566160"/>
+            <a:ext cx="685800" cy="1051560"/>
           </a:xfrm>
           <a:prstGeom prst="rect">
             <a:avLst/>
@@ -6236,34 +7161,34 @@
           <a:ln/>
         </p:spPr>
         <p:txBody>
-          <a:bodyPr wrap="square" lIns="0" tIns="0" rIns="0" bIns="0" rtlCol="0" anchor="ctr"/>
-          <a:lstStyle/>
-          <a:p>
-            <a:pPr algn="ctr" indent="0" marL="0">
-              <a:buNone/>
-            </a:pPr>
-            <a:r>
-              <a:rPr lang="en-US" sz="1300" b="1" dirty="0">
-                <a:solidFill>
-                  <a:schemeClr val="bg1"/>
-                </a:solidFill>
-              </a:rPr>
-              <a:t>T4</a:t>
-            </a:r>
-            <a:endParaRPr lang="en-US" sz="1300" dirty="0"/>
-          </a:p>
-        </p:txBody>
-      </p:sp>
-      <p:sp>
-        <p:nvSpPr>
-          <p:cNvPr id="22" name="Technique name T4"/>
+          <a:bodyPr wrap="square" lIns="1016" tIns="1016" rIns="1016" bIns="1016" rtlCol="0" anchor="ctr"/>
+          <a:lstStyle/>
+          <a:p>
+            <a:pPr indent="0" marL="0">
+              <a:buNone/>
+            </a:pPr>
+            <a:r>
+              <a:rPr lang="en-US" sz="3000" b="1" dirty="0">
+                <a:solidFill>
+                  <a:schemeClr val="tx2"/>
+                </a:solidFill>
+              </a:rPr>
+              <a:t>0</a:t>
+            </a:r>
+            <a:endParaRPr lang="en-US" sz="3000" dirty="0"/>
+          </a:p>
+        </p:txBody>
+      </p:sp>
+      <p:sp>
+        <p:nvSpPr>
+          <p:cNvPr id="38" name="Fact label 3"/>
           <p:cNvSpPr txBox="1"/>
           <p:nvPr/>
         </p:nvSpPr>
         <p:spPr>
           <a:xfrm>
-            <a:off x="5522976" y="1920240"/>
-            <a:ext cx="1444752" cy="731520"/>
+            <a:off x="5358384" y="3566160"/>
+            <a:ext cx="1188720" cy="1051560"/>
           </a:xfrm>
           <a:prstGeom prst="rect">
             <a:avLst/>
@@ -6272,80 +7197,46 @@
           <a:ln/>
         </p:spPr>
         <p:txBody>
-          <a:bodyPr wrap="square" lIns="1016" tIns="1016" rIns="1016" bIns="1016" rtlCol="0" anchor="t"/>
-          <a:lstStyle/>
-          <a:p>
-            <a:pPr indent="0" marL="0">
-              <a:buNone/>
-            </a:pPr>
-            <a:r>
-              <a:rPr lang="en-US" sz="1400" b="1" dirty="0">
+          <a:bodyPr wrap="square" lIns="1016" tIns="1016" rIns="1016" bIns="1016" rtlCol="0" anchor="ctr"/>
+          <a:lstStyle/>
+          <a:p>
+            <a:pPr indent="0" marL="0">
+              <a:buNone/>
+            </a:pPr>
+            <a:r>
+              <a:rPr lang="en-US" sz="1200" dirty="0">
                 <a:solidFill>
                   <a:schemeClr val="tx1"/>
                 </a:solidFill>
               </a:rPr>
-              <a:t>Inconsistent design</a:t>
-            </a:r>
-            <a:endParaRPr lang="en-US" sz="1400" dirty="0"/>
-          </a:p>
-        </p:txBody>
-      </p:sp>
-      <p:sp>
-        <p:nvSpPr>
-          <p:cNvPr id="23" name="Technique ref T4"/>
-          <p:cNvSpPr txBox="1"/>
-          <p:nvPr/>
-        </p:nvSpPr>
-        <p:spPr>
-          <a:xfrm>
-            <a:off x="5522976" y="2697480"/>
-            <a:ext cx="1444752" cy="594360"/>
-          </a:xfrm>
-          <a:prstGeom prst="rect">
-            <a:avLst/>
-          </a:prstGeom>
-          <a:noFill/>
-          <a:ln/>
-        </p:spPr>
-        <p:txBody>
-          <a:bodyPr wrap="square" lIns="1016" tIns="1016" rIns="1016" bIns="1016" rtlCol="0" anchor="t"/>
-          <a:lstStyle/>
-          <a:p>
-            <a:pPr indent="0" marL="0">
-              <a:buNone/>
-            </a:pPr>
-            <a:r>
-              <a:rPr lang="en-US" sz="1050" dirty="0">
-                <a:solidFill>
-                  <a:schemeClr val="accent3"/>
-                </a:solidFill>
-              </a:rPr>
-              <a:t>Mendel 2010/2012 etc.</a:t>
-            </a:r>
-            <a:endParaRPr lang="en-US" sz="1050" dirty="0"/>
-          </a:p>
-        </p:txBody>
-      </p:sp>
-      <p:sp>
-        <p:nvSpPr>
-          <p:cNvPr id="24" name="Technique card T5"/>
+              <a:t>scrolling, so gaze stays reliable</a:t>
+            </a:r>
+            <a:endParaRPr lang="en-US" sz="1200" dirty="0"/>
+          </a:p>
+        </p:txBody>
+      </p:sp>
+      <p:sp>
+        <p:nvSpPr>
+          <p:cNvPr id="39" name="Fact 4"/>
           <p:cNvSpPr/>
           <p:nvPr/>
         </p:nvSpPr>
         <p:spPr>
           <a:xfrm>
-            <a:off x="7150608" y="1234440"/>
-            <a:ext cx="1536192" cy="2103120"/>
-          </a:xfrm>
-          <a:prstGeom prst="rect">
-            <a:avLst/>
+            <a:off x="6711696" y="3566160"/>
+            <a:ext cx="1947672" cy="1051560"/>
+          </a:xfrm>
+          <a:prstGeom prst="roundRect">
+            <a:avLst>
+              <a:gd name="adj" fmla="val 6957"/>
+            </a:avLst>
           </a:prstGeom>
           <a:solidFill>
-            <a:schemeClr val="bg1"/>
+            <a:schemeClr val="accent6"/>
           </a:solidFill>
-          <a:ln w="12700">
+          <a:ln w="9525">
             <a:solidFill>
-              <a:schemeClr val="bg2"/>
+              <a:schemeClr val="accent5"/>
             </a:solidFill>
             <a:prstDash val="solid"/>
           </a:ln>
@@ -6353,39 +7244,14 @@
       </p:sp>
       <p:sp>
         <p:nvSpPr>
-          <p:cNvPr id="25" name="Badge T5"/>
-          <p:cNvSpPr/>
-          <p:nvPr/>
-        </p:nvSpPr>
-        <p:spPr>
-          <a:xfrm>
-            <a:off x="7260336" y="1371600"/>
-            <a:ext cx="457200" cy="457200"/>
-          </a:xfrm>
-          <a:prstGeom prst="ellipse">
-            <a:avLst/>
-          </a:prstGeom>
-          <a:solidFill>
-            <a:schemeClr val="accent1"/>
-          </a:solidFill>
-          <a:ln w="12700">
-            <a:solidFill>
-              <a:schemeClr val="accent1"/>
-            </a:solidFill>
-            <a:prstDash val="solid"/>
-          </a:ln>
-        </p:spPr>
-      </p:sp>
-      <p:sp>
-        <p:nvSpPr>
-          <p:cNvPr id="26" name="Badge text T5"/>
+          <p:cNvPr id="40" name="Fact num 4"/>
           <p:cNvSpPr txBox="1"/>
           <p:nvPr/>
         </p:nvSpPr>
         <p:spPr>
           <a:xfrm>
-            <a:off x="7260336" y="1371600"/>
-            <a:ext cx="457200" cy="457200"/>
+            <a:off x="6757416" y="3566160"/>
+            <a:ext cx="685800" cy="1051560"/>
           </a:xfrm>
           <a:prstGeom prst="rect">
             <a:avLst/>
@@ -6394,34 +7260,34 @@
           <a:ln/>
         </p:spPr>
         <p:txBody>
-          <a:bodyPr wrap="square" lIns="0" tIns="0" rIns="0" bIns="0" rtlCol="0" anchor="ctr"/>
-          <a:lstStyle/>
-          <a:p>
-            <a:pPr algn="ctr" indent="0" marL="0">
-              <a:buNone/>
-            </a:pPr>
-            <a:r>
-              <a:rPr lang="en-US" sz="1300" b="1" dirty="0">
-                <a:solidFill>
-                  <a:schemeClr val="bg1"/>
-                </a:solidFill>
-              </a:rPr>
-              <a:t>T5</a:t>
-            </a:r>
-            <a:endParaRPr lang="en-US" sz="1300" dirty="0"/>
-          </a:p>
-        </p:txBody>
-      </p:sp>
-      <p:sp>
-        <p:nvSpPr>
-          <p:cNvPr id="27" name="Technique name T5"/>
+          <a:bodyPr wrap="square" lIns="1016" tIns="1016" rIns="1016" bIns="1016" rtlCol="0" anchor="ctr"/>
+          <a:lstStyle/>
+          <a:p>
+            <a:pPr indent="0" marL="0">
+              <a:buNone/>
+            </a:pPr>
+            <a:r>
+              <a:rPr lang="en-US" sz="3000" b="1" dirty="0">
+                <a:solidFill>
+                  <a:schemeClr val="tx2"/>
+                </a:solidFill>
+              </a:rPr>
+              <a:t>20</a:t>
+            </a:r>
+            <a:endParaRPr lang="en-US" sz="3000" dirty="0"/>
+          </a:p>
+        </p:txBody>
+      </p:sp>
+      <p:sp>
+        <p:nvSpPr>
+          <p:cNvPr id="41" name="Fact label 4"/>
           <p:cNvSpPr txBox="1"/>
           <p:nvPr/>
         </p:nvSpPr>
         <p:spPr>
           <a:xfrm>
-            <a:off x="7196328" y="1920240"/>
-            <a:ext cx="1444752" cy="731520"/>
+            <a:off x="7443216" y="3566160"/>
+            <a:ext cx="1188720" cy="1051560"/>
           </a:xfrm>
           <a:prstGeom prst="rect">
             <a:avLst/>
@@ -6430,457 +7296,21 @@
           <a:ln/>
         </p:spPr>
         <p:txBody>
-          <a:bodyPr wrap="square" lIns="1016" tIns="1016" rIns="1016" bIns="1016" rtlCol="0" anchor="t"/>
-          <a:lstStyle/>
-          <a:p>
-            <a:pPr indent="0" marL="0">
-              <a:buNone/>
-            </a:pPr>
-            <a:r>
-              <a:rPr lang="en-US" sz="1400" b="1" dirty="0">
+          <a:bodyPr wrap="square" lIns="1016" tIns="1016" rIns="1016" bIns="1016" rtlCol="0" anchor="ctr"/>
+          <a:lstStyle/>
+          <a:p>
+            <a:pPr indent="0" marL="0">
+              <a:buNone/>
+            </a:pPr>
+            <a:r>
+              <a:rPr lang="en-US" sz="1200" dirty="0">
                 <a:solidFill>
                   <a:schemeClr val="tx1"/>
                 </a:solidFill>
               </a:rPr>
-              <a:t>Low-contrast progress indicator</a:t>
-            </a:r>
-            <a:endParaRPr lang="en-US" sz="1400" dirty="0"/>
-          </a:p>
-        </p:txBody>
-      </p:sp>
-      <p:sp>
-        <p:nvSpPr>
-          <p:cNvPr id="28" name="Technique ref T5"/>
-          <p:cNvSpPr txBox="1"/>
-          <p:nvPr/>
-        </p:nvSpPr>
-        <p:spPr>
-          <a:xfrm>
-            <a:off x="7196328" y="2697480"/>
-            <a:ext cx="1444752" cy="594360"/>
-          </a:xfrm>
-          <a:prstGeom prst="rect">
-            <a:avLst/>
-          </a:prstGeom>
-          <a:noFill/>
-          <a:ln/>
-        </p:spPr>
-        <p:txBody>
-          <a:bodyPr wrap="square" lIns="1016" tIns="1016" rIns="1016" bIns="1016" rtlCol="0" anchor="t"/>
-          <a:lstStyle/>
-          <a:p>
-            <a:pPr indent="0" marL="0">
-              <a:buNone/>
-            </a:pPr>
-            <a:r>
-              <a:rPr lang="en-US" sz="1050" dirty="0">
-                <a:solidFill>
-                  <a:schemeClr val="accent3"/>
-                </a:solidFill>
-              </a:rPr>
-              <a:t>Yu et al. 2022; Legge et al. 1997</a:t>
-            </a:r>
-            <a:endParaRPr lang="en-US" sz="1050" dirty="0"/>
-          </a:p>
-        </p:txBody>
-      </p:sp>
-      <p:sp>
-        <p:nvSpPr>
-          <p:cNvPr id="29" name="Fact 1"/>
-          <p:cNvSpPr/>
-          <p:nvPr/>
-        </p:nvSpPr>
-        <p:spPr>
-          <a:xfrm>
-            <a:off x="457200" y="3566160"/>
-            <a:ext cx="1947672" cy="1005840"/>
-          </a:xfrm>
-          <a:prstGeom prst="rect">
-            <a:avLst/>
-          </a:prstGeom>
-          <a:solidFill>
-            <a:schemeClr val="accent6"/>
-          </a:solidFill>
-          <a:ln w="12700">
-            <a:solidFill>
-              <a:schemeClr val="bg2"/>
-            </a:solidFill>
-            <a:prstDash val="solid"/>
-          </a:ln>
-        </p:spPr>
-      </p:sp>
-      <p:sp>
-        <p:nvSpPr>
-          <p:cNvPr id="30" name="Fact num 1"/>
-          <p:cNvSpPr txBox="1"/>
-          <p:nvPr/>
-        </p:nvSpPr>
-        <p:spPr>
-          <a:xfrm>
-            <a:off x="502920" y="3611880"/>
-            <a:ext cx="640080" cy="914400"/>
-          </a:xfrm>
-          <a:prstGeom prst="rect">
-            <a:avLst/>
-          </a:prstGeom>
-          <a:noFill/>
-          <a:ln/>
-        </p:spPr>
-        <p:txBody>
-          <a:bodyPr wrap="square" lIns="1016" tIns="1016" rIns="1016" bIns="1016" rtlCol="0" anchor="ctr"/>
-          <a:lstStyle/>
-          <a:p>
-            <a:pPr indent="0" marL="0">
-              <a:buNone/>
-            </a:pPr>
-            <a:r>
-              <a:rPr lang="en-US" sz="2800" b="1" dirty="0">
-                <a:solidFill>
-                  <a:schemeClr val="accent1"/>
-                </a:solidFill>
-                <a:latin typeface="Georgia" pitchFamily="34" charset="0"/>
-                <a:ea typeface="Georgia" pitchFamily="34" charset="-122"/>
-                <a:cs typeface="Georgia" pitchFamily="34" charset="-120"/>
-              </a:rPr>
-              <a:t>7</a:t>
-            </a:r>
-            <a:endParaRPr lang="en-US" sz="2800" dirty="0"/>
-          </a:p>
-        </p:txBody>
-      </p:sp>
-      <p:sp>
-        <p:nvSpPr>
-          <p:cNvPr id="31" name="Fact label 1"/>
-          <p:cNvSpPr txBox="1"/>
-          <p:nvPr/>
-        </p:nvSpPr>
-        <p:spPr>
-          <a:xfrm>
-            <a:off x="1143000" y="3611880"/>
-            <a:ext cx="1234440" cy="914400"/>
-          </a:xfrm>
-          <a:prstGeom prst="rect">
-            <a:avLst/>
-          </a:prstGeom>
-          <a:noFill/>
-          <a:ln/>
-        </p:spPr>
-        <p:txBody>
-          <a:bodyPr wrap="square" lIns="1016" tIns="1016" rIns="1016" bIns="1016" rtlCol="0" anchor="ctr"/>
-          <a:lstStyle/>
-          <a:p>
-            <a:pPr indent="0" marL="0">
-              <a:buNone/>
-            </a:pPr>
-            <a:r>
-              <a:rPr lang="en-US" sz="1100" dirty="0">
-                <a:solidFill>
-                  <a:schemeClr val="tx1"/>
-                </a:solidFill>
-              </a:rPr>
-              <a:t>versions per site: G, B-T1…T5, B-all</a:t>
-            </a:r>
-            <a:endParaRPr lang="en-US" sz="1100" dirty="0"/>
-          </a:p>
-        </p:txBody>
-      </p:sp>
-      <p:sp>
-        <p:nvSpPr>
-          <p:cNvPr id="32" name="Fact 2"/>
-          <p:cNvSpPr/>
-          <p:nvPr/>
-        </p:nvSpPr>
-        <p:spPr>
-          <a:xfrm>
-            <a:off x="2542032" y="3566160"/>
-            <a:ext cx="1947672" cy="1005840"/>
-          </a:xfrm>
-          <a:prstGeom prst="rect">
-            <a:avLst/>
-          </a:prstGeom>
-          <a:solidFill>
-            <a:schemeClr val="accent6"/>
-          </a:solidFill>
-          <a:ln w="12700">
-            <a:solidFill>
-              <a:schemeClr val="bg2"/>
-            </a:solidFill>
-            <a:prstDash val="solid"/>
-          </a:ln>
-        </p:spPr>
-      </p:sp>
-      <p:sp>
-        <p:nvSpPr>
-          <p:cNvPr id="33" name="Fact num 2"/>
-          <p:cNvSpPr txBox="1"/>
-          <p:nvPr/>
-        </p:nvSpPr>
-        <p:spPr>
-          <a:xfrm>
-            <a:off x="2587752" y="3611880"/>
-            <a:ext cx="640080" cy="914400"/>
-          </a:xfrm>
-          <a:prstGeom prst="rect">
-            <a:avLst/>
-          </a:prstGeom>
-          <a:noFill/>
-          <a:ln/>
-        </p:spPr>
-        <p:txBody>
-          <a:bodyPr wrap="square" lIns="1016" tIns="1016" rIns="1016" bIns="1016" rtlCol="0" anchor="ctr"/>
-          <a:lstStyle/>
-          <a:p>
-            <a:pPr indent="0" marL="0">
-              <a:buNone/>
-            </a:pPr>
-            <a:r>
-              <a:rPr lang="en-US" sz="2800" b="1" dirty="0">
-                <a:solidFill>
-                  <a:schemeClr val="accent1"/>
-                </a:solidFill>
-                <a:latin typeface="Georgia" pitchFamily="34" charset="0"/>
-                <a:ea typeface="Georgia" pitchFamily="34" charset="-122"/>
-                <a:cs typeface="Georgia" pitchFamily="34" charset="-120"/>
-              </a:rPr>
-              <a:t>2</a:t>
-            </a:r>
-            <a:endParaRPr lang="en-US" sz="2800" dirty="0"/>
-          </a:p>
-        </p:txBody>
-      </p:sp>
-      <p:sp>
-        <p:nvSpPr>
-          <p:cNvPr id="34" name="Fact label 2"/>
-          <p:cNvSpPr txBox="1"/>
-          <p:nvPr/>
-        </p:nvSpPr>
-        <p:spPr>
-          <a:xfrm>
-            <a:off x="3227832" y="3611880"/>
-            <a:ext cx="1234440" cy="914400"/>
-          </a:xfrm>
-          <a:prstGeom prst="rect">
-            <a:avLst/>
-          </a:prstGeom>
-          <a:noFill/>
-          <a:ln/>
-        </p:spPr>
-        <p:txBody>
-          <a:bodyPr wrap="square" lIns="1016" tIns="1016" rIns="1016" bIns="1016" rtlCol="0" anchor="ctr"/>
-          <a:lstStyle/>
-          <a:p>
-            <a:pPr indent="0" marL="0">
-              <a:buNone/>
-            </a:pPr>
-            <a:r>
-              <a:rPr lang="en-US" sz="1100" dirty="0">
-                <a:solidFill>
-                  <a:schemeClr val="tx1"/>
-                </a:solidFill>
-              </a:rPr>
-              <a:t>genres: shopping, job search</a:t>
-            </a:r>
-            <a:endParaRPr lang="en-US" sz="1100" dirty="0"/>
-          </a:p>
-        </p:txBody>
-      </p:sp>
-      <p:sp>
-        <p:nvSpPr>
-          <p:cNvPr id="35" name="Fact 3"/>
-          <p:cNvSpPr/>
-          <p:nvPr/>
-        </p:nvSpPr>
-        <p:spPr>
-          <a:xfrm>
-            <a:off x="4626864" y="3566160"/>
-            <a:ext cx="1947672" cy="1005840"/>
-          </a:xfrm>
-          <a:prstGeom prst="rect">
-            <a:avLst/>
-          </a:prstGeom>
-          <a:solidFill>
-            <a:schemeClr val="accent6"/>
-          </a:solidFill>
-          <a:ln w="12700">
-            <a:solidFill>
-              <a:schemeClr val="bg2"/>
-            </a:solidFill>
-            <a:prstDash val="solid"/>
-          </a:ln>
-        </p:spPr>
-      </p:sp>
-      <p:sp>
-        <p:nvSpPr>
-          <p:cNvPr id="36" name="Fact num 3"/>
-          <p:cNvSpPr txBox="1"/>
-          <p:nvPr/>
-        </p:nvSpPr>
-        <p:spPr>
-          <a:xfrm>
-            <a:off x="4672584" y="3611880"/>
-            <a:ext cx="640080" cy="914400"/>
-          </a:xfrm>
-          <a:prstGeom prst="rect">
-            <a:avLst/>
-          </a:prstGeom>
-          <a:noFill/>
-          <a:ln/>
-        </p:spPr>
-        <p:txBody>
-          <a:bodyPr wrap="square" lIns="1016" tIns="1016" rIns="1016" bIns="1016" rtlCol="0" anchor="ctr"/>
-          <a:lstStyle/>
-          <a:p>
-            <a:pPr indent="0" marL="0">
-              <a:buNone/>
-            </a:pPr>
-            <a:r>
-              <a:rPr lang="en-US" sz="2800" b="1" dirty="0">
-                <a:solidFill>
-                  <a:schemeClr val="accent1"/>
-                </a:solidFill>
-                <a:latin typeface="Georgia" pitchFamily="34" charset="0"/>
-                <a:ea typeface="Georgia" pitchFamily="34" charset="-122"/>
-                <a:cs typeface="Georgia" pitchFamily="34" charset="-120"/>
-              </a:rPr>
-              <a:t>0</a:t>
-            </a:r>
-            <a:endParaRPr lang="en-US" sz="2800" dirty="0"/>
-          </a:p>
-        </p:txBody>
-      </p:sp>
-      <p:sp>
-        <p:nvSpPr>
-          <p:cNvPr id="37" name="Fact label 3"/>
-          <p:cNvSpPr txBox="1"/>
-          <p:nvPr/>
-        </p:nvSpPr>
-        <p:spPr>
-          <a:xfrm>
-            <a:off x="5312664" y="3611880"/>
-            <a:ext cx="1234440" cy="914400"/>
-          </a:xfrm>
-          <a:prstGeom prst="rect">
-            <a:avLst/>
-          </a:prstGeom>
-          <a:noFill/>
-          <a:ln/>
-        </p:spPr>
-        <p:txBody>
-          <a:bodyPr wrap="square" lIns="1016" tIns="1016" rIns="1016" bIns="1016" rtlCol="0" anchor="ctr"/>
-          <a:lstStyle/>
-          <a:p>
-            <a:pPr indent="0" marL="0">
-              <a:buNone/>
-            </a:pPr>
-            <a:r>
-              <a:rPr lang="en-US" sz="1100" dirty="0">
-                <a:solidFill>
-                  <a:schemeClr val="tx1"/>
-                </a:solidFill>
-              </a:rPr>
-              <a:t>scrolling, so gaze stays reliable</a:t>
-            </a:r>
-            <a:endParaRPr lang="en-US" sz="1100" dirty="0"/>
-          </a:p>
-        </p:txBody>
-      </p:sp>
-      <p:sp>
-        <p:nvSpPr>
-          <p:cNvPr id="38" name="Fact 4"/>
-          <p:cNvSpPr/>
-          <p:nvPr/>
-        </p:nvSpPr>
-        <p:spPr>
-          <a:xfrm>
-            <a:off x="6711696" y="3566160"/>
-            <a:ext cx="1947672" cy="1005840"/>
-          </a:xfrm>
-          <a:prstGeom prst="rect">
-            <a:avLst/>
-          </a:prstGeom>
-          <a:solidFill>
-            <a:schemeClr val="accent6"/>
-          </a:solidFill>
-          <a:ln w="12700">
-            <a:solidFill>
-              <a:schemeClr val="bg2"/>
-            </a:solidFill>
-            <a:prstDash val="solid"/>
-          </a:ln>
-        </p:spPr>
-      </p:sp>
-      <p:sp>
-        <p:nvSpPr>
-          <p:cNvPr id="39" name="Fact num 4"/>
-          <p:cNvSpPr txBox="1"/>
-          <p:nvPr/>
-        </p:nvSpPr>
-        <p:spPr>
-          <a:xfrm>
-            <a:off x="6757416" y="3611880"/>
-            <a:ext cx="640080" cy="914400"/>
-          </a:xfrm>
-          <a:prstGeom prst="rect">
-            <a:avLst/>
-          </a:prstGeom>
-          <a:noFill/>
-          <a:ln/>
-        </p:spPr>
-        <p:txBody>
-          <a:bodyPr wrap="square" lIns="1016" tIns="1016" rIns="1016" bIns="1016" rtlCol="0" anchor="ctr"/>
-          <a:lstStyle/>
-          <a:p>
-            <a:pPr indent="0" marL="0">
-              <a:buNone/>
-            </a:pPr>
-            <a:r>
-              <a:rPr lang="en-US" sz="2800" b="1" dirty="0">
-                <a:solidFill>
-                  <a:schemeClr val="accent1"/>
-                </a:solidFill>
-                <a:latin typeface="Georgia" pitchFamily="34" charset="0"/>
-                <a:ea typeface="Georgia" pitchFamily="34" charset="-122"/>
-                <a:cs typeface="Georgia" pitchFamily="34" charset="-120"/>
-              </a:rPr>
-              <a:t>20</a:t>
-            </a:r>
-            <a:endParaRPr lang="en-US" sz="2800" dirty="0"/>
-          </a:p>
-        </p:txBody>
-      </p:sp>
-      <p:sp>
-        <p:nvSpPr>
-          <p:cNvPr id="40" name="Fact label 4"/>
-          <p:cNvSpPr txBox="1"/>
-          <p:nvPr/>
-        </p:nvSpPr>
-        <p:spPr>
-          <a:xfrm>
-            <a:off x="7397496" y="3611880"/>
-            <a:ext cx="1234440" cy="914400"/>
-          </a:xfrm>
-          <a:prstGeom prst="rect">
-            <a:avLst/>
-          </a:prstGeom>
-          <a:noFill/>
-          <a:ln/>
-        </p:spPr>
-        <p:txBody>
-          <a:bodyPr wrap="square" lIns="1016" tIns="1016" rIns="1016" bIns="1016" rtlCol="0" anchor="ctr"/>
-          <a:lstStyle/>
-          <a:p>
-            <a:pPr indent="0" marL="0">
-              <a:buNone/>
-            </a:pPr>
-            <a:r>
-              <a:rPr lang="en-US" sz="1100" dirty="0">
-                <a:solidFill>
-                  <a:schemeClr val="tx1"/>
-                </a:solidFill>
-              </a:rPr>
               <a:t>areas of interest per site</a:t>
             </a:r>
-            <a:endParaRPr lang="en-US" sz="1100" dirty="0"/>
+            <a:endParaRPr lang="en-US" sz="1200" dirty="0"/>
           </a:p>
         </p:txBody>
       </p:sp>
@@ -6896,8 +7326,8 @@
         </p:nvSpPr>
         <p:spPr>
           <a:xfrm>
-            <a:off x="8229600" y="4828032"/>
-            <a:ext cx="457200" cy="228600"/>
+            <a:off x="8321040" y="4800600"/>
+            <a:ext cx="365760" cy="228600"/>
           </a:xfrm>
           <a:prstGeom prst="rect">
             <a:avLst/>
@@ -6914,7 +7344,7 @@
             <a:lvl1pPr>
               <a:defRPr sz="900">
                 <a:solidFill>
-                  <a:schemeClr val="accent3"/>
+                  <a:schemeClr val="tx1"/>
                 </a:solidFill>
               </a:defRPr>
             </a:lvl1pPr>
@@ -6956,14 +7386,50 @@
       </p:grpSpPr>
       <p:sp>
         <p:nvSpPr>
-          <p:cNvPr id="2" name="Text 0"/>
+          <p:cNvPr id="2" name="Section label"/>
+          <p:cNvSpPr txBox="1"/>
+          <p:nvPr/>
+        </p:nvSpPr>
+        <p:spPr>
+          <a:xfrm>
+            <a:off x="457200" y="219456"/>
+            <a:ext cx="5486400" cy="237744"/>
+          </a:xfrm>
+          <a:prstGeom prst="rect">
+            <a:avLst/>
+          </a:prstGeom>
+          <a:noFill/>
+          <a:ln/>
+        </p:spPr>
+        <p:txBody>
+          <a:bodyPr wrap="square" lIns="0" tIns="0" rIns="0" bIns="0" rtlCol="0" anchor="ctr"/>
+          <a:lstStyle/>
+          <a:p>
+            <a:pPr indent="0" marL="0">
+              <a:buNone/>
+            </a:pPr>
+            <a:r>
+              <a:rPr lang="en-US" sz="1200" b="1" dirty="0">
+                <a:solidFill>
+                  <a:schemeClr val="tx2"/>
+                </a:solidFill>
+              </a:rPr>
+              <a:t>Master's · 3/3</a:t>
+            </a:r>
+            <a:endParaRPr lang="en-US" sz="1200" dirty="0"/>
+          </a:p>
+        </p:txBody>
+      </p:sp>
+      <p:sp>
+        <p:nvSpPr>
+          <p:cNvPr id="3" name="Text 1"/>
           <p:cNvSpPr/>
           <p:nvPr/>
         </p:nvSpPr>
         <p:spPr>
           <a:xfrm>
-            <a:off x="457200" y="274320"/>
-            <a:ext cx="8229600" cy="685800"/>
+            <a:off x="457200" y="457200"/>
+            <a:ext cx="8229600" cy="594360"/>
           </a:xfrm>
           <a:prstGeom prst="rect">
             <a:avLst/>
@@ -6979,23 +7445,20 @@
               <a:buNone/>
             </a:pPr>
             <a:r>
-              <a:rPr lang="en-US" sz="2200" b="1" dirty="0">
+              <a:rPr lang="en-US" sz="2600" b="1" dirty="0">
                 <a:solidFill>
                   <a:schemeClr val="tx2"/>
                 </a:solidFill>
-                <a:latin typeface="Georgia" pitchFamily="34" charset="0"/>
-                <a:ea typeface="Georgia" pitchFamily="34" charset="-122"/>
-                <a:cs typeface="Georgia" pitchFamily="34" charset="-120"/>
-              </a:rPr>
-              <a:t>Master's (3/3): status and take-away</a:t>
-            </a:r>
-            <a:endParaRPr lang="en-US" sz="2200" dirty="0"/>
-          </a:p>
-        </p:txBody>
-      </p:sp>
-      <p:sp>
-        <p:nvSpPr>
-          <p:cNvPr id="4" name="Step 1"/>
+              </a:rPr>
+              <a:t>Status and take-away</a:t>
+            </a:r>
+            <a:endParaRPr lang="en-US" sz="2600" dirty="0"/>
+          </a:p>
+        </p:txBody>
+      </p:sp>
+      <p:sp>
+        <p:nvSpPr>
+          <p:cNvPr id="5" name="Step 1"/>
           <p:cNvSpPr/>
           <p:nvPr/>
         </p:nvSpPr>
@@ -7004,15 +7467,17 @@
             <a:off x="457200" y="1280160"/>
             <a:ext cx="2468880" cy="1188720"/>
           </a:xfrm>
-          <a:prstGeom prst="rect">
-            <a:avLst/>
+          <a:prstGeom prst="roundRect">
+            <a:avLst>
+              <a:gd name="adj" fmla="val 6154"/>
+            </a:avLst>
           </a:prstGeom>
           <a:solidFill>
-            <a:schemeClr val="accent1"/>
+            <a:schemeClr val="tx2"/>
           </a:solidFill>
-          <a:ln w="12700">
+          <a:ln w="9525">
             <a:solidFill>
-              <a:schemeClr val="bg2"/>
+              <a:schemeClr val="tx2"/>
             </a:solidFill>
             <a:prstDash val="solid"/>
           </a:ln>
@@ -7020,14 +7485,14 @@
       </p:sp>
       <p:sp>
         <p:nvSpPr>
-          <p:cNvPr id="5" name="Step text 1"/>
+          <p:cNvPr id="6" name="Step text 1"/>
           <p:cNvSpPr txBox="1"/>
           <p:nvPr/>
         </p:nvSpPr>
         <p:spPr>
           <a:xfrm>
-            <a:off x="548640" y="1325880"/>
-            <a:ext cx="2286000" cy="1097280"/>
+            <a:off x="566928" y="1280160"/>
+            <a:ext cx="2286000" cy="1188720"/>
           </a:xfrm>
           <a:prstGeom prst="rect">
             <a:avLst/>
@@ -7050,7 +7515,7 @@
               </a:rPr>
               <a:t>DONE</a:t>
             </a:r>
-            <a:endParaRPr lang="en-US" sz="1300" dirty="0"/>
+            <a:endParaRPr lang="en-US" sz="1400" dirty="0"/>
           </a:p>
           <a:p>
             <a:pPr indent="0" marL="0">
@@ -7064,44 +7529,70 @@
               </a:rPr>
               <a:t>Prototypes</a:t>
             </a:r>
-            <a:endParaRPr lang="en-US" sz="1300" dirty="0"/>
-          </a:p>
-          <a:p>
-            <a:pPr indent="0" marL="0">
-              <a:buNone/>
-            </a:pPr>
-            <a:r>
-              <a:rPr lang="en-US" sz="1300" dirty="0">
+            <a:endParaRPr lang="en-US" sz="1400" dirty="0"/>
+          </a:p>
+          <a:p>
+            <a:pPr indent="0" marL="0">
+              <a:buNone/>
+            </a:pPr>
+            <a:r>
+              <a:rPr lang="en-US" sz="1400" dirty="0">
                 <a:solidFill>
                   <a:schemeClr val="bg1"/>
                 </a:solidFill>
               </a:rPr>
               <a:t>Both sites complete</a:t>
             </a:r>
-            <a:endParaRPr lang="en-US" sz="1300" dirty="0"/>
-          </a:p>
-        </p:txBody>
-      </p:sp>
-      <p:sp>
-        <p:nvSpPr>
-          <p:cNvPr id="6" name="Step arrow 1"/>
+            <a:endParaRPr lang="en-US" sz="1400" dirty="0"/>
+          </a:p>
+        </p:txBody>
+      </p:sp>
+      <p:sp>
+        <p:nvSpPr>
+          <p:cNvPr id="7" name="Step arrow 1"/>
           <p:cNvSpPr/>
           <p:nvPr/>
         </p:nvSpPr>
         <p:spPr>
           <a:xfrm>
-            <a:off x="2971800" y="1783080"/>
-            <a:ext cx="274320" cy="274320"/>
-          </a:xfrm>
-          <a:prstGeom prst="rightArrow">
-            <a:avLst/>
+            <a:off x="2971800" y="1874520"/>
+            <a:ext cx="320040" cy="0"/>
+          </a:xfrm>
+          <a:prstGeom prst="line">
+            <a:avLst/>
+          </a:prstGeom>
+          <a:noFill/>
+          <a:ln w="15875">
+            <a:solidFill>
+              <a:schemeClr val="tx1"/>
+            </a:solidFill>
+            <a:prstDash val="solid"/>
+            <a:tailEnd type="triangle"/>
+          </a:ln>
+        </p:spPr>
+      </p:sp>
+      <p:sp>
+        <p:nvSpPr>
+          <p:cNvPr id="8" name="Step 2"/>
+          <p:cNvSpPr/>
+          <p:nvPr/>
+        </p:nvSpPr>
+        <p:spPr>
+          <a:xfrm>
+            <a:off x="3337560" y="1280160"/>
+            <a:ext cx="2468880" cy="1188720"/>
+          </a:xfrm>
+          <a:prstGeom prst="roundRect">
+            <a:avLst>
+              <a:gd name="adj" fmla="val 6154"/>
+            </a:avLst>
           </a:prstGeom>
           <a:solidFill>
-            <a:schemeClr val="accent3"/>
+            <a:schemeClr val="accent6"/>
           </a:solidFill>
-          <a:ln w="12700">
+          <a:ln w="9525">
             <a:solidFill>
-              <a:schemeClr val="accent3"/>
+              <a:schemeClr val="accent5"/>
             </a:solidFill>
             <a:prstDash val="solid"/>
           </a:ln>
@@ -7109,24 +7600,114 @@
       </p:sp>
       <p:sp>
         <p:nvSpPr>
-          <p:cNvPr id="7" name="Step 2"/>
+          <p:cNvPr id="9" name="Step text 2"/>
+          <p:cNvSpPr txBox="1"/>
+          <p:nvPr/>
+        </p:nvSpPr>
+        <p:spPr>
+          <a:xfrm>
+            <a:off x="3447288" y="1280160"/>
+            <a:ext cx="2286000" cy="1188720"/>
+          </a:xfrm>
+          <a:prstGeom prst="rect">
+            <a:avLst/>
+          </a:prstGeom>
+          <a:noFill/>
+          <a:ln/>
+        </p:spPr>
+        <p:txBody>
+          <a:bodyPr wrap="square" lIns="1016" tIns="1016" rIns="1016" bIns="1016" rtlCol="0" anchor="ctr"/>
+          <a:lstStyle/>
+          <a:p>
+            <a:pPr indent="0" marL="0">
+              <a:buNone/>
+            </a:pPr>
+            <a:r>
+              <a:rPr lang="en-US" sz="1100" b="1" dirty="0">
+                <a:solidFill>
+                  <a:schemeClr val="tx1"/>
+                </a:solidFill>
+              </a:rPr>
+              <a:t>PLANNED</a:t>
+            </a:r>
+            <a:endParaRPr lang="en-US" sz="1400" dirty="0"/>
+          </a:p>
+          <a:p>
+            <a:pPr indent="0" marL="0">
+              <a:buNone/>
+            </a:pPr>
+            <a:r>
+              <a:rPr lang="en-US" sz="2000" b="1" dirty="0">
+                <a:solidFill>
+                  <a:schemeClr val="tx1"/>
+                </a:solidFill>
+              </a:rPr>
+              <a:t>Pilot</a:t>
+            </a:r>
+            <a:endParaRPr lang="en-US" sz="1400" dirty="0"/>
+          </a:p>
+          <a:p>
+            <a:pPr indent="0" marL="0">
+              <a:buNone/>
+            </a:pPr>
+            <a:r>
+              <a:rPr lang="en-US" sz="1400" dirty="0">
+                <a:solidFill>
+                  <a:schemeClr val="tx1"/>
+                </a:solidFill>
+              </a:rPr>
+              <a:t>N = 6</a:t>
+            </a:r>
+            <a:endParaRPr lang="en-US" sz="1400" dirty="0"/>
+          </a:p>
+        </p:txBody>
+      </p:sp>
+      <p:sp>
+        <p:nvSpPr>
+          <p:cNvPr id="10" name="Step arrow 2"/>
           <p:cNvSpPr/>
           <p:nvPr/>
         </p:nvSpPr>
         <p:spPr>
           <a:xfrm>
-            <a:off x="3291840" y="1280160"/>
+            <a:off x="5852160" y="1874520"/>
+            <a:ext cx="320040" cy="0"/>
+          </a:xfrm>
+          <a:prstGeom prst="line">
+            <a:avLst/>
+          </a:prstGeom>
+          <a:noFill/>
+          <a:ln w="15875">
+            <a:solidFill>
+              <a:schemeClr val="tx1"/>
+            </a:solidFill>
+            <a:prstDash val="solid"/>
+            <a:tailEnd type="triangle"/>
+          </a:ln>
+        </p:spPr>
+      </p:sp>
+      <p:sp>
+        <p:nvSpPr>
+          <p:cNvPr id="11" name="Step 3"/>
+          <p:cNvSpPr/>
+          <p:nvPr/>
+        </p:nvSpPr>
+        <p:spPr>
+          <a:xfrm>
+            <a:off x="6217920" y="1280160"/>
             <a:ext cx="2468880" cy="1188720"/>
           </a:xfrm>
-          <a:prstGeom prst="rect">
-            <a:avLst/>
+          <a:prstGeom prst="roundRect">
+            <a:avLst>
+              <a:gd name="adj" fmla="val 6154"/>
+            </a:avLst>
           </a:prstGeom>
           <a:solidFill>
-            <a:schemeClr val="accent2"/>
+            <a:schemeClr val="accent6"/>
           </a:solidFill>
-          <a:ln w="12700">
+          <a:ln w="9525">
             <a:solidFill>
-              <a:schemeClr val="bg2"/>
+              <a:schemeClr val="accent5"/>
             </a:solidFill>
             <a:prstDash val="solid"/>
           </a:ln>
@@ -7134,14 +7715,14 @@
       </p:sp>
       <p:sp>
         <p:nvSpPr>
-          <p:cNvPr id="8" name="Step text 2"/>
+          <p:cNvPr id="12" name="Step text 3"/>
           <p:cNvSpPr txBox="1"/>
           <p:nvPr/>
         </p:nvSpPr>
         <p:spPr>
           <a:xfrm>
-            <a:off x="3383280" y="1325880"/>
-            <a:ext cx="2286000" cy="1097280"/>
+            <a:off x="6327648" y="1280160"/>
+            <a:ext cx="2286000" cy="1188720"/>
           </a:xfrm>
           <a:prstGeom prst="rect">
             <a:avLst/>
@@ -7159,12 +7740,12 @@
             <a:r>
               <a:rPr lang="en-US" sz="1100" b="1" dirty="0">
                 <a:solidFill>
-                  <a:schemeClr val="tx2"/>
+                  <a:schemeClr val="tx1"/>
                 </a:solidFill>
               </a:rPr>
               <a:t>PLANNED</a:t>
             </a:r>
-            <a:endParaRPr lang="en-US" sz="1300" dirty="0"/>
+            <a:endParaRPr lang="en-US" sz="1400" dirty="0"/>
           </a:p>
           <a:p>
             <a:pPr indent="0" marL="0">
@@ -7173,49 +7754,51 @@
             <a:r>
               <a:rPr lang="en-US" sz="2000" b="1" dirty="0">
                 <a:solidFill>
-                  <a:schemeClr val="tx2"/>
-                </a:solidFill>
-              </a:rPr>
-              <a:t>Pilot</a:t>
-            </a:r>
-            <a:endParaRPr lang="en-US" sz="1300" dirty="0"/>
-          </a:p>
-          <a:p>
-            <a:pPr indent="0" marL="0">
-              <a:buNone/>
-            </a:pPr>
-            <a:r>
-              <a:rPr lang="en-US" sz="1300" dirty="0">
-                <a:solidFill>
-                  <a:schemeClr val="tx2"/>
-                </a:solidFill>
-              </a:rPr>
-              <a:t>N = 6</a:t>
-            </a:r>
-            <a:endParaRPr lang="en-US" sz="1300" dirty="0"/>
-          </a:p>
-        </p:txBody>
-      </p:sp>
-      <p:sp>
-        <p:nvSpPr>
-          <p:cNvPr id="9" name="Step arrow 2"/>
+                  <a:schemeClr val="tx1"/>
+                </a:solidFill>
+              </a:rPr>
+              <a:t>Main study</a:t>
+            </a:r>
+            <a:endParaRPr lang="en-US" sz="1400" dirty="0"/>
+          </a:p>
+          <a:p>
+            <a:pPr indent="0" marL="0">
+              <a:buNone/>
+            </a:pPr>
+            <a:r>
+              <a:rPr lang="en-US" sz="1400" dirty="0">
+                <a:solidFill>
+                  <a:schemeClr val="tx1"/>
+                </a:solidFill>
+              </a:rPr>
+              <a:t>N = 40–64</a:t>
+            </a:r>
+            <a:endParaRPr lang="en-US" sz="1400" dirty="0"/>
+          </a:p>
+        </p:txBody>
+      </p:sp>
+      <p:sp>
+        <p:nvSpPr>
+          <p:cNvPr id="13" name="Status box"/>
           <p:cNvSpPr/>
           <p:nvPr/>
         </p:nvSpPr>
         <p:spPr>
           <a:xfrm>
-            <a:off x="5806440" y="1783080"/>
-            <a:ext cx="274320" cy="274320"/>
-          </a:xfrm>
-          <a:prstGeom prst="rightArrow">
-            <a:avLst/>
+            <a:off x="457200" y="2697480"/>
+            <a:ext cx="8229600" cy="777240"/>
+          </a:xfrm>
+          <a:prstGeom prst="roundRect">
+            <a:avLst>
+              <a:gd name="adj" fmla="val 9412"/>
+            </a:avLst>
           </a:prstGeom>
           <a:solidFill>
-            <a:schemeClr val="accent3"/>
+            <a:srgbClr val="FDEEEE"/>
           </a:solidFill>
-          <a:ln w="12700">
+          <a:ln w="9525">
             <a:solidFill>
-              <a:schemeClr val="accent3"/>
+              <a:srgbClr val="FE3939"/>
             </a:solidFill>
             <a:prstDash val="solid"/>
           </a:ln>
@@ -7223,24 +7806,73 @@
       </p:sp>
       <p:sp>
         <p:nvSpPr>
-          <p:cNvPr id="10" name="Step 3"/>
+          <p:cNvPr id="14" name="Status text"/>
+          <p:cNvSpPr txBox="1"/>
+          <p:nvPr/>
+        </p:nvSpPr>
+        <p:spPr>
+          <a:xfrm>
+            <a:off x="594360" y="2697480"/>
+            <a:ext cx="7955280" cy="777240"/>
+          </a:xfrm>
+          <a:prstGeom prst="rect">
+            <a:avLst/>
+          </a:prstGeom>
+          <a:noFill/>
+          <a:ln/>
+        </p:spPr>
+        <p:txBody>
+          <a:bodyPr wrap="square" lIns="1016" tIns="1016" rIns="1016" bIns="1016" rtlCol="0" anchor="ctr"/>
+          <a:lstStyle/>
+          <a:p>
+            <a:pPr indent="0" marL="0">
+              <a:buNone/>
+            </a:pPr>
+            <a:r>
+              <a:rPr lang="en-US" sz="1500" b="1" dirty="0">
+                <a:solidFill>
+                  <a:schemeClr val="accent4"/>
+                </a:solidFill>
+              </a:rPr>
+              <a:t>So far: </a:t>
+            </a:r>
+            <a:pPr indent="0" marL="0">
+              <a:buNone/>
+            </a:pPr>
+            <a:r>
+              <a:rPr lang="en-US" sz="1500" dirty="0">
+                <a:solidFill>
+                  <a:schemeClr val="tx1"/>
+                </a:solidFill>
+              </a:rPr>
+              <a:t>N = 3 preliminary study and a wiring check with mock LLM responses. No results are claimed yet.</a:t>
+            </a:r>
+            <a:endParaRPr lang="en-US" sz="1500" dirty="0"/>
+          </a:p>
+        </p:txBody>
+      </p:sp>
+      <p:sp>
+        <p:nvSpPr>
+          <p:cNvPr id="15" name="Take-away"/>
           <p:cNvSpPr/>
           <p:nvPr/>
         </p:nvSpPr>
         <p:spPr>
           <a:xfrm>
-            <a:off x="6126480" y="1280160"/>
-            <a:ext cx="2468880" cy="1188720"/>
-          </a:xfrm>
-          <a:prstGeom prst="rect">
-            <a:avLst/>
+            <a:off x="457200" y="3657600"/>
+            <a:ext cx="8229600" cy="960120"/>
+          </a:xfrm>
+          <a:prstGeom prst="roundRect">
+            <a:avLst>
+              <a:gd name="adj" fmla="val 7619"/>
+            </a:avLst>
           </a:prstGeom>
           <a:solidFill>
-            <a:schemeClr val="accent2"/>
+            <a:schemeClr val="tx2"/>
           </a:solidFill>
-          <a:ln w="12700">
+          <a:ln w="9525">
             <a:solidFill>
-              <a:schemeClr val="bg2"/>
+              <a:schemeClr val="tx2"/>
             </a:solidFill>
             <a:prstDash val="solid"/>
           </a:ln>
@@ -7248,14 +7880,14 @@
       </p:sp>
       <p:sp>
         <p:nvSpPr>
-          <p:cNvPr id="11" name="Step text 3"/>
+          <p:cNvPr id="16" name="Take-away text"/>
           <p:cNvSpPr txBox="1"/>
           <p:nvPr/>
         </p:nvSpPr>
         <p:spPr>
           <a:xfrm>
-            <a:off x="6217920" y="1325880"/>
-            <a:ext cx="2286000" cy="1097280"/>
+            <a:off x="594360" y="3657600"/>
+            <a:ext cx="7955280" cy="960120"/>
           </a:xfrm>
           <a:prstGeom prst="rect">
             <a:avLst/>
@@ -7271,28 +7903,14 @@
               <a:buNone/>
             </a:pPr>
             <a:r>
-              <a:rPr lang="en-US" sz="1100" b="1" dirty="0">
-                <a:solidFill>
-                  <a:schemeClr val="tx2"/>
-                </a:solidFill>
-              </a:rPr>
-              <a:t>PLANNED</a:t>
-            </a:r>
-            <a:endParaRPr lang="en-US" sz="1300" dirty="0"/>
-          </a:p>
-          <a:p>
-            <a:pPr indent="0" marL="0">
-              <a:buNone/>
-            </a:pPr>
-            <a:r>
-              <a:rPr lang="en-US" sz="2000" b="1" dirty="0">
-                <a:solidFill>
-                  <a:schemeClr val="tx2"/>
-                </a:solidFill>
-              </a:rPr>
-              <a:t>Main study</a:t>
-            </a:r>
-            <a:endParaRPr lang="en-US" sz="1300" dirty="0"/>
+              <a:rPr lang="en-US" sz="1700" b="1" dirty="0">
+                <a:solidFill>
+                  <a:schemeClr val="bg1"/>
+                </a:solidFill>
+              </a:rPr>
+              <a:t>Help UX teams find where and why users hesitate, with less burden on users.</a:t>
+            </a:r>
+            <a:endParaRPr lang="en-US" sz="1400" dirty="0"/>
           </a:p>
           <a:p>
             <a:pPr indent="0" marL="0">
@@ -7301,159 +7919,12 @@
             <a:r>
               <a:rPr lang="en-US" sz="1300" dirty="0">
                 <a:solidFill>
-                  <a:schemeClr val="tx2"/>
-                </a:solidFill>
-              </a:rPr>
-              <a:t>N = 40–64</a:t>
-            </a:r>
-            <a:endParaRPr lang="en-US" sz="1300" dirty="0"/>
-          </a:p>
-        </p:txBody>
-      </p:sp>
-      <p:sp>
-        <p:nvSpPr>
-          <p:cNvPr id="12" name="Honesty box"/>
-          <p:cNvSpPr/>
-          <p:nvPr/>
-        </p:nvSpPr>
-        <p:spPr>
-          <a:xfrm>
-            <a:off x="457200" y="2697480"/>
-            <a:ext cx="8229600" cy="777240"/>
-          </a:xfrm>
-          <a:prstGeom prst="rect">
-            <a:avLst/>
-          </a:prstGeom>
-          <a:solidFill>
-            <a:schemeClr val="bg1"/>
-          </a:solidFill>
-          <a:ln w="12700">
-            <a:solidFill>
-              <a:schemeClr val="accent4"/>
-            </a:solidFill>
-            <a:prstDash val="solid"/>
-          </a:ln>
-        </p:spPr>
-      </p:sp>
-      <p:sp>
-        <p:nvSpPr>
-          <p:cNvPr id="13" name="Honesty text"/>
-          <p:cNvSpPr txBox="1"/>
-          <p:nvPr/>
-        </p:nvSpPr>
-        <p:spPr>
-          <a:xfrm>
-            <a:off x="594360" y="2724912"/>
-            <a:ext cx="7955280" cy="731520"/>
-          </a:xfrm>
-          <a:prstGeom prst="rect">
-            <a:avLst/>
-          </a:prstGeom>
-          <a:noFill/>
-          <a:ln/>
-        </p:spPr>
-        <p:txBody>
-          <a:bodyPr wrap="square" lIns="1016" tIns="1016" rIns="1016" bIns="1016" rtlCol="0" anchor="ctr"/>
-          <a:lstStyle/>
-          <a:p>
-            <a:pPr indent="0" marL="0">
-              <a:buNone/>
-            </a:pPr>
-            <a:r>
-              <a:rPr lang="en-US" sz="1400" b="1" dirty="0">
-                <a:solidFill>
-                  <a:schemeClr val="accent4"/>
-                </a:solidFill>
-              </a:rPr>
-              <a:t>So far: </a:t>
-            </a:r>
-            <a:pPr indent="0" marL="0">
-              <a:buNone/>
-            </a:pPr>
-            <a:r>
-              <a:rPr lang="en-US" sz="1400" dirty="0">
-                <a:solidFill>
-                  <a:schemeClr val="tx1"/>
-                </a:solidFill>
-              </a:rPr>
-              <a:t>N = 3 preliminary study and a wiring check with mock LLM responses. No results are claimed yet.</a:t>
+                  <a:schemeClr val="bg1"/>
+                </a:solidFill>
+              </a:rPr>
+              <a:t>Showing where an LLM's interpretation breaks down is itself a useful finding.</a:t>
             </a:r>
             <a:endParaRPr lang="en-US" sz="1400" dirty="0"/>
-          </a:p>
-        </p:txBody>
-      </p:sp>
-      <p:sp>
-        <p:nvSpPr>
-          <p:cNvPr id="14" name="Take-away"/>
-          <p:cNvSpPr/>
-          <p:nvPr/>
-        </p:nvSpPr>
-        <p:spPr>
-          <a:xfrm>
-            <a:off x="457200" y="3657600"/>
-            <a:ext cx="8229600" cy="914400"/>
-          </a:xfrm>
-          <a:prstGeom prst="rect">
-            <a:avLst/>
-          </a:prstGeom>
-          <a:solidFill>
-            <a:schemeClr val="tx2"/>
-          </a:solidFill>
-          <a:ln w="12700">
-            <a:solidFill>
-              <a:schemeClr val="bg2"/>
-            </a:solidFill>
-            <a:prstDash val="solid"/>
-          </a:ln>
-        </p:spPr>
-      </p:sp>
-      <p:sp>
-        <p:nvSpPr>
-          <p:cNvPr id="15" name="Take-away text"/>
-          <p:cNvSpPr txBox="1"/>
-          <p:nvPr/>
-        </p:nvSpPr>
-        <p:spPr>
-          <a:xfrm>
-            <a:off x="594360" y="3685032"/>
-            <a:ext cx="7955280" cy="868680"/>
-          </a:xfrm>
-          <a:prstGeom prst="rect">
-            <a:avLst/>
-          </a:prstGeom>
-          <a:noFill/>
-          <a:ln/>
-        </p:spPr>
-        <p:txBody>
-          <a:bodyPr wrap="square" lIns="1016" tIns="1016" rIns="1016" bIns="1016" rtlCol="0" anchor="ctr"/>
-          <a:lstStyle/>
-          <a:p>
-            <a:pPr indent="0" marL="0">
-              <a:buNone/>
-            </a:pPr>
-            <a:r>
-              <a:rPr lang="en-US" sz="1600" b="1" dirty="0">
-                <a:solidFill>
-                  <a:schemeClr val="bg1"/>
-                </a:solidFill>
-              </a:rPr>
-              <a:t>Help UX teams find where and why users hesitate, with less burden on users.</a:t>
-            </a:r>
-            <a:endParaRPr lang="en-US" sz="1300" dirty="0"/>
-          </a:p>
-          <a:p>
-            <a:pPr indent="0" marL="0">
-              <a:buNone/>
-            </a:pPr>
-            <a:r>
-              <a:rPr lang="en-US" sz="1200" dirty="0">
-                <a:solidFill>
-                  <a:schemeClr val="accent6"/>
-                </a:solidFill>
-              </a:rPr>
-              <a:t>Showing where an LLM's interpretation breaks down is itself a useful finding.</a:t>
-            </a:r>
-            <a:endParaRPr lang="en-US" sz="1300" dirty="0"/>
           </a:p>
         </p:txBody>
       </p:sp>
@@ -7469,8 +7940,8 @@
         </p:nvSpPr>
         <p:spPr>
           <a:xfrm>
-            <a:off x="8229600" y="4828032"/>
-            <a:ext cx="457200" cy="228600"/>
+            <a:off x="8321040" y="4800600"/>
+            <a:ext cx="365760" cy="228600"/>
           </a:xfrm>
           <a:prstGeom prst="rect">
             <a:avLst/>
@@ -7487,7 +7958,7 @@
             <a:lvl1pPr>
               <a:defRPr sz="900">
                 <a:solidFill>
-                  <a:schemeClr val="accent3"/>
+                  <a:schemeClr val="tx1"/>
                 </a:solidFill>
               </a:defRPr>
             </a:lvl1pPr>
@@ -7511,49 +7982,49 @@
 </file>
 
 <file path=ppt/theme/theme1.xml><?xml version="1.0" encoding="utf-8"?>
-<a:theme xmlns:a="http://schemas.openxmlformats.org/drawingml/2006/main" name="Hesitation">
+<a:theme xmlns:a="http://schemas.openxmlformats.org/drawingml/2006/main" name="Hesitation (guidebook style)">
   <a:themeElements>
-    <a:clrScheme name="Hesitation">
+    <a:clrScheme name="Hesitation (guidebook style)">
       <a:dk1>
-        <a:srgbClr val="1F2937"/>
+        <a:srgbClr val="1A1A1A"/>
       </a:dk1>
       <a:lt1>
         <a:srgbClr val="FFFFFF"/>
       </a:lt1>
       <a:dk2>
-        <a:srgbClr val="14213D"/>
+        <a:srgbClr val="0031D8"/>
       </a:dk2>
       <a:lt2>
-        <a:srgbClr val="F3F6F9"/>
+        <a:srgbClr val="F8F8FB"/>
       </a:lt2>
       <a:accent1>
-        <a:srgbClr val="0F8B8D"/>
+        <a:srgbClr val="0017C1"/>
       </a:accent1>
       <a:accent2>
-        <a:srgbClr val="E8A33D"/>
+        <a:srgbClr val="D2A400"/>
       </a:accent2>
       <a:accent3>
-        <a:srgbClr val="6B7280"/>
+        <a:srgbClr val="626264"/>
       </a:accent3>
       <a:accent4>
-        <a:srgbClr val="C8553D"/>
+        <a:srgbClr val="CE0000"/>
       </a:accent4>
       <a:accent5>
-        <a:srgbClr val="3A6EA5"/>
+        <a:srgbClr val="7096F8"/>
       </a:accent5>
       <a:accent6>
-        <a:srgbClr val="D8EEEE"/>
+        <a:srgbClr val="E8F1FE"/>
       </a:accent6>
       <a:hlink>
-        <a:srgbClr val="0F8B8D"/>
+        <a:srgbClr val="0017C1"/>
       </a:hlink>
       <a:folHlink>
-        <a:srgbClr val="6B7280"/>
+        <a:srgbClr val="626264"/>
       </a:folHlink>
     </a:clrScheme>
-    <a:fontScheme name="Hesitation">
+    <a:fontScheme name="Hesitation (guidebook style)">
       <a:majorFont>
-        <a:latin typeface="Georgia"/>
+        <a:latin typeface="Calibri"/>
         <a:ea typeface=""/>
         <a:cs typeface=""/>
         <a:font script="Jpan" typeface="游ゴシック Light"/>

--- a/slides/english_research_intro.pptx
+++ b/slides/english_research_intro.pptx
@@ -13,13 +13,12 @@
     <p:sldId id="261" r:id="rId7"/>
     <p:sldId id="262" r:id="rId8"/>
     <p:sldId id="263" r:id="rId9"/>
-    <p:sldId id="264" r:id="rId10"/>
   </p:sldIdLst>
   <p:notesMasterIdLst>
-    <p:notesMasterId r:id="rId11"/>
+    <p:notesMasterId r:id="rId10"/>
   </p:notesMasterIdLst>
-  <p:sldSz cx="9144000" cy="5143500"/>
-  <p:notesSz cx="5143500" cy="9144000"/>
+  <p:sldSz cx="12192000" cy="6858000"/>
+  <p:notesSz cx="6858000" cy="12192000"/>
   <p:defaultTextStyle>
     <a:lvl1pPr marL="0" algn="l" defTabSz="914400" rtl="0" eaLnBrk="1" latinLnBrk="0" hangingPunct="1">
       <a:defRPr sz="1800" kern="1200">
@@ -115,29 +114,24 @@
   <p:extLst>
     <p:ext uri="{521415D9-36F7-43E2-AB2F-B90AF26B5E84}">
       <p14:sectionLst xmlns:p14="http://schemas.microsoft.com/office/powerpoint/2010/main">
-        <p14:section name="Overview" id="{46db539d-e296-6513-1d45-571434484eef}">
+        <p14:section name="Overview" id="{ca8e77c1-4f27-d813-5812-ceee8774ae89}">
           <p14:sldIdLst>
             <p14:sldId id="256"/>
             <p14:sldId id="257"/>
           </p14:sldIdLst>
         </p14:section>
-        <p14:section name="Undergraduate" id="{78571636-cb7e-0d80-df89-d1cfb1d4bfae}">
+        <p14:section name="Undergraduate" id="{59f6dde8-0844-c6a1-209c-4147c9e7b111}">
           <p14:sldIdLst>
             <p14:sldId id="258"/>
             <p14:sldId id="259"/>
             <p14:sldId id="260"/>
           </p14:sldIdLst>
         </p14:section>
-        <p14:section name="Bridge" id="{d0e11926-0dfe-f616-5598-48d459b5de57}">
+        <p14:section name="Master's" id="{e67f6d12-8dbc-85ef-6760-ad82032bf670}">
           <p14:sldIdLst>
             <p14:sldId id="261"/>
-          </p14:sldIdLst>
-        </p14:section>
-        <p14:section name="Master's" id="{fcbe5ac4-9a1f-3337-5b74-e67a563a3649}">
-          <p14:sldIdLst>
             <p14:sldId id="262"/>
             <p14:sldId id="263"/>
-            <p14:sldId id="264"/>
           </p14:sldIdLst>
         </p14:section>
       </p14:sectionLst>
@@ -147,451 +141,6 @@
     </p:ext>
   </p:extLst>
 </p:presentation>
-</file>
-
-<file path=ppt/charts/chart1.xml><?xml version="1.0" encoding="utf-8"?>
-<c:chartSpace xmlns:c="http://schemas.openxmlformats.org/drawingml/2006/chart" xmlns:a="http://schemas.openxmlformats.org/drawingml/2006/main" xmlns:r="http://schemas.openxmlformats.org/officeDocument/2006/relationships">
-  <c:date1904 val="0"/>
-  <c:roundedCorners val="1"/>
-  <c:chart>
-    <c:title>
-      <c:tx>
-        <c:rich>
-          <a:bodyPr/>
-          <a:lstStyle/>
-          <a:p>
-            <a:pPr>
-              <a:defRPr sz="1200" b="0" i="0" u="none" strike="noStrike">
-                <a:solidFill>
-                  <a:srgbClr val="1A1A1A"/>
-                </a:solidFill>
-                <a:latin typeface="+mn-lt"/>
-              </a:defRPr>
-            </a:pPr>
-            <a:r>
-              <a:rPr sz="1200" b="0" i="0" u="none" strike="noStrike">
-                <a:solidFill>
-                  <a:srgbClr val="1A1A1A"/>
-                </a:solidFill>
-                <a:latin typeface="+mn-lt"/>
-              </a:rPr>
-              <a:t>BERTScore against what participants actually said</a:t>
-            </a:r>
-          </a:p>
-        </c:rich>
-      </c:tx>
-      <c:layout/>
-      <c:overlay val="0"/>
-    </c:title>
-    <c:autoTitleDeleted val="0"/>
-    <c:plotArea>
-      <c:layout/>
-      <c:barChart>
-        <c:barDir val="col"/>
-        <c:grouping val="clustered"/>
-        <c:varyColors val="0"/>
-        <c:ser>
-          <c:idx val="0"/>
-          <c:order val="0"/>
-          <c:tx>
-            <c:strRef>
-              <c:f>Sheet1!$B$1</c:f>
-              <c:strCache>
-                <c:ptCount val="1"/>
-                <c:pt idx="0">
-                  <c:v>InTA (UI only)</c:v>
-                </c:pt>
-              </c:strCache>
-            </c:strRef>
-          </c:tx>
-          <c:spPr>
-            <a:solidFill>
-              <a:srgbClr val="999999"/>
-            </a:solidFill>
-            <a:effectLst/>
-          </c:spPr>
-          <c:invertIfNegative val="0"/>
-          <c:dLbls>
-            <c:numFmt formatCode="0.000" sourceLinked="0"/>
-            <c:txPr>
-              <a:bodyPr/>
-              <a:lstStyle/>
-              <a:p>
-                <a:pPr>
-                  <a:defRPr b="0" i="0" strike="noStrike" sz="1000" u="none">
-                    <a:solidFill>
-                      <a:srgbClr val="1A1A1A"/>
-                    </a:solidFill>
-                    <a:latin typeface="+mn-lt"/>
-                  </a:defRPr>
-                </a:pPr>
-              </a:p>
-            </c:txPr>
-            <c:showLegendKey val="0"/>
-            <c:showVal val="1"/>
-            <c:showCatName val="0"/>
-            <c:showSerName val="0"/>
-            <c:showPercent val="0"/>
-            <c:showBubbleSize val="0"/>
-            <c:showLeaderLines val="0"/>
-          </c:dLbls>
-          <c:cat>
-            <c:multiLvlStrRef>
-              <c:f>Sheet1!$A$2:$A$5</c:f>
-              <c:multiLvlStrCache>
-                <c:ptCount val="4"/>
-                <c:lvl>
-                  <c:pt idx="0">
-                    <c:v>Good A</c:v>
-                  </c:pt>
-                  <c:pt idx="1">
-                    <c:v>Bad A</c:v>
-                  </c:pt>
-                  <c:pt idx="2">
-                    <c:v>Good B</c:v>
-                  </c:pt>
-                  <c:pt idx="3">
-                    <c:v>Bad B</c:v>
-                  </c:pt>
-                </c:lvl>
-              </c:multiLvlStrCache>
-            </c:multiLvlStrRef>
-          </c:cat>
-          <c:val>
-            <c:numRef>
-              <c:f>Sheet1!$B$2:$B$5</c:f>
-              <c:numCache>
-                <c:formatCode>General</c:formatCode>
-                <c:ptCount val="4"/>
-                <c:pt idx="0">
-                  <c:v>0.68</c:v>
-                </c:pt>
-                <c:pt idx="1">
-                  <c:v>0.683</c:v>
-                </c:pt>
-                <c:pt idx="2">
-                  <c:v>0.691</c:v>
-                </c:pt>
-                <c:pt idx="3">
-                  <c:v>0.67</c:v>
-                </c:pt>
-              </c:numCache>
-            </c:numRef>
-          </c:val>
-        </c:ser>
-        <c:ser>
-          <c:idx val="1"/>
-          <c:order val="1"/>
-          <c:tx>
-            <c:strRef>
-              <c:f>Sheet1!$C$1</c:f>
-              <c:strCache>
-                <c:ptCount val="1"/>
-                <c:pt idx="0">
-                  <c:v>EsTA (gaze + UI)</c:v>
-                </c:pt>
-              </c:strCache>
-            </c:strRef>
-          </c:tx>
-          <c:spPr>
-            <a:solidFill>
-              <a:srgbClr val="0017C1"/>
-            </a:solidFill>
-            <a:effectLst/>
-          </c:spPr>
-          <c:invertIfNegative val="0"/>
-          <c:dLbls>
-            <c:numFmt formatCode="0.000" sourceLinked="0"/>
-            <c:txPr>
-              <a:bodyPr/>
-              <a:lstStyle/>
-              <a:p>
-                <a:pPr>
-                  <a:defRPr b="0" i="0" strike="noStrike" sz="1000" u="none">
-                    <a:solidFill>
-                      <a:srgbClr val="1A1A1A"/>
-                    </a:solidFill>
-                    <a:latin typeface="+mn-lt"/>
-                  </a:defRPr>
-                </a:pPr>
-              </a:p>
-            </c:txPr>
-            <c:showLegendKey val="0"/>
-            <c:showVal val="1"/>
-            <c:showCatName val="0"/>
-            <c:showSerName val="0"/>
-            <c:showPercent val="0"/>
-            <c:showBubbleSize val="0"/>
-            <c:showLeaderLines val="0"/>
-          </c:dLbls>
-          <c:cat>
-            <c:multiLvlStrRef>
-              <c:f>Sheet1!$A$2:$A$5</c:f>
-              <c:multiLvlStrCache>
-                <c:ptCount val="4"/>
-                <c:lvl>
-                  <c:pt idx="0">
-                    <c:v>Good A</c:v>
-                  </c:pt>
-                  <c:pt idx="1">
-                    <c:v>Bad A</c:v>
-                  </c:pt>
-                  <c:pt idx="2">
-                    <c:v>Good B</c:v>
-                  </c:pt>
-                  <c:pt idx="3">
-                    <c:v>Bad B</c:v>
-                  </c:pt>
-                </c:lvl>
-              </c:multiLvlStrCache>
-            </c:multiLvlStrRef>
-          </c:cat>
-          <c:val>
-            <c:numRef>
-              <c:f>Sheet1!$C$2:$C$5</c:f>
-              <c:numCache>
-                <c:formatCode>General</c:formatCode>
-                <c:ptCount val="4"/>
-                <c:pt idx="0">
-                  <c:v>0.673</c:v>
-                </c:pt>
-                <c:pt idx="1">
-                  <c:v>0.677</c:v>
-                </c:pt>
-                <c:pt idx="2">
-                  <c:v>0.688</c:v>
-                </c:pt>
-                <c:pt idx="3">
-                  <c:v>0.682</c:v>
-                </c:pt>
-              </c:numCache>
-            </c:numRef>
-          </c:val>
-        </c:ser>
-        <c:dLbls>
-          <c:numFmt formatCode="0.000" sourceLinked="0"/>
-          <c:txPr>
-            <a:bodyPr/>
-            <a:lstStyle/>
-            <a:p>
-              <a:pPr>
-                <a:defRPr b="0" i="0" strike="noStrike" sz="1000" u="none">
-                  <a:solidFill>
-                    <a:srgbClr val="1A1A1A"/>
-                  </a:solidFill>
-                  <a:latin typeface="+mn-lt"/>
-                </a:defRPr>
-              </a:pPr>
-            </a:p>
-          </c:txPr>
-          <c:showLegendKey val="0"/>
-          <c:showVal val="1"/>
-          <c:showCatName val="0"/>
-          <c:showSerName val="0"/>
-          <c:showPercent val="0"/>
-          <c:showBubbleSize val="0"/>
-          <c:showLeaderLines val="0"/>
-        </c:dLbls>
-        <c:gapWidth val="60"/>
-        <c:overlap val="0"/>
-        <c:axId val="2094734554"/>
-        <c:axId val="2094734552"/>
-        <c:axId val="2094734556"/>
-      </c:barChart>
-      <c:catAx>
-        <c:axId val="2094734554"/>
-        <c:scaling>
-          <c:orientation val="minMax"/>
-        </c:scaling>
-        <c:delete val="0"/>
-        <c:axPos val="b"/>
-        <c:title>
-          <c:tx>
-            <c:rich>
-              <a:bodyPr/>
-              <a:lstStyle/>
-              <a:p>
-                <a:pPr>
-                  <a:defRPr sz="1000" b="0" i="0" u="none" strike="noStrike">
-                    <a:solidFill>
-                      <a:srgbClr val="626264"/>
-                    </a:solidFill>
-                    <a:latin typeface="+mn-lt"/>
-                  </a:defRPr>
-                </a:pPr>
-                <a:r>
-                  <a:rPr sz="1000" b="0" i="0" u="none" strike="noStrike">
-                    <a:solidFill>
-                      <a:srgbClr val="626264"/>
-                    </a:solidFill>
-                    <a:latin typeface="+mn-lt"/>
-                  </a:rPr>
-                  <a:t>Condition (A = e-commerce, B = video streaming)</a:t>
-                </a:r>
-              </a:p>
-            </c:rich>
-          </c:tx>
-          <c:layout/>
-          <c:overlay val="0"/>
-        </c:title>
-        <c:numFmt formatCode="General" sourceLinked="1"/>
-        <c:majorTickMark val="out"/>
-        <c:minorTickMark val="none"/>
-        <c:tickLblPos val="low"/>
-        <c:spPr>
-          <a:ln w="12700" cap="flat">
-            <a:solidFill>
-              <a:srgbClr val="888888"/>
-            </a:solidFill>
-            <a:prstDash val="solid"/>
-            <a:round/>
-          </a:ln>
-        </c:spPr>
-        <c:txPr>
-          <a:bodyPr/>
-          <a:lstStyle/>
-          <a:p>
-            <a:pPr>
-              <a:defRPr sz="1100" b="0" i="0" u="none" strike="noStrike">
-                <a:solidFill>
-                  <a:srgbClr val="1A1A1A"/>
-                </a:solidFill>
-                <a:latin typeface="+mn-lt"/>
-              </a:defRPr>
-            </a:pPr>
-            <a:endParaRPr lang="en-US"/>
-          </a:p>
-        </c:txPr>
-        <c:crossAx val="2094734552"/>
-        <c:crosses val="autoZero"/>
-        <c:auto val="1"/>
-        <c:lblAlgn val="ctr"/>
-        <c:noMultiLvlLbl val="1"/>
-      </c:catAx>
-      <c:valAx>
-        <c:axId val="2094734552"/>
-        <c:scaling>
-          <c:orientation val="minMax"/>
-          <c:max val="1"/>
-          <c:min val="0"/>
-        </c:scaling>
-        <c:delete val="0"/>
-        <c:axPos val="l"/>
-        <c:majorGridlines>
-          <c:spPr>
-            <a:ln w="6350" cap="flat">
-              <a:solidFill>
-                <a:srgbClr val="E5E5E5"/>
-              </a:solidFill>
-              <a:prstDash val="solid"/>
-              <a:round/>
-            </a:ln>
-          </c:spPr>
-        </c:majorGridlines>
-        <c:title>
-          <c:tx>
-            <c:rich>
-              <a:bodyPr/>
-              <a:lstStyle/>
-              <a:p>
-                <a:pPr>
-                  <a:defRPr sz="1000" b="0" i="0" u="none" strike="noStrike">
-                    <a:solidFill>
-                      <a:srgbClr val="626264"/>
-                    </a:solidFill>
-                    <a:latin typeface="+mn-lt"/>
-                  </a:defRPr>
-                </a:pPr>
-                <a:r>
-                  <a:rPr sz="1000" b="0" i="0" u="none" strike="noStrike">
-                    <a:solidFill>
-                      <a:srgbClr val="626264"/>
-                    </a:solidFill>
-                    <a:latin typeface="+mn-lt"/>
-                  </a:rPr>
-                  <a:t>BERTScore</a:t>
-                </a:r>
-              </a:p>
-            </c:rich>
-          </c:tx>
-          <c:layout/>
-          <c:overlay val="0"/>
-        </c:title>
-        <c:numFmt formatCode="0.0" sourceLinked="0"/>
-        <c:majorTickMark val="out"/>
-        <c:minorTickMark val="none"/>
-        <c:tickLblPos val="nextTo"/>
-        <c:spPr>
-          <a:ln w="12700" cap="flat">
-            <a:solidFill>
-              <a:srgbClr val="888888"/>
-            </a:solidFill>
-            <a:prstDash val="solid"/>
-            <a:round/>
-          </a:ln>
-        </c:spPr>
-        <c:txPr>
-          <a:bodyPr/>
-          <a:lstStyle/>
-          <a:p>
-            <a:pPr>
-              <a:defRPr sz="1000" b="0" i="0" u="none" strike="noStrike">
-                <a:solidFill>
-                  <a:srgbClr val="626264"/>
-                </a:solidFill>
-                <a:latin typeface="+mn-lt"/>
-              </a:defRPr>
-            </a:pPr>
-            <a:endParaRPr lang="en-US"/>
-          </a:p>
-        </c:txPr>
-        <c:crossAx val="2094734554"/>
-        <c:crosses val="autoZero"/>
-        <c:crossBetween val="between"/>
-        <c:majorUnit val="0.2"/>
-      </c:valAx>
-      <c:spPr>
-        <a:noFill/>
-        <a:ln>
-          <a:noFill/>
-        </a:ln>
-        <a:effectLst/>
-      </c:spPr>
-    </c:plotArea>
-    <c:legend>
-      <c:legendPos val="t"/>
-      <c:overlay val="0"/>
-      <c:txPr>
-        <a:bodyPr/>
-        <a:lstStyle/>
-        <a:p>
-          <a:pPr>
-            <a:defRPr sz="1100">
-              <a:solidFill>
-                <a:srgbClr val="1A1A1A"/>
-              </a:solidFill>
-              <a:latin typeface="+mn-lt"/>
-              <a:cs typeface="+mn-lt"/>
-            </a:defRPr>
-          </a:pPr>
-          <a:endParaRPr lang="en-US"/>
-        </a:p>
-      </c:txPr>
-    </c:legend>
-    <c:plotVisOnly val="1"/>
-    <c:dispBlanksAs val="span"/>
-  </c:chart>
-  <c:spPr>
-    <a:noFill/>
-    <a:ln>
-      <a:noFill/>
-    </a:ln>
-    <a:effectLst/>
-  </c:spPr>
-  <c:externalData r:id="rId1">
-    <c:autoUpdate val="0"/>
-  </c:externalData>
-</c:chartSpace>
 </file>
 
 <file path=ppt/notesMasters/notesMaster1.xml><?xml version="1.0" encoding="utf-8"?>
@@ -989,7 +538,7 @@
           <a:p>
             <a:r>
               <a:rPr lang="en-US" dirty="0"/>
-              <a:t>Hello, I'm Reina Ikeda, a first-year master's student at Tokyo Metropolitan University. I'll introduce my research on understanding why users hesitate, from my undergraduate thesis to my master's work.</a:t>
+              <a:t>Hello, I'm Reina Ikeda, a first-year master's student at Tokyo Metropolitan University. I'll introduce my research on why users hesitate, from my thesis to my master's work.</a:t>
             </a:r>
             <a:endParaRPr lang="en-US" dirty="0"/>
           </a:p>
@@ -1077,7 +626,7 @@
           <a:p>
             <a:r>
               <a:rPr lang="en-US" dirty="0"/>
-              <a:t>Usability tests often use the think-aloud method: users speak their thoughts while operating a product. It reveals why people struggle, but talking while acting is a burden and can change natural behavior. My idea is to use eye movements and screen information, together with a large language model, to understand hesitation without that burden. My thesis predicted think-aloud; my master's research explains where and why users get stuck.</a:t>
+              <a:t>Usability tests often use think-aloud: users speak their thoughts while operating a product. It reveals why people struggle, but talking while acting is a burden and can change behavior. My idea is to combine gaze, screen information and a large language model. My thesis predicted think-aloud; my master's research explains where and why users get stuck. I would especially like advice on the evaluation design and the sample size.</a:t>
             </a:r>
             <a:endParaRPr lang="en-US" dirty="0"/>
           </a:p>
@@ -1165,7 +714,7 @@
           <a:p>
             <a:r>
               <a:rPr lang="en-US" dirty="0"/>
-              <a:t>In my thesis I proposed EsTA, which predicts think-aloud from gaze and UI information. A 120-hertz eye tracker records fixations, saccades and pupil size, and we add element coordinates and HTML code. GPT-4 receives both and writes the think-aloud as natural text, including doubt. As a baseline, InTA uses UI information only. Twenty university students performed four conditions: good or bad UI, on shopping and video sites. The bad UIs deliberately violated Nielsen's heuristics.</a:t>
+              <a:t>In my thesis, EsTA gives GPT-4 two inputs: gaze from a 120-hertz eye tracker, and UI information such as element coordinates and HTML. GPT-4 writes the think-aloud. The baseline, InTA, uses UI information only. Twenty students used good and bad UIs on shopping and video sites.</a:t>
             </a:r>
             <a:endParaRPr lang="en-US" dirty="0"/>
           </a:p>
@@ -1253,7 +802,7 @@
           <a:p>
             <a:r>
               <a:rPr lang="en-US" dirty="0"/>
-              <a:t>We measured similarity to what participants actually said, using BERTScore. Both methods exceeded 0.617, a machine-translation benchmark, in every condition. EsTA was slightly lower in three of four conditions. Reading the outputs showed why: EsTA wrote thoughts users never voiced, which the metric counts as saying too much.</a:t>
+              <a:t>We compared the output with what participants actually said, using BERTScore. Every score exceeded 0.617, a machine-translation benchmark. Adding gaze changed the score by at most 0.012, and EsTA was slightly lower in three of four conditions. Reading the outputs, EsTA sometimes wrote thoughts that users never voiced.</a:t>
             </a:r>
             <a:endParaRPr lang="en-US" dirty="0"/>
           </a:p>
@@ -1341,7 +890,7 @@
           <a:p>
             <a:r>
               <a:rPr lang="en-US" dirty="0"/>
-              <a:t>Here is a cart-checking scene. The participant said they would now check the cart. The UI-only output skipped the checking and said the budget comes later. EsTA described adding shipping to reach 12,900 yen and confirming it fit the budget, which matched the gaze moving through the prices. So gaze recovered a calculation that was never spoken. This was presented at the Japan Ergonomics Society last December.</a:t>
+              <a:t>Here is one cart-checking scene. The user said they would check the cart. The UI-only output skipped ahead to the budget. EsTA described adding shipping and confirming the budget, which was consistent with the gaze moving through the prices. This is a single example. It also shows the problem: EsTA can say too much, and time order was weakly handled.</a:t>
             </a:r>
             <a:endParaRPr lang="en-US" dirty="0"/>
           </a:p>
@@ -1429,7 +978,7 @@
           <a:p>
             <a:r>
               <a:rPr lang="en-US" dirty="0"/>
-              <a:t>The thesis left two challenges: the model sometimes says too much, and time order is weakly handled. So in my master's research I changed the goal and the evaluation. The tool now explains what users struggle with, and I check it against key points made by a human analyst. Saying too much becomes a number: the over-claim rate.</a:t>
+              <a:t>So in my master's research, the tool explains what users struggle with, and I measure how well. The input is gaze metrics, dwell time and visits per design technique, plus UI structure: HTML, CSS and task. The LLM writes which element, on which screen, and why it caused trouble. A human analyst's key points, covering where, when and why, are never given to the LLM. I score recall, and the over-claim rate, which makes saying too much measurable.</a:t>
             </a:r>
             <a:endParaRPr lang="en-US" dirty="0"/>
           </a:p>
@@ -1517,7 +1066,7 @@
           <a:p>
             <a:r>
               <a:rPr lang="en-US" dirty="0"/>
-              <a:t>The tool takes two inputs. From gaze: dwell time and visit counts for each design technique, compared between good and bad versions. From the UI: which screen contains which technique, the HTML and CSS, and the task context. The LLM writes, for each technique, which element, on which screen, and why it caused trouble, plus a summary and suggestions. The core value is integrating two different modalities and explaining them; judging hesitation itself is not the goal. I evaluate against human key points, covering where, when and why, using recall and over-claim rate. These key points are never given to the LLM.</a:t>
+              <a:t>I built mock shopping and job-search sites. Each bad technique is grounded in the literature, for example decoys with similar names, shifting button positions, and low-contrast progress indicators. Each technique has its own version, plus one with all of them, so effects can be separated. Nothing scrolls, so gaze coordinates stay reliable.</a:t>
             </a:r>
             <a:endParaRPr lang="en-US" dirty="0"/>
           </a:p>
@@ -1605,7 +1154,7 @@
           <a:p>
             <a:r>
               <a:rPr lang="en-US" dirty="0"/>
-              <a:t>The test sites are mock shopping and job-search sites. The bad versions embed five techniques, each grounded in the literature: decoys with similar names, decorative noise, shifting button positions, inconsistent design, and a low-contrast progress indicator. Each technique has its own version, so effects can be separated, plus one version with all five. Nothing scrolls, so gaze coordinates stay reliable, and twenty areas of interest are defined on every site.</a:t>
+              <a:t>Prototypes for both sites are done and a six-person pilot is planned. So far I only have a three-person preliminary study and a wiring check with mock LLM responses, so I cannot claim results. The main study will recruit forty to sixty-four participants. I would welcome advice on the evaluation design and the sample size. Thank you.</a:t>
             </a:r>
             <a:endParaRPr lang="en-US" dirty="0"/>
           </a:p>
@@ -1629,94 +1178,6 @@
             <a:fld id="{F7021451-1387-4CA6-816F-3879F97B5CBC}" type="slidenum">
               <a:rPr lang="en-US"/>
               <a:t>8</a:t>
-            </a:fld>
-            <a:endParaRPr lang="en-US"/>
-          </a:p>
-        </p:txBody>
-      </p:sp>
-    </p:spTree>
-    <p:extLst>
-      <p:ext uri="{BB962C8B-B14F-4D97-AF65-F5344CB8AC3E}">
-        <p14:creationId xmlns:p14="http://schemas.microsoft.com/office/powerpoint/2010/main" val="1024086991"/>
-      </p:ext>
-    </p:extLst>
-  </p:cSld>
-  <p:clrMapOvr>
-    <a:masterClrMapping/>
-  </p:clrMapOvr>
-</p:notes>
-</file>
-
-<file path=ppt/notesSlides/notesSlide9.xml><?xml version="1.0" encoding="utf-8"?>
-<p:notes xmlns:a="http://schemas.openxmlformats.org/drawingml/2006/main" xmlns:r="http://schemas.openxmlformats.org/officeDocument/2006/relationships" xmlns:p="http://schemas.openxmlformats.org/presentationml/2006/main">
-  <p:cSld>
-    <p:spTree>
-      <p:nvGrpSpPr>
-        <p:cNvPr id="1" name=""/>
-        <p:cNvGrpSpPr/>
-        <p:nvPr/>
-      </p:nvGrpSpPr>
-      <p:grpSpPr>
-        <a:xfrm>
-          <a:off x="0" y="0"/>
-          <a:ext cx="0" cy="0"/>
-          <a:chOff x="0" y="0"/>
-          <a:chExt cx="0" cy="0"/>
-        </a:xfrm>
-      </p:grpSpPr>
-      <p:sp>
-        <p:nvSpPr>
-          <p:cNvPr id="2" name="Slide Image Placeholder 1"/>
-          <p:cNvSpPr>
-            <a:spLocks noGrp="1" noRot="1" noChangeAspect="1"/>
-          </p:cNvSpPr>
-          <p:nvPr>
-            <p:ph type="sldImg"/>
-          </p:nvPr>
-        </p:nvSpPr>
-        <p:spPr/>
-      </p:sp>
-      <p:sp>
-        <p:nvSpPr>
-          <p:cNvPr id="3" name="Notes Placeholder 2"/>
-          <p:cNvSpPr>
-            <a:spLocks noGrp="1"/>
-          </p:cNvSpPr>
-          <p:nvPr>
-            <p:ph type="body" idx="1"/>
-          </p:nvPr>
-        </p:nvSpPr>
-        <p:spPr/>
-        <p:txBody>
-          <a:bodyPr/>
-          <a:lstStyle/>
-          <a:p>
-            <a:r>
-              <a:rPr lang="en-US" dirty="0"/>
-              <a:t>Prototypes for both sites are complete, and a six-person pilot is planned. So far I only have a three-person preliminary study and a wiring check with mock LLM responses, so I cannot claim results yet; the main study will recruit forty to sixty-four participants. Whatever the outcome, showing where an LLM's interpretation breaks down is itself a useful finding. My goal is to help UX teams find where and why users hesitate, with less burden on users. Thank you.</a:t>
-            </a:r>
-            <a:endParaRPr lang="en-US" dirty="0"/>
-          </a:p>
-        </p:txBody>
-      </p:sp>
-      <p:sp>
-        <p:nvSpPr>
-          <p:cNvPr id="4" name="Slide Number Placeholder 3"/>
-          <p:cNvSpPr>
-            <a:spLocks noGrp="1"/>
-          </p:cNvSpPr>
-          <p:nvPr>
-            <p:ph type="sldNum" sz="quarter" idx="10"/>
-          </p:nvPr>
-        </p:nvSpPr>
-        <p:spPr/>
-        <p:txBody>
-          <a:bodyPr/>
-          <a:lstStyle/>
-          <a:p>
-            <a:fld id="{F7021451-1387-4CA6-816F-3879F97B5CBC}" type="slidenum">
-              <a:rPr lang="en-US"/>
-              <a:t>9</a:t>
             </a:fld>
             <a:endParaRPr lang="en-US"/>
           </a:p>
@@ -1829,8 +1290,8 @@
         </p:nvSpPr>
         <p:spPr>
           <a:xfrm>
-            <a:off x="6949440" y="4800600"/>
-            <a:ext cx="1280160" cy="228600"/>
+            <a:off x="9052560" y="6382512"/>
+            <a:ext cx="2011680" cy="292608"/>
           </a:xfrm>
           <a:prstGeom prst="rect">
             <a:avLst/>
@@ -1846,14 +1307,14 @@
               <a:buNone/>
             </a:pPr>
             <a:r>
-              <a:rPr lang="en-US" sz="900" dirty="0">
+              <a:rPr lang="en-US" sz="1800" dirty="0">
                 <a:solidFill>
                   <a:schemeClr val="tx2"/>
                 </a:solidFill>
               </a:rPr>
               <a:t>Reina Ikeda</a:t>
             </a:r>
-            <a:endParaRPr lang="en-US" sz="900" dirty="0"/>
+            <a:endParaRPr lang="en-US" sz="1800" dirty="0"/>
           </a:p>
         </p:txBody>
       </p:sp>
@@ -1869,8 +1330,8 @@
         </p:nvSpPr>
         <p:spPr>
           <a:xfrm>
-            <a:off x="8321040" y="4800600"/>
-            <a:ext cx="365760" cy="228600"/>
+            <a:off x="11155680" y="6382512"/>
+            <a:ext cx="411480" cy="292608"/>
           </a:xfrm>
           <a:prstGeom prst="rect">
             <a:avLst/>
@@ -1885,7 +1346,7 @@
           <a:bodyPr/>
           <a:lstStyle>
             <a:lvl1pPr>
-              <a:defRPr sz="900">
+              <a:defRPr sz="1800">
                 <a:solidFill>
                   <a:schemeClr val="tx1"/>
                 </a:solidFill>
@@ -1939,8 +1400,8 @@
         </p:nvSpPr>
         <p:spPr>
           <a:xfrm>
-            <a:off x="8321040" y="4800600"/>
-            <a:ext cx="365760" cy="228600"/>
+            <a:off x="11155680" y="6382512"/>
+            <a:ext cx="411480" cy="292608"/>
           </a:xfrm>
           <a:prstGeom prst="rect">
             <a:avLst/>
@@ -1955,7 +1416,7 @@
           <a:bodyPr/>
           <a:lstStyle>
             <a:lvl1pPr>
-              <a:defRPr sz="900">
+              <a:defRPr sz="1800">
                 <a:solidFill>
                   <a:schemeClr val="tx1"/>
                 </a:solidFill>
@@ -2259,8 +1720,8 @@
         </p:nvSpPr>
         <p:spPr>
           <a:xfrm>
-            <a:off x="182880" y="182880"/>
-            <a:ext cx="4572000" cy="274320"/>
+            <a:off x="274320" y="274320"/>
+            <a:ext cx="6400800" cy="365760"/>
           </a:xfrm>
           <a:prstGeom prst="rect">
             <a:avLst/>
@@ -2276,14 +1737,14 @@
               <a:buNone/>
             </a:pPr>
             <a:r>
-              <a:rPr lang="en-US" sz="1200" b="1" dirty="0">
+              <a:rPr lang="en-US" sz="2000" b="1" dirty="0">
                 <a:solidFill>
                   <a:schemeClr val="bg1"/>
                 </a:solidFill>
               </a:rPr>
               <a:t>Tokyo Metropolitan University</a:t>
             </a:r>
-            <a:endParaRPr lang="en-US" sz="1200" dirty="0"/>
+            <a:endParaRPr lang="en-US" sz="2000" dirty="0"/>
           </a:p>
         </p:txBody>
       </p:sp>
@@ -2295,8 +1756,8 @@
         </p:nvSpPr>
         <p:spPr>
           <a:xfrm>
-            <a:off x="914400" y="1325880"/>
-            <a:ext cx="7498080" cy="1371600"/>
+            <a:off x="1188720" y="1828800"/>
+            <a:ext cx="10058400" cy="1280160"/>
           </a:xfrm>
           <a:prstGeom prst="rect">
             <a:avLst/>
@@ -2312,14 +1773,14 @@
               <a:buNone/>
             </a:pPr>
             <a:r>
-              <a:rPr lang="en-US" sz="4000" dirty="0">
+              <a:rPr lang="en-US" sz="5400" dirty="0">
                 <a:solidFill>
                   <a:schemeClr val="bg1"/>
                 </a:solidFill>
               </a:rPr>
               <a:t>Understanding Why Users Hesitate</a:t>
             </a:r>
-            <a:endParaRPr lang="en-US" sz="4000" dirty="0"/>
+            <a:endParaRPr lang="en-US" sz="5400" dirty="0"/>
           </a:p>
         </p:txBody>
       </p:sp>
@@ -2331,8 +1792,8 @@
         </p:nvSpPr>
         <p:spPr>
           <a:xfrm>
-            <a:off x="914400" y="2743200"/>
-            <a:ext cx="7315200" cy="411480"/>
+            <a:off x="1188720" y="3291840"/>
+            <a:ext cx="10058400" cy="548640"/>
           </a:xfrm>
           <a:prstGeom prst="rect">
             <a:avLst/>
@@ -2348,14 +1809,14 @@
               <a:buNone/>
             </a:pPr>
             <a:r>
-              <a:rPr lang="en-US" sz="2000" dirty="0">
+              <a:rPr lang="en-US" sz="2800" dirty="0">
                 <a:solidFill>
                   <a:schemeClr val="bg1"/>
                 </a:solidFill>
               </a:rPr>
               <a:t>From think-aloud prediction to LLM-based gaze interpretation</a:t>
             </a:r>
-            <a:endParaRPr lang="en-US" sz="2000" dirty="0"/>
+            <a:endParaRPr lang="en-US" sz="2800" dirty="0"/>
           </a:p>
         </p:txBody>
       </p:sp>
@@ -2367,8 +1828,8 @@
         </p:nvSpPr>
         <p:spPr>
           <a:xfrm>
-            <a:off x="914400" y="3657600"/>
-            <a:ext cx="2971800" cy="457200"/>
+            <a:off x="1188720" y="4754880"/>
+            <a:ext cx="5120640" cy="594360"/>
           </a:xfrm>
           <a:prstGeom prst="rect">
             <a:avLst/>
@@ -2392,8 +1853,8 @@
         </p:nvSpPr>
         <p:spPr>
           <a:xfrm>
-            <a:off x="914400" y="3657600"/>
-            <a:ext cx="2971800" cy="457200"/>
+            <a:off x="1188720" y="4754880"/>
+            <a:ext cx="5120640" cy="594360"/>
           </a:xfrm>
           <a:prstGeom prst="rect">
             <a:avLst/>
@@ -2409,14 +1870,14 @@
               <a:buNone/>
             </a:pPr>
             <a:r>
-              <a:rPr lang="en-US" sz="1300" dirty="0">
+              <a:rPr lang="en-US" sz="2000" dirty="0">
                 <a:solidFill>
                   <a:schemeClr val="bg1"/>
                 </a:solidFill>
               </a:rPr>
               <a:t>Reina Ikeda · Master's student, 1st year</a:t>
             </a:r>
-            <a:endParaRPr lang="en-US" sz="1300" dirty="0"/>
+            <a:endParaRPr lang="en-US" sz="2000" dirty="0"/>
           </a:p>
         </p:txBody>
       </p:sp>
@@ -2453,8 +1914,8 @@
         </p:nvSpPr>
         <p:spPr>
           <a:xfrm>
-            <a:off x="457200" y="219456"/>
-            <a:ext cx="5486400" cy="237744"/>
+            <a:off x="640080" y="256032"/>
+            <a:ext cx="7315200" cy="329184"/>
           </a:xfrm>
           <a:prstGeom prst="rect">
             <a:avLst/>
@@ -2470,14 +1931,14 @@
               <a:buNone/>
             </a:pPr>
             <a:r>
-              <a:rPr lang="en-US" sz="1200" b="1" dirty="0">
+              <a:rPr lang="en-US" sz="2000" b="1" dirty="0">
                 <a:solidFill>
                   <a:schemeClr val="tx2"/>
                 </a:solidFill>
               </a:rPr>
-              <a:t>Overview</a:t>
-            </a:r>
-            <a:endParaRPr lang="en-US" sz="1200" dirty="0"/>
+              <a:t>Background and objective</a:t>
+            </a:r>
+            <a:endParaRPr lang="en-US" sz="2000" dirty="0"/>
           </a:p>
         </p:txBody>
       </p:sp>
@@ -2489,8 +1950,8 @@
         </p:nvSpPr>
         <p:spPr>
           <a:xfrm>
-            <a:off x="457200" y="457200"/>
-            <a:ext cx="8229600" cy="594360"/>
+            <a:off x="640080" y="594360"/>
+            <a:ext cx="10881360" cy="731520"/>
           </a:xfrm>
           <a:prstGeom prst="rect">
             <a:avLst/>
@@ -2506,14 +1967,14 @@
               <a:buNone/>
             </a:pPr>
             <a:r>
-              <a:rPr lang="en-US" sz="2600" b="1" dirty="0">
+              <a:rPr lang="en-US" sz="2800" b="1" dirty="0">
                 <a:solidFill>
                   <a:schemeClr val="tx2"/>
                 </a:solidFill>
               </a:rPr>
-              <a:t>Think-aloud explains why, but at a cost</a:t>
-            </a:r>
-            <a:endParaRPr lang="en-US" sz="2600" dirty="0"/>
+              <a:t>Think-aloud explains hesitation, but it burdens users.</a:t>
+            </a:r>
+            <a:endParaRPr lang="en-US" sz="2800" dirty="0"/>
           </a:p>
         </p:txBody>
       </p:sp>
@@ -2525,18 +1986,18 @@
         </p:nvSpPr>
         <p:spPr>
           <a:xfrm>
-            <a:off x="457200" y="1325880"/>
-            <a:ext cx="2514600" cy="3017520"/>
+            <a:off x="640080" y="1600200"/>
+            <a:ext cx="3319272" cy="3108960"/>
           </a:xfrm>
           <a:prstGeom prst="roundRect">
             <a:avLst>
-              <a:gd name="adj" fmla="val 2909"/>
+              <a:gd name="adj" fmla="val 2941"/>
             </a:avLst>
           </a:prstGeom>
           <a:solidFill>
             <a:schemeClr val="bg2"/>
           </a:solidFill>
-          <a:ln w="9525">
+          <a:ln w="12700">
             <a:solidFill>
               <a:srgbClr val="CCCCCC"/>
             </a:solidFill>
@@ -2552,8 +2013,8 @@
         </p:nvSpPr>
         <p:spPr>
           <a:xfrm>
-            <a:off x="594360" y="1463040"/>
-            <a:ext cx="2240280" cy="2743200"/>
+            <a:off x="731520" y="1691640"/>
+            <a:ext cx="3136392" cy="2926080"/>
           </a:xfrm>
           <a:prstGeom prst="rect">
             <a:avLst/>
@@ -2562,96 +2023,68 @@
           <a:ln/>
         </p:spPr>
         <p:txBody>
-          <a:bodyPr wrap="square" lIns="1016" tIns="1016" rIns="1016" bIns="1016" rtlCol="0" anchor="t"/>
-          <a:lstStyle/>
-          <a:p>
-            <a:pPr indent="0" marL="0">
-              <a:buNone/>
-            </a:pPr>
-            <a:r>
-              <a:rPr lang="en-US" sz="1800" b="1" dirty="0">
+          <a:bodyPr wrap="square" lIns="1270" tIns="1270" rIns="1270" bIns="1270" rtlCol="0" anchor="t"/>
+          <a:lstStyle/>
+          <a:p>
+            <a:pPr indent="0" marL="0">
+              <a:buNone/>
+            </a:pPr>
+            <a:r>
+              <a:rPr lang="en-US" sz="2400" b="1" dirty="0">
                 <a:solidFill>
                   <a:schemeClr val="tx2"/>
                 </a:solidFill>
               </a:rPr>
               <a:t>Problem</a:t>
             </a:r>
-            <a:endParaRPr lang="en-US" sz="1400" dirty="0"/>
-          </a:p>
-          <a:p>
-            <a:pPr indent="0" marL="0">
-              <a:buNone/>
-            </a:pPr>
-            <a:r>
-              <a:rPr lang="en-US" sz="600" b="1" dirty="0">
+            <a:endParaRPr lang="en-US" sz="2000" dirty="0"/>
+          </a:p>
+          <a:p>
+            <a:pPr indent="0" marL="0">
+              <a:buNone/>
+            </a:pPr>
+            <a:r>
+              <a:rPr lang="en-US" sz="2000" b="1" dirty="0">
                 <a:solidFill>
                   <a:schemeClr val="tx1"/>
                 </a:solidFill>
               </a:rPr>
-              <a:t> </a:t>
-            </a:r>
-            <a:endParaRPr lang="en-US" sz="1400" dirty="0"/>
-          </a:p>
-          <a:p>
-            <a:pPr indent="0" marL="0">
-              <a:buNone/>
-            </a:pPr>
-            <a:r>
-              <a:rPr lang="en-US" sz="1500" b="1" dirty="0">
-                <a:solidFill>
-                  <a:schemeClr val="tx1"/>
-                </a:solidFill>
-              </a:rPr>
               <a:t>Think-aloud shows why users struggle.</a:t>
             </a:r>
-            <a:endParaRPr lang="en-US" sz="1400" dirty="0"/>
-          </a:p>
-          <a:p>
-            <a:pPr indent="0" marL="0">
-              <a:buNone/>
-            </a:pPr>
-            <a:r>
-              <a:rPr lang="en-US" sz="600" b="1" dirty="0">
-                <a:solidFill>
-                  <a:schemeClr val="tx1"/>
-                </a:solidFill>
-              </a:rPr>
-              <a:t> </a:t>
-            </a:r>
-            <a:endParaRPr lang="en-US" sz="1400" dirty="0"/>
-          </a:p>
-          <a:p>
-            <a:pPr indent="0" marL="0">
-              <a:buNone/>
-            </a:pPr>
-            <a:r>
-              <a:rPr lang="en-US" sz="1400" dirty="0">
+            <a:endParaRPr lang="en-US" sz="2000" dirty="0"/>
+          </a:p>
+          <a:p>
+            <a:pPr indent="0" marL="0">
+              <a:buNone/>
+            </a:pPr>
+            <a:r>
+              <a:rPr lang="en-US" sz="2000" dirty="0">
                 <a:solidFill>
                   <a:schemeClr val="accent3"/>
                 </a:solidFill>
               </a:rPr>
-              <a:t>But talking while acting is a burden and can change natural behavior.</a:t>
-            </a:r>
-            <a:endParaRPr lang="en-US" sz="1400" dirty="0"/>
-          </a:p>
-        </p:txBody>
-      </p:sp>
-      <p:sp>
-        <p:nvSpPr>
-          <p:cNvPr id="7" name="Arrow problem-idea"/>
+              <a:t>Speaking while acting is a burden and can change behavior.</a:t>
+            </a:r>
+            <a:endParaRPr lang="en-US" sz="2000" dirty="0"/>
+          </a:p>
+        </p:txBody>
+      </p:sp>
+      <p:sp>
+        <p:nvSpPr>
+          <p:cNvPr id="7" name="Arrow 1"/>
           <p:cNvSpPr/>
           <p:nvPr/>
         </p:nvSpPr>
         <p:spPr>
           <a:xfrm>
-            <a:off x="3017520" y="2834640"/>
-            <a:ext cx="365760" cy="0"/>
+            <a:off x="4005072" y="3154680"/>
+            <a:ext cx="384048" cy="0"/>
           </a:xfrm>
           <a:prstGeom prst="line">
             <a:avLst/>
           </a:prstGeom>
           <a:noFill/>
-          <a:ln w="15875">
+          <a:ln w="19050">
             <a:solidFill>
               <a:schemeClr val="tx1"/>
             </a:solidFill>
@@ -2668,18 +2101,18 @@
         </p:nvSpPr>
         <p:spPr>
           <a:xfrm>
-            <a:off x="3429000" y="1325880"/>
-            <a:ext cx="2514600" cy="3017520"/>
+            <a:off x="4434840" y="1600200"/>
+            <a:ext cx="3319272" cy="3108960"/>
           </a:xfrm>
           <a:prstGeom prst="roundRect">
             <a:avLst>
-              <a:gd name="adj" fmla="val 2909"/>
+              <a:gd name="adj" fmla="val 2941"/>
             </a:avLst>
           </a:prstGeom>
           <a:solidFill>
             <a:schemeClr val="accent6"/>
           </a:solidFill>
-          <a:ln w="9525">
+          <a:ln w="12700">
             <a:solidFill>
               <a:schemeClr val="accent5"/>
             </a:solidFill>
@@ -2695,8 +2128,8 @@
         </p:nvSpPr>
         <p:spPr>
           <a:xfrm>
-            <a:off x="3566160" y="1463040"/>
-            <a:ext cx="2240280" cy="2743200"/>
+            <a:off x="4526280" y="1691640"/>
+            <a:ext cx="3136392" cy="2926080"/>
           </a:xfrm>
           <a:prstGeom prst="rect">
             <a:avLst/>
@@ -2705,96 +2138,68 @@
           <a:ln/>
         </p:spPr>
         <p:txBody>
-          <a:bodyPr wrap="square" lIns="1016" tIns="1016" rIns="1016" bIns="1016" rtlCol="0" anchor="t"/>
-          <a:lstStyle/>
-          <a:p>
-            <a:pPr indent="0" marL="0">
-              <a:buNone/>
-            </a:pPr>
-            <a:r>
-              <a:rPr lang="en-US" sz="1800" b="1" dirty="0">
+          <a:bodyPr wrap="square" lIns="1270" tIns="1270" rIns="1270" bIns="1270" rtlCol="0" anchor="t"/>
+          <a:lstStyle/>
+          <a:p>
+            <a:pPr indent="0" marL="0">
+              <a:buNone/>
+            </a:pPr>
+            <a:r>
+              <a:rPr lang="en-US" sz="2400" b="1" dirty="0">
                 <a:solidFill>
                   <a:schemeClr val="tx2"/>
                 </a:solidFill>
               </a:rPr>
               <a:t>Idea</a:t>
             </a:r>
-            <a:endParaRPr lang="en-US" sz="1400" dirty="0"/>
-          </a:p>
-          <a:p>
-            <a:pPr indent="0" marL="0">
-              <a:buNone/>
-            </a:pPr>
-            <a:r>
-              <a:rPr lang="en-US" sz="600" b="1" dirty="0">
+            <a:endParaRPr lang="en-US" sz="2000" dirty="0"/>
+          </a:p>
+          <a:p>
+            <a:pPr indent="0" marL="0">
+              <a:buNone/>
+            </a:pPr>
+            <a:r>
+              <a:rPr lang="en-US" sz="2000" b="1" dirty="0">
                 <a:solidFill>
                   <a:schemeClr val="tx1"/>
                 </a:solidFill>
               </a:rPr>
-              <a:t> </a:t>
-            </a:r>
-            <a:endParaRPr lang="en-US" sz="1400" dirty="0"/>
-          </a:p>
-          <a:p>
-            <a:pPr indent="0" marL="0">
-              <a:buNone/>
-            </a:pPr>
-            <a:r>
-              <a:rPr lang="en-US" sz="1500" b="1" dirty="0">
-                <a:solidFill>
-                  <a:schemeClr val="tx1"/>
-                </a:solidFill>
-              </a:rPr>
               <a:t>Gaze + UI information + LLM</a:t>
             </a:r>
-            <a:endParaRPr lang="en-US" sz="1400" dirty="0"/>
-          </a:p>
-          <a:p>
-            <a:pPr indent="0" marL="0">
-              <a:buNone/>
-            </a:pPr>
-            <a:r>
-              <a:rPr lang="en-US" sz="600" b="1" dirty="0">
-                <a:solidFill>
-                  <a:schemeClr val="tx1"/>
-                </a:solidFill>
-              </a:rPr>
-              <a:t> </a:t>
-            </a:r>
-            <a:endParaRPr lang="en-US" sz="1400" dirty="0"/>
-          </a:p>
-          <a:p>
-            <a:pPr indent="0" marL="0">
-              <a:buNone/>
-            </a:pPr>
-            <a:r>
-              <a:rPr lang="en-US" sz="1400" dirty="0">
+            <a:endParaRPr lang="en-US" sz="2000" dirty="0"/>
+          </a:p>
+          <a:p>
+            <a:pPr indent="0" marL="0">
+              <a:buNone/>
+            </a:pPr>
+            <a:r>
+              <a:rPr lang="en-US" sz="2000" dirty="0">
                 <a:solidFill>
                   <a:schemeClr val="accent3"/>
                 </a:solidFill>
               </a:rPr>
               <a:t>Understand hesitation without asking users to speak.</a:t>
             </a:r>
-            <a:endParaRPr lang="en-US" sz="1400" dirty="0"/>
-          </a:p>
-        </p:txBody>
-      </p:sp>
-      <p:sp>
-        <p:nvSpPr>
-          <p:cNvPr id="10" name="Arrow idea-stages"/>
+            <a:endParaRPr lang="en-US" sz="2000" dirty="0"/>
+          </a:p>
+        </p:txBody>
+      </p:sp>
+      <p:sp>
+        <p:nvSpPr>
+          <p:cNvPr id="10" name="Arrow 2"/>
           <p:cNvSpPr/>
           <p:nvPr/>
         </p:nvSpPr>
         <p:spPr>
           <a:xfrm>
-            <a:off x="5989320" y="2834640"/>
-            <a:ext cx="365760" cy="0"/>
+            <a:off x="7799832" y="3154680"/>
+            <a:ext cx="384048" cy="0"/>
           </a:xfrm>
           <a:prstGeom prst="line">
             <a:avLst/>
           </a:prstGeom>
           <a:noFill/>
-          <a:ln w="15875">
+          <a:ln w="19050">
             <a:solidFill>
               <a:schemeClr val="tx1"/>
             </a:solidFill>
@@ -2811,18 +2216,18 @@
         </p:nvSpPr>
         <p:spPr>
           <a:xfrm>
-            <a:off x="6400800" y="1325880"/>
-            <a:ext cx="2286000" cy="3017520"/>
+            <a:off x="8229600" y="1600200"/>
+            <a:ext cx="3319272" cy="3108960"/>
           </a:xfrm>
           <a:prstGeom prst="roundRect">
             <a:avLst>
-              <a:gd name="adj" fmla="val 3200"/>
+              <a:gd name="adj" fmla="val 2941"/>
             </a:avLst>
           </a:prstGeom>
           <a:solidFill>
             <a:schemeClr val="bg2"/>
           </a:solidFill>
-          <a:ln w="9525">
+          <a:ln w="12700">
             <a:solidFill>
               <a:srgbClr val="CCCCCC"/>
             </a:solidFill>
@@ -2838,8 +2243,8 @@
         </p:nvSpPr>
         <p:spPr>
           <a:xfrm>
-            <a:off x="6537960" y="1463040"/>
-            <a:ext cx="2011680" cy="320040"/>
+            <a:off x="8321040" y="1691640"/>
+            <a:ext cx="3136392" cy="411480"/>
           </a:xfrm>
           <a:prstGeom prst="rect">
             <a:avLst/>
@@ -2848,21 +2253,21 @@
           <a:ln/>
         </p:spPr>
         <p:txBody>
-          <a:bodyPr wrap="square" lIns="1016" tIns="1016" rIns="1016" bIns="1016" rtlCol="0" anchor="t"/>
-          <a:lstStyle/>
-          <a:p>
-            <a:pPr indent="0" marL="0">
-              <a:buNone/>
-            </a:pPr>
-            <a:r>
-              <a:rPr lang="en-US" sz="1800" b="1" dirty="0">
+          <a:bodyPr wrap="square" lIns="1270" tIns="1270" rIns="1270" bIns="1270" rtlCol="0" anchor="t"/>
+          <a:lstStyle/>
+          <a:p>
+            <a:pPr indent="0" marL="0">
+              <a:buNone/>
+            </a:pPr>
+            <a:r>
+              <a:rPr lang="en-US" sz="2400" b="1" dirty="0">
                 <a:solidFill>
                   <a:schemeClr val="tx2"/>
                 </a:solidFill>
               </a:rPr>
               <a:t>Two stages</a:t>
             </a:r>
-            <a:endParaRPr lang="en-US" sz="1800" dirty="0"/>
+            <a:endParaRPr lang="en-US" sz="2400" dirty="0"/>
           </a:p>
         </p:txBody>
       </p:sp>
@@ -2874,18 +2279,18 @@
         </p:nvSpPr>
         <p:spPr>
           <a:xfrm>
-            <a:off x="6537960" y="1965960"/>
-            <a:ext cx="2011680" cy="960120"/>
+            <a:off x="8412480" y="2194560"/>
+            <a:ext cx="2953512" cy="914400"/>
           </a:xfrm>
           <a:prstGeom prst="roundRect">
             <a:avLst>
-              <a:gd name="adj" fmla="val 7619"/>
+              <a:gd name="adj" fmla="val 10000"/>
             </a:avLst>
           </a:prstGeom>
           <a:solidFill>
             <a:schemeClr val="bg1"/>
           </a:solidFill>
-          <a:ln w="9525">
+          <a:ln w="12700">
             <a:solidFill>
               <a:srgbClr val="CCCCCC"/>
             </a:solidFill>
@@ -2901,8 +2306,8 @@
         </p:nvSpPr>
         <p:spPr>
           <a:xfrm>
-            <a:off x="6583680" y="1965960"/>
-            <a:ext cx="1920240" cy="960120"/>
+            <a:off x="8458200" y="2194560"/>
+            <a:ext cx="2862072" cy="914400"/>
           </a:xfrm>
           <a:prstGeom prst="rect">
             <a:avLst/>
@@ -2911,35 +2316,35 @@
           <a:ln/>
         </p:spPr>
         <p:txBody>
-          <a:bodyPr wrap="square" lIns="1016" tIns="1016" rIns="1016" bIns="1016" rtlCol="0" anchor="ctr"/>
-          <a:lstStyle/>
-          <a:p>
-            <a:pPr indent="0" marL="0">
-              <a:buNone/>
-            </a:pPr>
-            <a:r>
-              <a:rPr lang="en-US" sz="1400" b="1" dirty="0">
+          <a:bodyPr wrap="square" lIns="1270" tIns="1270" rIns="1270" bIns="1270" rtlCol="0" anchor="ctr"/>
+          <a:lstStyle/>
+          <a:p>
+            <a:pPr indent="0" marL="0">
+              <a:buNone/>
+            </a:pPr>
+            <a:r>
+              <a:rPr lang="en-US" sz="2000" b="1" dirty="0">
                 <a:solidFill>
                   <a:schemeClr val="tx1"/>
                 </a:solidFill>
               </a:rPr>
               <a:t>Undergraduate</a:t>
             </a:r>
-            <a:endParaRPr lang="en-US" sz="1400" dirty="0"/>
-          </a:p>
-          <a:p>
-            <a:pPr indent="0" marL="0">
-              <a:buNone/>
-            </a:pPr>
-            <a:r>
-              <a:rPr lang="en-US" sz="1300" dirty="0">
+            <a:endParaRPr lang="en-US" sz="2000" dirty="0"/>
+          </a:p>
+          <a:p>
+            <a:pPr indent="0" marL="0">
+              <a:buNone/>
+            </a:pPr>
+            <a:r>
+              <a:rPr lang="en-US" sz="2000" dirty="0">
                 <a:solidFill>
                   <a:schemeClr val="accent3"/>
                 </a:solidFill>
               </a:rPr>
               <a:t>Predict think-aloud</a:t>
             </a:r>
-            <a:endParaRPr lang="en-US" sz="1400" dirty="0"/>
+            <a:endParaRPr lang="en-US" sz="2000" dirty="0"/>
           </a:p>
         </p:txBody>
       </p:sp>
@@ -2951,14 +2356,14 @@
         </p:nvSpPr>
         <p:spPr>
           <a:xfrm>
-            <a:off x="7543800" y="2971800"/>
-            <a:ext cx="0" cy="320040"/>
+            <a:off x="9889236" y="3154680"/>
+            <a:ext cx="0" cy="274320"/>
           </a:xfrm>
           <a:prstGeom prst="line">
             <a:avLst/>
           </a:prstGeom>
           <a:noFill/>
-          <a:ln w="15875">
+          <a:ln w="19050">
             <a:solidFill>
               <a:schemeClr val="tx1"/>
             </a:solidFill>
@@ -2975,18 +2380,18 @@
         </p:nvSpPr>
         <p:spPr>
           <a:xfrm>
-            <a:off x="6537960" y="3337560"/>
-            <a:ext cx="2011680" cy="914400"/>
+            <a:off x="8412480" y="3474720"/>
+            <a:ext cx="2953512" cy="1097280"/>
           </a:xfrm>
           <a:prstGeom prst="roundRect">
             <a:avLst>
-              <a:gd name="adj" fmla="val 8000"/>
+              <a:gd name="adj" fmla="val 8333"/>
             </a:avLst>
           </a:prstGeom>
           <a:solidFill>
             <a:schemeClr val="tx2"/>
           </a:solidFill>
-          <a:ln w="9525">
+          <a:ln w="12700">
             <a:solidFill>
               <a:schemeClr val="tx2"/>
             </a:solidFill>
@@ -3002,8 +2407,8 @@
         </p:nvSpPr>
         <p:spPr>
           <a:xfrm>
-            <a:off x="6583680" y="3337560"/>
-            <a:ext cx="1920240" cy="914400"/>
+            <a:off x="8458200" y="3474720"/>
+            <a:ext cx="2862072" cy="1097280"/>
           </a:xfrm>
           <a:prstGeom prst="rect">
             <a:avLst/>
@@ -3012,35 +2417,109 @@
           <a:ln/>
         </p:spPr>
         <p:txBody>
-          <a:bodyPr wrap="square" lIns="1016" tIns="1016" rIns="1016" bIns="1016" rtlCol="0" anchor="ctr"/>
-          <a:lstStyle/>
-          <a:p>
-            <a:pPr indent="0" marL="0">
-              <a:buNone/>
-            </a:pPr>
-            <a:r>
-              <a:rPr lang="en-US" sz="1400" b="1" dirty="0">
+          <a:bodyPr wrap="square" lIns="1270" tIns="1270" rIns="1270" bIns="1270" rtlCol="0" anchor="ctr"/>
+          <a:lstStyle/>
+          <a:p>
+            <a:pPr indent="0" marL="0">
+              <a:buNone/>
+            </a:pPr>
+            <a:r>
+              <a:rPr lang="en-US" sz="2000" b="1" dirty="0">
                 <a:solidFill>
                   <a:schemeClr val="bg1"/>
                 </a:solidFill>
               </a:rPr>
               <a:t>Master's</a:t>
             </a:r>
-            <a:endParaRPr lang="en-US" sz="1400" dirty="0"/>
-          </a:p>
-          <a:p>
-            <a:pPr indent="0" marL="0">
-              <a:buNone/>
-            </a:pPr>
-            <a:r>
-              <a:rPr lang="en-US" sz="1300" dirty="0">
+            <a:endParaRPr lang="en-US" sz="2000" dirty="0"/>
+          </a:p>
+          <a:p>
+            <a:pPr indent="0" marL="0">
+              <a:buNone/>
+            </a:pPr>
+            <a:r>
+              <a:rPr lang="en-US" sz="2000" dirty="0">
                 <a:solidFill>
                   <a:schemeClr val="bg1"/>
                 </a:solidFill>
               </a:rPr>
               <a:t>Explain where and why</a:t>
             </a:r>
-            <a:endParaRPr lang="en-US" sz="1400" dirty="0"/>
+            <a:endParaRPr lang="en-US" sz="2000" dirty="0"/>
+          </a:p>
+        </p:txBody>
+      </p:sp>
+      <p:sp>
+        <p:nvSpPr>
+          <p:cNvPr id="18" name="Advice box"/>
+          <p:cNvSpPr/>
+          <p:nvPr/>
+        </p:nvSpPr>
+        <p:spPr>
+          <a:xfrm>
+            <a:off x="640080" y="5120640"/>
+            <a:ext cx="10908792" cy="777240"/>
+          </a:xfrm>
+          <a:prstGeom prst="roundRect">
+            <a:avLst>
+              <a:gd name="adj" fmla="val 11765"/>
+            </a:avLst>
+          </a:prstGeom>
+          <a:solidFill>
+            <a:srgbClr val="FDEEEE"/>
+          </a:solidFill>
+          <a:ln w="12700">
+            <a:solidFill>
+              <a:srgbClr val="FE3939"/>
+            </a:solidFill>
+            <a:prstDash val="solid"/>
+          </a:ln>
+        </p:spPr>
+      </p:sp>
+      <p:sp>
+        <p:nvSpPr>
+          <p:cNvPr id="19" name="Advice text"/>
+          <p:cNvSpPr txBox="1"/>
+          <p:nvPr/>
+        </p:nvSpPr>
+        <p:spPr>
+          <a:xfrm>
+            <a:off x="777240" y="5120640"/>
+            <a:ext cx="10607040" cy="777240"/>
+          </a:xfrm>
+          <a:prstGeom prst="rect">
+            <a:avLst/>
+          </a:prstGeom>
+          <a:noFill/>
+          <a:ln/>
+        </p:spPr>
+        <p:txBody>
+          <a:bodyPr wrap="square" lIns="1270" tIns="1270" rIns="1270" bIns="1270" rtlCol="0" anchor="ctr"/>
+          <a:lstStyle/>
+          <a:p>
+            <a:pPr indent="0" marL="0">
+              <a:buNone/>
+            </a:pPr>
+            <a:r>
+              <a:rPr lang="en-US" sz="2000" b="1" dirty="0">
+                <a:solidFill>
+                  <a:schemeClr val="accent4"/>
+                </a:solidFill>
+              </a:rPr>
+              <a:t>Advice wanted: </a:t>
+            </a:r>
+            <a:pPr indent="0" marL="0">
+              <a:buNone/>
+            </a:pPr>
+            <a:r>
+              <a:rPr lang="en-US" sz="2000" dirty="0">
+                <a:solidFill>
+                  <a:schemeClr val="tx1"/>
+                </a:solidFill>
+              </a:rPr>
+              <a:t>evaluation design and sample size</a:t>
+            </a:r>
+            <a:endParaRPr lang="en-US" sz="2000" dirty="0"/>
           </a:p>
         </p:txBody>
       </p:sp>
@@ -3056,8 +2535,8 @@
         </p:nvSpPr>
         <p:spPr>
           <a:xfrm>
-            <a:off x="8321040" y="4800600"/>
-            <a:ext cx="365760" cy="228600"/>
+            <a:off x="11155680" y="6382512"/>
+            <a:ext cx="411480" cy="292608"/>
           </a:xfrm>
           <a:prstGeom prst="rect">
             <a:avLst/>
@@ -3072,7 +2551,7 @@
           <a:bodyPr/>
           <a:lstStyle>
             <a:lvl1pPr>
-              <a:defRPr sz="900">
+              <a:defRPr sz="1800">
                 <a:solidFill>
                   <a:schemeClr val="tx1"/>
                 </a:solidFill>
@@ -3122,8 +2601,8 @@
         </p:nvSpPr>
         <p:spPr>
           <a:xfrm>
-            <a:off x="457200" y="219456"/>
-            <a:ext cx="5486400" cy="237744"/>
+            <a:off x="640080" y="256032"/>
+            <a:ext cx="7315200" cy="329184"/>
           </a:xfrm>
           <a:prstGeom prst="rect">
             <a:avLst/>
@@ -3139,14 +2618,14 @@
               <a:buNone/>
             </a:pPr>
             <a:r>
-              <a:rPr lang="en-US" sz="1200" b="1" dirty="0">
+              <a:rPr lang="en-US" sz="2000" b="1" dirty="0">
                 <a:solidFill>
                   <a:schemeClr val="tx2"/>
                 </a:solidFill>
               </a:rPr>
-              <a:t>Undergraduate · 1/3</a:t>
-            </a:r>
-            <a:endParaRPr lang="en-US" sz="1200" dirty="0"/>
+              <a:t>Undergraduate thesis · method</a:t>
+            </a:r>
+            <a:endParaRPr lang="en-US" sz="2000" dirty="0"/>
           </a:p>
         </p:txBody>
       </p:sp>
@@ -3158,8 +2637,8 @@
         </p:nvSpPr>
         <p:spPr>
           <a:xfrm>
-            <a:off x="457200" y="457200"/>
-            <a:ext cx="8229600" cy="594360"/>
+            <a:off x="640080" y="594360"/>
+            <a:ext cx="10881360" cy="731520"/>
           </a:xfrm>
           <a:prstGeom prst="rect">
             <a:avLst/>
@@ -3175,14 +2654,14 @@
               <a:buNone/>
             </a:pPr>
             <a:r>
-              <a:rPr lang="en-US" sz="2600" b="1" dirty="0">
+              <a:rPr lang="en-US" sz="2800" b="1" dirty="0">
                 <a:solidFill>
                   <a:schemeClr val="tx2"/>
                 </a:solidFill>
               </a:rPr>
-              <a:t>EsTA predicts think-aloud from gaze + UI</a:t>
-            </a:r>
-            <a:endParaRPr lang="en-US" sz="2600" dirty="0"/>
+              <a:t>EsTA asks an LLM to write think-aloud from gaze and UI information.</a:t>
+            </a:r>
+            <a:endParaRPr lang="en-US" sz="2800" dirty="0"/>
           </a:p>
         </p:txBody>
       </p:sp>
@@ -3194,8 +2673,8 @@
         </p:nvSpPr>
         <p:spPr>
           <a:xfrm>
-            <a:off x="457200" y="1280160"/>
-            <a:ext cx="2651760" cy="1097280"/>
+            <a:off x="640080" y="1600200"/>
+            <a:ext cx="3840480" cy="1371600"/>
           </a:xfrm>
           <a:prstGeom prst="roundRect">
             <a:avLst>
@@ -3205,7 +2684,7 @@
           <a:solidFill>
             <a:schemeClr val="bg2"/>
           </a:solidFill>
-          <a:ln w="9525">
+          <a:ln w="12700">
             <a:solidFill>
               <a:srgbClr val="CCCCCC"/>
             </a:solidFill>
@@ -3221,8 +2700,8 @@
         </p:nvSpPr>
         <p:spPr>
           <a:xfrm>
-            <a:off x="548640" y="1280160"/>
-            <a:ext cx="2468880" cy="1097280"/>
+            <a:off x="731520" y="1600200"/>
+            <a:ext cx="3657600" cy="1371600"/>
           </a:xfrm>
           <a:prstGeom prst="rect">
             <a:avLst/>
@@ -3231,35 +2710,35 @@
           <a:ln/>
         </p:spPr>
         <p:txBody>
-          <a:bodyPr wrap="square" lIns="1016" tIns="1016" rIns="1016" bIns="1016" rtlCol="0" anchor="ctr"/>
-          <a:lstStyle/>
-          <a:p>
-            <a:pPr indent="0" marL="0">
-              <a:buNone/>
-            </a:pPr>
-            <a:r>
-              <a:rPr lang="en-US" sz="1400" b="1" dirty="0">
+          <a:bodyPr wrap="square" lIns="1270" tIns="1270" rIns="1270" bIns="1270" rtlCol="0" anchor="ctr"/>
+          <a:lstStyle/>
+          <a:p>
+            <a:pPr indent="0" marL="0">
+              <a:buNone/>
+            </a:pPr>
+            <a:r>
+              <a:rPr lang="en-US" sz="2000" b="1" dirty="0">
                 <a:solidFill>
                   <a:schemeClr val="tx1"/>
                 </a:solidFill>
               </a:rPr>
               <a:t>Gaze (Tobii, 120 Hz)</a:t>
             </a:r>
-            <a:endParaRPr lang="en-US" sz="1400" dirty="0"/>
-          </a:p>
-          <a:p>
-            <a:pPr indent="0" marL="0">
-              <a:buNone/>
-            </a:pPr>
-            <a:r>
-              <a:rPr lang="en-US" sz="1300" dirty="0">
+            <a:endParaRPr lang="en-US" sz="2000" dirty="0"/>
+          </a:p>
+          <a:p>
+            <a:pPr indent="0" marL="0">
+              <a:buNone/>
+            </a:pPr>
+            <a:r>
+              <a:rPr lang="en-US" sz="2000" dirty="0">
                 <a:solidFill>
                   <a:schemeClr val="accent3"/>
                 </a:solidFill>
               </a:rPr>
-              <a:t>fixations · saccades · pupil size</a:t>
-            </a:r>
-            <a:endParaRPr lang="en-US" sz="1400" dirty="0"/>
+              <a:t>fixations, saccades, pupil size</a:t>
+            </a:r>
+            <a:endParaRPr lang="en-US" sz="2000" dirty="0"/>
           </a:p>
         </p:txBody>
       </p:sp>
@@ -3271,8 +2750,8 @@
         </p:nvSpPr>
         <p:spPr>
           <a:xfrm>
-            <a:off x="457200" y="2560320"/>
-            <a:ext cx="2651760" cy="1097280"/>
+            <a:off x="640080" y="3200400"/>
+            <a:ext cx="3840480" cy="1371600"/>
           </a:xfrm>
           <a:prstGeom prst="roundRect">
             <a:avLst>
@@ -3282,7 +2761,7 @@
           <a:solidFill>
             <a:schemeClr val="bg2"/>
           </a:solidFill>
-          <a:ln w="9525">
+          <a:ln w="12700">
             <a:solidFill>
               <a:srgbClr val="CCCCCC"/>
             </a:solidFill>
@@ -3298,8 +2777,8 @@
         </p:nvSpPr>
         <p:spPr>
           <a:xfrm>
-            <a:off x="548640" y="2560320"/>
-            <a:ext cx="2468880" cy="1097280"/>
+            <a:off x="731520" y="3200400"/>
+            <a:ext cx="3657600" cy="1371600"/>
           </a:xfrm>
           <a:prstGeom prst="rect">
             <a:avLst/>
@@ -3308,35 +2787,35 @@
           <a:ln/>
         </p:spPr>
         <p:txBody>
-          <a:bodyPr wrap="square" lIns="1016" tIns="1016" rIns="1016" bIns="1016" rtlCol="0" anchor="ctr"/>
-          <a:lstStyle/>
-          <a:p>
-            <a:pPr indent="0" marL="0">
-              <a:buNone/>
-            </a:pPr>
-            <a:r>
-              <a:rPr lang="en-US" sz="1400" b="1" dirty="0">
+          <a:bodyPr wrap="square" lIns="1270" tIns="1270" rIns="1270" bIns="1270" rtlCol="0" anchor="ctr"/>
+          <a:lstStyle/>
+          <a:p>
+            <a:pPr indent="0" marL="0">
+              <a:buNone/>
+            </a:pPr>
+            <a:r>
+              <a:rPr lang="en-US" sz="2000" b="1" dirty="0">
                 <a:solidFill>
                   <a:schemeClr val="tx1"/>
                 </a:solidFill>
               </a:rPr>
               <a:t>UI information</a:t>
             </a:r>
-            <a:endParaRPr lang="en-US" sz="1400" dirty="0"/>
-          </a:p>
-          <a:p>
-            <a:pPr indent="0" marL="0">
-              <a:buNone/>
-            </a:pPr>
-            <a:r>
-              <a:rPr lang="en-US" sz="1300" dirty="0">
+            <a:endParaRPr lang="en-US" sz="2000" dirty="0"/>
+          </a:p>
+          <a:p>
+            <a:pPr indent="0" marL="0">
+              <a:buNone/>
+            </a:pPr>
+            <a:r>
+              <a:rPr lang="en-US" sz="2000" dirty="0">
                 <a:solidFill>
                   <a:schemeClr val="accent3"/>
                 </a:solidFill>
               </a:rPr>
-              <a:t>element coordinates · HTML</a:t>
-            </a:r>
-            <a:endParaRPr lang="en-US" sz="1400" dirty="0"/>
+              <a:t>element coordinates, HTML</a:t>
+            </a:r>
+            <a:endParaRPr lang="en-US" sz="2000" dirty="0"/>
           </a:p>
         </p:txBody>
       </p:sp>
@@ -3348,14 +2827,14 @@
         </p:nvSpPr>
         <p:spPr>
           <a:xfrm>
-            <a:off x="3154680" y="1828800"/>
-            <a:ext cx="548640" cy="411480"/>
+            <a:off x="4526280" y="2286000"/>
+            <a:ext cx="594360" cy="594360"/>
           </a:xfrm>
           <a:prstGeom prst="line">
             <a:avLst/>
           </a:prstGeom>
           <a:noFill/>
-          <a:ln w="15875">
+          <a:ln w="19050">
             <a:solidFill>
               <a:schemeClr val="tx1"/>
             </a:solidFill>
@@ -3372,14 +2851,14 @@
         </p:nvSpPr>
         <p:spPr>
           <a:xfrm>
-            <a:off x="3154680" y="3108960"/>
-            <a:ext cx="548640" cy="-411480"/>
+            <a:off x="4526280" y="3886200"/>
+            <a:ext cx="594360" cy="-594360"/>
           </a:xfrm>
           <a:prstGeom prst="line">
             <a:avLst/>
           </a:prstGeom>
           <a:noFill/>
-          <a:ln w="15875">
+          <a:ln w="19050">
             <a:solidFill>
               <a:schemeClr val="tx1"/>
             </a:solidFill>
@@ -3396,18 +2875,18 @@
         </p:nvSpPr>
         <p:spPr>
           <a:xfrm>
-            <a:off x="3749040" y="1828800"/>
-            <a:ext cx="1554480" cy="1280160"/>
+            <a:off x="5166360" y="2331720"/>
+            <a:ext cx="1828800" cy="1554480"/>
           </a:xfrm>
           <a:prstGeom prst="roundRect">
             <a:avLst>
-              <a:gd name="adj" fmla="val 5714"/>
+              <a:gd name="adj" fmla="val 5882"/>
             </a:avLst>
           </a:prstGeom>
           <a:solidFill>
             <a:schemeClr val="tx2"/>
           </a:solidFill>
-          <a:ln w="9525">
+          <a:ln w="12700">
             <a:solidFill>
               <a:schemeClr val="tx2"/>
             </a:solidFill>
@@ -3423,8 +2902,8 @@
         </p:nvSpPr>
         <p:spPr>
           <a:xfrm>
-            <a:off x="3749040" y="1828800"/>
-            <a:ext cx="1554480" cy="1280160"/>
+            <a:off x="5166360" y="2331720"/>
+            <a:ext cx="1828800" cy="1554480"/>
           </a:xfrm>
           <a:prstGeom prst="rect">
             <a:avLst/>
@@ -3433,21 +2912,21 @@
           <a:ln/>
         </p:spPr>
         <p:txBody>
-          <a:bodyPr wrap="square" lIns="1016" tIns="1016" rIns="1016" bIns="1016" rtlCol="0" anchor="ctr"/>
+          <a:bodyPr wrap="square" lIns="1270" tIns="1270" rIns="1270" bIns="1270" rtlCol="0" anchor="ctr"/>
           <a:lstStyle/>
           <a:p>
             <a:pPr algn="ctr" indent="0" marL="0">
               <a:buNone/>
             </a:pPr>
             <a:r>
-              <a:rPr lang="en-US" sz="2200" b="1" dirty="0">
+              <a:rPr lang="en-US" sz="2800" b="1" dirty="0">
                 <a:solidFill>
                   <a:schemeClr val="bg1"/>
                 </a:solidFill>
               </a:rPr>
               <a:t>GPT-4</a:t>
             </a:r>
-            <a:endParaRPr lang="en-US" sz="2200" dirty="0"/>
+            <a:endParaRPr lang="en-US" sz="2800" dirty="0"/>
           </a:p>
         </p:txBody>
       </p:sp>
@@ -3459,14 +2938,14 @@
         </p:nvSpPr>
         <p:spPr>
           <a:xfrm>
-            <a:off x="5349240" y="2468880"/>
-            <a:ext cx="411480" cy="0"/>
+            <a:off x="7040880" y="3108960"/>
+            <a:ext cx="594360" cy="0"/>
           </a:xfrm>
           <a:prstGeom prst="line">
             <a:avLst/>
           </a:prstGeom>
           <a:noFill/>
-          <a:ln w="15875">
+          <a:ln w="19050">
             <a:solidFill>
               <a:schemeClr val="tx1"/>
             </a:solidFill>
@@ -3483,8 +2962,8 @@
         </p:nvSpPr>
         <p:spPr>
           <a:xfrm>
-            <a:off x="5806440" y="1737360"/>
-            <a:ext cx="2880360" cy="1463040"/>
+            <a:off x="7680960" y="2194560"/>
+            <a:ext cx="3867912" cy="1828800"/>
           </a:xfrm>
           <a:prstGeom prst="roundRect">
             <a:avLst>
@@ -3494,7 +2973,7 @@
           <a:solidFill>
             <a:schemeClr val="accent6"/>
           </a:solidFill>
-          <a:ln w="9525">
+          <a:ln w="12700">
             <a:solidFill>
               <a:schemeClr val="accent5"/>
             </a:solidFill>
@@ -3510,8 +2989,8 @@
         </p:nvSpPr>
         <p:spPr>
           <a:xfrm>
-            <a:off x="5897880" y="1737360"/>
-            <a:ext cx="2697480" cy="1463040"/>
+            <a:off x="7772400" y="2194560"/>
+            <a:ext cx="3657600" cy="1828800"/>
           </a:xfrm>
           <a:prstGeom prst="rect">
             <a:avLst/>
@@ -3520,35 +2999,35 @@
           <a:ln/>
         </p:spPr>
         <p:txBody>
-          <a:bodyPr wrap="square" lIns="1016" tIns="1016" rIns="1016" bIns="1016" rtlCol="0" anchor="ctr"/>
-          <a:lstStyle/>
-          <a:p>
-            <a:pPr indent="0" marL="0">
-              <a:buNone/>
-            </a:pPr>
-            <a:r>
-              <a:rPr lang="en-US" sz="1400" b="1" dirty="0">
+          <a:bodyPr wrap="square" lIns="1270" tIns="1270" rIns="1270" bIns="1270" rtlCol="0" anchor="ctr"/>
+          <a:lstStyle/>
+          <a:p>
+            <a:pPr indent="0" marL="0">
+              <a:buNone/>
+            </a:pPr>
+            <a:r>
+              <a:rPr lang="en-US" sz="2000" b="1" dirty="0">
                 <a:solidFill>
                   <a:schemeClr val="tx2"/>
                 </a:solidFill>
               </a:rPr>
               <a:t>Predicted think-aloud</a:t>
             </a:r>
-            <a:endParaRPr lang="en-US" sz="1400" dirty="0"/>
-          </a:p>
-          <a:p>
-            <a:pPr indent="0" marL="0">
-              <a:buNone/>
-            </a:pPr>
-            <a:r>
-              <a:rPr lang="en-US" sz="1300" dirty="0">
+            <a:endParaRPr lang="en-US" sz="2000" dirty="0"/>
+          </a:p>
+          <a:p>
+            <a:pPr indent="0" marL="0">
+              <a:buNone/>
+            </a:pPr>
+            <a:r>
+              <a:rPr lang="en-US" sz="2000" dirty="0">
                 <a:solidFill>
                   <a:schemeClr val="accent3"/>
                 </a:solidFill>
               </a:rPr>
               <a:t>natural text, including doubt</a:t>
             </a:r>
-            <a:endParaRPr lang="en-US" sz="1400" dirty="0"/>
+            <a:endParaRPr lang="en-US" sz="2000" dirty="0"/>
           </a:p>
         </p:txBody>
       </p:sp>
@@ -3560,18 +3039,18 @@
         </p:nvSpPr>
         <p:spPr>
           <a:xfrm>
-            <a:off x="457200" y="3840480"/>
-            <a:ext cx="4023360" cy="777240"/>
+            <a:off x="640080" y="4846320"/>
+            <a:ext cx="5394960" cy="1097280"/>
           </a:xfrm>
           <a:prstGeom prst="roundRect">
             <a:avLst>
-              <a:gd name="adj" fmla="val 9412"/>
+              <a:gd name="adj" fmla="val 8333"/>
             </a:avLst>
           </a:prstGeom>
           <a:solidFill>
             <a:schemeClr val="bg1"/>
           </a:solidFill>
-          <a:ln w="9525">
+          <a:ln w="12700">
             <a:solidFill>
               <a:srgbClr val="CCCCCC"/>
             </a:solidFill>
@@ -3587,8 +3066,8 @@
         </p:nvSpPr>
         <p:spPr>
           <a:xfrm>
-            <a:off x="548640" y="3840480"/>
-            <a:ext cx="3840480" cy="777240"/>
+            <a:off x="777240" y="4846320"/>
+            <a:ext cx="5120640" cy="1097280"/>
           </a:xfrm>
           <a:prstGeom prst="rect">
             <a:avLst/>
@@ -3597,14 +3076,14 @@
           <a:ln/>
         </p:spPr>
         <p:txBody>
-          <a:bodyPr wrap="square" lIns="1016" tIns="1016" rIns="1016" bIns="1016" rtlCol="0" anchor="ctr"/>
-          <a:lstStyle/>
-          <a:p>
-            <a:pPr indent="0" marL="0">
-              <a:buNone/>
-            </a:pPr>
-            <a:r>
-              <a:rPr lang="en-US" sz="1400" b="1" dirty="0">
+          <a:bodyPr wrap="square" lIns="1270" tIns="1270" rIns="1270" bIns="1270" rtlCol="0" anchor="ctr"/>
+          <a:lstStyle/>
+          <a:p>
+            <a:pPr indent="0" marL="0">
+              <a:buNone/>
+            </a:pPr>
+            <a:r>
+              <a:rPr lang="en-US" sz="2000" b="1" dirty="0">
                 <a:solidFill>
                   <a:schemeClr val="accent4"/>
                 </a:solidFill>
@@ -3615,14 +3094,14 @@
               <a:buNone/>
             </a:pPr>
             <a:r>
-              <a:rPr lang="en-US" sz="1400" dirty="0">
+              <a:rPr lang="en-US" sz="2000" dirty="0">
                 <a:solidFill>
                   <a:schemeClr val="tx1"/>
                 </a:solidFill>
               </a:rPr>
-              <a:t>UI information only, no gaze</a:t>
-            </a:r>
-            <a:endParaRPr lang="en-US" sz="1400" dirty="0"/>
+              <a:t>UI information only</a:t>
+            </a:r>
+            <a:endParaRPr lang="en-US" sz="2000" dirty="0"/>
           </a:p>
         </p:txBody>
       </p:sp>
@@ -3634,18 +3113,18 @@
         </p:nvSpPr>
         <p:spPr>
           <a:xfrm>
-            <a:off x="4663440" y="3840480"/>
-            <a:ext cx="4023360" cy="777240"/>
+            <a:off x="6172200" y="4846320"/>
+            <a:ext cx="5376672" cy="1097280"/>
           </a:xfrm>
           <a:prstGeom prst="roundRect">
             <a:avLst>
-              <a:gd name="adj" fmla="val 9412"/>
+              <a:gd name="adj" fmla="val 8333"/>
             </a:avLst>
           </a:prstGeom>
           <a:solidFill>
             <a:schemeClr val="bg1"/>
           </a:solidFill>
-          <a:ln w="9525">
+          <a:ln w="12700">
             <a:solidFill>
               <a:srgbClr val="CCCCCC"/>
             </a:solidFill>
@@ -3661,8 +3140,8 @@
         </p:nvSpPr>
         <p:spPr>
           <a:xfrm>
-            <a:off x="4754880" y="3840480"/>
-            <a:ext cx="3840480" cy="777240"/>
+            <a:off x="6309360" y="4846320"/>
+            <a:ext cx="5120640" cy="1097280"/>
           </a:xfrm>
           <a:prstGeom prst="rect">
             <a:avLst/>
@@ -3671,32 +3150,32 @@
           <a:ln/>
         </p:spPr>
         <p:txBody>
-          <a:bodyPr wrap="square" lIns="1016" tIns="1016" rIns="1016" bIns="1016" rtlCol="0" anchor="ctr"/>
-          <a:lstStyle/>
-          <a:p>
-            <a:pPr indent="0" marL="0">
-              <a:buNone/>
-            </a:pPr>
-            <a:r>
-              <a:rPr lang="en-US" sz="1300" b="1" dirty="0">
+          <a:bodyPr wrap="square" lIns="1270" tIns="1270" rIns="1270" bIns="1270" rtlCol="0" anchor="ctr"/>
+          <a:lstStyle/>
+          <a:p>
+            <a:pPr indent="0" marL="0">
+              <a:buNone/>
+            </a:pPr>
+            <a:r>
+              <a:rPr lang="en-US" sz="2000" b="1" dirty="0">
                 <a:solidFill>
                   <a:schemeClr val="tx2"/>
                 </a:solidFill>
               </a:rPr>
-              <a:t>Study: </a:t>
-            </a:r>
-            <a:pPr indent="0" marL="0">
-              <a:buNone/>
-            </a:pPr>
-            <a:r>
-              <a:rPr lang="en-US" sz="1300" dirty="0">
+              <a:t>20 students: </a:t>
+            </a:r>
+            <a:pPr indent="0" marL="0">
+              <a:buNone/>
+            </a:pPr>
+            <a:r>
+              <a:rPr lang="en-US" sz="2000" dirty="0">
                 <a:solidFill>
                   <a:schemeClr val="tx1"/>
                 </a:solidFill>
               </a:rPr>
-              <a:t>20 students × 4 conditions (Good/Bad UI × shopping/video)</a:t>
-            </a:r>
-            <a:endParaRPr lang="en-US" sz="1300" dirty="0"/>
+              <a:t>Good/Bad UI × shopping/video</a:t>
+            </a:r>
+            <a:endParaRPr lang="en-US" sz="2000" dirty="0"/>
           </a:p>
         </p:txBody>
       </p:sp>
@@ -3712,8 +3191,8 @@
         </p:nvSpPr>
         <p:spPr>
           <a:xfrm>
-            <a:off x="8321040" y="4800600"/>
-            <a:ext cx="365760" cy="228600"/>
+            <a:off x="11155680" y="6382512"/>
+            <a:ext cx="411480" cy="292608"/>
           </a:xfrm>
           <a:prstGeom prst="rect">
             <a:avLst/>
@@ -3728,7 +3207,7 @@
           <a:bodyPr/>
           <a:lstStyle>
             <a:lvl1pPr>
-              <a:defRPr sz="900">
+              <a:defRPr sz="1800">
                 <a:solidFill>
                   <a:schemeClr val="tx1"/>
                 </a:solidFill>
@@ -3778,8 +3257,8 @@
         </p:nvSpPr>
         <p:spPr>
           <a:xfrm>
-            <a:off x="457200" y="219456"/>
-            <a:ext cx="5486400" cy="237744"/>
+            <a:off x="640080" y="256032"/>
+            <a:ext cx="7315200" cy="329184"/>
           </a:xfrm>
           <a:prstGeom prst="rect">
             <a:avLst/>
@@ -3795,14 +3274,14 @@
               <a:buNone/>
             </a:pPr>
             <a:r>
-              <a:rPr lang="en-US" sz="1200" b="1" dirty="0">
+              <a:rPr lang="en-US" sz="2000" b="1" dirty="0">
                 <a:solidFill>
                   <a:schemeClr val="tx2"/>
                 </a:solidFill>
               </a:rPr>
-              <a:t>Undergraduate · 2/3</a:t>
-            </a:r>
-            <a:endParaRPr lang="en-US" sz="1200" dirty="0"/>
+              <a:t>Undergraduate thesis · result</a:t>
+            </a:r>
+            <a:endParaRPr lang="en-US" sz="2000" dirty="0"/>
           </a:p>
         </p:txBody>
       </p:sp>
@@ -3814,8 +3293,8 @@
         </p:nvSpPr>
         <p:spPr>
           <a:xfrm>
-            <a:off x="457200" y="457200"/>
-            <a:ext cx="8229600" cy="594360"/>
+            <a:off x="640080" y="594360"/>
+            <a:ext cx="10881360" cy="731520"/>
           </a:xfrm>
           <a:prstGeom prst="rect">
             <a:avLst/>
@@ -3831,53 +3310,1335 @@
               <a:buNone/>
             </a:pPr>
             <a:r>
-              <a:rPr lang="en-US" sz="2600" b="1" dirty="0">
+              <a:rPr lang="en-US" sz="2800" b="1" dirty="0">
                 <a:solidFill>
                   <a:schemeClr val="tx2"/>
                 </a:solidFill>
               </a:rPr>
-              <a:t>Close to real speech, but EsTA says more</a:t>
-            </a:r>
-            <a:endParaRPr lang="en-US" sz="2600" dirty="0"/>
+              <a:t>Adding gaze changed BERTScore by no more than 0.012 in any condition.</a:t>
+            </a:r>
+            <a:endParaRPr lang="en-US" sz="2800" dirty="0"/>
           </a:p>
         </p:txBody>
       </p:sp>
       <p:graphicFrame>
         <p:nvGraphicFramePr>
-          <p:cNvPr id="5" name="Chart 0" descr=""/>
-          <p:cNvGraphicFramePr/>
-          <p:nvPr/>
+          <p:cNvPr id="5" name="BERTScore table"/>
+          <p:cNvGraphicFramePr>
+            <a:graphicFrameLocks noGrp="1"/>
+          </p:cNvGraphicFramePr>
+          <p:nvPr>
+            <p:extLst>
+              <p:ext uri="{D42A27DB-BD31-4B8C-83A1-F6EECF244321}">
+                <p14:modId xmlns:p14="http://schemas.microsoft.com/office/powerpoint/2010/main" val="1579011935"/>
+              </p:ext>
+            </p:extLst>
+          </p:nvPr>
         </p:nvGraphicFramePr>
         <p:xfrm>
-          <a:off x="365760" y="1188720"/>
-          <a:ext cx="5394960" cy="3520440"/>
+          <a:off x="640080" y="1600200"/>
+          <a:ext cx="6766560" cy="914400"/>
         </p:xfrm>
-        <a:graphic xmlns:a="http://schemas.openxmlformats.org/drawingml/2006/main">
-          <a:graphicData uri="http://schemas.openxmlformats.org/drawingml/2006/chart">
-            <c:chart xmlns:c="http://schemas.openxmlformats.org/drawingml/2006/chart" r:id="rId1"/>
+        <a:graphic>
+          <a:graphicData uri="http://schemas.openxmlformats.org/drawingml/2006/table">
+            <a:tbl>
+              <a:tblPr/>
+              <a:tblGrid>
+                <a:gridCol w="1828800"/>
+                <a:gridCol w="1554480"/>
+                <a:gridCol w="1554480"/>
+                <a:gridCol w="1828800"/>
+              </a:tblGrid>
+              <a:tr h="685800">
+                <a:tc>
+                  <a:txBody>
+                    <a:bodyPr/>
+                    <a:lstStyle/>
+                    <a:p>
+                      <a:pPr algn="l" indent="0" marL="0">
+                        <a:buNone/>
+                      </a:pPr>
+                      <a:r>
+                        <a:rPr lang="en-US" sz="2000" b="1" dirty="0">
+                          <a:solidFill>
+                            <a:schemeClr val="bg1"/>
+                          </a:solidFill>
+                        </a:rPr>
+                        <a:t>BERTScore</a:t>
+                      </a:r>
+                      <a:endParaRPr lang="en-US" sz="2000" dirty="0"/>
+                    </a:p>
+                  </a:txBody>
+                  <a:tcPr marL="91440" marR="91440" marT="45720" marB="45720" anchor="ctr">
+                    <a:lnL w="12700" cap="flat" cmpd="sng" algn="ctr">
+                      <a:solidFill>
+                        <a:srgbClr val="CCCCCC"/>
+                      </a:solidFill>
+                      <a:prstDash val="solid"/>
+                      <a:round/>
+                      <a:headEnd type="none" w="med" len="med"/>
+                      <a:tailEnd type="none" w="med" len="med"/>
+                    </a:lnL>
+                    <a:lnR w="12700" cap="flat" cmpd="sng" algn="ctr">
+                      <a:solidFill>
+                        <a:srgbClr val="CCCCCC"/>
+                      </a:solidFill>
+                      <a:prstDash val="solid"/>
+                      <a:round/>
+                      <a:headEnd type="none" w="med" len="med"/>
+                      <a:tailEnd type="none" w="med" len="med"/>
+                    </a:lnR>
+                    <a:lnT w="12700" cap="flat" cmpd="sng" algn="ctr">
+                      <a:solidFill>
+                        <a:srgbClr val="CCCCCC"/>
+                      </a:solidFill>
+                      <a:prstDash val="solid"/>
+                      <a:round/>
+                      <a:headEnd type="none" w="med" len="med"/>
+                      <a:tailEnd type="none" w="med" len="med"/>
+                    </a:lnT>
+                    <a:lnB w="12700" cap="flat" cmpd="sng" algn="ctr">
+                      <a:solidFill>
+                        <a:srgbClr val="CCCCCC"/>
+                      </a:solidFill>
+                      <a:prstDash val="solid"/>
+                      <a:round/>
+                      <a:headEnd type="none" w="med" len="med"/>
+                      <a:tailEnd type="none" w="med" len="med"/>
+                    </a:lnB>
+                    <a:solidFill>
+                      <a:schemeClr val="tx2"/>
+                    </a:solidFill>
+                  </a:tcPr>
+                </a:tc>
+                <a:tc>
+                  <a:txBody>
+                    <a:bodyPr/>
+                    <a:lstStyle/>
+                    <a:p>
+                      <a:pPr algn="ctr" indent="0" marL="0">
+                        <a:buNone/>
+                      </a:pPr>
+                      <a:r>
+                        <a:rPr lang="en-US" sz="2000" b="1" dirty="0">
+                          <a:solidFill>
+                            <a:schemeClr val="bg1"/>
+                          </a:solidFill>
+                        </a:rPr>
+                        <a:t>InTA</a:t>
+                      </a:r>
+                      <a:endParaRPr lang="en-US" sz="2000" dirty="0"/>
+                    </a:p>
+                  </a:txBody>
+                  <a:tcPr marL="91440" marR="91440" marT="45720" marB="45720" anchor="ctr">
+                    <a:lnL w="12700" cap="flat" cmpd="sng" algn="ctr">
+                      <a:solidFill>
+                        <a:srgbClr val="CCCCCC"/>
+                      </a:solidFill>
+                      <a:prstDash val="solid"/>
+                      <a:round/>
+                      <a:headEnd type="none" w="med" len="med"/>
+                      <a:tailEnd type="none" w="med" len="med"/>
+                    </a:lnL>
+                    <a:lnR w="12700" cap="flat" cmpd="sng" algn="ctr">
+                      <a:solidFill>
+                        <a:srgbClr val="CCCCCC"/>
+                      </a:solidFill>
+                      <a:prstDash val="solid"/>
+                      <a:round/>
+                      <a:headEnd type="none" w="med" len="med"/>
+                      <a:tailEnd type="none" w="med" len="med"/>
+                    </a:lnR>
+                    <a:lnT w="12700" cap="flat" cmpd="sng" algn="ctr">
+                      <a:solidFill>
+                        <a:srgbClr val="CCCCCC"/>
+                      </a:solidFill>
+                      <a:prstDash val="solid"/>
+                      <a:round/>
+                      <a:headEnd type="none" w="med" len="med"/>
+                      <a:tailEnd type="none" w="med" len="med"/>
+                    </a:lnT>
+                    <a:lnB w="12700" cap="flat" cmpd="sng" algn="ctr">
+                      <a:solidFill>
+                        <a:srgbClr val="CCCCCC"/>
+                      </a:solidFill>
+                      <a:prstDash val="solid"/>
+                      <a:round/>
+                      <a:headEnd type="none" w="med" len="med"/>
+                      <a:tailEnd type="none" w="med" len="med"/>
+                    </a:lnB>
+                    <a:solidFill>
+                      <a:schemeClr val="tx2"/>
+                    </a:solidFill>
+                  </a:tcPr>
+                </a:tc>
+                <a:tc>
+                  <a:txBody>
+                    <a:bodyPr/>
+                    <a:lstStyle/>
+                    <a:p>
+                      <a:pPr algn="ctr" indent="0" marL="0">
+                        <a:buNone/>
+                      </a:pPr>
+                      <a:r>
+                        <a:rPr lang="en-US" sz="2000" b="1" dirty="0">
+                          <a:solidFill>
+                            <a:schemeClr val="bg1"/>
+                          </a:solidFill>
+                        </a:rPr>
+                        <a:t>EsTA</a:t>
+                      </a:r>
+                      <a:endParaRPr lang="en-US" sz="2000" dirty="0"/>
+                    </a:p>
+                  </a:txBody>
+                  <a:tcPr marL="91440" marR="91440" marT="45720" marB="45720" anchor="ctr">
+                    <a:lnL w="12700" cap="flat" cmpd="sng" algn="ctr">
+                      <a:solidFill>
+                        <a:srgbClr val="CCCCCC"/>
+                      </a:solidFill>
+                      <a:prstDash val="solid"/>
+                      <a:round/>
+                      <a:headEnd type="none" w="med" len="med"/>
+                      <a:tailEnd type="none" w="med" len="med"/>
+                    </a:lnL>
+                    <a:lnR w="12700" cap="flat" cmpd="sng" algn="ctr">
+                      <a:solidFill>
+                        <a:srgbClr val="CCCCCC"/>
+                      </a:solidFill>
+                      <a:prstDash val="solid"/>
+                      <a:round/>
+                      <a:headEnd type="none" w="med" len="med"/>
+                      <a:tailEnd type="none" w="med" len="med"/>
+                    </a:lnR>
+                    <a:lnT w="12700" cap="flat" cmpd="sng" algn="ctr">
+                      <a:solidFill>
+                        <a:srgbClr val="CCCCCC"/>
+                      </a:solidFill>
+                      <a:prstDash val="solid"/>
+                      <a:round/>
+                      <a:headEnd type="none" w="med" len="med"/>
+                      <a:tailEnd type="none" w="med" len="med"/>
+                    </a:lnT>
+                    <a:lnB w="12700" cap="flat" cmpd="sng" algn="ctr">
+                      <a:solidFill>
+                        <a:srgbClr val="CCCCCC"/>
+                      </a:solidFill>
+                      <a:prstDash val="solid"/>
+                      <a:round/>
+                      <a:headEnd type="none" w="med" len="med"/>
+                      <a:tailEnd type="none" w="med" len="med"/>
+                    </a:lnB>
+                    <a:solidFill>
+                      <a:schemeClr val="tx2"/>
+                    </a:solidFill>
+                  </a:tcPr>
+                </a:tc>
+                <a:tc>
+                  <a:txBody>
+                    <a:bodyPr/>
+                    <a:lstStyle/>
+                    <a:p>
+                      <a:pPr algn="ctr" indent="0" marL="0">
+                        <a:buNone/>
+                      </a:pPr>
+                      <a:r>
+                        <a:rPr lang="en-US" sz="2000" b="1" dirty="0">
+                          <a:solidFill>
+                            <a:schemeClr val="bg1"/>
+                          </a:solidFill>
+                        </a:rPr>
+                        <a:t>EsTA − InTA</a:t>
+                      </a:r>
+                      <a:endParaRPr lang="en-US" sz="2000" dirty="0"/>
+                    </a:p>
+                  </a:txBody>
+                  <a:tcPr marL="91440" marR="91440" marT="45720" marB="45720" anchor="ctr">
+                    <a:lnL w="12700" cap="flat" cmpd="sng" algn="ctr">
+                      <a:solidFill>
+                        <a:srgbClr val="CCCCCC"/>
+                      </a:solidFill>
+                      <a:prstDash val="solid"/>
+                      <a:round/>
+                      <a:headEnd type="none" w="med" len="med"/>
+                      <a:tailEnd type="none" w="med" len="med"/>
+                    </a:lnL>
+                    <a:lnR w="12700" cap="flat" cmpd="sng" algn="ctr">
+                      <a:solidFill>
+                        <a:srgbClr val="CCCCCC"/>
+                      </a:solidFill>
+                      <a:prstDash val="solid"/>
+                      <a:round/>
+                      <a:headEnd type="none" w="med" len="med"/>
+                      <a:tailEnd type="none" w="med" len="med"/>
+                    </a:lnR>
+                    <a:lnT w="12700" cap="flat" cmpd="sng" algn="ctr">
+                      <a:solidFill>
+                        <a:srgbClr val="CCCCCC"/>
+                      </a:solidFill>
+                      <a:prstDash val="solid"/>
+                      <a:round/>
+                      <a:headEnd type="none" w="med" len="med"/>
+                      <a:tailEnd type="none" w="med" len="med"/>
+                    </a:lnT>
+                    <a:lnB w="12700" cap="flat" cmpd="sng" algn="ctr">
+                      <a:solidFill>
+                        <a:srgbClr val="CCCCCC"/>
+                      </a:solidFill>
+                      <a:prstDash val="solid"/>
+                      <a:round/>
+                      <a:headEnd type="none" w="med" len="med"/>
+                      <a:tailEnd type="none" w="med" len="med"/>
+                    </a:lnB>
+                    <a:solidFill>
+                      <a:schemeClr val="tx2"/>
+                    </a:solidFill>
+                  </a:tcPr>
+                </a:tc>
+              </a:tr>
+              <a:tr h="685800">
+                <a:tc>
+                  <a:txBody>
+                    <a:bodyPr/>
+                    <a:lstStyle/>
+                    <a:p>
+                      <a:pPr algn="l" indent="0" marL="0">
+                        <a:buNone/>
+                      </a:pPr>
+                      <a:r>
+                        <a:rPr lang="en-US" sz="2000" b="1" dirty="0">
+                          <a:solidFill>
+                            <a:schemeClr val="tx1"/>
+                          </a:solidFill>
+                        </a:rPr>
+                        <a:t>Good A</a:t>
+                      </a:r>
+                      <a:endParaRPr lang="en-US" sz="2000" dirty="0"/>
+                    </a:p>
+                  </a:txBody>
+                  <a:tcPr marL="91440" marR="91440" marT="45720" marB="45720" anchor="ctr">
+                    <a:lnL w="12700" cap="flat" cmpd="sng" algn="ctr">
+                      <a:solidFill>
+                        <a:srgbClr val="CCCCCC"/>
+                      </a:solidFill>
+                      <a:prstDash val="solid"/>
+                      <a:round/>
+                      <a:headEnd type="none" w="med" len="med"/>
+                      <a:tailEnd type="none" w="med" len="med"/>
+                    </a:lnL>
+                    <a:lnR w="12700" cap="flat" cmpd="sng" algn="ctr">
+                      <a:solidFill>
+                        <a:srgbClr val="CCCCCC"/>
+                      </a:solidFill>
+                      <a:prstDash val="solid"/>
+                      <a:round/>
+                      <a:headEnd type="none" w="med" len="med"/>
+                      <a:tailEnd type="none" w="med" len="med"/>
+                    </a:lnR>
+                    <a:lnT w="12700" cap="flat" cmpd="sng" algn="ctr">
+                      <a:solidFill>
+                        <a:srgbClr val="CCCCCC"/>
+                      </a:solidFill>
+                      <a:prstDash val="solid"/>
+                      <a:round/>
+                      <a:headEnd type="none" w="med" len="med"/>
+                      <a:tailEnd type="none" w="med" len="med"/>
+                    </a:lnT>
+                    <a:lnB w="12700" cap="flat" cmpd="sng" algn="ctr">
+                      <a:solidFill>
+                        <a:srgbClr val="CCCCCC"/>
+                      </a:solidFill>
+                      <a:prstDash val="solid"/>
+                      <a:round/>
+                      <a:headEnd type="none" w="med" len="med"/>
+                      <a:tailEnd type="none" w="med" len="med"/>
+                    </a:lnB>
+                    <a:solidFill>
+                      <a:schemeClr val="bg1"/>
+                    </a:solidFill>
+                  </a:tcPr>
+                </a:tc>
+                <a:tc>
+                  <a:txBody>
+                    <a:bodyPr/>
+                    <a:lstStyle/>
+                    <a:p>
+                      <a:pPr algn="ctr" indent="0" marL="0">
+                        <a:buNone/>
+                      </a:pPr>
+                      <a:r>
+                        <a:rPr lang="en-US" sz="2000" dirty="0">
+                          <a:solidFill>
+                            <a:schemeClr val="tx1"/>
+                          </a:solidFill>
+                        </a:rPr>
+                        <a:t>0.680</a:t>
+                      </a:r>
+                      <a:endParaRPr lang="en-US" sz="2000" dirty="0"/>
+                    </a:p>
+                  </a:txBody>
+                  <a:tcPr marL="91440" marR="91440" marT="45720" marB="45720" anchor="ctr">
+                    <a:lnL w="12700" cap="flat" cmpd="sng" algn="ctr">
+                      <a:solidFill>
+                        <a:srgbClr val="CCCCCC"/>
+                      </a:solidFill>
+                      <a:prstDash val="solid"/>
+                      <a:round/>
+                      <a:headEnd type="none" w="med" len="med"/>
+                      <a:tailEnd type="none" w="med" len="med"/>
+                    </a:lnL>
+                    <a:lnR w="12700" cap="flat" cmpd="sng" algn="ctr">
+                      <a:solidFill>
+                        <a:srgbClr val="CCCCCC"/>
+                      </a:solidFill>
+                      <a:prstDash val="solid"/>
+                      <a:round/>
+                      <a:headEnd type="none" w="med" len="med"/>
+                      <a:tailEnd type="none" w="med" len="med"/>
+                    </a:lnR>
+                    <a:lnT w="12700" cap="flat" cmpd="sng" algn="ctr">
+                      <a:solidFill>
+                        <a:srgbClr val="CCCCCC"/>
+                      </a:solidFill>
+                      <a:prstDash val="solid"/>
+                      <a:round/>
+                      <a:headEnd type="none" w="med" len="med"/>
+                      <a:tailEnd type="none" w="med" len="med"/>
+                    </a:lnT>
+                    <a:lnB w="12700" cap="flat" cmpd="sng" algn="ctr">
+                      <a:solidFill>
+                        <a:srgbClr val="CCCCCC"/>
+                      </a:solidFill>
+                      <a:prstDash val="solid"/>
+                      <a:round/>
+                      <a:headEnd type="none" w="med" len="med"/>
+                      <a:tailEnd type="none" w="med" len="med"/>
+                    </a:lnB>
+                    <a:solidFill>
+                      <a:schemeClr val="bg1"/>
+                    </a:solidFill>
+                  </a:tcPr>
+                </a:tc>
+                <a:tc>
+                  <a:txBody>
+                    <a:bodyPr/>
+                    <a:lstStyle/>
+                    <a:p>
+                      <a:pPr algn="ctr" indent="0" marL="0">
+                        <a:buNone/>
+                      </a:pPr>
+                      <a:r>
+                        <a:rPr lang="en-US" sz="2000" dirty="0">
+                          <a:solidFill>
+                            <a:schemeClr val="tx1"/>
+                          </a:solidFill>
+                        </a:rPr>
+                        <a:t>0.673</a:t>
+                      </a:r>
+                      <a:endParaRPr lang="en-US" sz="2000" dirty="0"/>
+                    </a:p>
+                  </a:txBody>
+                  <a:tcPr marL="91440" marR="91440" marT="45720" marB="45720" anchor="ctr">
+                    <a:lnL w="12700" cap="flat" cmpd="sng" algn="ctr">
+                      <a:solidFill>
+                        <a:srgbClr val="CCCCCC"/>
+                      </a:solidFill>
+                      <a:prstDash val="solid"/>
+                      <a:round/>
+                      <a:headEnd type="none" w="med" len="med"/>
+                      <a:tailEnd type="none" w="med" len="med"/>
+                    </a:lnL>
+                    <a:lnR w="12700" cap="flat" cmpd="sng" algn="ctr">
+                      <a:solidFill>
+                        <a:srgbClr val="CCCCCC"/>
+                      </a:solidFill>
+                      <a:prstDash val="solid"/>
+                      <a:round/>
+                      <a:headEnd type="none" w="med" len="med"/>
+                      <a:tailEnd type="none" w="med" len="med"/>
+                    </a:lnR>
+                    <a:lnT w="12700" cap="flat" cmpd="sng" algn="ctr">
+                      <a:solidFill>
+                        <a:srgbClr val="CCCCCC"/>
+                      </a:solidFill>
+                      <a:prstDash val="solid"/>
+                      <a:round/>
+                      <a:headEnd type="none" w="med" len="med"/>
+                      <a:tailEnd type="none" w="med" len="med"/>
+                    </a:lnT>
+                    <a:lnB w="12700" cap="flat" cmpd="sng" algn="ctr">
+                      <a:solidFill>
+                        <a:srgbClr val="CCCCCC"/>
+                      </a:solidFill>
+                      <a:prstDash val="solid"/>
+                      <a:round/>
+                      <a:headEnd type="none" w="med" len="med"/>
+                      <a:tailEnd type="none" w="med" len="med"/>
+                    </a:lnB>
+                    <a:solidFill>
+                      <a:schemeClr val="bg1"/>
+                    </a:solidFill>
+                  </a:tcPr>
+                </a:tc>
+                <a:tc>
+                  <a:txBody>
+                    <a:bodyPr/>
+                    <a:lstStyle/>
+                    <a:p>
+                      <a:pPr algn="ctr" indent="0" marL="0">
+                        <a:buNone/>
+                      </a:pPr>
+                      <a:r>
+                        <a:rPr lang="en-US" sz="2000" b="1" dirty="0">
+                          <a:solidFill>
+                            <a:schemeClr val="accent4"/>
+                          </a:solidFill>
+                        </a:rPr>
+                        <a:t>−0.007</a:t>
+                      </a:r>
+                      <a:endParaRPr lang="en-US" sz="2000" dirty="0"/>
+                    </a:p>
+                  </a:txBody>
+                  <a:tcPr marL="91440" marR="91440" marT="45720" marB="45720" anchor="ctr">
+                    <a:lnL w="12700" cap="flat" cmpd="sng" algn="ctr">
+                      <a:solidFill>
+                        <a:srgbClr val="CCCCCC"/>
+                      </a:solidFill>
+                      <a:prstDash val="solid"/>
+                      <a:round/>
+                      <a:headEnd type="none" w="med" len="med"/>
+                      <a:tailEnd type="none" w="med" len="med"/>
+                    </a:lnL>
+                    <a:lnR w="12700" cap="flat" cmpd="sng" algn="ctr">
+                      <a:solidFill>
+                        <a:srgbClr val="CCCCCC"/>
+                      </a:solidFill>
+                      <a:prstDash val="solid"/>
+                      <a:round/>
+                      <a:headEnd type="none" w="med" len="med"/>
+                      <a:tailEnd type="none" w="med" len="med"/>
+                    </a:lnR>
+                    <a:lnT w="12700" cap="flat" cmpd="sng" algn="ctr">
+                      <a:solidFill>
+                        <a:srgbClr val="CCCCCC"/>
+                      </a:solidFill>
+                      <a:prstDash val="solid"/>
+                      <a:round/>
+                      <a:headEnd type="none" w="med" len="med"/>
+                      <a:tailEnd type="none" w="med" len="med"/>
+                    </a:lnT>
+                    <a:lnB w="12700" cap="flat" cmpd="sng" algn="ctr">
+                      <a:solidFill>
+                        <a:srgbClr val="CCCCCC"/>
+                      </a:solidFill>
+                      <a:prstDash val="solid"/>
+                      <a:round/>
+                      <a:headEnd type="none" w="med" len="med"/>
+                      <a:tailEnd type="none" w="med" len="med"/>
+                    </a:lnB>
+                    <a:solidFill>
+                      <a:schemeClr val="bg1"/>
+                    </a:solidFill>
+                  </a:tcPr>
+                </a:tc>
+              </a:tr>
+              <a:tr h="685800">
+                <a:tc>
+                  <a:txBody>
+                    <a:bodyPr/>
+                    <a:lstStyle/>
+                    <a:p>
+                      <a:pPr algn="l" indent="0" marL="0">
+                        <a:buNone/>
+                      </a:pPr>
+                      <a:r>
+                        <a:rPr lang="en-US" sz="2000" b="1" dirty="0">
+                          <a:solidFill>
+                            <a:schemeClr val="tx1"/>
+                          </a:solidFill>
+                        </a:rPr>
+                        <a:t>Bad A</a:t>
+                      </a:r>
+                      <a:endParaRPr lang="en-US" sz="2000" dirty="0"/>
+                    </a:p>
+                  </a:txBody>
+                  <a:tcPr marL="91440" marR="91440" marT="45720" marB="45720" anchor="ctr">
+                    <a:lnL w="12700" cap="flat" cmpd="sng" algn="ctr">
+                      <a:solidFill>
+                        <a:srgbClr val="CCCCCC"/>
+                      </a:solidFill>
+                      <a:prstDash val="solid"/>
+                      <a:round/>
+                      <a:headEnd type="none" w="med" len="med"/>
+                      <a:tailEnd type="none" w="med" len="med"/>
+                    </a:lnL>
+                    <a:lnR w="12700" cap="flat" cmpd="sng" algn="ctr">
+                      <a:solidFill>
+                        <a:srgbClr val="CCCCCC"/>
+                      </a:solidFill>
+                      <a:prstDash val="solid"/>
+                      <a:round/>
+                      <a:headEnd type="none" w="med" len="med"/>
+                      <a:tailEnd type="none" w="med" len="med"/>
+                    </a:lnR>
+                    <a:lnT w="12700" cap="flat" cmpd="sng" algn="ctr">
+                      <a:solidFill>
+                        <a:srgbClr val="CCCCCC"/>
+                      </a:solidFill>
+                      <a:prstDash val="solid"/>
+                      <a:round/>
+                      <a:headEnd type="none" w="med" len="med"/>
+                      <a:tailEnd type="none" w="med" len="med"/>
+                    </a:lnT>
+                    <a:lnB w="12700" cap="flat" cmpd="sng" algn="ctr">
+                      <a:solidFill>
+                        <a:srgbClr val="CCCCCC"/>
+                      </a:solidFill>
+                      <a:prstDash val="solid"/>
+                      <a:round/>
+                      <a:headEnd type="none" w="med" len="med"/>
+                      <a:tailEnd type="none" w="med" len="med"/>
+                    </a:lnB>
+                    <a:solidFill>
+                      <a:schemeClr val="bg1"/>
+                    </a:solidFill>
+                  </a:tcPr>
+                </a:tc>
+                <a:tc>
+                  <a:txBody>
+                    <a:bodyPr/>
+                    <a:lstStyle/>
+                    <a:p>
+                      <a:pPr algn="ctr" indent="0" marL="0">
+                        <a:buNone/>
+                      </a:pPr>
+                      <a:r>
+                        <a:rPr lang="en-US" sz="2000" dirty="0">
+                          <a:solidFill>
+                            <a:schemeClr val="tx1"/>
+                          </a:solidFill>
+                        </a:rPr>
+                        <a:t>0.683</a:t>
+                      </a:r>
+                      <a:endParaRPr lang="en-US" sz="2000" dirty="0"/>
+                    </a:p>
+                  </a:txBody>
+                  <a:tcPr marL="91440" marR="91440" marT="45720" marB="45720" anchor="ctr">
+                    <a:lnL w="12700" cap="flat" cmpd="sng" algn="ctr">
+                      <a:solidFill>
+                        <a:srgbClr val="CCCCCC"/>
+                      </a:solidFill>
+                      <a:prstDash val="solid"/>
+                      <a:round/>
+                      <a:headEnd type="none" w="med" len="med"/>
+                      <a:tailEnd type="none" w="med" len="med"/>
+                    </a:lnL>
+                    <a:lnR w="12700" cap="flat" cmpd="sng" algn="ctr">
+                      <a:solidFill>
+                        <a:srgbClr val="CCCCCC"/>
+                      </a:solidFill>
+                      <a:prstDash val="solid"/>
+                      <a:round/>
+                      <a:headEnd type="none" w="med" len="med"/>
+                      <a:tailEnd type="none" w="med" len="med"/>
+                    </a:lnR>
+                    <a:lnT w="12700" cap="flat" cmpd="sng" algn="ctr">
+                      <a:solidFill>
+                        <a:srgbClr val="CCCCCC"/>
+                      </a:solidFill>
+                      <a:prstDash val="solid"/>
+                      <a:round/>
+                      <a:headEnd type="none" w="med" len="med"/>
+                      <a:tailEnd type="none" w="med" len="med"/>
+                    </a:lnT>
+                    <a:lnB w="12700" cap="flat" cmpd="sng" algn="ctr">
+                      <a:solidFill>
+                        <a:srgbClr val="CCCCCC"/>
+                      </a:solidFill>
+                      <a:prstDash val="solid"/>
+                      <a:round/>
+                      <a:headEnd type="none" w="med" len="med"/>
+                      <a:tailEnd type="none" w="med" len="med"/>
+                    </a:lnB>
+                    <a:solidFill>
+                      <a:schemeClr val="bg1"/>
+                    </a:solidFill>
+                  </a:tcPr>
+                </a:tc>
+                <a:tc>
+                  <a:txBody>
+                    <a:bodyPr/>
+                    <a:lstStyle/>
+                    <a:p>
+                      <a:pPr algn="ctr" indent="0" marL="0">
+                        <a:buNone/>
+                      </a:pPr>
+                      <a:r>
+                        <a:rPr lang="en-US" sz="2000" dirty="0">
+                          <a:solidFill>
+                            <a:schemeClr val="tx1"/>
+                          </a:solidFill>
+                        </a:rPr>
+                        <a:t>0.677</a:t>
+                      </a:r>
+                      <a:endParaRPr lang="en-US" sz="2000" dirty="0"/>
+                    </a:p>
+                  </a:txBody>
+                  <a:tcPr marL="91440" marR="91440" marT="45720" marB="45720" anchor="ctr">
+                    <a:lnL w="12700" cap="flat" cmpd="sng" algn="ctr">
+                      <a:solidFill>
+                        <a:srgbClr val="CCCCCC"/>
+                      </a:solidFill>
+                      <a:prstDash val="solid"/>
+                      <a:round/>
+                      <a:headEnd type="none" w="med" len="med"/>
+                      <a:tailEnd type="none" w="med" len="med"/>
+                    </a:lnL>
+                    <a:lnR w="12700" cap="flat" cmpd="sng" algn="ctr">
+                      <a:solidFill>
+                        <a:srgbClr val="CCCCCC"/>
+                      </a:solidFill>
+                      <a:prstDash val="solid"/>
+                      <a:round/>
+                      <a:headEnd type="none" w="med" len="med"/>
+                      <a:tailEnd type="none" w="med" len="med"/>
+                    </a:lnR>
+                    <a:lnT w="12700" cap="flat" cmpd="sng" algn="ctr">
+                      <a:solidFill>
+                        <a:srgbClr val="CCCCCC"/>
+                      </a:solidFill>
+                      <a:prstDash val="solid"/>
+                      <a:round/>
+                      <a:headEnd type="none" w="med" len="med"/>
+                      <a:tailEnd type="none" w="med" len="med"/>
+                    </a:lnT>
+                    <a:lnB w="12700" cap="flat" cmpd="sng" algn="ctr">
+                      <a:solidFill>
+                        <a:srgbClr val="CCCCCC"/>
+                      </a:solidFill>
+                      <a:prstDash val="solid"/>
+                      <a:round/>
+                      <a:headEnd type="none" w="med" len="med"/>
+                      <a:tailEnd type="none" w="med" len="med"/>
+                    </a:lnB>
+                    <a:solidFill>
+                      <a:schemeClr val="bg1"/>
+                    </a:solidFill>
+                  </a:tcPr>
+                </a:tc>
+                <a:tc>
+                  <a:txBody>
+                    <a:bodyPr/>
+                    <a:lstStyle/>
+                    <a:p>
+                      <a:pPr algn="ctr" indent="0" marL="0">
+                        <a:buNone/>
+                      </a:pPr>
+                      <a:r>
+                        <a:rPr lang="en-US" sz="2000" b="1" dirty="0">
+                          <a:solidFill>
+                            <a:schemeClr val="accent4"/>
+                          </a:solidFill>
+                        </a:rPr>
+                        <a:t>−0.006</a:t>
+                      </a:r>
+                      <a:endParaRPr lang="en-US" sz="2000" dirty="0"/>
+                    </a:p>
+                  </a:txBody>
+                  <a:tcPr marL="91440" marR="91440" marT="45720" marB="45720" anchor="ctr">
+                    <a:lnL w="12700" cap="flat" cmpd="sng" algn="ctr">
+                      <a:solidFill>
+                        <a:srgbClr val="CCCCCC"/>
+                      </a:solidFill>
+                      <a:prstDash val="solid"/>
+                      <a:round/>
+                      <a:headEnd type="none" w="med" len="med"/>
+                      <a:tailEnd type="none" w="med" len="med"/>
+                    </a:lnL>
+                    <a:lnR w="12700" cap="flat" cmpd="sng" algn="ctr">
+                      <a:solidFill>
+                        <a:srgbClr val="CCCCCC"/>
+                      </a:solidFill>
+                      <a:prstDash val="solid"/>
+                      <a:round/>
+                      <a:headEnd type="none" w="med" len="med"/>
+                      <a:tailEnd type="none" w="med" len="med"/>
+                    </a:lnR>
+                    <a:lnT w="12700" cap="flat" cmpd="sng" algn="ctr">
+                      <a:solidFill>
+                        <a:srgbClr val="CCCCCC"/>
+                      </a:solidFill>
+                      <a:prstDash val="solid"/>
+                      <a:round/>
+                      <a:headEnd type="none" w="med" len="med"/>
+                      <a:tailEnd type="none" w="med" len="med"/>
+                    </a:lnT>
+                    <a:lnB w="12700" cap="flat" cmpd="sng" algn="ctr">
+                      <a:solidFill>
+                        <a:srgbClr val="CCCCCC"/>
+                      </a:solidFill>
+                      <a:prstDash val="solid"/>
+                      <a:round/>
+                      <a:headEnd type="none" w="med" len="med"/>
+                      <a:tailEnd type="none" w="med" len="med"/>
+                    </a:lnB>
+                    <a:solidFill>
+                      <a:schemeClr val="bg1"/>
+                    </a:solidFill>
+                  </a:tcPr>
+                </a:tc>
+              </a:tr>
+              <a:tr h="685800">
+                <a:tc>
+                  <a:txBody>
+                    <a:bodyPr/>
+                    <a:lstStyle/>
+                    <a:p>
+                      <a:pPr algn="l" indent="0" marL="0">
+                        <a:buNone/>
+                      </a:pPr>
+                      <a:r>
+                        <a:rPr lang="en-US" sz="2000" b="1" dirty="0">
+                          <a:solidFill>
+                            <a:schemeClr val="tx1"/>
+                          </a:solidFill>
+                        </a:rPr>
+                        <a:t>Good B</a:t>
+                      </a:r>
+                      <a:endParaRPr lang="en-US" sz="2000" dirty="0"/>
+                    </a:p>
+                  </a:txBody>
+                  <a:tcPr marL="91440" marR="91440" marT="45720" marB="45720" anchor="ctr">
+                    <a:lnL w="12700" cap="flat" cmpd="sng" algn="ctr">
+                      <a:solidFill>
+                        <a:srgbClr val="CCCCCC"/>
+                      </a:solidFill>
+                      <a:prstDash val="solid"/>
+                      <a:round/>
+                      <a:headEnd type="none" w="med" len="med"/>
+                      <a:tailEnd type="none" w="med" len="med"/>
+                    </a:lnL>
+                    <a:lnR w="12700" cap="flat" cmpd="sng" algn="ctr">
+                      <a:solidFill>
+                        <a:srgbClr val="CCCCCC"/>
+                      </a:solidFill>
+                      <a:prstDash val="solid"/>
+                      <a:round/>
+                      <a:headEnd type="none" w="med" len="med"/>
+                      <a:tailEnd type="none" w="med" len="med"/>
+                    </a:lnR>
+                    <a:lnT w="12700" cap="flat" cmpd="sng" algn="ctr">
+                      <a:solidFill>
+                        <a:srgbClr val="CCCCCC"/>
+                      </a:solidFill>
+                      <a:prstDash val="solid"/>
+                      <a:round/>
+                      <a:headEnd type="none" w="med" len="med"/>
+                      <a:tailEnd type="none" w="med" len="med"/>
+                    </a:lnT>
+                    <a:lnB w="12700" cap="flat" cmpd="sng" algn="ctr">
+                      <a:solidFill>
+                        <a:srgbClr val="CCCCCC"/>
+                      </a:solidFill>
+                      <a:prstDash val="solid"/>
+                      <a:round/>
+                      <a:headEnd type="none" w="med" len="med"/>
+                      <a:tailEnd type="none" w="med" len="med"/>
+                    </a:lnB>
+                    <a:solidFill>
+                      <a:schemeClr val="bg1"/>
+                    </a:solidFill>
+                  </a:tcPr>
+                </a:tc>
+                <a:tc>
+                  <a:txBody>
+                    <a:bodyPr/>
+                    <a:lstStyle/>
+                    <a:p>
+                      <a:pPr algn="ctr" indent="0" marL="0">
+                        <a:buNone/>
+                      </a:pPr>
+                      <a:r>
+                        <a:rPr lang="en-US" sz="2000" dirty="0">
+                          <a:solidFill>
+                            <a:schemeClr val="tx1"/>
+                          </a:solidFill>
+                        </a:rPr>
+                        <a:t>0.691</a:t>
+                      </a:r>
+                      <a:endParaRPr lang="en-US" sz="2000" dirty="0"/>
+                    </a:p>
+                  </a:txBody>
+                  <a:tcPr marL="91440" marR="91440" marT="45720" marB="45720" anchor="ctr">
+                    <a:lnL w="12700" cap="flat" cmpd="sng" algn="ctr">
+                      <a:solidFill>
+                        <a:srgbClr val="CCCCCC"/>
+                      </a:solidFill>
+                      <a:prstDash val="solid"/>
+                      <a:round/>
+                      <a:headEnd type="none" w="med" len="med"/>
+                      <a:tailEnd type="none" w="med" len="med"/>
+                    </a:lnL>
+                    <a:lnR w="12700" cap="flat" cmpd="sng" algn="ctr">
+                      <a:solidFill>
+                        <a:srgbClr val="CCCCCC"/>
+                      </a:solidFill>
+                      <a:prstDash val="solid"/>
+                      <a:round/>
+                      <a:headEnd type="none" w="med" len="med"/>
+                      <a:tailEnd type="none" w="med" len="med"/>
+                    </a:lnR>
+                    <a:lnT w="12700" cap="flat" cmpd="sng" algn="ctr">
+                      <a:solidFill>
+                        <a:srgbClr val="CCCCCC"/>
+                      </a:solidFill>
+                      <a:prstDash val="solid"/>
+                      <a:round/>
+                      <a:headEnd type="none" w="med" len="med"/>
+                      <a:tailEnd type="none" w="med" len="med"/>
+                    </a:lnT>
+                    <a:lnB w="12700" cap="flat" cmpd="sng" algn="ctr">
+                      <a:solidFill>
+                        <a:srgbClr val="CCCCCC"/>
+                      </a:solidFill>
+                      <a:prstDash val="solid"/>
+                      <a:round/>
+                      <a:headEnd type="none" w="med" len="med"/>
+                      <a:tailEnd type="none" w="med" len="med"/>
+                    </a:lnB>
+                    <a:solidFill>
+                      <a:schemeClr val="bg1"/>
+                    </a:solidFill>
+                  </a:tcPr>
+                </a:tc>
+                <a:tc>
+                  <a:txBody>
+                    <a:bodyPr/>
+                    <a:lstStyle/>
+                    <a:p>
+                      <a:pPr algn="ctr" indent="0" marL="0">
+                        <a:buNone/>
+                      </a:pPr>
+                      <a:r>
+                        <a:rPr lang="en-US" sz="2000" dirty="0">
+                          <a:solidFill>
+                            <a:schemeClr val="tx1"/>
+                          </a:solidFill>
+                        </a:rPr>
+                        <a:t>0.688</a:t>
+                      </a:r>
+                      <a:endParaRPr lang="en-US" sz="2000" dirty="0"/>
+                    </a:p>
+                  </a:txBody>
+                  <a:tcPr marL="91440" marR="91440" marT="45720" marB="45720" anchor="ctr">
+                    <a:lnL w="12700" cap="flat" cmpd="sng" algn="ctr">
+                      <a:solidFill>
+                        <a:srgbClr val="CCCCCC"/>
+                      </a:solidFill>
+                      <a:prstDash val="solid"/>
+                      <a:round/>
+                      <a:headEnd type="none" w="med" len="med"/>
+                      <a:tailEnd type="none" w="med" len="med"/>
+                    </a:lnL>
+                    <a:lnR w="12700" cap="flat" cmpd="sng" algn="ctr">
+                      <a:solidFill>
+                        <a:srgbClr val="CCCCCC"/>
+                      </a:solidFill>
+                      <a:prstDash val="solid"/>
+                      <a:round/>
+                      <a:headEnd type="none" w="med" len="med"/>
+                      <a:tailEnd type="none" w="med" len="med"/>
+                    </a:lnR>
+                    <a:lnT w="12700" cap="flat" cmpd="sng" algn="ctr">
+                      <a:solidFill>
+                        <a:srgbClr val="CCCCCC"/>
+                      </a:solidFill>
+                      <a:prstDash val="solid"/>
+                      <a:round/>
+                      <a:headEnd type="none" w="med" len="med"/>
+                      <a:tailEnd type="none" w="med" len="med"/>
+                    </a:lnT>
+                    <a:lnB w="12700" cap="flat" cmpd="sng" algn="ctr">
+                      <a:solidFill>
+                        <a:srgbClr val="CCCCCC"/>
+                      </a:solidFill>
+                      <a:prstDash val="solid"/>
+                      <a:round/>
+                      <a:headEnd type="none" w="med" len="med"/>
+                      <a:tailEnd type="none" w="med" len="med"/>
+                    </a:lnB>
+                    <a:solidFill>
+                      <a:schemeClr val="bg1"/>
+                    </a:solidFill>
+                  </a:tcPr>
+                </a:tc>
+                <a:tc>
+                  <a:txBody>
+                    <a:bodyPr/>
+                    <a:lstStyle/>
+                    <a:p>
+                      <a:pPr algn="ctr" indent="0" marL="0">
+                        <a:buNone/>
+                      </a:pPr>
+                      <a:r>
+                        <a:rPr lang="en-US" sz="2000" b="1" dirty="0">
+                          <a:solidFill>
+                            <a:schemeClr val="accent4"/>
+                          </a:solidFill>
+                        </a:rPr>
+                        <a:t>−0.003</a:t>
+                      </a:r>
+                      <a:endParaRPr lang="en-US" sz="2000" dirty="0"/>
+                    </a:p>
+                  </a:txBody>
+                  <a:tcPr marL="91440" marR="91440" marT="45720" marB="45720" anchor="ctr">
+                    <a:lnL w="12700" cap="flat" cmpd="sng" algn="ctr">
+                      <a:solidFill>
+                        <a:srgbClr val="CCCCCC"/>
+                      </a:solidFill>
+                      <a:prstDash val="solid"/>
+                      <a:round/>
+                      <a:headEnd type="none" w="med" len="med"/>
+                      <a:tailEnd type="none" w="med" len="med"/>
+                    </a:lnL>
+                    <a:lnR w="12700" cap="flat" cmpd="sng" algn="ctr">
+                      <a:solidFill>
+                        <a:srgbClr val="CCCCCC"/>
+                      </a:solidFill>
+                      <a:prstDash val="solid"/>
+                      <a:round/>
+                      <a:headEnd type="none" w="med" len="med"/>
+                      <a:tailEnd type="none" w="med" len="med"/>
+                    </a:lnR>
+                    <a:lnT w="12700" cap="flat" cmpd="sng" algn="ctr">
+                      <a:solidFill>
+                        <a:srgbClr val="CCCCCC"/>
+                      </a:solidFill>
+                      <a:prstDash val="solid"/>
+                      <a:round/>
+                      <a:headEnd type="none" w="med" len="med"/>
+                      <a:tailEnd type="none" w="med" len="med"/>
+                    </a:lnT>
+                    <a:lnB w="12700" cap="flat" cmpd="sng" algn="ctr">
+                      <a:solidFill>
+                        <a:srgbClr val="CCCCCC"/>
+                      </a:solidFill>
+                      <a:prstDash val="solid"/>
+                      <a:round/>
+                      <a:headEnd type="none" w="med" len="med"/>
+                      <a:tailEnd type="none" w="med" len="med"/>
+                    </a:lnB>
+                    <a:solidFill>
+                      <a:schemeClr val="bg1"/>
+                    </a:solidFill>
+                  </a:tcPr>
+                </a:tc>
+              </a:tr>
+              <a:tr h="685800">
+                <a:tc>
+                  <a:txBody>
+                    <a:bodyPr/>
+                    <a:lstStyle/>
+                    <a:p>
+                      <a:pPr algn="l" indent="0" marL="0">
+                        <a:buNone/>
+                      </a:pPr>
+                      <a:r>
+                        <a:rPr lang="en-US" sz="2000" b="1" dirty="0">
+                          <a:solidFill>
+                            <a:schemeClr val="tx1"/>
+                          </a:solidFill>
+                        </a:rPr>
+                        <a:t>Bad B</a:t>
+                      </a:r>
+                      <a:endParaRPr lang="en-US" sz="2000" dirty="0"/>
+                    </a:p>
+                  </a:txBody>
+                  <a:tcPr marL="91440" marR="91440" marT="45720" marB="45720" anchor="ctr">
+                    <a:lnL w="12700" cap="flat" cmpd="sng" algn="ctr">
+                      <a:solidFill>
+                        <a:srgbClr val="CCCCCC"/>
+                      </a:solidFill>
+                      <a:prstDash val="solid"/>
+                      <a:round/>
+                      <a:headEnd type="none" w="med" len="med"/>
+                      <a:tailEnd type="none" w="med" len="med"/>
+                    </a:lnL>
+                    <a:lnR w="12700" cap="flat" cmpd="sng" algn="ctr">
+                      <a:solidFill>
+                        <a:srgbClr val="CCCCCC"/>
+                      </a:solidFill>
+                      <a:prstDash val="solid"/>
+                      <a:round/>
+                      <a:headEnd type="none" w="med" len="med"/>
+                      <a:tailEnd type="none" w="med" len="med"/>
+                    </a:lnR>
+                    <a:lnT w="12700" cap="flat" cmpd="sng" algn="ctr">
+                      <a:solidFill>
+                        <a:srgbClr val="CCCCCC"/>
+                      </a:solidFill>
+                      <a:prstDash val="solid"/>
+                      <a:round/>
+                      <a:headEnd type="none" w="med" len="med"/>
+                      <a:tailEnd type="none" w="med" len="med"/>
+                    </a:lnT>
+                    <a:lnB w="12700" cap="flat" cmpd="sng" algn="ctr">
+                      <a:solidFill>
+                        <a:srgbClr val="CCCCCC"/>
+                      </a:solidFill>
+                      <a:prstDash val="solid"/>
+                      <a:round/>
+                      <a:headEnd type="none" w="med" len="med"/>
+                      <a:tailEnd type="none" w="med" len="med"/>
+                    </a:lnB>
+                    <a:solidFill>
+                      <a:schemeClr val="bg1"/>
+                    </a:solidFill>
+                  </a:tcPr>
+                </a:tc>
+                <a:tc>
+                  <a:txBody>
+                    <a:bodyPr/>
+                    <a:lstStyle/>
+                    <a:p>
+                      <a:pPr algn="ctr" indent="0" marL="0">
+                        <a:buNone/>
+                      </a:pPr>
+                      <a:r>
+                        <a:rPr lang="en-US" sz="2000" dirty="0">
+                          <a:solidFill>
+                            <a:schemeClr val="tx1"/>
+                          </a:solidFill>
+                        </a:rPr>
+                        <a:t>0.670</a:t>
+                      </a:r>
+                      <a:endParaRPr lang="en-US" sz="2000" dirty="0"/>
+                    </a:p>
+                  </a:txBody>
+                  <a:tcPr marL="91440" marR="91440" marT="45720" marB="45720" anchor="ctr">
+                    <a:lnL w="12700" cap="flat" cmpd="sng" algn="ctr">
+                      <a:solidFill>
+                        <a:srgbClr val="CCCCCC"/>
+                      </a:solidFill>
+                      <a:prstDash val="solid"/>
+                      <a:round/>
+                      <a:headEnd type="none" w="med" len="med"/>
+                      <a:tailEnd type="none" w="med" len="med"/>
+                    </a:lnL>
+                    <a:lnR w="12700" cap="flat" cmpd="sng" algn="ctr">
+                      <a:solidFill>
+                        <a:srgbClr val="CCCCCC"/>
+                      </a:solidFill>
+                      <a:prstDash val="solid"/>
+                      <a:round/>
+                      <a:headEnd type="none" w="med" len="med"/>
+                      <a:tailEnd type="none" w="med" len="med"/>
+                    </a:lnR>
+                    <a:lnT w="12700" cap="flat" cmpd="sng" algn="ctr">
+                      <a:solidFill>
+                        <a:srgbClr val="CCCCCC"/>
+                      </a:solidFill>
+                      <a:prstDash val="solid"/>
+                      <a:round/>
+                      <a:headEnd type="none" w="med" len="med"/>
+                      <a:tailEnd type="none" w="med" len="med"/>
+                    </a:lnT>
+                    <a:lnB w="12700" cap="flat" cmpd="sng" algn="ctr">
+                      <a:solidFill>
+                        <a:srgbClr val="CCCCCC"/>
+                      </a:solidFill>
+                      <a:prstDash val="solid"/>
+                      <a:round/>
+                      <a:headEnd type="none" w="med" len="med"/>
+                      <a:tailEnd type="none" w="med" len="med"/>
+                    </a:lnB>
+                    <a:solidFill>
+                      <a:schemeClr val="bg1"/>
+                    </a:solidFill>
+                  </a:tcPr>
+                </a:tc>
+                <a:tc>
+                  <a:txBody>
+                    <a:bodyPr/>
+                    <a:lstStyle/>
+                    <a:p>
+                      <a:pPr algn="ctr" indent="0" marL="0">
+                        <a:buNone/>
+                      </a:pPr>
+                      <a:r>
+                        <a:rPr lang="en-US" sz="2000" dirty="0">
+                          <a:solidFill>
+                            <a:schemeClr val="tx1"/>
+                          </a:solidFill>
+                        </a:rPr>
+                        <a:t>0.682</a:t>
+                      </a:r>
+                      <a:endParaRPr lang="en-US" sz="2000" dirty="0"/>
+                    </a:p>
+                  </a:txBody>
+                  <a:tcPr marL="91440" marR="91440" marT="45720" marB="45720" anchor="ctr">
+                    <a:lnL w="12700" cap="flat" cmpd="sng" algn="ctr">
+                      <a:solidFill>
+                        <a:srgbClr val="CCCCCC"/>
+                      </a:solidFill>
+                      <a:prstDash val="solid"/>
+                      <a:round/>
+                      <a:headEnd type="none" w="med" len="med"/>
+                      <a:tailEnd type="none" w="med" len="med"/>
+                    </a:lnL>
+                    <a:lnR w="12700" cap="flat" cmpd="sng" algn="ctr">
+                      <a:solidFill>
+                        <a:srgbClr val="CCCCCC"/>
+                      </a:solidFill>
+                      <a:prstDash val="solid"/>
+                      <a:round/>
+                      <a:headEnd type="none" w="med" len="med"/>
+                      <a:tailEnd type="none" w="med" len="med"/>
+                    </a:lnR>
+                    <a:lnT w="12700" cap="flat" cmpd="sng" algn="ctr">
+                      <a:solidFill>
+                        <a:srgbClr val="CCCCCC"/>
+                      </a:solidFill>
+                      <a:prstDash val="solid"/>
+                      <a:round/>
+                      <a:headEnd type="none" w="med" len="med"/>
+                      <a:tailEnd type="none" w="med" len="med"/>
+                    </a:lnT>
+                    <a:lnB w="12700" cap="flat" cmpd="sng" algn="ctr">
+                      <a:solidFill>
+                        <a:srgbClr val="CCCCCC"/>
+                      </a:solidFill>
+                      <a:prstDash val="solid"/>
+                      <a:round/>
+                      <a:headEnd type="none" w="med" len="med"/>
+                      <a:tailEnd type="none" w="med" len="med"/>
+                    </a:lnB>
+                    <a:solidFill>
+                      <a:schemeClr val="bg1"/>
+                    </a:solidFill>
+                  </a:tcPr>
+                </a:tc>
+                <a:tc>
+                  <a:txBody>
+                    <a:bodyPr/>
+                    <a:lstStyle/>
+                    <a:p>
+                      <a:pPr algn="ctr" indent="0" marL="0">
+                        <a:buNone/>
+                      </a:pPr>
+                      <a:r>
+                        <a:rPr lang="en-US" sz="2000" b="1" dirty="0">
+                          <a:solidFill>
+                            <a:schemeClr val="accent1"/>
+                          </a:solidFill>
+                        </a:rPr>
+                        <a:t>+0.012</a:t>
+                      </a:r>
+                      <a:endParaRPr lang="en-US" sz="2000" dirty="0"/>
+                    </a:p>
+                  </a:txBody>
+                  <a:tcPr marL="91440" marR="91440" marT="45720" marB="45720" anchor="ctr">
+                    <a:lnL w="12700" cap="flat" cmpd="sng" algn="ctr">
+                      <a:solidFill>
+                        <a:srgbClr val="CCCCCC"/>
+                      </a:solidFill>
+                      <a:prstDash val="solid"/>
+                      <a:round/>
+                      <a:headEnd type="none" w="med" len="med"/>
+                      <a:tailEnd type="none" w="med" len="med"/>
+                    </a:lnL>
+                    <a:lnR w="12700" cap="flat" cmpd="sng" algn="ctr">
+                      <a:solidFill>
+                        <a:srgbClr val="CCCCCC"/>
+                      </a:solidFill>
+                      <a:prstDash val="solid"/>
+                      <a:round/>
+                      <a:headEnd type="none" w="med" len="med"/>
+                      <a:tailEnd type="none" w="med" len="med"/>
+                    </a:lnR>
+                    <a:lnT w="12700" cap="flat" cmpd="sng" algn="ctr">
+                      <a:solidFill>
+                        <a:srgbClr val="CCCCCC"/>
+                      </a:solidFill>
+                      <a:prstDash val="solid"/>
+                      <a:round/>
+                      <a:headEnd type="none" w="med" len="med"/>
+                      <a:tailEnd type="none" w="med" len="med"/>
+                    </a:lnT>
+                    <a:lnB w="12700" cap="flat" cmpd="sng" algn="ctr">
+                      <a:solidFill>
+                        <a:srgbClr val="CCCCCC"/>
+                      </a:solidFill>
+                      <a:prstDash val="solid"/>
+                      <a:round/>
+                      <a:headEnd type="none" w="med" len="med"/>
+                      <a:tailEnd type="none" w="med" len="med"/>
+                    </a:lnB>
+                    <a:solidFill>
+                      <a:schemeClr val="bg1"/>
+                    </a:solidFill>
+                  </a:tcPr>
+                </a:tc>
+              </a:tr>
+            </a:tbl>
           </a:graphicData>
         </a:graphic>
       </p:graphicFrame>
       <p:sp>
         <p:nvSpPr>
-          <p:cNvPr id="6" name="Callout 1"/>
+          <p:cNvPr id="6" name="Table note"/>
+          <p:cNvSpPr txBox="1"/>
+          <p:nvPr/>
+        </p:nvSpPr>
+        <p:spPr>
+          <a:xfrm>
+            <a:off x="640080" y="5120640"/>
+            <a:ext cx="6766560" cy="365760"/>
+          </a:xfrm>
+          <a:prstGeom prst="rect">
+            <a:avLst/>
+          </a:prstGeom>
+          <a:noFill/>
+          <a:ln/>
+        </p:spPr>
+        <p:txBody>
+          <a:bodyPr wrap="square" lIns="0" tIns="0" rIns="0" bIns="0" rtlCol="0" anchor="t"/>
+          <a:lstStyle/>
+          <a:p>
+            <a:pPr indent="0" marL="0">
+              <a:buNone/>
+            </a:pPr>
+            <a:r>
+              <a:rPr lang="en-US" sz="1800" dirty="0">
+                <a:solidFill>
+                  <a:schemeClr val="accent3"/>
+                </a:solidFill>
+              </a:rPr>
+              <a:t>A = e-commerce, B = video streaming. n = 20 students.</a:t>
+            </a:r>
+            <a:endParaRPr lang="en-US" sz="1800" dirty="0"/>
+          </a:p>
+        </p:txBody>
+      </p:sp>
+      <p:sp>
+        <p:nvSpPr>
+          <p:cNvPr id="7" name="Callout 1"/>
           <p:cNvSpPr/>
           <p:nvPr/>
         </p:nvSpPr>
         <p:spPr>
           <a:xfrm>
-            <a:off x="6035040" y="1280160"/>
-            <a:ext cx="2651760" cy="960120"/>
+            <a:off x="7772400" y="1600200"/>
+            <a:ext cx="3776472" cy="1554480"/>
           </a:xfrm>
           <a:prstGeom prst="roundRect">
             <a:avLst>
-              <a:gd name="adj" fmla="val 7619"/>
+              <a:gd name="adj" fmla="val 5882"/>
             </a:avLst>
           </a:prstGeom>
           <a:solidFill>
             <a:schemeClr val="bg2"/>
           </a:solidFill>
-          <a:ln w="9525">
+          <a:ln w="12700">
             <a:solidFill>
               <a:srgbClr val="CCCCCC"/>
             </a:solidFill>
@@ -3887,14 +4648,14 @@
       </p:sp>
       <p:sp>
         <p:nvSpPr>
-          <p:cNvPr id="7" name="Callout 1 text"/>
+          <p:cNvPr id="8" name="Callout 1 text"/>
           <p:cNvSpPr txBox="1"/>
           <p:nvPr/>
         </p:nvSpPr>
         <p:spPr>
           <a:xfrm>
-            <a:off x="6126480" y="1280160"/>
-            <a:ext cx="2468880" cy="960120"/>
+            <a:off x="7863840" y="1600200"/>
+            <a:ext cx="3593592" cy="1554480"/>
           </a:xfrm>
           <a:prstGeom prst="rect">
             <a:avLst/>
@@ -3903,135 +4664,58 @@
           <a:ln/>
         </p:spPr>
         <p:txBody>
-          <a:bodyPr wrap="square" lIns="1016" tIns="1016" rIns="1016" bIns="1016" rtlCol="0" anchor="ctr"/>
-          <a:lstStyle/>
-          <a:p>
-            <a:pPr indent="0" marL="0">
-              <a:buNone/>
-            </a:pPr>
-            <a:r>
-              <a:rPr lang="en-US" sz="1800" b="1" dirty="0">
+          <a:bodyPr wrap="square" lIns="1270" tIns="1270" rIns="1270" bIns="1270" rtlCol="0" anchor="ctr"/>
+          <a:lstStyle/>
+          <a:p>
+            <a:pPr indent="0" marL="0">
+              <a:buNone/>
+            </a:pPr>
+            <a:r>
+              <a:rPr lang="en-US" sz="2000" b="1" dirty="0">
                 <a:solidFill>
                   <a:schemeClr val="tx2"/>
                 </a:solidFill>
               </a:rPr>
-              <a:t>All above 0.617</a:t>
-            </a:r>
-            <a:endParaRPr lang="en-US" sz="1400" dirty="0"/>
-          </a:p>
-          <a:p>
-            <a:pPr indent="0" marL="0">
-              <a:buNone/>
-            </a:pPr>
-            <a:r>
-              <a:rPr lang="en-US" sz="1200" dirty="0">
+              <a:t>All scores above 0.617</a:t>
+            </a:r>
+            <a:endParaRPr lang="en-US" sz="2000" dirty="0"/>
+          </a:p>
+          <a:p>
+            <a:pPr indent="0" marL="0">
+              <a:buNone/>
+            </a:pPr>
+            <a:r>
+              <a:rPr lang="en-US" sz="2000" dirty="0">
                 <a:solidFill>
                   <a:schemeClr val="accent3"/>
                 </a:solidFill>
               </a:rPr>
-              <a:t>WMT24 benchmark, every condition</a:t>
-            </a:r>
-            <a:endParaRPr lang="en-US" sz="1400" dirty="0"/>
-          </a:p>
-        </p:txBody>
-      </p:sp>
-      <p:sp>
-        <p:nvSpPr>
-          <p:cNvPr id="8" name="Callout 2"/>
+              <a:t>WMT24 benchmark</a:t>
+            </a:r>
+            <a:endParaRPr lang="en-US" sz="2000" dirty="0"/>
+          </a:p>
+        </p:txBody>
+      </p:sp>
+      <p:sp>
+        <p:nvSpPr>
+          <p:cNvPr id="9" name="Callout 2"/>
           <p:cNvSpPr/>
           <p:nvPr/>
         </p:nvSpPr>
         <p:spPr>
           <a:xfrm>
-            <a:off x="6035040" y="2423160"/>
-            <a:ext cx="2651760" cy="960120"/>
+            <a:off x="7772400" y="3383280"/>
+            <a:ext cx="3776472" cy="1874520"/>
           </a:xfrm>
           <a:prstGeom prst="roundRect">
             <a:avLst>
-              <a:gd name="adj" fmla="val 7619"/>
-            </a:avLst>
-          </a:prstGeom>
-          <a:solidFill>
-            <a:schemeClr val="bg2"/>
-          </a:solidFill>
-          <a:ln w="9525">
-            <a:solidFill>
-              <a:srgbClr val="CCCCCC"/>
-            </a:solidFill>
-            <a:prstDash val="solid"/>
-          </a:ln>
-        </p:spPr>
-      </p:sp>
-      <p:sp>
-        <p:nvSpPr>
-          <p:cNvPr id="9" name="Callout 2 text"/>
-          <p:cNvSpPr txBox="1"/>
-          <p:nvPr/>
-        </p:nvSpPr>
-        <p:spPr>
-          <a:xfrm>
-            <a:off x="6126480" y="2423160"/>
-            <a:ext cx="2468880" cy="960120"/>
-          </a:xfrm>
-          <a:prstGeom prst="rect">
-            <a:avLst/>
-          </a:prstGeom>
-          <a:noFill/>
-          <a:ln/>
-        </p:spPr>
-        <p:txBody>
-          <a:bodyPr wrap="square" lIns="1016" tIns="1016" rIns="1016" bIns="1016" rtlCol="0" anchor="ctr"/>
-          <a:lstStyle/>
-          <a:p>
-            <a:pPr indent="0" marL="0">
-              <a:buNone/>
-            </a:pPr>
-            <a:r>
-              <a:rPr lang="en-US" sz="1800" b="1" dirty="0">
-                <a:solidFill>
-                  <a:schemeClr val="tx2"/>
-                </a:solidFill>
-              </a:rPr>
-              <a:t>EsTA lower in 3 of 4</a:t>
-            </a:r>
-            <a:endParaRPr lang="en-US" sz="1400" dirty="0"/>
-          </a:p>
-          <a:p>
-            <a:pPr indent="0" marL="0">
-              <a:buNone/>
-            </a:pPr>
-            <a:r>
-              <a:rPr lang="en-US" sz="1200" dirty="0">
-                <a:solidFill>
-                  <a:schemeClr val="accent3"/>
-                </a:solidFill>
-              </a:rPr>
-              <a:t>Good A, Bad A, Good B</a:t>
-            </a:r>
-            <a:endParaRPr lang="en-US" sz="1400" dirty="0"/>
-          </a:p>
-        </p:txBody>
-      </p:sp>
-      <p:sp>
-        <p:nvSpPr>
-          <p:cNvPr id="10" name="Callout 3"/>
-          <p:cNvSpPr/>
-          <p:nvPr/>
-        </p:nvSpPr>
-        <p:spPr>
-          <a:xfrm>
-            <a:off x="6035040" y="3566160"/>
-            <a:ext cx="2651760" cy="1097280"/>
-          </a:xfrm>
-          <a:prstGeom prst="roundRect">
-            <a:avLst>
-              <a:gd name="adj" fmla="val 6667"/>
+              <a:gd name="adj" fmla="val 4878"/>
             </a:avLst>
           </a:prstGeom>
           <a:solidFill>
             <a:schemeClr val="accent6"/>
           </a:solidFill>
-          <a:ln w="9525">
+          <a:ln w="12700">
             <a:solidFill>
               <a:schemeClr val="accent5"/>
             </a:solidFill>
@@ -4041,14 +4725,14 @@
       </p:sp>
       <p:sp>
         <p:nvSpPr>
-          <p:cNvPr id="11" name="Callout 3 text"/>
+          <p:cNvPr id="10" name="Callout 2 text"/>
           <p:cNvSpPr txBox="1"/>
           <p:nvPr/>
         </p:nvSpPr>
         <p:spPr>
           <a:xfrm>
-            <a:off x="6126480" y="3566160"/>
-            <a:ext cx="2468880" cy="1097280"/>
+            <a:off x="7863840" y="3383280"/>
+            <a:ext cx="3593592" cy="1874520"/>
           </a:xfrm>
           <a:prstGeom prst="rect">
             <a:avLst/>
@@ -4057,35 +4741,21 @@
           <a:ln/>
         </p:spPr>
         <p:txBody>
-          <a:bodyPr wrap="square" lIns="1016" tIns="1016" rIns="1016" bIns="1016" rtlCol="0" anchor="ctr"/>
-          <a:lstStyle/>
-          <a:p>
-            <a:pPr indent="0" marL="0">
-              <a:buNone/>
-            </a:pPr>
-            <a:r>
-              <a:rPr lang="en-US" sz="1600" b="1" dirty="0">
-                <a:solidFill>
-                  <a:schemeClr val="tx2"/>
-                </a:solidFill>
-              </a:rPr>
-              <a:t>Why? “Saying too much”</a:t>
-            </a:r>
-            <a:endParaRPr lang="en-US" sz="1400" dirty="0"/>
-          </a:p>
-          <a:p>
-            <a:pPr indent="0" marL="0">
-              <a:buNone/>
-            </a:pPr>
-            <a:r>
-              <a:rPr lang="en-US" sz="1200" dirty="0">
+          <a:bodyPr wrap="square" lIns="1270" tIns="1270" rIns="1270" bIns="1270" rtlCol="0" anchor="ctr"/>
+          <a:lstStyle/>
+          <a:p>
+            <a:pPr indent="0" marL="0">
+              <a:buNone/>
+            </a:pPr>
+            <a:r>
+              <a:rPr lang="en-US" sz="2000" b="1" dirty="0">
                 <a:solidFill>
                   <a:schemeClr val="tx1"/>
                 </a:solidFill>
               </a:rPr>
-              <a:t>EsTA wrote thoughts users never voiced.</a:t>
-            </a:r>
-            <a:endParaRPr lang="en-US" sz="1400" dirty="0"/>
+              <a:t>EsTA sometimes wrote thoughts users never voiced.</a:t>
+            </a:r>
+            <a:endParaRPr lang="en-US" sz="2000" dirty="0"/>
           </a:p>
         </p:txBody>
       </p:sp>
@@ -4101,8 +4771,8 @@
         </p:nvSpPr>
         <p:spPr>
           <a:xfrm>
-            <a:off x="8321040" y="4800600"/>
-            <a:ext cx="365760" cy="228600"/>
+            <a:off x="11155680" y="6382512"/>
+            <a:ext cx="411480" cy="292608"/>
           </a:xfrm>
           <a:prstGeom prst="rect">
             <a:avLst/>
@@ -4117,7 +4787,7 @@
           <a:bodyPr/>
           <a:lstStyle>
             <a:lvl1pPr>
-              <a:defRPr sz="900">
+              <a:defRPr sz="1800">
                 <a:solidFill>
                   <a:schemeClr val="tx1"/>
                 </a:solidFill>
@@ -4167,8 +4837,8 @@
         </p:nvSpPr>
         <p:spPr>
           <a:xfrm>
-            <a:off x="457200" y="219456"/>
-            <a:ext cx="5486400" cy="237744"/>
+            <a:off x="640080" y="256032"/>
+            <a:ext cx="7315200" cy="329184"/>
           </a:xfrm>
           <a:prstGeom prst="rect">
             <a:avLst/>
@@ -4184,14 +4854,14 @@
               <a:buNone/>
             </a:pPr>
             <a:r>
-              <a:rPr lang="en-US" sz="1200" b="1" dirty="0">
+              <a:rPr lang="en-US" sz="2000" b="1" dirty="0">
                 <a:solidFill>
                   <a:schemeClr val="tx2"/>
                 </a:solidFill>
               </a:rPr>
-              <a:t>Undergraduate · 3/3</a:t>
-            </a:r>
-            <a:endParaRPr lang="en-US" sz="1200" dirty="0"/>
+              <a:t>Undergraduate thesis · example</a:t>
+            </a:r>
+            <a:endParaRPr lang="en-US" sz="2000" dirty="0"/>
           </a:p>
         </p:txBody>
       </p:sp>
@@ -4203,8 +4873,8 @@
         </p:nvSpPr>
         <p:spPr>
           <a:xfrm>
-            <a:off x="457200" y="457200"/>
-            <a:ext cx="8229600" cy="594360"/>
+            <a:off x="640080" y="594360"/>
+            <a:ext cx="10881360" cy="731520"/>
           </a:xfrm>
           <a:prstGeom prst="rect">
             <a:avLst/>
@@ -4220,14 +4890,14 @@
               <a:buNone/>
             </a:pPr>
             <a:r>
-              <a:rPr lang="en-US" sz="2600" b="1" dirty="0">
+              <a:rPr lang="en-US" sz="2800" b="1" dirty="0">
                 <a:solidFill>
                   <a:schemeClr val="tx2"/>
                 </a:solidFill>
               </a:rPr>
-              <a:t>Gaze recovered an unspoken calculation</a:t>
-            </a:r>
-            <a:endParaRPr lang="en-US" sz="2600" dirty="0"/>
+              <a:t>In one cart scene, EsTA wrote a budget check consistent with the gaze.</a:t>
+            </a:r>
+            <a:endParaRPr lang="en-US" sz="2800" dirty="0"/>
           </a:p>
         </p:txBody>
       </p:sp>
@@ -4239,18 +4909,18 @@
         </p:nvSpPr>
         <p:spPr>
           <a:xfrm>
-            <a:off x="457200" y="1280160"/>
-            <a:ext cx="2651760" cy="2286000"/>
+            <a:off x="640080" y="1600200"/>
+            <a:ext cx="3502152" cy="3291840"/>
           </a:xfrm>
           <a:prstGeom prst="roundRect">
             <a:avLst>
-              <a:gd name="adj" fmla="val 3200"/>
+              <a:gd name="adj" fmla="val 2778"/>
             </a:avLst>
           </a:prstGeom>
           <a:solidFill>
             <a:schemeClr val="bg2"/>
           </a:solidFill>
-          <a:ln w="9525">
+          <a:ln w="12700">
             <a:solidFill>
               <a:srgbClr val="CCCCCC"/>
             </a:solidFill>
@@ -4266,8 +4936,8 @@
         </p:nvSpPr>
         <p:spPr>
           <a:xfrm>
-            <a:off x="566928" y="1371600"/>
-            <a:ext cx="2432304" cy="365760"/>
+            <a:off x="777240" y="1737360"/>
+            <a:ext cx="3227832" cy="457200"/>
           </a:xfrm>
           <a:prstGeom prst="rect">
             <a:avLst/>
@@ -4276,21 +4946,21 @@
           <a:ln/>
         </p:spPr>
         <p:txBody>
-          <a:bodyPr wrap="square" lIns="1016" tIns="1016" rIns="1016" bIns="1016" rtlCol="0" anchor="t"/>
-          <a:lstStyle/>
-          <a:p>
-            <a:pPr indent="0" marL="0">
-              <a:buNone/>
-            </a:pPr>
-            <a:r>
-              <a:rPr lang="en-US" sz="1500" b="1" dirty="0">
+          <a:bodyPr wrap="square" lIns="1270" tIns="1270" rIns="1270" bIns="1270" rtlCol="0" anchor="t"/>
+          <a:lstStyle/>
+          <a:p>
+            <a:pPr indent="0" marL="0">
+              <a:buNone/>
+            </a:pPr>
+            <a:r>
+              <a:rPr lang="en-US" sz="2000" b="1" dirty="0">
                 <a:solidFill>
                   <a:schemeClr val="tx1"/>
                 </a:solidFill>
               </a:rPr>
               <a:t>Actual utterance</a:t>
             </a:r>
-            <a:endParaRPr lang="en-US" sz="1500" dirty="0"/>
+            <a:endParaRPr lang="en-US" sz="2000" dirty="0"/>
           </a:p>
         </p:txBody>
       </p:sp>
@@ -4302,8 +4972,8 @@
         </p:nvSpPr>
         <p:spPr>
           <a:xfrm>
-            <a:off x="566928" y="1828800"/>
-            <a:ext cx="2432304" cy="1645920"/>
+            <a:off x="777240" y="2286000"/>
+            <a:ext cx="3227832" cy="2468880"/>
           </a:xfrm>
           <a:prstGeom prst="rect">
             <a:avLst/>
@@ -4312,21 +4982,21 @@
           <a:ln/>
         </p:spPr>
         <p:txBody>
-          <a:bodyPr wrap="square" lIns="1016" tIns="1016" rIns="1016" bIns="1016" rtlCol="0" anchor="t"/>
-          <a:lstStyle/>
-          <a:p>
-            <a:pPr indent="0" marL="0">
-              <a:buNone/>
-            </a:pPr>
-            <a:r>
-              <a:rPr lang="en-US" sz="1600" i="1" dirty="0">
+          <a:bodyPr wrap="square" lIns="1270" tIns="1270" rIns="1270" bIns="1270" rtlCol="0" anchor="t"/>
+          <a:lstStyle/>
+          <a:p>
+            <a:pPr indent="0" marL="0">
+              <a:buNone/>
+            </a:pPr>
+            <a:r>
+              <a:rPr lang="en-US" sz="2000" i="1" dirty="0">
                 <a:solidFill>
                   <a:schemeClr val="tx1"/>
                 </a:solidFill>
               </a:rPr>
               <a:t>“Now I have all four items, so let me check the cart.”</a:t>
             </a:r>
-            <a:endParaRPr lang="en-US" sz="1600" dirty="0"/>
+            <a:endParaRPr lang="en-US" sz="2000" dirty="0"/>
           </a:p>
         </p:txBody>
       </p:sp>
@@ -4338,18 +5008,18 @@
         </p:nvSpPr>
         <p:spPr>
           <a:xfrm>
-            <a:off x="3246120" y="1280160"/>
-            <a:ext cx="2651760" cy="2286000"/>
+            <a:off x="4343400" y="1600200"/>
+            <a:ext cx="3502152" cy="3291840"/>
           </a:xfrm>
           <a:prstGeom prst="roundRect">
             <a:avLst>
-              <a:gd name="adj" fmla="val 3200"/>
+              <a:gd name="adj" fmla="val 2778"/>
             </a:avLst>
           </a:prstGeom>
           <a:solidFill>
             <a:schemeClr val="bg2"/>
           </a:solidFill>
-          <a:ln w="9525">
+          <a:ln w="12700">
             <a:solidFill>
               <a:srgbClr val="CCCCCC"/>
             </a:solidFill>
@@ -4365,8 +5035,8 @@
         </p:nvSpPr>
         <p:spPr>
           <a:xfrm>
-            <a:off x="3355848" y="1371600"/>
-            <a:ext cx="2432304" cy="365760"/>
+            <a:off x="4480560" y="1737360"/>
+            <a:ext cx="3227832" cy="457200"/>
           </a:xfrm>
           <a:prstGeom prst="rect">
             <a:avLst/>
@@ -4375,21 +5045,21 @@
           <a:ln/>
         </p:spPr>
         <p:txBody>
-          <a:bodyPr wrap="square" lIns="1016" tIns="1016" rIns="1016" bIns="1016" rtlCol="0" anchor="t"/>
-          <a:lstStyle/>
-          <a:p>
-            <a:pPr indent="0" marL="0">
-              <a:buNone/>
-            </a:pPr>
-            <a:r>
-              <a:rPr lang="en-US" sz="1500" b="1" dirty="0">
+          <a:bodyPr wrap="square" lIns="1270" tIns="1270" rIns="1270" bIns="1270" rtlCol="0" anchor="t"/>
+          <a:lstStyle/>
+          <a:p>
+            <a:pPr indent="0" marL="0">
+              <a:buNone/>
+            </a:pPr>
+            <a:r>
+              <a:rPr lang="en-US" sz="2000" b="1" dirty="0">
                 <a:solidFill>
                   <a:schemeClr val="tx1"/>
                 </a:solidFill>
               </a:rPr>
               <a:t>InTA (UI only)</a:t>
             </a:r>
-            <a:endParaRPr lang="en-US" sz="1500" dirty="0"/>
+            <a:endParaRPr lang="en-US" sz="2000" dirty="0"/>
           </a:p>
         </p:txBody>
       </p:sp>
@@ -4401,8 +5071,8 @@
         </p:nvSpPr>
         <p:spPr>
           <a:xfrm>
-            <a:off x="3355848" y="1828800"/>
-            <a:ext cx="2432304" cy="1645920"/>
+            <a:off x="4480560" y="2286000"/>
+            <a:ext cx="3227832" cy="2468880"/>
           </a:xfrm>
           <a:prstGeom prst="rect">
             <a:avLst/>
@@ -4411,21 +5081,21 @@
           <a:ln/>
         </p:spPr>
         <p:txBody>
-          <a:bodyPr wrap="square" lIns="1016" tIns="1016" rIns="1016" bIns="1016" rtlCol="0" anchor="t"/>
-          <a:lstStyle/>
-          <a:p>
-            <a:pPr indent="0" marL="0">
-              <a:buNone/>
-            </a:pPr>
-            <a:r>
-              <a:rPr lang="en-US" sz="1600" i="1" dirty="0">
+          <a:bodyPr wrap="square" lIns="1270" tIns="1270" rIns="1270" bIns="1270" rtlCol="0" anchor="t"/>
+          <a:lstStyle/>
+          <a:p>
+            <a:pPr indent="0" marL="0">
+              <a:buNone/>
+            </a:pPr>
+            <a:r>
+              <a:rPr lang="en-US" sz="2000" i="1" dirty="0">
                 <a:solidFill>
                   <a:schemeClr val="tx1"/>
                 </a:solidFill>
               </a:rPr>
               <a:t>“…items complete, I’ll check the budget later.”</a:t>
             </a:r>
-            <a:endParaRPr lang="en-US" sz="1600" dirty="0"/>
+            <a:endParaRPr lang="en-US" sz="2000" dirty="0"/>
           </a:p>
         </p:txBody>
       </p:sp>
@@ -4437,18 +5107,18 @@
         </p:nvSpPr>
         <p:spPr>
           <a:xfrm>
-            <a:off x="6035040" y="1280160"/>
-            <a:ext cx="2651760" cy="2286000"/>
+            <a:off x="8046720" y="1600200"/>
+            <a:ext cx="3502152" cy="3291840"/>
           </a:xfrm>
           <a:prstGeom prst="roundRect">
             <a:avLst>
-              <a:gd name="adj" fmla="val 3200"/>
+              <a:gd name="adj" fmla="val 2778"/>
             </a:avLst>
           </a:prstGeom>
           <a:solidFill>
             <a:schemeClr val="accent6"/>
           </a:solidFill>
-          <a:ln w="9525">
+          <a:ln w="12700">
             <a:solidFill>
               <a:schemeClr val="accent5"/>
             </a:solidFill>
@@ -4464,8 +5134,8 @@
         </p:nvSpPr>
         <p:spPr>
           <a:xfrm>
-            <a:off x="6144768" y="1371600"/>
-            <a:ext cx="2432304" cy="365760"/>
+            <a:off x="8183880" y="1737360"/>
+            <a:ext cx="3227832" cy="457200"/>
           </a:xfrm>
           <a:prstGeom prst="rect">
             <a:avLst/>
@@ -4474,21 +5144,21 @@
           <a:ln/>
         </p:spPr>
         <p:txBody>
-          <a:bodyPr wrap="square" lIns="1016" tIns="1016" rIns="1016" bIns="1016" rtlCol="0" anchor="t"/>
-          <a:lstStyle/>
-          <a:p>
-            <a:pPr indent="0" marL="0">
-              <a:buNone/>
-            </a:pPr>
-            <a:r>
-              <a:rPr lang="en-US" sz="1500" b="1" dirty="0">
+          <a:bodyPr wrap="square" lIns="1270" tIns="1270" rIns="1270" bIns="1270" rtlCol="0" anchor="t"/>
+          <a:lstStyle/>
+          <a:p>
+            <a:pPr indent="0" marL="0">
+              <a:buNone/>
+            </a:pPr>
+            <a:r>
+              <a:rPr lang="en-US" sz="2000" b="1" dirty="0">
                 <a:solidFill>
                   <a:schemeClr val="tx2"/>
                 </a:solidFill>
               </a:rPr>
               <a:t>EsTA (gaze + UI)</a:t>
             </a:r>
-            <a:endParaRPr lang="en-US" sz="1500" dirty="0"/>
+            <a:endParaRPr lang="en-US" sz="2000" dirty="0"/>
           </a:p>
         </p:txBody>
       </p:sp>
@@ -4500,8 +5170,8 @@
         </p:nvSpPr>
         <p:spPr>
           <a:xfrm>
-            <a:off x="6144768" y="1828800"/>
-            <a:ext cx="2432304" cy="1645920"/>
+            <a:off x="8183880" y="2286000"/>
+            <a:ext cx="3227832" cy="2468880"/>
           </a:xfrm>
           <a:prstGeom prst="rect">
             <a:avLst/>
@@ -4510,61 +5180,34 @@
           <a:ln/>
         </p:spPr>
         <p:txBody>
-          <a:bodyPr wrap="square" lIns="1016" tIns="1016" rIns="1016" bIns="1016" rtlCol="0" anchor="t"/>
-          <a:lstStyle/>
-          <a:p>
-            <a:pPr indent="0" marL="0">
-              <a:buNone/>
-            </a:pPr>
-            <a:r>
-              <a:rPr lang="en-US" sz="1600" i="1" dirty="0">
+          <a:bodyPr wrap="square" lIns="1270" tIns="1270" rIns="1270" bIns="1270" rtlCol="0" anchor="t"/>
+          <a:lstStyle/>
+          <a:p>
+            <a:pPr indent="0" marL="0">
+              <a:buNone/>
+            </a:pPr>
+            <a:r>
+              <a:rPr lang="en-US" sz="2000" i="1" dirty="0">
                 <a:solidFill>
                   <a:schemeClr val="tx1"/>
                 </a:solidFill>
               </a:rPr>
               <a:t>“…¥12,400, plus ¥500 shipping makes ¥12,900, within the ¥14,000 budget.”</a:t>
             </a:r>
-            <a:endParaRPr lang="en-US" sz="1600" dirty="0"/>
-          </a:p>
-        </p:txBody>
-      </p:sp>
-      <p:sp>
-        <p:nvSpPr>
-          <p:cNvPr id="14" name="Takeaway card"/>
-          <p:cNvSpPr/>
-          <p:nvPr/>
-        </p:nvSpPr>
-        <p:spPr>
-          <a:xfrm>
-            <a:off x="457200" y="3749040"/>
-            <a:ext cx="8229600" cy="548640"/>
-          </a:xfrm>
-          <a:prstGeom prst="roundRect">
-            <a:avLst>
-              <a:gd name="adj" fmla="val 13333"/>
-            </a:avLst>
-          </a:prstGeom>
-          <a:solidFill>
-            <a:schemeClr val="tx2"/>
-          </a:solidFill>
-          <a:ln w="9525">
-            <a:solidFill>
-              <a:schemeClr val="tx2"/>
-            </a:solidFill>
-            <a:prstDash val="solid"/>
-          </a:ln>
-        </p:spPr>
-      </p:sp>
-      <p:sp>
-        <p:nvSpPr>
-          <p:cNvPr id="15" name="Takeaway text"/>
+            <a:endParaRPr lang="en-US" sz="2000" dirty="0"/>
+          </a:p>
+        </p:txBody>
+      </p:sp>
+      <p:sp>
+        <p:nvSpPr>
+          <p:cNvPr id="14" name="Example note"/>
           <p:cNvSpPr txBox="1"/>
           <p:nvPr/>
         </p:nvSpPr>
         <p:spPr>
           <a:xfrm>
-            <a:off x="594360" y="3749040"/>
-            <a:ext cx="7955280" cy="548640"/>
+            <a:off x="640080" y="5120640"/>
+            <a:ext cx="10881360" cy="731520"/>
           </a:xfrm>
           <a:prstGeom prst="rect">
             <a:avLst/>
@@ -4573,42 +5216,6 @@
           <a:ln/>
         </p:spPr>
         <p:txBody>
-          <a:bodyPr wrap="square" lIns="1016" tIns="1016" rIns="1016" bIns="1016" rtlCol="0" anchor="ctr"/>
-          <a:lstStyle/>
-          <a:p>
-            <a:pPr indent="0" marL="0">
-              <a:buNone/>
-            </a:pPr>
-            <a:r>
-              <a:rPr lang="en-US" sz="1500" b="1" dirty="0">
-                <a:solidFill>
-                  <a:schemeClr val="bg1"/>
-                </a:solidFill>
-              </a:rPr>
-              <a:t>Gaze moving through the prices matched the unspoken budget check.</a:t>
-            </a:r>
-            <a:endParaRPr lang="en-US" sz="1500" dirty="0"/>
-          </a:p>
-        </p:txBody>
-      </p:sp>
-      <p:sp>
-        <p:nvSpPr>
-          <p:cNvPr id="16" name="Venue"/>
-          <p:cNvSpPr txBox="1"/>
-          <p:nvPr/>
-        </p:nvSpPr>
-        <p:spPr>
-          <a:xfrm>
-            <a:off x="457200" y="4434840"/>
-            <a:ext cx="8229600" cy="274320"/>
-          </a:xfrm>
-          <a:prstGeom prst="rect">
-            <a:avLst/>
-          </a:prstGeom>
-          <a:noFill/>
-          <a:ln/>
-        </p:spPr>
-        <p:txBody>
           <a:bodyPr wrap="square" lIns="0" tIns="0" rIns="0" bIns="0" rtlCol="0" anchor="t"/>
           <a:lstStyle/>
           <a:p>
@@ -4616,14 +5223,14 @@
               <a:buNone/>
             </a:pPr>
             <a:r>
-              <a:rPr lang="en-US" sz="1000" dirty="0">
+              <a:rPr lang="en-US" sz="1800" dirty="0">
                 <a:solidFill>
                   <a:schemeClr val="accent3"/>
                 </a:solidFill>
               </a:rPr>
-              <a:t>Presented at the Japan Ergonomics Society Kanto Branch, Dec 2025. Excerpts translated from Japanese.</a:t>
-            </a:r>
-            <a:endParaRPr lang="en-US" sz="1000" dirty="0"/>
+              <a:t>Single example, not a general result. Excerpts translated from Japanese. Presented at the Japan Ergonomics Society Kanto Branch, Dec 2025.</a:t>
+            </a:r>
+            <a:endParaRPr lang="en-US" sz="1800" dirty="0"/>
           </a:p>
         </p:txBody>
       </p:sp>
@@ -4639,8 +5246,8 @@
         </p:nvSpPr>
         <p:spPr>
           <a:xfrm>
-            <a:off x="8321040" y="4800600"/>
-            <a:ext cx="365760" cy="228600"/>
+            <a:off x="11155680" y="6382512"/>
+            <a:ext cx="411480" cy="292608"/>
           </a:xfrm>
           <a:prstGeom prst="rect">
             <a:avLst/>
@@ -4655,7 +5262,7 @@
           <a:bodyPr/>
           <a:lstStyle>
             <a:lvl1pPr>
-              <a:defRPr sz="900">
+              <a:defRPr sz="1800">
                 <a:solidFill>
                   <a:schemeClr val="tx1"/>
                 </a:solidFill>
@@ -4705,8 +5312,8 @@
         </p:nvSpPr>
         <p:spPr>
           <a:xfrm>
-            <a:off x="457200" y="219456"/>
-            <a:ext cx="5486400" cy="237744"/>
+            <a:off x="640080" y="256032"/>
+            <a:ext cx="7315200" cy="329184"/>
           </a:xfrm>
           <a:prstGeom prst="rect">
             <a:avLst/>
@@ -4722,14 +5329,14 @@
               <a:buNone/>
             </a:pPr>
             <a:r>
-              <a:rPr lang="en-US" sz="1200" b="1" dirty="0">
+              <a:rPr lang="en-US" sz="2000" b="1" dirty="0">
                 <a:solidFill>
                   <a:schemeClr val="tx2"/>
                 </a:solidFill>
               </a:rPr>
-              <a:t>Bridge</a:t>
-            </a:r>
-            <a:endParaRPr lang="en-US" sz="1200" dirty="0"/>
+              <a:t>Master's research · method</a:t>
+            </a:r>
+            <a:endParaRPr lang="en-US" sz="2000" dirty="0"/>
           </a:p>
         </p:txBody>
       </p:sp>
@@ -4741,8 +5348,8 @@
         </p:nvSpPr>
         <p:spPr>
           <a:xfrm>
-            <a:off x="457200" y="457200"/>
-            <a:ext cx="8229600" cy="594360"/>
+            <a:off x="640080" y="594360"/>
+            <a:ext cx="10881360" cy="731520"/>
           </a:xfrm>
           <a:prstGeom prst="rect">
             <a:avLst/>
@@ -4758,109 +5365,37 @@
               <a:buNone/>
             </a:pPr>
             <a:r>
-              <a:rPr lang="en-US" sz="2600" b="1" dirty="0">
+              <a:rPr lang="en-US" sz="2800" b="1" dirty="0">
                 <a:solidFill>
                   <a:schemeClr val="tx2"/>
                 </a:solidFill>
               </a:rPr>
-              <a:t>From “saying too much” to a measurable goal</a:t>
-            </a:r>
-            <a:endParaRPr lang="en-US" sz="2600" dirty="0"/>
-          </a:p>
-        </p:txBody>
-      </p:sp>
-      <p:sp>
-        <p:nvSpPr>
-          <p:cNvPr id="5" name="Left header"/>
-          <p:cNvSpPr txBox="1"/>
-          <p:nvPr/>
-        </p:nvSpPr>
-        <p:spPr>
-          <a:xfrm>
-            <a:off x="457200" y="1188720"/>
-            <a:ext cx="3474720" cy="274320"/>
-          </a:xfrm>
-          <a:prstGeom prst="rect">
-            <a:avLst/>
-          </a:prstGeom>
-          <a:noFill/>
-          <a:ln/>
-        </p:spPr>
-        <p:txBody>
-          <a:bodyPr wrap="square" lIns="0" tIns="0" rIns="0" bIns="0" rtlCol="0" anchor="t"/>
-          <a:lstStyle/>
-          <a:p>
-            <a:pPr indent="0" marL="0">
-              <a:buNone/>
-            </a:pPr>
-            <a:r>
-              <a:rPr lang="en-US" sz="1300" b="1" dirty="0">
-                <a:solidFill>
-                  <a:schemeClr val="accent3"/>
-                </a:solidFill>
-              </a:rPr>
-              <a:t>Challenges from the thesis</a:t>
-            </a:r>
-            <a:endParaRPr lang="en-US" sz="1300" dirty="0"/>
-          </a:p>
-        </p:txBody>
-      </p:sp>
-      <p:sp>
-        <p:nvSpPr>
-          <p:cNvPr id="6" name="Right header"/>
-          <p:cNvSpPr txBox="1"/>
-          <p:nvPr/>
-        </p:nvSpPr>
-        <p:spPr>
-          <a:xfrm>
-            <a:off x="4754880" y="1188720"/>
-            <a:ext cx="3931920" cy="274320"/>
-          </a:xfrm>
-          <a:prstGeom prst="rect">
-            <a:avLst/>
-          </a:prstGeom>
-          <a:noFill/>
-          <a:ln/>
-        </p:spPr>
-        <p:txBody>
-          <a:bodyPr wrap="square" lIns="0" tIns="0" rIns="0" bIns="0" rtlCol="0" anchor="t"/>
-          <a:lstStyle/>
-          <a:p>
-            <a:pPr indent="0" marL="0">
-              <a:buNone/>
-            </a:pPr>
-            <a:r>
-              <a:rPr lang="en-US" sz="1300" b="1" dirty="0">
-                <a:solidFill>
-                  <a:schemeClr val="tx2"/>
-                </a:solidFill>
-              </a:rPr>
-              <a:t>Master's research</a:t>
-            </a:r>
-            <a:endParaRPr lang="en-US" sz="1300" dirty="0"/>
-          </a:p>
-        </p:txBody>
-      </p:sp>
-      <p:sp>
-        <p:nvSpPr>
-          <p:cNvPr id="7" name="Challenge 1"/>
+              <a:t>The LLM's explanation is scored against human key points it never sees.</a:t>
+            </a:r>
+            <a:endParaRPr lang="en-US" sz="2800" dirty="0"/>
+          </a:p>
+        </p:txBody>
+      </p:sp>
+      <p:sp>
+        <p:nvSpPr>
+          <p:cNvPr id="5" name="Input gaze"/>
           <p:cNvSpPr/>
           <p:nvPr/>
         </p:nvSpPr>
         <p:spPr>
           <a:xfrm>
-            <a:off x="457200" y="1554480"/>
-            <a:ext cx="3474720" cy="1280160"/>
+            <a:off x="640080" y="1600200"/>
+            <a:ext cx="3291840" cy="1417320"/>
           </a:xfrm>
           <a:prstGeom prst="roundRect">
             <a:avLst>
-              <a:gd name="adj" fmla="val 5714"/>
+              <a:gd name="adj" fmla="val 6452"/>
             </a:avLst>
           </a:prstGeom>
           <a:solidFill>
             <a:schemeClr val="bg2"/>
           </a:solidFill>
-          <a:ln w="9525">
+          <a:ln w="12700">
             <a:solidFill>
               <a:srgbClr val="CCCCCC"/>
             </a:solidFill>
@@ -4870,14 +5405,14 @@
       </p:sp>
       <p:sp>
         <p:nvSpPr>
-          <p:cNvPr id="8" name="Challenge 1 text"/>
+          <p:cNvPr id="6" name="Input gaze text"/>
           <p:cNvSpPr txBox="1"/>
           <p:nvPr/>
         </p:nvSpPr>
         <p:spPr>
           <a:xfrm>
-            <a:off x="594360" y="1554480"/>
-            <a:ext cx="3200400" cy="1280160"/>
+            <a:off x="731520" y="1600200"/>
+            <a:ext cx="3108960" cy="1417320"/>
           </a:xfrm>
           <a:prstGeom prst="rect">
             <a:avLst/>
@@ -4886,7 +5421,7 @@
           <a:ln/>
         </p:spPr>
         <p:txBody>
-          <a:bodyPr wrap="square" lIns="1016" tIns="1016" rIns="1016" bIns="1016" rtlCol="0" anchor="ctr"/>
+          <a:bodyPr wrap="square" lIns="1270" tIns="1270" rIns="1270" bIns="1270" rtlCol="0" anchor="ctr"/>
           <a:lstStyle/>
           <a:p>
             <a:pPr indent="0" marL="0">
@@ -4898,46 +5433,46 @@
                   <a:schemeClr val="tx1"/>
                 </a:solidFill>
               </a:rPr>
-              <a:t>Overstatement</a:t>
-            </a:r>
-            <a:endParaRPr lang="en-US" sz="1400" dirty="0"/>
-          </a:p>
-          <a:p>
-            <a:pPr indent="0" marL="0">
-              <a:buNone/>
-            </a:pPr>
-            <a:r>
-              <a:rPr lang="en-US" sz="1400" dirty="0">
+              <a:t>Gaze metrics</a:t>
+            </a:r>
+            <a:endParaRPr lang="en-US" sz="2000" dirty="0"/>
+          </a:p>
+          <a:p>
+            <a:pPr indent="0" marL="0">
+              <a:buNone/>
+            </a:pPr>
+            <a:r>
+              <a:rPr lang="en-US" sz="2000" dirty="0">
                 <a:solidFill>
                   <a:schemeClr val="accent3"/>
                 </a:solidFill>
               </a:rPr>
-              <a:t>The model sometimes says too much.</a:t>
-            </a:r>
-            <a:endParaRPr lang="en-US" sz="1400" dirty="0"/>
-          </a:p>
-        </p:txBody>
-      </p:sp>
-      <p:sp>
-        <p:nvSpPr>
-          <p:cNvPr id="9" name="Challenge 2"/>
+              <a:t>dwell time, visits per technique</a:t>
+            </a:r>
+            <a:endParaRPr lang="en-US" sz="2000" dirty="0"/>
+          </a:p>
+        </p:txBody>
+      </p:sp>
+      <p:sp>
+        <p:nvSpPr>
+          <p:cNvPr id="7" name="Input UI"/>
           <p:cNvSpPr/>
           <p:nvPr/>
         </p:nvSpPr>
         <p:spPr>
           <a:xfrm>
-            <a:off x="457200" y="3017520"/>
-            <a:ext cx="3474720" cy="1280160"/>
+            <a:off x="640080" y="3200400"/>
+            <a:ext cx="3291840" cy="1417320"/>
           </a:xfrm>
           <a:prstGeom prst="roundRect">
             <a:avLst>
-              <a:gd name="adj" fmla="val 5714"/>
+              <a:gd name="adj" fmla="val 6452"/>
             </a:avLst>
           </a:prstGeom>
           <a:solidFill>
             <a:schemeClr val="bg2"/>
           </a:solidFill>
-          <a:ln w="9525">
+          <a:ln w="12700">
             <a:solidFill>
               <a:srgbClr val="CCCCCC"/>
             </a:solidFill>
@@ -4947,14 +5482,14 @@
       </p:sp>
       <p:sp>
         <p:nvSpPr>
-          <p:cNvPr id="10" name="Challenge 2 text"/>
+          <p:cNvPr id="8" name="Input UI text"/>
           <p:cNvSpPr txBox="1"/>
           <p:nvPr/>
         </p:nvSpPr>
         <p:spPr>
           <a:xfrm>
-            <a:off x="594360" y="3017520"/>
-            <a:ext cx="3200400" cy="1280160"/>
+            <a:off x="731520" y="3200400"/>
+            <a:ext cx="3108960" cy="1417320"/>
           </a:xfrm>
           <a:prstGeom prst="rect">
             <a:avLst/>
@@ -4963,7 +5498,7 @@
           <a:ln/>
         </p:spPr>
         <p:txBody>
-          <a:bodyPr wrap="square" lIns="1016" tIns="1016" rIns="1016" bIns="1016" rtlCol="0" anchor="ctr"/>
+          <a:bodyPr wrap="square" lIns="1270" tIns="1270" rIns="1270" bIns="1270" rtlCol="0" anchor="ctr"/>
           <a:lstStyle/>
           <a:p>
             <a:pPr indent="0" marL="0">
@@ -4975,42 +5510,42 @@
                   <a:schemeClr val="tx1"/>
                 </a:solidFill>
               </a:rPr>
-              <a:t>Time order</a:t>
-            </a:r>
-            <a:endParaRPr lang="en-US" sz="1400" dirty="0"/>
-          </a:p>
-          <a:p>
-            <a:pPr indent="0" marL="0">
-              <a:buNone/>
-            </a:pPr>
-            <a:r>
-              <a:rPr lang="en-US" sz="1400" dirty="0">
+              <a:t>UI structure</a:t>
+            </a:r>
+            <a:endParaRPr lang="en-US" sz="2000" dirty="0"/>
+          </a:p>
+          <a:p>
+            <a:pPr indent="0" marL="0">
+              <a:buNone/>
+            </a:pPr>
+            <a:r>
+              <a:rPr lang="en-US" sz="2000" dirty="0">
                 <a:solidFill>
                   <a:schemeClr val="accent3"/>
                 </a:solidFill>
               </a:rPr>
-              <a:t>Weakly handled in the thesis.</a:t>
-            </a:r>
-            <a:endParaRPr lang="en-US" sz="1400" dirty="0"/>
-          </a:p>
-        </p:txBody>
-      </p:sp>
-      <p:sp>
-        <p:nvSpPr>
-          <p:cNvPr id="11" name="Arrow goal"/>
+              <a:t>screen, HTML/CSS, task</a:t>
+            </a:r>
+            <a:endParaRPr lang="en-US" sz="2000" dirty="0"/>
+          </a:p>
+        </p:txBody>
+      </p:sp>
+      <p:sp>
+        <p:nvSpPr>
+          <p:cNvPr id="9" name="Gaze to LLM"/>
           <p:cNvSpPr/>
           <p:nvPr/>
         </p:nvSpPr>
         <p:spPr>
           <a:xfrm>
-            <a:off x="4023360" y="2194560"/>
-            <a:ext cx="640080" cy="0"/>
+            <a:off x="3977640" y="2331720"/>
+            <a:ext cx="411480" cy="548640"/>
           </a:xfrm>
           <a:prstGeom prst="line">
             <a:avLst/>
           </a:prstGeom>
           <a:noFill/>
-          <a:ln w="15875">
+          <a:ln w="19050">
             <a:solidFill>
               <a:schemeClr val="tx1"/>
             </a:solidFill>
@@ -5021,20 +5556,20 @@
       </p:sp>
       <p:sp>
         <p:nvSpPr>
-          <p:cNvPr id="12" name="Arrow eval"/>
+          <p:cNvPr id="10" name="UI to LLM"/>
           <p:cNvSpPr/>
           <p:nvPr/>
         </p:nvSpPr>
         <p:spPr>
           <a:xfrm>
-            <a:off x="4023360" y="3657600"/>
-            <a:ext cx="640080" cy="0"/>
+            <a:off x="3977640" y="3886200"/>
+            <a:ext cx="411480" cy="-548640"/>
           </a:xfrm>
           <a:prstGeom prst="line">
             <a:avLst/>
           </a:prstGeom>
           <a:noFill/>
-          <a:ln w="15875">
+          <a:ln w="19050">
             <a:solidFill>
               <a:schemeClr val="tx1"/>
             </a:solidFill>
@@ -5045,24 +5580,111 @@
       </p:sp>
       <p:sp>
         <p:nvSpPr>
-          <p:cNvPr id="13" name="New goal"/>
+          <p:cNvPr id="11" name="LLM"/>
           <p:cNvSpPr/>
           <p:nvPr/>
         </p:nvSpPr>
         <p:spPr>
           <a:xfrm>
-            <a:off x="4754880" y="1554480"/>
-            <a:ext cx="3931920" cy="1280160"/>
+            <a:off x="4434840" y="2286000"/>
+            <a:ext cx="1280160" cy="1554480"/>
           </a:xfrm>
           <a:prstGeom prst="roundRect">
             <a:avLst>
-              <a:gd name="adj" fmla="val 5714"/>
+              <a:gd name="adj" fmla="val 7143"/>
+            </a:avLst>
+          </a:prstGeom>
+          <a:solidFill>
+            <a:schemeClr val="tx2"/>
+          </a:solidFill>
+          <a:ln w="12700">
+            <a:solidFill>
+              <a:schemeClr val="tx2"/>
+            </a:solidFill>
+            <a:prstDash val="solid"/>
+          </a:ln>
+        </p:spPr>
+      </p:sp>
+      <p:sp>
+        <p:nvSpPr>
+          <p:cNvPr id="12" name="LLM text"/>
+          <p:cNvSpPr txBox="1"/>
+          <p:nvPr/>
+        </p:nvSpPr>
+        <p:spPr>
+          <a:xfrm>
+            <a:off x="4434840" y="2286000"/>
+            <a:ext cx="1280160" cy="1554480"/>
+          </a:xfrm>
+          <a:prstGeom prst="rect">
+            <a:avLst/>
+          </a:prstGeom>
+          <a:noFill/>
+          <a:ln/>
+        </p:spPr>
+        <p:txBody>
+          <a:bodyPr wrap="square" lIns="1270" tIns="1270" rIns="1270" bIns="1270" rtlCol="0" anchor="ctr"/>
+          <a:lstStyle/>
+          <a:p>
+            <a:pPr algn="ctr" indent="0" marL="0">
+              <a:buNone/>
+            </a:pPr>
+            <a:r>
+              <a:rPr lang="en-US" sz="2800" b="1" dirty="0">
+                <a:solidFill>
+                  <a:schemeClr val="bg1"/>
+                </a:solidFill>
+              </a:rPr>
+              <a:t>LLM</a:t>
+            </a:r>
+            <a:endParaRPr lang="en-US" sz="2800" dirty="0"/>
+          </a:p>
+        </p:txBody>
+      </p:sp>
+      <p:sp>
+        <p:nvSpPr>
+          <p:cNvPr id="13" name="LLM to output"/>
+          <p:cNvSpPr/>
+          <p:nvPr/>
+        </p:nvSpPr>
+        <p:spPr>
+          <a:xfrm>
+            <a:off x="5760720" y="3063240"/>
+            <a:ext cx="365760" cy="0"/>
+          </a:xfrm>
+          <a:prstGeom prst="line">
+            <a:avLst/>
+          </a:prstGeom>
+          <a:noFill/>
+          <a:ln w="19050">
+            <a:solidFill>
+              <a:schemeClr val="tx1"/>
+            </a:solidFill>
+            <a:prstDash val="solid"/>
+            <a:tailEnd type="triangle"/>
+          </a:ln>
+        </p:spPr>
+      </p:sp>
+      <p:sp>
+        <p:nvSpPr>
+          <p:cNvPr id="14" name="Output"/>
+          <p:cNvSpPr/>
+          <p:nvPr/>
+        </p:nvSpPr>
+        <p:spPr>
+          <a:xfrm>
+            <a:off x="6172200" y="1600200"/>
+            <a:ext cx="2743200" cy="3017520"/>
+          </a:xfrm>
+          <a:prstGeom prst="roundRect">
+            <a:avLst>
+              <a:gd name="adj" fmla="val 3333"/>
             </a:avLst>
           </a:prstGeom>
           <a:solidFill>
             <a:schemeClr val="accent6"/>
           </a:solidFill>
-          <a:ln w="9525">
+          <a:ln w="12700">
             <a:solidFill>
               <a:schemeClr val="accent5"/>
             </a:solidFill>
@@ -5072,14 +5694,14 @@
       </p:sp>
       <p:sp>
         <p:nvSpPr>
-          <p:cNvPr id="14" name="New goal text"/>
+          <p:cNvPr id="15" name="Output text"/>
           <p:cNvSpPr txBox="1"/>
           <p:nvPr/>
         </p:nvSpPr>
         <p:spPr>
           <a:xfrm>
-            <a:off x="4892040" y="1554480"/>
-            <a:ext cx="3657600" cy="1280160"/>
+            <a:off x="6263640" y="1600200"/>
+            <a:ext cx="2560320" cy="3017520"/>
           </a:xfrm>
           <a:prstGeom prst="rect">
             <a:avLst/>
@@ -5088,74 +5710,99 @@
           <a:ln/>
         </p:spPr>
         <p:txBody>
-          <a:bodyPr wrap="square" lIns="1016" tIns="1016" rIns="1016" bIns="1016" rtlCol="0" anchor="ctr"/>
-          <a:lstStyle/>
-          <a:p>
-            <a:pPr indent="0" marL="0">
-              <a:buNone/>
-            </a:pPr>
-            <a:r>
-              <a:rPr lang="en-US" sz="1200" b="1" dirty="0">
+          <a:bodyPr wrap="square" lIns="1270" tIns="1270" rIns="1270" bIns="1270" rtlCol="0" anchor="ctr"/>
+          <a:lstStyle/>
+          <a:p>
+            <a:pPr indent="0" marL="0">
+              <a:buNone/>
+            </a:pPr>
+            <a:r>
+              <a:rPr lang="en-US" sz="2000" b="1" dirty="0">
                 <a:solidFill>
                   <a:schemeClr val="tx2"/>
                 </a:solidFill>
               </a:rPr>
-              <a:t>New goal</a:t>
-            </a:r>
-            <a:endParaRPr lang="en-US" sz="1400" dirty="0"/>
-          </a:p>
-          <a:p>
-            <a:pPr indent="0" marL="0">
-              <a:buNone/>
-            </a:pPr>
-            <a:r>
-              <a:rPr lang="en-US" sz="1800" b="1" dirty="0">
+              <a:t>Per technique</a:t>
+            </a:r>
+            <a:endParaRPr lang="en-US" sz="2000" dirty="0"/>
+          </a:p>
+          <a:p>
+            <a:pPr indent="0" marL="0">
+              <a:buNone/>
+            </a:pPr>
+            <a:r>
+              <a:rPr lang="en-US" sz="2000" dirty="0">
                 <a:solidFill>
                   <a:schemeClr val="tx1"/>
                 </a:solidFill>
               </a:rPr>
-              <a:t>Explain what users struggle with</a:t>
-            </a:r>
-            <a:endParaRPr lang="en-US" sz="1400" dirty="0"/>
-          </a:p>
-          <a:p>
-            <a:pPr indent="0" marL="0">
-              <a:buNone/>
-            </a:pPr>
-            <a:r>
-              <a:rPr lang="en-US" sz="1400" dirty="0">
-                <a:solidFill>
-                  <a:schemeClr val="accent3"/>
-                </a:solidFill>
-              </a:rPr>
-              <a:t>where, when and why</a:t>
-            </a:r>
-            <a:endParaRPr lang="en-US" sz="1400" dirty="0"/>
-          </a:p>
-        </p:txBody>
-      </p:sp>
-      <p:sp>
-        <p:nvSpPr>
-          <p:cNvPr id="15" name="New evaluation"/>
+              <a:t>element, screen, reason</a:t>
+            </a:r>
+            <a:endParaRPr lang="en-US" sz="2000" dirty="0"/>
+          </a:p>
+          <a:p>
+            <a:pPr indent="0" marL="0">
+              <a:buNone/>
+            </a:pPr>
+            <a:r>
+              <a:rPr lang="en-US" sz="2000" dirty="0">
+                <a:solidFill>
+                  <a:schemeClr val="tx1"/>
+                </a:solidFill>
+              </a:rPr>
+              <a:t>+ summary, suggestions</a:t>
+            </a:r>
+            <a:endParaRPr lang="en-US" sz="2000" dirty="0"/>
+          </a:p>
+        </p:txBody>
+      </p:sp>
+      <p:sp>
+        <p:nvSpPr>
+          <p:cNvPr id="16" name="Compare"/>
           <p:cNvSpPr/>
           <p:nvPr/>
         </p:nvSpPr>
         <p:spPr>
           <a:xfrm>
-            <a:off x="4754880" y="3017520"/>
-            <a:ext cx="3931920" cy="1280160"/>
+            <a:off x="8961120" y="3108960"/>
+            <a:ext cx="365760" cy="0"/>
+          </a:xfrm>
+          <a:prstGeom prst="line">
+            <a:avLst/>
+          </a:prstGeom>
+          <a:noFill/>
+          <a:ln w="19050">
+            <a:solidFill>
+              <a:schemeClr val="tx1"/>
+            </a:solidFill>
+            <a:prstDash val="dash"/>
+            <a:headEnd type="triangle"/>
+            <a:tailEnd type="triangle"/>
+          </a:ln>
+        </p:spPr>
+      </p:sp>
+      <p:sp>
+        <p:nvSpPr>
+          <p:cNvPr id="17" name="Human key points"/>
+          <p:cNvSpPr/>
+          <p:nvPr/>
+        </p:nvSpPr>
+        <p:spPr>
+          <a:xfrm>
+            <a:off x="9372600" y="1600200"/>
+            <a:ext cx="2176272" cy="3017520"/>
           </a:xfrm>
           <a:prstGeom prst="roundRect">
             <a:avLst>
-              <a:gd name="adj" fmla="val 5714"/>
+              <a:gd name="adj" fmla="val 4202"/>
             </a:avLst>
           </a:prstGeom>
           <a:solidFill>
-            <a:schemeClr val="accent6"/>
+            <a:schemeClr val="bg1"/>
           </a:solidFill>
-          <a:ln w="9525">
+          <a:ln w="12700">
             <a:solidFill>
-              <a:schemeClr val="accent5"/>
+              <a:srgbClr val="CCCCCC"/>
             </a:solidFill>
             <a:prstDash val="solid"/>
           </a:ln>
@@ -5163,14 +5810,14 @@
       </p:sp>
       <p:sp>
         <p:nvSpPr>
-          <p:cNvPr id="16" name="New evaluation text"/>
+          <p:cNvPr id="18" name="Human key points text"/>
           <p:cNvSpPr txBox="1"/>
           <p:nvPr/>
         </p:nvSpPr>
         <p:spPr>
           <a:xfrm>
-            <a:off x="4892040" y="3017520"/>
-            <a:ext cx="3657600" cy="1280160"/>
+            <a:off x="9418320" y="1600200"/>
+            <a:ext cx="2084832" cy="3017520"/>
           </a:xfrm>
           <a:prstGeom prst="rect">
             <a:avLst/>
@@ -5179,49 +5826,109 @@
           <a:ln/>
         </p:spPr>
         <p:txBody>
-          <a:bodyPr wrap="square" lIns="1016" tIns="1016" rIns="1016" bIns="1016" rtlCol="0" anchor="ctr"/>
-          <a:lstStyle/>
-          <a:p>
-            <a:pPr indent="0" marL="0">
-              <a:buNone/>
-            </a:pPr>
-            <a:r>
-              <a:rPr lang="en-US" sz="1200" b="1" dirty="0">
+          <a:bodyPr wrap="square" lIns="1270" tIns="1270" rIns="1270" bIns="1270" rtlCol="0" anchor="ctr"/>
+          <a:lstStyle/>
+          <a:p>
+            <a:pPr algn="ctr" indent="0" marL="0">
+              <a:buNone/>
+            </a:pPr>
+            <a:r>
+              <a:rPr lang="en-US" sz="2000" b="1" dirty="0">
+                <a:solidFill>
+                  <a:schemeClr val="tx1"/>
+                </a:solidFill>
+              </a:rPr>
+              <a:t>Human key points</a:t>
+            </a:r>
+            <a:endParaRPr lang="en-US" sz="2000" dirty="0"/>
+          </a:p>
+          <a:p>
+            <a:pPr algn="ctr" indent="0" marL="0">
+              <a:buNone/>
+            </a:pPr>
+            <a:r>
+              <a:rPr lang="en-US" sz="2000" dirty="0">
+                <a:solidFill>
+                  <a:schemeClr val="accent3"/>
+                </a:solidFill>
+              </a:rPr>
+              <a:t>where, when, why</a:t>
+            </a:r>
+            <a:endParaRPr lang="en-US" sz="2000" dirty="0"/>
+          </a:p>
+        </p:txBody>
+      </p:sp>
+      <p:sp>
+        <p:nvSpPr>
+          <p:cNvPr id="19" name="Metrics strip"/>
+          <p:cNvSpPr/>
+          <p:nvPr/>
+        </p:nvSpPr>
+        <p:spPr>
+          <a:xfrm>
+            <a:off x="640080" y="4892040"/>
+            <a:ext cx="10908792" cy="1097280"/>
+          </a:xfrm>
+          <a:prstGeom prst="roundRect">
+            <a:avLst>
+              <a:gd name="adj" fmla="val 8333"/>
+            </a:avLst>
+          </a:prstGeom>
+          <a:solidFill>
+            <a:schemeClr val="bg2"/>
+          </a:solidFill>
+          <a:ln w="12700">
+            <a:solidFill>
+              <a:srgbClr val="CCCCCC"/>
+            </a:solidFill>
+            <a:prstDash val="solid"/>
+          </a:ln>
+        </p:spPr>
+      </p:sp>
+      <p:sp>
+        <p:nvSpPr>
+          <p:cNvPr id="20" name="Metrics text"/>
+          <p:cNvSpPr txBox="1"/>
+          <p:nvPr/>
+        </p:nvSpPr>
+        <p:spPr>
+          <a:xfrm>
+            <a:off x="777240" y="4892040"/>
+            <a:ext cx="10607040" cy="1097280"/>
+          </a:xfrm>
+          <a:prstGeom prst="rect">
+            <a:avLst/>
+          </a:prstGeom>
+          <a:noFill/>
+          <a:ln/>
+        </p:spPr>
+        <p:txBody>
+          <a:bodyPr wrap="square" lIns="1270" tIns="1270" rIns="1270" bIns="1270" rtlCol="0" anchor="ctr"/>
+          <a:lstStyle/>
+          <a:p>
+            <a:pPr indent="0" marL="0">
+              <a:buNone/>
+            </a:pPr>
+            <a:r>
+              <a:rPr lang="en-US" sz="2000" b="1" dirty="0">
                 <a:solidFill>
                   <a:schemeClr val="tx2"/>
                 </a:solidFill>
               </a:rPr>
-              <a:t>New evaluation</a:t>
-            </a:r>
-            <a:endParaRPr lang="en-US" sz="1400" dirty="0"/>
-          </a:p>
-          <a:p>
-            <a:pPr indent="0" marL="0">
-              <a:buNone/>
-            </a:pPr>
-            <a:r>
-              <a:rPr lang="en-US" sz="1800" b="1" dirty="0">
-                <a:solidFill>
-                  <a:schemeClr val="tx1"/>
-                </a:solidFill>
-              </a:rPr>
-              <a:t>Check against human key points</a:t>
-            </a:r>
-            <a:endParaRPr lang="en-US" sz="1400" dirty="0"/>
-          </a:p>
-          <a:p>
-            <a:pPr indent="0" marL="0">
-              <a:buNone/>
-            </a:pPr>
-            <a:r>
-              <a:rPr lang="en-US" sz="1400" b="1" dirty="0">
+              <a:t>Scored by recall and over-claim rate. </a:t>
+            </a:r>
+            <a:pPr indent="0" marL="0">
+              <a:buNone/>
+            </a:pPr>
+            <a:r>
+              <a:rPr lang="en-US" sz="2000" b="1" dirty="0">
                 <a:solidFill>
                   <a:schemeClr val="accent4"/>
                 </a:solidFill>
               </a:rPr>
-              <a:t>“Saying too much” → over-claim rate</a:t>
-            </a:r>
-            <a:endParaRPr lang="en-US" sz="1400" dirty="0"/>
+              <a:t>Key points are never given to the LLM.</a:t>
+            </a:r>
+            <a:endParaRPr lang="en-US" sz="2000" dirty="0"/>
           </a:p>
         </p:txBody>
       </p:sp>
@@ -5237,8 +5944,8 @@
         </p:nvSpPr>
         <p:spPr>
           <a:xfrm>
-            <a:off x="8321040" y="4800600"/>
-            <a:ext cx="365760" cy="228600"/>
+            <a:off x="11155680" y="6382512"/>
+            <a:ext cx="411480" cy="292608"/>
           </a:xfrm>
           <a:prstGeom prst="rect">
             <a:avLst/>
@@ -5253,7 +5960,7 @@
           <a:bodyPr/>
           <a:lstStyle>
             <a:lvl1pPr>
-              <a:defRPr sz="900">
+              <a:defRPr sz="1800">
                 <a:solidFill>
                   <a:schemeClr val="tx1"/>
                 </a:solidFill>
@@ -5303,8 +6010,8 @@
         </p:nvSpPr>
         <p:spPr>
           <a:xfrm>
-            <a:off x="457200" y="219456"/>
-            <a:ext cx="5486400" cy="237744"/>
+            <a:off x="640080" y="256032"/>
+            <a:ext cx="7315200" cy="329184"/>
           </a:xfrm>
           <a:prstGeom prst="rect">
             <a:avLst/>
@@ -5320,14 +6027,14 @@
               <a:buNone/>
             </a:pPr>
             <a:r>
-              <a:rPr lang="en-US" sz="1200" b="1" dirty="0">
+              <a:rPr lang="en-US" sz="2000" b="1" dirty="0">
                 <a:solidFill>
                   <a:schemeClr val="tx2"/>
                 </a:solidFill>
               </a:rPr>
-              <a:t>Master's · 1/3</a:t>
-            </a:r>
-            <a:endParaRPr lang="en-US" sz="1200" dirty="0"/>
+              <a:t>Master's research · experiment design</a:t>
+            </a:r>
+            <a:endParaRPr lang="en-US" sz="2000" dirty="0"/>
           </a:p>
         </p:txBody>
       </p:sp>
@@ -5339,8 +6046,8 @@
         </p:nvSpPr>
         <p:spPr>
           <a:xfrm>
-            <a:off x="457200" y="457200"/>
-            <a:ext cx="8229600" cy="594360"/>
+            <a:off x="640080" y="594360"/>
+            <a:ext cx="10881360" cy="731520"/>
           </a:xfrm>
           <a:prstGeom prst="rect">
             <a:avLst/>
@@ -5356,37 +6063,37 @@
               <a:buNone/>
             </a:pPr>
             <a:r>
-              <a:rPr lang="en-US" sz="2600" b="1" dirty="0">
+              <a:rPr lang="en-US" sz="2800" b="1" dirty="0">
                 <a:solidFill>
                   <a:schemeClr val="tx2"/>
                 </a:solidFill>
               </a:rPr>
-              <a:t>A tool that explains, checked against humans</a:t>
-            </a:r>
-            <a:endParaRPr lang="en-US" sz="2600" dirty="0"/>
-          </a:p>
-        </p:txBody>
-      </p:sp>
-      <p:sp>
-        <p:nvSpPr>
-          <p:cNvPr id="5" name="Input gaze"/>
+              <a:t>Each bad-UI technique is embedded alone and combined on mock sites.</a:t>
+            </a:r>
+            <a:endParaRPr lang="en-US" sz="2800" dirty="0"/>
+          </a:p>
+        </p:txBody>
+      </p:sp>
+      <p:sp>
+        <p:nvSpPr>
+          <p:cNvPr id="5" name="Technique card T1"/>
           <p:cNvSpPr/>
           <p:nvPr/>
         </p:nvSpPr>
         <p:spPr>
           <a:xfrm>
-            <a:off x="457200" y="1280160"/>
-            <a:ext cx="2377440" cy="1097280"/>
+            <a:off x="640080" y="1554480"/>
+            <a:ext cx="2103120" cy="2880360"/>
           </a:xfrm>
           <a:prstGeom prst="roundRect">
             <a:avLst>
-              <a:gd name="adj" fmla="val 6667"/>
+              <a:gd name="adj" fmla="val 4348"/>
             </a:avLst>
           </a:prstGeom>
           <a:solidFill>
             <a:schemeClr val="bg2"/>
           </a:solidFill>
-          <a:ln w="9525">
+          <a:ln w="12700">
             <a:solidFill>
               <a:srgbClr val="CCCCCC"/>
             </a:solidFill>
@@ -5396,14 +6103,39 @@
       </p:sp>
       <p:sp>
         <p:nvSpPr>
-          <p:cNvPr id="6" name="Input gaze text"/>
+          <p:cNvPr id="6" name="Badge T1"/>
+          <p:cNvSpPr/>
+          <p:nvPr/>
+        </p:nvSpPr>
+        <p:spPr>
+          <a:xfrm>
+            <a:off x="777240" y="1691640"/>
+            <a:ext cx="548640" cy="548640"/>
+          </a:xfrm>
+          <a:prstGeom prst="ellipse">
+            <a:avLst/>
+          </a:prstGeom>
+          <a:solidFill>
+            <a:schemeClr val="tx2"/>
+          </a:solidFill>
+          <a:ln w="12700">
+            <a:solidFill>
+              <a:schemeClr val="tx2"/>
+            </a:solidFill>
+            <a:prstDash val="solid"/>
+          </a:ln>
+        </p:spPr>
+      </p:sp>
+      <p:sp>
+        <p:nvSpPr>
+          <p:cNvPr id="7" name="Badge text T1"/>
           <p:cNvSpPr txBox="1"/>
           <p:nvPr/>
         </p:nvSpPr>
         <p:spPr>
           <a:xfrm>
-            <a:off x="530352" y="1280160"/>
-            <a:ext cx="2240280" cy="1097280"/>
+            <a:off x="777240" y="1691640"/>
+            <a:ext cx="548640" cy="548640"/>
           </a:xfrm>
           <a:prstGeom prst="rect">
             <a:avLst/>
@@ -5412,58 +6144,116 @@
           <a:ln/>
         </p:spPr>
         <p:txBody>
-          <a:bodyPr wrap="square" lIns="1016" tIns="1016" rIns="1016" bIns="1016" rtlCol="0" anchor="ctr"/>
-          <a:lstStyle/>
-          <a:p>
-            <a:pPr indent="0" marL="0">
-              <a:buNone/>
-            </a:pPr>
-            <a:r>
-              <a:rPr lang="en-US" sz="1400" b="1" dirty="0">
+          <a:bodyPr wrap="square" lIns="0" tIns="0" rIns="0" bIns="0" rtlCol="0" anchor="ctr"/>
+          <a:lstStyle/>
+          <a:p>
+            <a:pPr algn="ctr" indent="0" marL="0">
+              <a:buNone/>
+            </a:pPr>
+            <a:r>
+              <a:rPr lang="en-US" sz="2000" b="1" dirty="0">
+                <a:solidFill>
+                  <a:schemeClr val="bg1"/>
+                </a:solidFill>
+              </a:rPr>
+              <a:t>T1</a:t>
+            </a:r>
+            <a:endParaRPr lang="en-US" sz="2000" dirty="0"/>
+          </a:p>
+        </p:txBody>
+      </p:sp>
+      <p:sp>
+        <p:nvSpPr>
+          <p:cNvPr id="8" name="Technique name T1"/>
+          <p:cNvSpPr txBox="1"/>
+          <p:nvPr/>
+        </p:nvSpPr>
+        <p:spPr>
+          <a:xfrm>
+            <a:off x="685800" y="2331720"/>
+            <a:ext cx="2011680" cy="1097280"/>
+          </a:xfrm>
+          <a:prstGeom prst="rect">
+            <a:avLst/>
+          </a:prstGeom>
+          <a:noFill/>
+          <a:ln/>
+        </p:spPr>
+        <p:txBody>
+          <a:bodyPr wrap="square" lIns="1270" tIns="1270" rIns="1270" bIns="1270" rtlCol="0" anchor="t"/>
+          <a:lstStyle/>
+          <a:p>
+            <a:pPr indent="0" marL="0">
+              <a:buNone/>
+            </a:pPr>
+            <a:r>
+              <a:rPr lang="en-US" sz="2000" b="1" dirty="0">
                 <a:solidFill>
                   <a:schemeClr val="tx1"/>
                 </a:solidFill>
               </a:rPr>
-              <a:t>Gaze metrics</a:t>
-            </a:r>
-            <a:endParaRPr lang="en-US" sz="1400" dirty="0"/>
-          </a:p>
-          <a:p>
-            <a:pPr indent="0" marL="0">
-              <a:buNone/>
-            </a:pPr>
-            <a:r>
-              <a:rPr lang="en-US" sz="1200" dirty="0">
+              <a:t>Similar-name decoys</a:t>
+            </a:r>
+            <a:endParaRPr lang="en-US" sz="2000" dirty="0"/>
+          </a:p>
+        </p:txBody>
+      </p:sp>
+      <p:sp>
+        <p:nvSpPr>
+          <p:cNvPr id="9" name="Technique ref T1"/>
+          <p:cNvSpPr txBox="1"/>
+          <p:nvPr/>
+        </p:nvSpPr>
+        <p:spPr>
+          <a:xfrm>
+            <a:off x="685800" y="3429000"/>
+            <a:ext cx="2011680" cy="914400"/>
+          </a:xfrm>
+          <a:prstGeom prst="rect">
+            <a:avLst/>
+          </a:prstGeom>
+          <a:noFill/>
+          <a:ln/>
+        </p:spPr>
+        <p:txBody>
+          <a:bodyPr wrap="square" lIns="1270" tIns="1270" rIns="1270" bIns="1270" rtlCol="0" anchor="t"/>
+          <a:lstStyle/>
+          <a:p>
+            <a:pPr indent="0" marL="0">
+              <a:buNone/>
+            </a:pPr>
+            <a:r>
+              <a:rPr lang="en-US" sz="1800" dirty="0">
                 <a:solidFill>
                   <a:schemeClr val="accent3"/>
                 </a:solidFill>
               </a:rPr>
-              <a:t>dwell time · visits, per technique, Good vs. Bad</a:t>
-            </a:r>
-            <a:endParaRPr lang="en-US" sz="1400" dirty="0"/>
-          </a:p>
-        </p:txBody>
-      </p:sp>
-      <p:sp>
-        <p:nvSpPr>
-          <p:cNvPr id="7" name="Input UI"/>
+              <a:t>Duncan &amp; Humphreys 1989</a:t>
+            </a:r>
+            <a:endParaRPr lang="en-US" sz="1800" dirty="0"/>
+          </a:p>
+        </p:txBody>
+      </p:sp>
+      <p:sp>
+        <p:nvSpPr>
+          <p:cNvPr id="10" name="Technique card T2"/>
           <p:cNvSpPr/>
           <p:nvPr/>
         </p:nvSpPr>
         <p:spPr>
           <a:xfrm>
-            <a:off x="457200" y="2560320"/>
-            <a:ext cx="2377440" cy="1097280"/>
+            <a:off x="2841498" y="1554480"/>
+            <a:ext cx="2103120" cy="2880360"/>
           </a:xfrm>
           <a:prstGeom prst="roundRect">
             <a:avLst>
-              <a:gd name="adj" fmla="val 6667"/>
+              <a:gd name="adj" fmla="val 4348"/>
             </a:avLst>
           </a:prstGeom>
           <a:solidFill>
             <a:schemeClr val="bg2"/>
           </a:solidFill>
-          <a:ln w="9525">
+          <a:ln w="12700">
             <a:solidFill>
               <a:srgbClr val="CCCCCC"/>
             </a:solidFill>
@@ -5473,122 +6263,22 @@
       </p:sp>
       <p:sp>
         <p:nvSpPr>
-          <p:cNvPr id="8" name="Input UI text"/>
-          <p:cNvSpPr txBox="1"/>
-          <p:nvPr/>
-        </p:nvSpPr>
-        <p:spPr>
-          <a:xfrm>
-            <a:off x="530352" y="2560320"/>
-            <a:ext cx="2240280" cy="1097280"/>
-          </a:xfrm>
-          <a:prstGeom prst="rect">
-            <a:avLst/>
-          </a:prstGeom>
-          <a:noFill/>
-          <a:ln/>
-        </p:spPr>
-        <p:txBody>
-          <a:bodyPr wrap="square" lIns="1016" tIns="1016" rIns="1016" bIns="1016" rtlCol="0" anchor="ctr"/>
-          <a:lstStyle/>
-          <a:p>
-            <a:pPr indent="0" marL="0">
-              <a:buNone/>
-            </a:pPr>
-            <a:r>
-              <a:rPr lang="en-US" sz="1400" b="1" dirty="0">
-                <a:solidFill>
-                  <a:schemeClr val="tx1"/>
-                </a:solidFill>
-              </a:rPr>
-              <a:t>UI structure</a:t>
-            </a:r>
-            <a:endParaRPr lang="en-US" sz="1400" dirty="0"/>
-          </a:p>
-          <a:p>
-            <a:pPr indent="0" marL="0">
-              <a:buNone/>
-            </a:pPr>
-            <a:r>
-              <a:rPr lang="en-US" sz="1200" dirty="0">
-                <a:solidFill>
-                  <a:schemeClr val="accent3"/>
-                </a:solidFill>
-              </a:rPr>
-              <a:t>screen ↔ technique · HTML/CSS · task</a:t>
-            </a:r>
-            <a:endParaRPr lang="en-US" sz="1400" dirty="0"/>
-          </a:p>
-        </p:txBody>
-      </p:sp>
-      <p:sp>
-        <p:nvSpPr>
-          <p:cNvPr id="9" name="Gaze to LLM"/>
+          <p:cNvPr id="11" name="Badge T2"/>
           <p:cNvSpPr/>
           <p:nvPr/>
         </p:nvSpPr>
         <p:spPr>
           <a:xfrm>
-            <a:off x="2880360" y="1828800"/>
-            <a:ext cx="365760" cy="274320"/>
-          </a:xfrm>
-          <a:prstGeom prst="line">
-            <a:avLst/>
-          </a:prstGeom>
-          <a:noFill/>
-          <a:ln w="15875">
-            <a:solidFill>
-              <a:schemeClr val="tx1"/>
-            </a:solidFill>
-            <a:prstDash val="solid"/>
-            <a:tailEnd type="triangle"/>
-          </a:ln>
-        </p:spPr>
-      </p:sp>
-      <p:sp>
-        <p:nvSpPr>
-          <p:cNvPr id="10" name="UI to LLM"/>
-          <p:cNvSpPr/>
-          <p:nvPr/>
-        </p:nvSpPr>
-        <p:spPr>
-          <a:xfrm>
-            <a:off x="2880360" y="3108960"/>
-            <a:ext cx="365760" cy="-274320"/>
-          </a:xfrm>
-          <a:prstGeom prst="line">
-            <a:avLst/>
-          </a:prstGeom>
-          <a:noFill/>
-          <a:ln w="15875">
-            <a:solidFill>
-              <a:schemeClr val="tx1"/>
-            </a:solidFill>
-            <a:prstDash val="solid"/>
-            <a:tailEnd type="triangle"/>
-          </a:ln>
-        </p:spPr>
-      </p:sp>
-      <p:sp>
-        <p:nvSpPr>
-          <p:cNvPr id="11" name="LLM"/>
-          <p:cNvSpPr/>
-          <p:nvPr/>
-        </p:nvSpPr>
-        <p:spPr>
-          <a:xfrm>
-            <a:off x="3291840" y="1828800"/>
-            <a:ext cx="1097280" cy="1280160"/>
-          </a:xfrm>
-          <a:prstGeom prst="roundRect">
-            <a:avLst>
-              <a:gd name="adj" fmla="val 6667"/>
-            </a:avLst>
+            <a:off x="2978658" y="1691640"/>
+            <a:ext cx="548640" cy="548640"/>
+          </a:xfrm>
+          <a:prstGeom prst="ellipse">
+            <a:avLst/>
           </a:prstGeom>
           <a:solidFill>
             <a:schemeClr val="tx2"/>
           </a:solidFill>
-          <a:ln w="9525">
+          <a:ln w="12700">
             <a:solidFill>
               <a:schemeClr val="tx2"/>
             </a:solidFill>
@@ -5598,14 +6288,14 @@
       </p:sp>
       <p:sp>
         <p:nvSpPr>
-          <p:cNvPr id="12" name="LLM text"/>
+          <p:cNvPr id="12" name="Badge text T2"/>
           <p:cNvSpPr txBox="1"/>
           <p:nvPr/>
         </p:nvSpPr>
         <p:spPr>
           <a:xfrm>
-            <a:off x="3291840" y="1828800"/>
-            <a:ext cx="1097280" cy="1280160"/>
+            <a:off x="2978658" y="1691640"/>
+            <a:ext cx="548640" cy="548640"/>
           </a:xfrm>
           <a:prstGeom prst="rect">
             <a:avLst/>
@@ -5614,68 +6304,596 @@
           <a:ln/>
         </p:spPr>
         <p:txBody>
-          <a:bodyPr wrap="square" lIns="1016" tIns="1016" rIns="1016" bIns="1016" rtlCol="0" anchor="ctr"/>
+          <a:bodyPr wrap="square" lIns="0" tIns="0" rIns="0" bIns="0" rtlCol="0" anchor="ctr"/>
           <a:lstStyle/>
           <a:p>
             <a:pPr algn="ctr" indent="0" marL="0">
               <a:buNone/>
             </a:pPr>
             <a:r>
-              <a:rPr lang="en-US" sz="2200" b="1" dirty="0">
+              <a:rPr lang="en-US" sz="2000" b="1" dirty="0">
                 <a:solidFill>
                   <a:schemeClr val="bg1"/>
                 </a:solidFill>
               </a:rPr>
-              <a:t>LLM</a:t>
-            </a:r>
-            <a:endParaRPr lang="en-US" sz="2200" dirty="0"/>
-          </a:p>
-        </p:txBody>
-      </p:sp>
-      <p:sp>
-        <p:nvSpPr>
-          <p:cNvPr id="13" name="LLM to output"/>
+              <a:t>T2</a:t>
+            </a:r>
+            <a:endParaRPr lang="en-US" sz="2000" dirty="0"/>
+          </a:p>
+        </p:txBody>
+      </p:sp>
+      <p:sp>
+        <p:nvSpPr>
+          <p:cNvPr id="13" name="Technique name T2"/>
+          <p:cNvSpPr txBox="1"/>
+          <p:nvPr/>
+        </p:nvSpPr>
+        <p:spPr>
+          <a:xfrm>
+            <a:off x="2887218" y="2331720"/>
+            <a:ext cx="2011680" cy="1097280"/>
+          </a:xfrm>
+          <a:prstGeom prst="rect">
+            <a:avLst/>
+          </a:prstGeom>
+          <a:noFill/>
+          <a:ln/>
+        </p:spPr>
+        <p:txBody>
+          <a:bodyPr wrap="square" lIns="1270" tIns="1270" rIns="1270" bIns="1270" rtlCol="0" anchor="t"/>
+          <a:lstStyle/>
+          <a:p>
+            <a:pPr indent="0" marL="0">
+              <a:buNone/>
+            </a:pPr>
+            <a:r>
+              <a:rPr lang="en-US" sz="2000" b="1" dirty="0">
+                <a:solidFill>
+                  <a:schemeClr val="tx1"/>
+                </a:solidFill>
+              </a:rPr>
+              <a:t>Decorative noise</a:t>
+            </a:r>
+            <a:endParaRPr lang="en-US" sz="2000" dirty="0"/>
+          </a:p>
+        </p:txBody>
+      </p:sp>
+      <p:sp>
+        <p:nvSpPr>
+          <p:cNvPr id="14" name="Technique ref T2"/>
+          <p:cNvSpPr txBox="1"/>
+          <p:nvPr/>
+        </p:nvSpPr>
+        <p:spPr>
+          <a:xfrm>
+            <a:off x="2887218" y="3429000"/>
+            <a:ext cx="2011680" cy="914400"/>
+          </a:xfrm>
+          <a:prstGeom prst="rect">
+            <a:avLst/>
+          </a:prstGeom>
+          <a:noFill/>
+          <a:ln/>
+        </p:spPr>
+        <p:txBody>
+          <a:bodyPr wrap="square" lIns="1270" tIns="1270" rIns="1270" bIns="1270" rtlCol="0" anchor="t"/>
+          <a:lstStyle/>
+          <a:p>
+            <a:pPr indent="0" marL="0">
+              <a:buNone/>
+            </a:pPr>
+            <a:r>
+              <a:rPr lang="en-US" sz="1800" dirty="0">
+                <a:solidFill>
+                  <a:schemeClr val="accent3"/>
+                </a:solidFill>
+              </a:rPr>
+              <a:t>Burke et al. 2005</a:t>
+            </a:r>
+            <a:endParaRPr lang="en-US" sz="1800" dirty="0"/>
+          </a:p>
+        </p:txBody>
+      </p:sp>
+      <p:sp>
+        <p:nvSpPr>
+          <p:cNvPr id="15" name="Technique card T3"/>
           <p:cNvSpPr/>
           <p:nvPr/>
         </p:nvSpPr>
         <p:spPr>
           <a:xfrm>
-            <a:off x="4434840" y="2468880"/>
-            <a:ext cx="320040" cy="0"/>
-          </a:xfrm>
-          <a:prstGeom prst="line">
-            <a:avLst/>
-          </a:prstGeom>
-          <a:noFill/>
-          <a:ln w="15875">
+            <a:off x="5042916" y="1554480"/>
+            <a:ext cx="2103120" cy="2880360"/>
+          </a:xfrm>
+          <a:prstGeom prst="roundRect">
+            <a:avLst>
+              <a:gd name="adj" fmla="val 4348"/>
+            </a:avLst>
+          </a:prstGeom>
+          <a:solidFill>
+            <a:schemeClr val="bg2"/>
+          </a:solidFill>
+          <a:ln w="12700">
             <a:solidFill>
-              <a:schemeClr val="tx1"/>
+              <a:srgbClr val="CCCCCC"/>
             </a:solidFill>
             <a:prstDash val="solid"/>
-            <a:tailEnd type="triangle"/>
           </a:ln>
         </p:spPr>
       </p:sp>
       <p:sp>
         <p:nvSpPr>
-          <p:cNvPr id="14" name="Output"/>
+          <p:cNvPr id="16" name="Badge T3"/>
           <p:cNvSpPr/>
           <p:nvPr/>
         </p:nvSpPr>
         <p:spPr>
           <a:xfrm>
-            <a:off x="4800600" y="1280160"/>
-            <a:ext cx="2194560" cy="2377440"/>
+            <a:off x="5180076" y="1691640"/>
+            <a:ext cx="548640" cy="548640"/>
+          </a:xfrm>
+          <a:prstGeom prst="ellipse">
+            <a:avLst/>
+          </a:prstGeom>
+          <a:solidFill>
+            <a:schemeClr val="tx2"/>
+          </a:solidFill>
+          <a:ln w="12700">
+            <a:solidFill>
+              <a:schemeClr val="tx2"/>
+            </a:solidFill>
+            <a:prstDash val="solid"/>
+          </a:ln>
+        </p:spPr>
+      </p:sp>
+      <p:sp>
+        <p:nvSpPr>
+          <p:cNvPr id="17" name="Badge text T3"/>
+          <p:cNvSpPr txBox="1"/>
+          <p:nvPr/>
+        </p:nvSpPr>
+        <p:spPr>
+          <a:xfrm>
+            <a:off x="5180076" y="1691640"/>
+            <a:ext cx="548640" cy="548640"/>
+          </a:xfrm>
+          <a:prstGeom prst="rect">
+            <a:avLst/>
+          </a:prstGeom>
+          <a:noFill/>
+          <a:ln/>
+        </p:spPr>
+        <p:txBody>
+          <a:bodyPr wrap="square" lIns="0" tIns="0" rIns="0" bIns="0" rtlCol="0" anchor="ctr"/>
+          <a:lstStyle/>
+          <a:p>
+            <a:pPr algn="ctr" indent="0" marL="0">
+              <a:buNone/>
+            </a:pPr>
+            <a:r>
+              <a:rPr lang="en-US" sz="2000" b="1" dirty="0">
+                <a:solidFill>
+                  <a:schemeClr val="bg1"/>
+                </a:solidFill>
+              </a:rPr>
+              <a:t>T3</a:t>
+            </a:r>
+            <a:endParaRPr lang="en-US" sz="2000" dirty="0"/>
+          </a:p>
+        </p:txBody>
+      </p:sp>
+      <p:sp>
+        <p:nvSpPr>
+          <p:cNvPr id="18" name="Technique name T3"/>
+          <p:cNvSpPr txBox="1"/>
+          <p:nvPr/>
+        </p:nvSpPr>
+        <p:spPr>
+          <a:xfrm>
+            <a:off x="5088636" y="2331720"/>
+            <a:ext cx="2011680" cy="1097280"/>
+          </a:xfrm>
+          <a:prstGeom prst="rect">
+            <a:avLst/>
+          </a:prstGeom>
+          <a:noFill/>
+          <a:ln/>
+        </p:spPr>
+        <p:txBody>
+          <a:bodyPr wrap="square" lIns="1270" tIns="1270" rIns="1270" bIns="1270" rtlCol="0" anchor="t"/>
+          <a:lstStyle/>
+          <a:p>
+            <a:pPr indent="0" marL="0">
+              <a:buNone/>
+            </a:pPr>
+            <a:r>
+              <a:rPr lang="en-US" sz="2000" b="1" dirty="0">
+                <a:solidFill>
+                  <a:schemeClr val="tx1"/>
+                </a:solidFill>
+              </a:rPr>
+              <a:t>Shifting button positions</a:t>
+            </a:r>
+            <a:endParaRPr lang="en-US" sz="2000" dirty="0"/>
+          </a:p>
+        </p:txBody>
+      </p:sp>
+      <p:sp>
+        <p:nvSpPr>
+          <p:cNvPr id="19" name="Technique ref T3"/>
+          <p:cNvSpPr txBox="1"/>
+          <p:nvPr/>
+        </p:nvSpPr>
+        <p:spPr>
+          <a:xfrm>
+            <a:off x="5088636" y="3429000"/>
+            <a:ext cx="2011680" cy="914400"/>
+          </a:xfrm>
+          <a:prstGeom prst="rect">
+            <a:avLst/>
+          </a:prstGeom>
+          <a:noFill/>
+          <a:ln/>
+        </p:spPr>
+        <p:txBody>
+          <a:bodyPr wrap="square" lIns="1270" tIns="1270" rIns="1270" bIns="1270" rtlCol="0" anchor="t"/>
+          <a:lstStyle/>
+          <a:p>
+            <a:pPr indent="0" marL="0">
+              <a:buNone/>
+            </a:pPr>
+            <a:r>
+              <a:rPr lang="en-US" sz="1800" dirty="0">
+                <a:solidFill>
+                  <a:schemeClr val="accent3"/>
+                </a:solidFill>
+              </a:rPr>
+              <a:t>McCarthy et al. 2003</a:t>
+            </a:r>
+            <a:endParaRPr lang="en-US" sz="1800" dirty="0"/>
+          </a:p>
+        </p:txBody>
+      </p:sp>
+      <p:sp>
+        <p:nvSpPr>
+          <p:cNvPr id="20" name="Technique card T4"/>
+          <p:cNvSpPr/>
+          <p:nvPr/>
+        </p:nvSpPr>
+        <p:spPr>
+          <a:xfrm>
+            <a:off x="7244334" y="1554480"/>
+            <a:ext cx="2103120" cy="2880360"/>
           </a:xfrm>
           <a:prstGeom prst="roundRect">
             <a:avLst>
-              <a:gd name="adj" fmla="val 3333"/>
+              <a:gd name="adj" fmla="val 4348"/>
+            </a:avLst>
+          </a:prstGeom>
+          <a:solidFill>
+            <a:schemeClr val="bg2"/>
+          </a:solidFill>
+          <a:ln w="12700">
+            <a:solidFill>
+              <a:srgbClr val="CCCCCC"/>
+            </a:solidFill>
+            <a:prstDash val="solid"/>
+          </a:ln>
+        </p:spPr>
+      </p:sp>
+      <p:sp>
+        <p:nvSpPr>
+          <p:cNvPr id="21" name="Badge T4"/>
+          <p:cNvSpPr/>
+          <p:nvPr/>
+        </p:nvSpPr>
+        <p:spPr>
+          <a:xfrm>
+            <a:off x="7381494" y="1691640"/>
+            <a:ext cx="548640" cy="548640"/>
+          </a:xfrm>
+          <a:prstGeom prst="ellipse">
+            <a:avLst/>
+          </a:prstGeom>
+          <a:solidFill>
+            <a:schemeClr val="tx2"/>
+          </a:solidFill>
+          <a:ln w="12700">
+            <a:solidFill>
+              <a:schemeClr val="tx2"/>
+            </a:solidFill>
+            <a:prstDash val="solid"/>
+          </a:ln>
+        </p:spPr>
+      </p:sp>
+      <p:sp>
+        <p:nvSpPr>
+          <p:cNvPr id="22" name="Badge text T4"/>
+          <p:cNvSpPr txBox="1"/>
+          <p:nvPr/>
+        </p:nvSpPr>
+        <p:spPr>
+          <a:xfrm>
+            <a:off x="7381494" y="1691640"/>
+            <a:ext cx="548640" cy="548640"/>
+          </a:xfrm>
+          <a:prstGeom prst="rect">
+            <a:avLst/>
+          </a:prstGeom>
+          <a:noFill/>
+          <a:ln/>
+        </p:spPr>
+        <p:txBody>
+          <a:bodyPr wrap="square" lIns="0" tIns="0" rIns="0" bIns="0" rtlCol="0" anchor="ctr"/>
+          <a:lstStyle/>
+          <a:p>
+            <a:pPr algn="ctr" indent="0" marL="0">
+              <a:buNone/>
+            </a:pPr>
+            <a:r>
+              <a:rPr lang="en-US" sz="2000" b="1" dirty="0">
+                <a:solidFill>
+                  <a:schemeClr val="bg1"/>
+                </a:solidFill>
+              </a:rPr>
+              <a:t>T4</a:t>
+            </a:r>
+            <a:endParaRPr lang="en-US" sz="2000" dirty="0"/>
+          </a:p>
+        </p:txBody>
+      </p:sp>
+      <p:sp>
+        <p:nvSpPr>
+          <p:cNvPr id="23" name="Technique name T4"/>
+          <p:cNvSpPr txBox="1"/>
+          <p:nvPr/>
+        </p:nvSpPr>
+        <p:spPr>
+          <a:xfrm>
+            <a:off x="7290054" y="2331720"/>
+            <a:ext cx="2011680" cy="1097280"/>
+          </a:xfrm>
+          <a:prstGeom prst="rect">
+            <a:avLst/>
+          </a:prstGeom>
+          <a:noFill/>
+          <a:ln/>
+        </p:spPr>
+        <p:txBody>
+          <a:bodyPr wrap="square" lIns="1270" tIns="1270" rIns="1270" bIns="1270" rtlCol="0" anchor="t"/>
+          <a:lstStyle/>
+          <a:p>
+            <a:pPr indent="0" marL="0">
+              <a:buNone/>
+            </a:pPr>
+            <a:r>
+              <a:rPr lang="en-US" sz="2000" b="1" dirty="0">
+                <a:solidFill>
+                  <a:schemeClr val="tx1"/>
+                </a:solidFill>
+              </a:rPr>
+              <a:t>Inconsistent design</a:t>
+            </a:r>
+            <a:endParaRPr lang="en-US" sz="2000" dirty="0"/>
+          </a:p>
+        </p:txBody>
+      </p:sp>
+      <p:sp>
+        <p:nvSpPr>
+          <p:cNvPr id="24" name="Technique ref T4"/>
+          <p:cNvSpPr txBox="1"/>
+          <p:nvPr/>
+        </p:nvSpPr>
+        <p:spPr>
+          <a:xfrm>
+            <a:off x="7290054" y="3429000"/>
+            <a:ext cx="2011680" cy="914400"/>
+          </a:xfrm>
+          <a:prstGeom prst="rect">
+            <a:avLst/>
+          </a:prstGeom>
+          <a:noFill/>
+          <a:ln/>
+        </p:spPr>
+        <p:txBody>
+          <a:bodyPr wrap="square" lIns="1270" tIns="1270" rIns="1270" bIns="1270" rtlCol="0" anchor="t"/>
+          <a:lstStyle/>
+          <a:p>
+            <a:pPr indent="0" marL="0">
+              <a:buNone/>
+            </a:pPr>
+            <a:r>
+              <a:rPr lang="en-US" sz="1800" dirty="0">
+                <a:solidFill>
+                  <a:schemeClr val="accent3"/>
+                </a:solidFill>
+              </a:rPr>
+              <a:t>Mendel 2010/2012 etc.</a:t>
+            </a:r>
+            <a:endParaRPr lang="en-US" sz="1800" dirty="0"/>
+          </a:p>
+        </p:txBody>
+      </p:sp>
+      <p:sp>
+        <p:nvSpPr>
+          <p:cNvPr id="25" name="Technique card T5"/>
+          <p:cNvSpPr/>
+          <p:nvPr/>
+        </p:nvSpPr>
+        <p:spPr>
+          <a:xfrm>
+            <a:off x="9445752" y="1554480"/>
+            <a:ext cx="2103120" cy="2880360"/>
+          </a:xfrm>
+          <a:prstGeom prst="roundRect">
+            <a:avLst>
+              <a:gd name="adj" fmla="val 4348"/>
+            </a:avLst>
+          </a:prstGeom>
+          <a:solidFill>
+            <a:schemeClr val="bg2"/>
+          </a:solidFill>
+          <a:ln w="12700">
+            <a:solidFill>
+              <a:srgbClr val="CCCCCC"/>
+            </a:solidFill>
+            <a:prstDash val="solid"/>
+          </a:ln>
+        </p:spPr>
+      </p:sp>
+      <p:sp>
+        <p:nvSpPr>
+          <p:cNvPr id="26" name="Badge T5"/>
+          <p:cNvSpPr/>
+          <p:nvPr/>
+        </p:nvSpPr>
+        <p:spPr>
+          <a:xfrm>
+            <a:off x="9582912" y="1691640"/>
+            <a:ext cx="548640" cy="548640"/>
+          </a:xfrm>
+          <a:prstGeom prst="ellipse">
+            <a:avLst/>
+          </a:prstGeom>
+          <a:solidFill>
+            <a:schemeClr val="tx2"/>
+          </a:solidFill>
+          <a:ln w="12700">
+            <a:solidFill>
+              <a:schemeClr val="tx2"/>
+            </a:solidFill>
+            <a:prstDash val="solid"/>
+          </a:ln>
+        </p:spPr>
+      </p:sp>
+      <p:sp>
+        <p:nvSpPr>
+          <p:cNvPr id="27" name="Badge text T5"/>
+          <p:cNvSpPr txBox="1"/>
+          <p:nvPr/>
+        </p:nvSpPr>
+        <p:spPr>
+          <a:xfrm>
+            <a:off x="9582912" y="1691640"/>
+            <a:ext cx="548640" cy="548640"/>
+          </a:xfrm>
+          <a:prstGeom prst="rect">
+            <a:avLst/>
+          </a:prstGeom>
+          <a:noFill/>
+          <a:ln/>
+        </p:spPr>
+        <p:txBody>
+          <a:bodyPr wrap="square" lIns="0" tIns="0" rIns="0" bIns="0" rtlCol="0" anchor="ctr"/>
+          <a:lstStyle/>
+          <a:p>
+            <a:pPr algn="ctr" indent="0" marL="0">
+              <a:buNone/>
+            </a:pPr>
+            <a:r>
+              <a:rPr lang="en-US" sz="2000" b="1" dirty="0">
+                <a:solidFill>
+                  <a:schemeClr val="bg1"/>
+                </a:solidFill>
+              </a:rPr>
+              <a:t>T5</a:t>
+            </a:r>
+            <a:endParaRPr lang="en-US" sz="2000" dirty="0"/>
+          </a:p>
+        </p:txBody>
+      </p:sp>
+      <p:sp>
+        <p:nvSpPr>
+          <p:cNvPr id="28" name="Technique name T5"/>
+          <p:cNvSpPr txBox="1"/>
+          <p:nvPr/>
+        </p:nvSpPr>
+        <p:spPr>
+          <a:xfrm>
+            <a:off x="9491472" y="2331720"/>
+            <a:ext cx="2011680" cy="1097280"/>
+          </a:xfrm>
+          <a:prstGeom prst="rect">
+            <a:avLst/>
+          </a:prstGeom>
+          <a:noFill/>
+          <a:ln/>
+        </p:spPr>
+        <p:txBody>
+          <a:bodyPr wrap="square" lIns="1270" tIns="1270" rIns="1270" bIns="1270" rtlCol="0" anchor="t"/>
+          <a:lstStyle/>
+          <a:p>
+            <a:pPr indent="0" marL="0">
+              <a:buNone/>
+            </a:pPr>
+            <a:r>
+              <a:rPr lang="en-US" sz="2000" b="1" dirty="0">
+                <a:solidFill>
+                  <a:schemeClr val="tx1"/>
+                </a:solidFill>
+              </a:rPr>
+              <a:t>Low-contrast progress indicator</a:t>
+            </a:r>
+            <a:endParaRPr lang="en-US" sz="2000" dirty="0"/>
+          </a:p>
+        </p:txBody>
+      </p:sp>
+      <p:sp>
+        <p:nvSpPr>
+          <p:cNvPr id="29" name="Technique ref T5"/>
+          <p:cNvSpPr txBox="1"/>
+          <p:nvPr/>
+        </p:nvSpPr>
+        <p:spPr>
+          <a:xfrm>
+            <a:off x="9491472" y="3429000"/>
+            <a:ext cx="2011680" cy="914400"/>
+          </a:xfrm>
+          <a:prstGeom prst="rect">
+            <a:avLst/>
+          </a:prstGeom>
+          <a:noFill/>
+          <a:ln/>
+        </p:spPr>
+        <p:txBody>
+          <a:bodyPr wrap="square" lIns="1270" tIns="1270" rIns="1270" bIns="1270" rtlCol="0" anchor="t"/>
+          <a:lstStyle/>
+          <a:p>
+            <a:pPr indent="0" marL="0">
+              <a:buNone/>
+            </a:pPr>
+            <a:r>
+              <a:rPr lang="en-US" sz="1800" dirty="0">
+                <a:solidFill>
+                  <a:schemeClr val="accent3"/>
+                </a:solidFill>
+              </a:rPr>
+              <a:t>Yu et al. 2022; Legge et al. 1997</a:t>
+            </a:r>
+            <a:endParaRPr lang="en-US" sz="1800" dirty="0"/>
+          </a:p>
+        </p:txBody>
+      </p:sp>
+      <p:sp>
+        <p:nvSpPr>
+          <p:cNvPr id="30" name="Fact 1"/>
+          <p:cNvSpPr/>
+          <p:nvPr/>
+        </p:nvSpPr>
+        <p:spPr>
+          <a:xfrm>
+            <a:off x="640080" y="4617720"/>
+            <a:ext cx="2651760" cy="1508760"/>
+          </a:xfrm>
+          <a:prstGeom prst="roundRect">
+            <a:avLst>
+              <a:gd name="adj" fmla="val 6061"/>
             </a:avLst>
           </a:prstGeom>
           <a:solidFill>
             <a:schemeClr val="accent6"/>
           </a:solidFill>
-          <a:ln w="9525">
+          <a:ln w="12700">
             <a:solidFill>
               <a:schemeClr val="accent5"/>
             </a:solidFill>
@@ -5685,14 +6903,14 @@
       </p:sp>
       <p:sp>
         <p:nvSpPr>
-          <p:cNvPr id="15" name="Output text"/>
+          <p:cNvPr id="31" name="Fact num 1"/>
           <p:cNvSpPr txBox="1"/>
           <p:nvPr/>
         </p:nvSpPr>
         <p:spPr>
           <a:xfrm>
-            <a:off x="4873752" y="1280160"/>
-            <a:ext cx="2057400" cy="2377440"/>
+            <a:off x="685800" y="4617720"/>
+            <a:ext cx="777240" cy="1508760"/>
           </a:xfrm>
           <a:prstGeom prst="rect">
             <a:avLst/>
@@ -5701,113 +6919,82 @@
           <a:ln/>
         </p:spPr>
         <p:txBody>
-          <a:bodyPr wrap="square" lIns="1016" tIns="1016" rIns="1016" bIns="1016" rtlCol="0" anchor="ctr"/>
-          <a:lstStyle/>
-          <a:p>
-            <a:pPr indent="0" marL="0">
-              <a:buNone/>
-            </a:pPr>
-            <a:r>
-              <a:rPr lang="en-US" sz="1400" b="1" dirty="0">
+          <a:bodyPr wrap="square" lIns="1270" tIns="1270" rIns="1270" bIns="1270" rtlCol="0" anchor="ctr"/>
+          <a:lstStyle/>
+          <a:p>
+            <a:pPr indent="0" marL="0">
+              <a:buNone/>
+            </a:pPr>
+            <a:r>
+              <a:rPr lang="en-US" sz="3600" b="1" dirty="0">
                 <a:solidFill>
                   <a:schemeClr val="tx2"/>
                 </a:solidFill>
               </a:rPr>
-              <a:t>Output</a:t>
-            </a:r>
-            <a:endParaRPr lang="en-US" sz="1400" dirty="0"/>
-          </a:p>
-          <a:p>
-            <a:pPr indent="0" marL="0">
-              <a:buNone/>
-            </a:pPr>
-            <a:r>
-              <a:rPr lang="en-US" sz="1200" dirty="0">
+              <a:t>7</a:t>
+            </a:r>
+            <a:endParaRPr lang="en-US" sz="3600" dirty="0"/>
+          </a:p>
+        </p:txBody>
+      </p:sp>
+      <p:sp>
+        <p:nvSpPr>
+          <p:cNvPr id="32" name="Fact label 1"/>
+          <p:cNvSpPr txBox="1"/>
+          <p:nvPr/>
+        </p:nvSpPr>
+        <p:spPr>
+          <a:xfrm>
+            <a:off x="1463040" y="4617720"/>
+            <a:ext cx="1783080" cy="1508760"/>
+          </a:xfrm>
+          <a:prstGeom prst="rect">
+            <a:avLst/>
+          </a:prstGeom>
+          <a:noFill/>
+          <a:ln/>
+        </p:spPr>
+        <p:txBody>
+          <a:bodyPr wrap="square" lIns="1270" tIns="1270" rIns="1270" bIns="1270" rtlCol="0" anchor="ctr"/>
+          <a:lstStyle/>
+          <a:p>
+            <a:pPr indent="0" marL="0">
+              <a:buNone/>
+            </a:pPr>
+            <a:r>
+              <a:rPr lang="en-US" sz="2000" dirty="0">
                 <a:solidFill>
                   <a:schemeClr val="tx1"/>
                 </a:solidFill>
               </a:rPr>
-              <a:t>Per technique: which element, which screen, why it caused trouble</a:t>
-            </a:r>
-            <a:endParaRPr lang="en-US" sz="1400" dirty="0"/>
-          </a:p>
-          <a:p>
-            <a:pPr indent="0" marL="0">
-              <a:buNone/>
-            </a:pPr>
-            <a:r>
-              <a:rPr lang="en-US" sz="1200" dirty="0">
-                <a:solidFill>
-                  <a:schemeClr val="tx1"/>
-                </a:solidFill>
-              </a:rPr>
-              <a:t>+ summary</a:t>
-            </a:r>
-            <a:endParaRPr lang="en-US" sz="1400" dirty="0"/>
-          </a:p>
-          <a:p>
-            <a:pPr indent="0" marL="0">
-              <a:buNone/>
-            </a:pPr>
-            <a:r>
-              <a:rPr lang="en-US" sz="1200" dirty="0">
-                <a:solidFill>
-                  <a:schemeClr val="tx1"/>
-                </a:solidFill>
-              </a:rPr>
-              <a:t>+ suggestions</a:t>
-            </a:r>
-            <a:endParaRPr lang="en-US" sz="1400" dirty="0"/>
-          </a:p>
-        </p:txBody>
-      </p:sp>
-      <p:sp>
-        <p:nvSpPr>
-          <p:cNvPr id="16" name="Compare arrow"/>
+              <a:t>versions per site: G, B-T1–T5, B-all</a:t>
+            </a:r>
+            <a:endParaRPr lang="en-US" sz="2000" dirty="0"/>
+          </a:p>
+        </p:txBody>
+      </p:sp>
+      <p:sp>
+        <p:nvSpPr>
+          <p:cNvPr id="33" name="Fact 2"/>
           <p:cNvSpPr/>
           <p:nvPr/>
         </p:nvSpPr>
         <p:spPr>
           <a:xfrm>
-            <a:off x="7040880" y="2468880"/>
-            <a:ext cx="365760" cy="0"/>
-          </a:xfrm>
-          <a:prstGeom prst="line">
-            <a:avLst/>
-          </a:prstGeom>
-          <a:noFill/>
-          <a:ln w="15875">
-            <a:solidFill>
-              <a:schemeClr val="tx1"/>
-            </a:solidFill>
-            <a:prstDash val="dash"/>
-            <a:headEnd type="triangle"/>
-            <a:tailEnd type="triangle"/>
-          </a:ln>
-        </p:spPr>
-      </p:sp>
-      <p:sp>
-        <p:nvSpPr>
-          <p:cNvPr id="17" name="Human key points"/>
-          <p:cNvSpPr/>
-          <p:nvPr/>
-        </p:nvSpPr>
-        <p:spPr>
-          <a:xfrm>
-            <a:off x="7452360" y="1280160"/>
-            <a:ext cx="1234440" cy="2377440"/>
+            <a:off x="3383280" y="4617720"/>
+            <a:ext cx="2651760" cy="1508760"/>
           </a:xfrm>
           <a:prstGeom prst="roundRect">
             <a:avLst>
-              <a:gd name="adj" fmla="val 5926"/>
+              <a:gd name="adj" fmla="val 6061"/>
             </a:avLst>
           </a:prstGeom>
           <a:solidFill>
-            <a:schemeClr val="bg1"/>
+            <a:schemeClr val="accent6"/>
           </a:solidFill>
-          <a:ln w="9525">
+          <a:ln w="12700">
             <a:solidFill>
-              <a:srgbClr val="CCCCCC"/>
+              <a:schemeClr val="accent5"/>
             </a:solidFill>
             <a:prstDash val="solid"/>
           </a:ln>
@@ -5815,14 +7002,14 @@
       </p:sp>
       <p:sp>
         <p:nvSpPr>
-          <p:cNvPr id="18" name="Human key points text"/>
+          <p:cNvPr id="34" name="Fact num 2"/>
           <p:cNvSpPr txBox="1"/>
           <p:nvPr/>
         </p:nvSpPr>
         <p:spPr>
           <a:xfrm>
-            <a:off x="7470648" y="1280160"/>
-            <a:ext cx="1197864" cy="2377440"/>
+            <a:off x="3429000" y="4617720"/>
+            <a:ext cx="777240" cy="1508760"/>
           </a:xfrm>
           <a:prstGeom prst="rect">
             <a:avLst/>
@@ -5831,88 +7018,82 @@
           <a:ln/>
         </p:spPr>
         <p:txBody>
-          <a:bodyPr wrap="square" lIns="1016" tIns="1016" rIns="1016" bIns="1016" rtlCol="0" anchor="ctr"/>
-          <a:lstStyle/>
-          <a:p>
-            <a:pPr algn="ctr" indent="0" marL="0">
-              <a:buNone/>
-            </a:pPr>
-            <a:r>
-              <a:rPr lang="en-US" sz="1300" b="1" dirty="0">
+          <a:bodyPr wrap="square" lIns="1270" tIns="1270" rIns="1270" bIns="1270" rtlCol="0" anchor="ctr"/>
+          <a:lstStyle/>
+          <a:p>
+            <a:pPr indent="0" marL="0">
+              <a:buNone/>
+            </a:pPr>
+            <a:r>
+              <a:rPr lang="en-US" sz="3600" b="1" dirty="0">
+                <a:solidFill>
+                  <a:schemeClr val="tx2"/>
+                </a:solidFill>
+              </a:rPr>
+              <a:t>2</a:t>
+            </a:r>
+            <a:endParaRPr lang="en-US" sz="3600" dirty="0"/>
+          </a:p>
+        </p:txBody>
+      </p:sp>
+      <p:sp>
+        <p:nvSpPr>
+          <p:cNvPr id="35" name="Fact label 2"/>
+          <p:cNvSpPr txBox="1"/>
+          <p:nvPr/>
+        </p:nvSpPr>
+        <p:spPr>
+          <a:xfrm>
+            <a:off x="4206240" y="4617720"/>
+            <a:ext cx="1783080" cy="1508760"/>
+          </a:xfrm>
+          <a:prstGeom prst="rect">
+            <a:avLst/>
+          </a:prstGeom>
+          <a:noFill/>
+          <a:ln/>
+        </p:spPr>
+        <p:txBody>
+          <a:bodyPr wrap="square" lIns="1270" tIns="1270" rIns="1270" bIns="1270" rtlCol="0" anchor="ctr"/>
+          <a:lstStyle/>
+          <a:p>
+            <a:pPr indent="0" marL="0">
+              <a:buNone/>
+            </a:pPr>
+            <a:r>
+              <a:rPr lang="en-US" sz="2000" dirty="0">
                 <a:solidFill>
                   <a:schemeClr val="tx1"/>
                 </a:solidFill>
               </a:rPr>
-              <a:t>Human key points</a:t>
-            </a:r>
-            <a:endParaRPr lang="en-US" sz="1400" dirty="0"/>
-          </a:p>
-          <a:p>
-            <a:pPr algn="ctr" indent="0" marL="0">
-              <a:buNone/>
-            </a:pPr>
-            <a:r>
-              <a:rPr lang="en-US" sz="1200" dirty="0">
-                <a:solidFill>
-                  <a:schemeClr val="accent3"/>
-                </a:solidFill>
-              </a:rPr>
-              <a:t>Where</a:t>
-            </a:r>
-            <a:endParaRPr lang="en-US" sz="1400" dirty="0"/>
-          </a:p>
-          <a:p>
-            <a:pPr algn="ctr" indent="0" marL="0">
-              <a:buNone/>
-            </a:pPr>
-            <a:r>
-              <a:rPr lang="en-US" sz="1200" dirty="0">
-                <a:solidFill>
-                  <a:schemeClr val="accent3"/>
-                </a:solidFill>
-              </a:rPr>
-              <a:t>When</a:t>
-            </a:r>
-            <a:endParaRPr lang="en-US" sz="1400" dirty="0"/>
-          </a:p>
-          <a:p>
-            <a:pPr algn="ctr" indent="0" marL="0">
-              <a:buNone/>
-            </a:pPr>
-            <a:r>
-              <a:rPr lang="en-US" sz="1200" dirty="0">
-                <a:solidFill>
-                  <a:schemeClr val="accent3"/>
-                </a:solidFill>
-              </a:rPr>
-              <a:t>Why</a:t>
-            </a:r>
-            <a:endParaRPr lang="en-US" sz="1400" dirty="0"/>
-          </a:p>
-        </p:txBody>
-      </p:sp>
-      <p:sp>
-        <p:nvSpPr>
-          <p:cNvPr id="19" name="Metrics strip"/>
+              <a:t>genres: shopping, job search</a:t>
+            </a:r>
+            <a:endParaRPr lang="en-US" sz="2000" dirty="0"/>
+          </a:p>
+        </p:txBody>
+      </p:sp>
+      <p:sp>
+        <p:nvSpPr>
+          <p:cNvPr id="36" name="Fact 3"/>
           <p:cNvSpPr/>
           <p:nvPr/>
         </p:nvSpPr>
         <p:spPr>
           <a:xfrm>
-            <a:off x="457200" y="3840480"/>
-            <a:ext cx="8229600" cy="777240"/>
+            <a:off x="6126480" y="4617720"/>
+            <a:ext cx="2651760" cy="1508760"/>
           </a:xfrm>
           <a:prstGeom prst="roundRect">
             <a:avLst>
-              <a:gd name="adj" fmla="val 9412"/>
+              <a:gd name="adj" fmla="val 6061"/>
             </a:avLst>
           </a:prstGeom>
           <a:solidFill>
-            <a:schemeClr val="bg2"/>
+            <a:schemeClr val="accent6"/>
           </a:solidFill>
-          <a:ln w="9525">
+          <a:ln w="12700">
             <a:solidFill>
-              <a:srgbClr val="CCCCCC"/>
+              <a:schemeClr val="accent5"/>
             </a:solidFill>
             <a:prstDash val="solid"/>
           </a:ln>
@@ -5920,14 +7101,14 @@
       </p:sp>
       <p:sp>
         <p:nvSpPr>
-          <p:cNvPr id="20" name="Metrics text"/>
+          <p:cNvPr id="37" name="Fact num 3"/>
           <p:cNvSpPr txBox="1"/>
           <p:nvPr/>
         </p:nvSpPr>
         <p:spPr>
           <a:xfrm>
-            <a:off x="594360" y="3840480"/>
-            <a:ext cx="7955280" cy="777240"/>
+            <a:off x="6172200" y="4617720"/>
+            <a:ext cx="777240" cy="1508760"/>
           </a:xfrm>
           <a:prstGeom prst="rect">
             <a:avLst/>
@@ -5936,43 +7117,156 @@
           <a:ln/>
         </p:spPr>
         <p:txBody>
-          <a:bodyPr wrap="square" lIns="1016" tIns="1016" rIns="1016" bIns="1016" rtlCol="0" anchor="ctr"/>
-          <a:lstStyle/>
-          <a:p>
-            <a:pPr indent="0" marL="0">
-              <a:buNone/>
-            </a:pPr>
-            <a:r>
-              <a:rPr lang="en-US" sz="1500" b="1" dirty="0">
+          <a:bodyPr wrap="square" lIns="1270" tIns="1270" rIns="1270" bIns="1270" rtlCol="0" anchor="ctr"/>
+          <a:lstStyle/>
+          <a:p>
+            <a:pPr indent="0" marL="0">
+              <a:buNone/>
+            </a:pPr>
+            <a:r>
+              <a:rPr lang="en-US" sz="3600" b="1" dirty="0">
                 <a:solidFill>
                   <a:schemeClr val="tx2"/>
                 </a:solidFill>
               </a:rPr>
-              <a:t>Metrics: </a:t>
-            </a:r>
-            <a:pPr indent="0" marL="0">
-              <a:buNone/>
-            </a:pPr>
-            <a:r>
-              <a:rPr lang="en-US" sz="1500" dirty="0">
+              <a:t>0</a:t>
+            </a:r>
+            <a:endParaRPr lang="en-US" sz="3600" dirty="0"/>
+          </a:p>
+        </p:txBody>
+      </p:sp>
+      <p:sp>
+        <p:nvSpPr>
+          <p:cNvPr id="38" name="Fact label 3"/>
+          <p:cNvSpPr txBox="1"/>
+          <p:nvPr/>
+        </p:nvSpPr>
+        <p:spPr>
+          <a:xfrm>
+            <a:off x="6949440" y="4617720"/>
+            <a:ext cx="1783080" cy="1508760"/>
+          </a:xfrm>
+          <a:prstGeom prst="rect">
+            <a:avLst/>
+          </a:prstGeom>
+          <a:noFill/>
+          <a:ln/>
+        </p:spPr>
+        <p:txBody>
+          <a:bodyPr wrap="square" lIns="1270" tIns="1270" rIns="1270" bIns="1270" rtlCol="0" anchor="ctr"/>
+          <a:lstStyle/>
+          <a:p>
+            <a:pPr indent="0" marL="0">
+              <a:buNone/>
+            </a:pPr>
+            <a:r>
+              <a:rPr lang="en-US" sz="2000" dirty="0">
                 <a:solidFill>
                   <a:schemeClr val="tx1"/>
                 </a:solidFill>
               </a:rPr>
-              <a:t>recall and over-claim rate.   </a:t>
-            </a:r>
-            <a:pPr indent="0" marL="0">
-              <a:buNone/>
-            </a:pPr>
-            <a:r>
-              <a:rPr lang="en-US" sz="1500" b="1" dirty="0">
-                <a:solidFill>
-                  <a:schemeClr val="accent4"/>
-                </a:solidFill>
-              </a:rPr>
-              <a:t>Key points are never given to the LLM.</a:t>
-            </a:r>
-            <a:endParaRPr lang="en-US" sz="1500" dirty="0"/>
+              <a:t>scrolling, so gaze stays reliable</a:t>
+            </a:r>
+            <a:endParaRPr lang="en-US" sz="2000" dirty="0"/>
+          </a:p>
+        </p:txBody>
+      </p:sp>
+      <p:sp>
+        <p:nvSpPr>
+          <p:cNvPr id="39" name="Fact 4"/>
+          <p:cNvSpPr/>
+          <p:nvPr/>
+        </p:nvSpPr>
+        <p:spPr>
+          <a:xfrm>
+            <a:off x="8869680" y="4617720"/>
+            <a:ext cx="2651760" cy="1508760"/>
+          </a:xfrm>
+          <a:prstGeom prst="roundRect">
+            <a:avLst>
+              <a:gd name="adj" fmla="val 6061"/>
+            </a:avLst>
+          </a:prstGeom>
+          <a:solidFill>
+            <a:schemeClr val="accent6"/>
+          </a:solidFill>
+          <a:ln w="12700">
+            <a:solidFill>
+              <a:schemeClr val="accent5"/>
+            </a:solidFill>
+            <a:prstDash val="solid"/>
+          </a:ln>
+        </p:spPr>
+      </p:sp>
+      <p:sp>
+        <p:nvSpPr>
+          <p:cNvPr id="40" name="Fact num 4"/>
+          <p:cNvSpPr txBox="1"/>
+          <p:nvPr/>
+        </p:nvSpPr>
+        <p:spPr>
+          <a:xfrm>
+            <a:off x="8915400" y="4617720"/>
+            <a:ext cx="777240" cy="1508760"/>
+          </a:xfrm>
+          <a:prstGeom prst="rect">
+            <a:avLst/>
+          </a:prstGeom>
+          <a:noFill/>
+          <a:ln/>
+        </p:spPr>
+        <p:txBody>
+          <a:bodyPr wrap="square" lIns="1270" tIns="1270" rIns="1270" bIns="1270" rtlCol="0" anchor="ctr"/>
+          <a:lstStyle/>
+          <a:p>
+            <a:pPr indent="0" marL="0">
+              <a:buNone/>
+            </a:pPr>
+            <a:r>
+              <a:rPr lang="en-US" sz="3600" b="1" dirty="0">
+                <a:solidFill>
+                  <a:schemeClr val="tx2"/>
+                </a:solidFill>
+              </a:rPr>
+              <a:t>20</a:t>
+            </a:r>
+            <a:endParaRPr lang="en-US" sz="3600" dirty="0"/>
+          </a:p>
+        </p:txBody>
+      </p:sp>
+      <p:sp>
+        <p:nvSpPr>
+          <p:cNvPr id="41" name="Fact label 4"/>
+          <p:cNvSpPr txBox="1"/>
+          <p:nvPr/>
+        </p:nvSpPr>
+        <p:spPr>
+          <a:xfrm>
+            <a:off x="9692640" y="4617720"/>
+            <a:ext cx="1783080" cy="1508760"/>
+          </a:xfrm>
+          <a:prstGeom prst="rect">
+            <a:avLst/>
+          </a:prstGeom>
+          <a:noFill/>
+          <a:ln/>
+        </p:spPr>
+        <p:txBody>
+          <a:bodyPr wrap="square" lIns="1270" tIns="1270" rIns="1270" bIns="1270" rtlCol="0" anchor="ctr"/>
+          <a:lstStyle/>
+          <a:p>
+            <a:pPr indent="0" marL="0">
+              <a:buNone/>
+            </a:pPr>
+            <a:r>
+              <a:rPr lang="en-US" sz="2000" dirty="0">
+                <a:solidFill>
+                  <a:schemeClr val="tx1"/>
+                </a:solidFill>
+              </a:rPr>
+              <a:t>areas of interest per site</a:t>
+            </a:r>
+            <a:endParaRPr lang="en-US" sz="2000" dirty="0"/>
           </a:p>
         </p:txBody>
       </p:sp>
@@ -5988,8 +7282,8 @@
         </p:nvSpPr>
         <p:spPr>
           <a:xfrm>
-            <a:off x="8321040" y="4800600"/>
-            <a:ext cx="365760" cy="228600"/>
+            <a:off x="11155680" y="6382512"/>
+            <a:ext cx="411480" cy="292608"/>
           </a:xfrm>
           <a:prstGeom prst="rect">
             <a:avLst/>
@@ -6004,7 +7298,7 @@
           <a:bodyPr/>
           <a:lstStyle>
             <a:lvl1pPr>
-              <a:defRPr sz="900">
+              <a:defRPr sz="1800">
                 <a:solidFill>
                   <a:schemeClr val="tx1"/>
                 </a:solidFill>
@@ -6054,8 +7348,8 @@
         </p:nvSpPr>
         <p:spPr>
           <a:xfrm>
-            <a:off x="457200" y="219456"/>
-            <a:ext cx="5486400" cy="237744"/>
+            <a:off x="640080" y="256032"/>
+            <a:ext cx="7315200" cy="329184"/>
           </a:xfrm>
           <a:prstGeom prst="rect">
             <a:avLst/>
@@ -6071,14 +7365,14 @@
               <a:buNone/>
             </a:pPr>
             <a:r>
-              <a:rPr lang="en-US" sz="1200" b="1" dirty="0">
+              <a:rPr lang="en-US" sz="2000" b="1" dirty="0">
                 <a:solidFill>
                   <a:schemeClr val="tx2"/>
                 </a:solidFill>
               </a:rPr>
-              <a:t>Master's · 2/3</a:t>
-            </a:r>
-            <a:endParaRPr lang="en-US" sz="1200" dirty="0"/>
+              <a:t>Master's research · status, limits, advice</a:t>
+            </a:r>
+            <a:endParaRPr lang="en-US" sz="2000" dirty="0"/>
           </a:p>
         </p:txBody>
       </p:sp>
@@ -6090,8 +7384,8 @@
         </p:nvSpPr>
         <p:spPr>
           <a:xfrm>
-            <a:off x="457200" y="457200"/>
-            <a:ext cx="8229600" cy="594360"/>
+            <a:off x="640080" y="594360"/>
+            <a:ext cx="10881360" cy="731520"/>
           </a:xfrm>
           <a:prstGeom prst="rect">
             <a:avLst/>
@@ -6107,57 +7401,32 @@
               <a:buNone/>
             </a:pPr>
             <a:r>
-              <a:rPr lang="en-US" sz="2600" b="1" dirty="0">
+              <a:rPr lang="en-US" sz="2800" b="1" dirty="0">
                 <a:solidFill>
                   <a:schemeClr val="tx2"/>
                 </a:solidFill>
               </a:rPr>
-              <a:t>Five literature-grounded bad-UI techniques</a:t>
-            </a:r>
-            <a:endParaRPr lang="en-US" sz="2600" dirty="0"/>
-          </a:p>
-        </p:txBody>
-      </p:sp>
-      <p:sp>
-        <p:nvSpPr>
-          <p:cNvPr id="5" name="Technique card T1"/>
+              <a:t>No results exist yet, so the evaluation design remains untested.</a:t>
+            </a:r>
+            <a:endParaRPr lang="en-US" sz="2800" dirty="0"/>
+          </a:p>
+        </p:txBody>
+      </p:sp>
+      <p:sp>
+        <p:nvSpPr>
+          <p:cNvPr id="5" name="Step 1"/>
           <p:cNvSpPr/>
           <p:nvPr/>
         </p:nvSpPr>
         <p:spPr>
           <a:xfrm>
-            <a:off x="457200" y="1234440"/>
-            <a:ext cx="1554480" cy="2103120"/>
+            <a:off x="640080" y="1554480"/>
+            <a:ext cx="3319272" cy="1234440"/>
           </a:xfrm>
           <a:prstGeom prst="roundRect">
             <a:avLst>
-              <a:gd name="adj" fmla="val 4706"/>
+              <a:gd name="adj" fmla="val 7407"/>
             </a:avLst>
-          </a:prstGeom>
-          <a:solidFill>
-            <a:schemeClr val="bg2"/>
-          </a:solidFill>
-          <a:ln w="9525">
-            <a:solidFill>
-              <a:srgbClr val="CCCCCC"/>
-            </a:solidFill>
-            <a:prstDash val="solid"/>
-          </a:ln>
-        </p:spPr>
-      </p:sp>
-      <p:sp>
-        <p:nvSpPr>
-          <p:cNvPr id="6" name="Badge T1"/>
-          <p:cNvSpPr/>
-          <p:nvPr/>
-        </p:nvSpPr>
-        <p:spPr>
-          <a:xfrm>
-            <a:off x="566928" y="1371600"/>
-            <a:ext cx="457200" cy="457200"/>
-          </a:xfrm>
-          <a:prstGeom prst="ellipse">
-            <a:avLst/>
           </a:prstGeom>
           <a:solidFill>
             <a:schemeClr val="tx2"/>
@@ -6172,14 +7441,14 @@
       </p:sp>
       <p:sp>
         <p:nvSpPr>
-          <p:cNvPr id="7" name="Badge text T1"/>
+          <p:cNvPr id="6" name="Step text 1"/>
           <p:cNvSpPr txBox="1"/>
           <p:nvPr/>
         </p:nvSpPr>
         <p:spPr>
           <a:xfrm>
-            <a:off x="566928" y="1371600"/>
-            <a:ext cx="457200" cy="457200"/>
+            <a:off x="731520" y="1554480"/>
+            <a:ext cx="3136392" cy="1234440"/>
           </a:xfrm>
           <a:prstGeom prst="rect">
             <a:avLst/>
@@ -6188,118 +7457,95 @@
           <a:ln/>
         </p:spPr>
         <p:txBody>
-          <a:bodyPr wrap="square" lIns="0" tIns="0" rIns="0" bIns="0" rtlCol="0" anchor="ctr"/>
-          <a:lstStyle/>
-          <a:p>
-            <a:pPr algn="ctr" indent="0" marL="0">
-              <a:buNone/>
-            </a:pPr>
-            <a:r>
-              <a:rPr lang="en-US" sz="1300" b="1" dirty="0">
+          <a:bodyPr wrap="square" lIns="1270" tIns="1270" rIns="1270" bIns="1270" rtlCol="0" anchor="ctr"/>
+          <a:lstStyle/>
+          <a:p>
+            <a:pPr indent="0" marL="0">
+              <a:buNone/>
+            </a:pPr>
+            <a:r>
+              <a:rPr lang="en-US" sz="1800" b="1" dirty="0">
                 <a:solidFill>
                   <a:schemeClr val="bg1"/>
                 </a:solidFill>
               </a:rPr>
-              <a:t>T1</a:t>
-            </a:r>
-            <a:endParaRPr lang="en-US" sz="1300" dirty="0"/>
-          </a:p>
-        </p:txBody>
-      </p:sp>
-      <p:sp>
-        <p:nvSpPr>
-          <p:cNvPr id="8" name="Technique name T1"/>
-          <p:cNvSpPr txBox="1"/>
-          <p:nvPr/>
-        </p:nvSpPr>
-        <p:spPr>
-          <a:xfrm>
-            <a:off x="502920" y="1920240"/>
-            <a:ext cx="1463040" cy="731520"/>
-          </a:xfrm>
-          <a:prstGeom prst="rect">
-            <a:avLst/>
-          </a:prstGeom>
-          <a:noFill/>
-          <a:ln/>
-        </p:spPr>
-        <p:txBody>
-          <a:bodyPr wrap="square" lIns="1016" tIns="1016" rIns="1016" bIns="1016" rtlCol="0" anchor="t"/>
-          <a:lstStyle/>
-          <a:p>
-            <a:pPr indent="0" marL="0">
-              <a:buNone/>
-            </a:pPr>
-            <a:r>
-              <a:rPr lang="en-US" sz="1400" b="1" dirty="0">
-                <a:solidFill>
-                  <a:schemeClr val="tx1"/>
-                </a:solidFill>
-              </a:rPr>
-              <a:t>Similar-name decoys</a:t>
-            </a:r>
-            <a:endParaRPr lang="en-US" sz="1400" dirty="0"/>
-          </a:p>
-        </p:txBody>
-      </p:sp>
-      <p:sp>
-        <p:nvSpPr>
-          <p:cNvPr id="9" name="Technique ref T1"/>
-          <p:cNvSpPr txBox="1"/>
-          <p:nvPr/>
-        </p:nvSpPr>
-        <p:spPr>
-          <a:xfrm>
-            <a:off x="502920" y="2697480"/>
-            <a:ext cx="1463040" cy="594360"/>
-          </a:xfrm>
-          <a:prstGeom prst="rect">
-            <a:avLst/>
-          </a:prstGeom>
-          <a:noFill/>
-          <a:ln/>
-        </p:spPr>
-        <p:txBody>
-          <a:bodyPr wrap="square" lIns="1016" tIns="1016" rIns="1016" bIns="1016" rtlCol="0" anchor="t"/>
-          <a:lstStyle/>
-          <a:p>
-            <a:pPr indent="0" marL="0">
-              <a:buNone/>
-            </a:pPr>
-            <a:r>
-              <a:rPr lang="en-US" sz="1100" dirty="0">
-                <a:solidFill>
-                  <a:schemeClr val="accent3"/>
-                </a:solidFill>
-              </a:rPr>
-              <a:t>Duncan &amp; Humphreys 1989</a:t>
-            </a:r>
-            <a:endParaRPr lang="en-US" sz="1100" dirty="0"/>
-          </a:p>
-        </p:txBody>
-      </p:sp>
-      <p:sp>
-        <p:nvSpPr>
-          <p:cNvPr id="10" name="Technique card T2"/>
+              <a:t>DONE</a:t>
+            </a:r>
+            <a:endParaRPr lang="en-US" sz="2000" dirty="0"/>
+          </a:p>
+          <a:p>
+            <a:pPr indent="0" marL="0">
+              <a:buNone/>
+            </a:pPr>
+            <a:r>
+              <a:rPr lang="en-US" sz="2400" b="1" dirty="0">
+                <a:solidFill>
+                  <a:schemeClr val="bg1"/>
+                </a:solidFill>
+              </a:rPr>
+              <a:t>Prototypes  </a:t>
+            </a:r>
+            <a:pPr indent="0" marL="0">
+              <a:buNone/>
+            </a:pPr>
+            <a:r>
+              <a:rPr lang="en-US" sz="2000" dirty="0">
+                <a:solidFill>
+                  <a:schemeClr val="bg1"/>
+                </a:solidFill>
+              </a:rPr>
+              <a:t>both sites</a:t>
+            </a:r>
+            <a:endParaRPr lang="en-US" sz="2000" dirty="0"/>
+          </a:p>
+        </p:txBody>
+      </p:sp>
+      <p:sp>
+        <p:nvSpPr>
+          <p:cNvPr id="7" name="Step arrow 1"/>
           <p:cNvSpPr/>
           <p:nvPr/>
         </p:nvSpPr>
         <p:spPr>
           <a:xfrm>
-            <a:off x="2125980" y="1234440"/>
-            <a:ext cx="1554480" cy="2103120"/>
+            <a:off x="4005072" y="2148840"/>
+            <a:ext cx="384048" cy="0"/>
+          </a:xfrm>
+          <a:prstGeom prst="line">
+            <a:avLst/>
+          </a:prstGeom>
+          <a:noFill/>
+          <a:ln w="19050">
+            <a:solidFill>
+              <a:schemeClr val="tx1"/>
+            </a:solidFill>
+            <a:prstDash val="solid"/>
+            <a:tailEnd type="triangle"/>
+          </a:ln>
+        </p:spPr>
+      </p:sp>
+      <p:sp>
+        <p:nvSpPr>
+          <p:cNvPr id="8" name="Step 2"/>
+          <p:cNvSpPr/>
+          <p:nvPr/>
+        </p:nvSpPr>
+        <p:spPr>
+          <a:xfrm>
+            <a:off x="4434840" y="1554480"/>
+            <a:ext cx="3319272" cy="1234440"/>
           </a:xfrm>
           <a:prstGeom prst="roundRect">
             <a:avLst>
-              <a:gd name="adj" fmla="val 4706"/>
+              <a:gd name="adj" fmla="val 7407"/>
             </a:avLst>
           </a:prstGeom>
           <a:solidFill>
-            <a:schemeClr val="bg2"/>
+            <a:schemeClr val="accent6"/>
           </a:solidFill>
-          <a:ln w="9525">
+          <a:ln w="12700">
             <a:solidFill>
-              <a:srgbClr val="CCCCCC"/>
+              <a:schemeClr val="accent5"/>
             </a:solidFill>
             <a:prstDash val="solid"/>
           </a:ln>
@@ -6307,17 +7553,291 @@
       </p:sp>
       <p:sp>
         <p:nvSpPr>
-          <p:cNvPr id="11" name="Badge T2"/>
+          <p:cNvPr id="9" name="Step text 2"/>
+          <p:cNvSpPr txBox="1"/>
+          <p:nvPr/>
+        </p:nvSpPr>
+        <p:spPr>
+          <a:xfrm>
+            <a:off x="4526280" y="1554480"/>
+            <a:ext cx="3136392" cy="1234440"/>
+          </a:xfrm>
+          <a:prstGeom prst="rect">
+            <a:avLst/>
+          </a:prstGeom>
+          <a:noFill/>
+          <a:ln/>
+        </p:spPr>
+        <p:txBody>
+          <a:bodyPr wrap="square" lIns="1270" tIns="1270" rIns="1270" bIns="1270" rtlCol="0" anchor="ctr"/>
+          <a:lstStyle/>
+          <a:p>
+            <a:pPr indent="0" marL="0">
+              <a:buNone/>
+            </a:pPr>
+            <a:r>
+              <a:rPr lang="en-US" sz="1800" b="1" dirty="0">
+                <a:solidFill>
+                  <a:schemeClr val="tx1"/>
+                </a:solidFill>
+              </a:rPr>
+              <a:t>PLANNED</a:t>
+            </a:r>
+            <a:endParaRPr lang="en-US" sz="2000" dirty="0"/>
+          </a:p>
+          <a:p>
+            <a:pPr indent="0" marL="0">
+              <a:buNone/>
+            </a:pPr>
+            <a:r>
+              <a:rPr lang="en-US" sz="2400" b="1" dirty="0">
+                <a:solidFill>
+                  <a:schemeClr val="tx1"/>
+                </a:solidFill>
+              </a:rPr>
+              <a:t>Pilot  </a:t>
+            </a:r>
+            <a:pPr indent="0" marL="0">
+              <a:buNone/>
+            </a:pPr>
+            <a:r>
+              <a:rPr lang="en-US" sz="2000" dirty="0">
+                <a:solidFill>
+                  <a:schemeClr val="tx1"/>
+                </a:solidFill>
+              </a:rPr>
+              <a:t>N = 6</a:t>
+            </a:r>
+            <a:endParaRPr lang="en-US" sz="2000" dirty="0"/>
+          </a:p>
+        </p:txBody>
+      </p:sp>
+      <p:sp>
+        <p:nvSpPr>
+          <p:cNvPr id="10" name="Step arrow 2"/>
           <p:cNvSpPr/>
           <p:nvPr/>
         </p:nvSpPr>
         <p:spPr>
           <a:xfrm>
-            <a:off x="2235708" y="1371600"/>
-            <a:ext cx="457200" cy="457200"/>
-          </a:xfrm>
-          <a:prstGeom prst="ellipse">
-            <a:avLst/>
+            <a:off x="7799832" y="2148840"/>
+            <a:ext cx="384048" cy="0"/>
+          </a:xfrm>
+          <a:prstGeom prst="line">
+            <a:avLst/>
+          </a:prstGeom>
+          <a:noFill/>
+          <a:ln w="19050">
+            <a:solidFill>
+              <a:schemeClr val="tx1"/>
+            </a:solidFill>
+            <a:prstDash val="solid"/>
+            <a:tailEnd type="triangle"/>
+          </a:ln>
+        </p:spPr>
+      </p:sp>
+      <p:sp>
+        <p:nvSpPr>
+          <p:cNvPr id="11" name="Step 3"/>
+          <p:cNvSpPr/>
+          <p:nvPr/>
+        </p:nvSpPr>
+        <p:spPr>
+          <a:xfrm>
+            <a:off x="8229600" y="1554480"/>
+            <a:ext cx="3319272" cy="1234440"/>
+          </a:xfrm>
+          <a:prstGeom prst="roundRect">
+            <a:avLst>
+              <a:gd name="adj" fmla="val 7407"/>
+            </a:avLst>
+          </a:prstGeom>
+          <a:solidFill>
+            <a:schemeClr val="accent6"/>
+          </a:solidFill>
+          <a:ln w="12700">
+            <a:solidFill>
+              <a:schemeClr val="accent5"/>
+            </a:solidFill>
+            <a:prstDash val="solid"/>
+          </a:ln>
+        </p:spPr>
+      </p:sp>
+      <p:sp>
+        <p:nvSpPr>
+          <p:cNvPr id="12" name="Step text 3"/>
+          <p:cNvSpPr txBox="1"/>
+          <p:nvPr/>
+        </p:nvSpPr>
+        <p:spPr>
+          <a:xfrm>
+            <a:off x="8321040" y="1554480"/>
+            <a:ext cx="3136392" cy="1234440"/>
+          </a:xfrm>
+          <a:prstGeom prst="rect">
+            <a:avLst/>
+          </a:prstGeom>
+          <a:noFill/>
+          <a:ln/>
+        </p:spPr>
+        <p:txBody>
+          <a:bodyPr wrap="square" lIns="1270" tIns="1270" rIns="1270" bIns="1270" rtlCol="0" anchor="ctr"/>
+          <a:lstStyle/>
+          <a:p>
+            <a:pPr indent="0" marL="0">
+              <a:buNone/>
+            </a:pPr>
+            <a:r>
+              <a:rPr lang="en-US" sz="1800" b="1" dirty="0">
+                <a:solidFill>
+                  <a:schemeClr val="tx1"/>
+                </a:solidFill>
+              </a:rPr>
+              <a:t>PLANNED</a:t>
+            </a:r>
+            <a:endParaRPr lang="en-US" sz="2000" dirty="0"/>
+          </a:p>
+          <a:p>
+            <a:pPr indent="0" marL="0">
+              <a:buNone/>
+            </a:pPr>
+            <a:r>
+              <a:rPr lang="en-US" sz="2400" b="1" dirty="0">
+                <a:solidFill>
+                  <a:schemeClr val="tx1"/>
+                </a:solidFill>
+              </a:rPr>
+              <a:t>Main study  </a:t>
+            </a:r>
+            <a:pPr indent="0" marL="0">
+              <a:buNone/>
+            </a:pPr>
+            <a:r>
+              <a:rPr lang="en-US" sz="2000" dirty="0">
+                <a:solidFill>
+                  <a:schemeClr val="tx1"/>
+                </a:solidFill>
+              </a:rPr>
+              <a:t>N = 40–64</a:t>
+            </a:r>
+            <a:endParaRPr lang="en-US" sz="2000" dirty="0"/>
+          </a:p>
+        </p:txBody>
+      </p:sp>
+      <p:sp>
+        <p:nvSpPr>
+          <p:cNvPr id="13" name="Status box"/>
+          <p:cNvSpPr/>
+          <p:nvPr/>
+        </p:nvSpPr>
+        <p:spPr>
+          <a:xfrm>
+            <a:off x="640080" y="2971800"/>
+            <a:ext cx="10908792" cy="1417320"/>
+          </a:xfrm>
+          <a:prstGeom prst="roundRect">
+            <a:avLst>
+              <a:gd name="adj" fmla="val 6452"/>
+            </a:avLst>
+          </a:prstGeom>
+          <a:solidFill>
+            <a:srgbClr val="FDEEEE"/>
+          </a:solidFill>
+          <a:ln w="12700">
+            <a:solidFill>
+              <a:srgbClr val="FE3939"/>
+            </a:solidFill>
+            <a:prstDash val="solid"/>
+          </a:ln>
+        </p:spPr>
+      </p:sp>
+      <p:sp>
+        <p:nvSpPr>
+          <p:cNvPr id="14" name="Status text"/>
+          <p:cNvSpPr txBox="1"/>
+          <p:nvPr/>
+        </p:nvSpPr>
+        <p:spPr>
+          <a:xfrm>
+            <a:off x="777240" y="2971800"/>
+            <a:ext cx="10607040" cy="1417320"/>
+          </a:xfrm>
+          <a:prstGeom prst="rect">
+            <a:avLst/>
+          </a:prstGeom>
+          <a:noFill/>
+          <a:ln/>
+        </p:spPr>
+        <p:txBody>
+          <a:bodyPr wrap="square" lIns="1270" tIns="1270" rIns="1270" bIns="1270" rtlCol="0" anchor="ctr"/>
+          <a:lstStyle/>
+          <a:p>
+            <a:pPr indent="0" marL="0">
+              <a:buNone/>
+            </a:pPr>
+            <a:r>
+              <a:rPr lang="en-US" sz="2000" b="1" dirty="0">
+                <a:solidFill>
+                  <a:schemeClr val="accent4"/>
+                </a:solidFill>
+              </a:rPr>
+              <a:t>So far: </a:t>
+            </a:r>
+            <a:pPr indent="0" marL="0">
+              <a:buNone/>
+            </a:pPr>
+            <a:r>
+              <a:rPr lang="en-US" sz="2000" dirty="0">
+                <a:solidFill>
+                  <a:schemeClr val="tx1"/>
+                </a:solidFill>
+              </a:rPr>
+              <a:t>N = 3 preliminary study and a wiring check with mock LLM responses. No results are claimed.</a:t>
+            </a:r>
+            <a:endParaRPr lang="en-US" sz="2000" dirty="0"/>
+          </a:p>
+          <a:p>
+            <a:pPr indent="0" marL="0">
+              <a:buNone/>
+            </a:pPr>
+            <a:r>
+              <a:rPr lang="en-US" sz="2000" b="1" dirty="0">
+                <a:solidFill>
+                  <a:schemeClr val="accent4"/>
+                </a:solidFill>
+              </a:rPr>
+              <a:t>Limits: </a:t>
+            </a:r>
+            <a:pPr indent="0" marL="0">
+              <a:buNone/>
+            </a:pPr>
+            <a:r>
+              <a:rPr lang="en-US" sz="2000" dirty="0">
+                <a:solidFill>
+                  <a:schemeClr val="tx1"/>
+                </a:solidFill>
+              </a:rPr>
+              <a:t>two mock-site genres and non-scrolling pages limit generalization.</a:t>
+            </a:r>
+            <a:endParaRPr lang="en-US" sz="2000" dirty="0"/>
+          </a:p>
+        </p:txBody>
+      </p:sp>
+      <p:sp>
+        <p:nvSpPr>
+          <p:cNvPr id="15" name="Advice box"/>
+          <p:cNvSpPr/>
+          <p:nvPr/>
+        </p:nvSpPr>
+        <p:spPr>
+          <a:xfrm>
+            <a:off x="640080" y="4572000"/>
+            <a:ext cx="10908792" cy="1600200"/>
+          </a:xfrm>
+          <a:prstGeom prst="roundRect">
+            <a:avLst>
+              <a:gd name="adj" fmla="val 5714"/>
+            </a:avLst>
           </a:prstGeom>
           <a:solidFill>
             <a:schemeClr val="tx2"/>
@@ -6332,14 +7852,14 @@
       </p:sp>
       <p:sp>
         <p:nvSpPr>
-          <p:cNvPr id="12" name="Badge text T2"/>
+          <p:cNvPr id="16" name="Advice text"/>
           <p:cNvSpPr txBox="1"/>
           <p:nvPr/>
         </p:nvSpPr>
         <p:spPr>
           <a:xfrm>
-            <a:off x="2235708" y="1371600"/>
-            <a:ext cx="457200" cy="457200"/>
+            <a:off x="777240" y="4572000"/>
+            <a:ext cx="10607040" cy="1600200"/>
           </a:xfrm>
           <a:prstGeom prst="rect">
             <a:avLst/>
@@ -6348,969 +7868,49 @@
           <a:ln/>
         </p:spPr>
         <p:txBody>
-          <a:bodyPr wrap="square" lIns="0" tIns="0" rIns="0" bIns="0" rtlCol="0" anchor="ctr"/>
-          <a:lstStyle/>
-          <a:p>
-            <a:pPr algn="ctr" indent="0" marL="0">
-              <a:buNone/>
-            </a:pPr>
-            <a:r>
-              <a:rPr lang="en-US" sz="1300" b="1" dirty="0">
+          <a:bodyPr wrap="square" lIns="1270" tIns="1270" rIns="1270" bIns="1270" rtlCol="0" anchor="ctr"/>
+          <a:lstStyle/>
+          <a:p>
+            <a:pPr indent="0" marL="0">
+              <a:buNone/>
+            </a:pPr>
+            <a:r>
+              <a:rPr lang="en-US" sz="2400" b="1" dirty="0">
                 <a:solidFill>
                   <a:schemeClr val="bg1"/>
                 </a:solidFill>
               </a:rPr>
-              <a:t>T2</a:t>
-            </a:r>
-            <a:endParaRPr lang="en-US" sz="1300" dirty="0"/>
-          </a:p>
-        </p:txBody>
-      </p:sp>
-      <p:sp>
-        <p:nvSpPr>
-          <p:cNvPr id="13" name="Technique name T2"/>
-          <p:cNvSpPr txBox="1"/>
-          <p:nvPr/>
-        </p:nvSpPr>
-        <p:spPr>
-          <a:xfrm>
-            <a:off x="2171700" y="1920240"/>
-            <a:ext cx="1463040" cy="731520"/>
-          </a:xfrm>
-          <a:prstGeom prst="rect">
-            <a:avLst/>
-          </a:prstGeom>
-          <a:noFill/>
-          <a:ln/>
-        </p:spPr>
-        <p:txBody>
-          <a:bodyPr wrap="square" lIns="1016" tIns="1016" rIns="1016" bIns="1016" rtlCol="0" anchor="t"/>
-          <a:lstStyle/>
-          <a:p>
-            <a:pPr indent="0" marL="0">
-              <a:buNone/>
-            </a:pPr>
-            <a:r>
-              <a:rPr lang="en-US" sz="1400" b="1" dirty="0">
-                <a:solidFill>
-                  <a:schemeClr val="tx1"/>
-                </a:solidFill>
-              </a:rPr>
-              <a:t>Decorative noise</a:t>
-            </a:r>
-            <a:endParaRPr lang="en-US" sz="1400" dirty="0"/>
-          </a:p>
-        </p:txBody>
-      </p:sp>
-      <p:sp>
-        <p:nvSpPr>
-          <p:cNvPr id="14" name="Technique ref T2"/>
-          <p:cNvSpPr txBox="1"/>
-          <p:nvPr/>
-        </p:nvSpPr>
-        <p:spPr>
-          <a:xfrm>
-            <a:off x="2171700" y="2697480"/>
-            <a:ext cx="1463040" cy="594360"/>
-          </a:xfrm>
-          <a:prstGeom prst="rect">
-            <a:avLst/>
-          </a:prstGeom>
-          <a:noFill/>
-          <a:ln/>
-        </p:spPr>
-        <p:txBody>
-          <a:bodyPr wrap="square" lIns="1016" tIns="1016" rIns="1016" bIns="1016" rtlCol="0" anchor="t"/>
-          <a:lstStyle/>
-          <a:p>
-            <a:pPr indent="0" marL="0">
-              <a:buNone/>
-            </a:pPr>
-            <a:r>
-              <a:rPr lang="en-US" sz="1100" dirty="0">
-                <a:solidFill>
-                  <a:schemeClr val="accent3"/>
-                </a:solidFill>
-              </a:rPr>
-              <a:t>Burke et al. 2005</a:t>
-            </a:r>
-            <a:endParaRPr lang="en-US" sz="1100" dirty="0"/>
-          </a:p>
-        </p:txBody>
-      </p:sp>
-      <p:sp>
-        <p:nvSpPr>
-          <p:cNvPr id="15" name="Technique card T3"/>
-          <p:cNvSpPr/>
-          <p:nvPr/>
-        </p:nvSpPr>
-        <p:spPr>
-          <a:xfrm>
-            <a:off x="3794760" y="1234440"/>
-            <a:ext cx="1554480" cy="2103120"/>
-          </a:xfrm>
-          <a:prstGeom prst="roundRect">
-            <a:avLst>
-              <a:gd name="adj" fmla="val 4706"/>
-            </a:avLst>
-          </a:prstGeom>
-          <a:solidFill>
-            <a:schemeClr val="bg2"/>
-          </a:solidFill>
-          <a:ln w="9525">
-            <a:solidFill>
-              <a:srgbClr val="CCCCCC"/>
-            </a:solidFill>
-            <a:prstDash val="solid"/>
-          </a:ln>
-        </p:spPr>
-      </p:sp>
-      <p:sp>
-        <p:nvSpPr>
-          <p:cNvPr id="16" name="Badge T3"/>
-          <p:cNvSpPr/>
-          <p:nvPr/>
-        </p:nvSpPr>
-        <p:spPr>
-          <a:xfrm>
-            <a:off x="3904488" y="1371600"/>
-            <a:ext cx="457200" cy="457200"/>
-          </a:xfrm>
-          <a:prstGeom prst="ellipse">
-            <a:avLst/>
-          </a:prstGeom>
-          <a:solidFill>
-            <a:schemeClr val="tx2"/>
-          </a:solidFill>
-          <a:ln w="12700">
-            <a:solidFill>
-              <a:schemeClr val="tx2"/>
-            </a:solidFill>
-            <a:prstDash val="solid"/>
-          </a:ln>
-        </p:spPr>
-      </p:sp>
-      <p:sp>
-        <p:nvSpPr>
-          <p:cNvPr id="17" name="Badge text T3"/>
-          <p:cNvSpPr txBox="1"/>
-          <p:nvPr/>
-        </p:nvSpPr>
-        <p:spPr>
-          <a:xfrm>
-            <a:off x="3904488" y="1371600"/>
-            <a:ext cx="457200" cy="457200"/>
-          </a:xfrm>
-          <a:prstGeom prst="rect">
-            <a:avLst/>
-          </a:prstGeom>
-          <a:noFill/>
-          <a:ln/>
-        </p:spPr>
-        <p:txBody>
-          <a:bodyPr wrap="square" lIns="0" tIns="0" rIns="0" bIns="0" rtlCol="0" anchor="ctr"/>
-          <a:lstStyle/>
-          <a:p>
-            <a:pPr algn="ctr" indent="0" marL="0">
-              <a:buNone/>
-            </a:pPr>
-            <a:r>
-              <a:rPr lang="en-US" sz="1300" b="1" dirty="0">
+              <a:t>Advice wanted</a:t>
+            </a:r>
+            <a:endParaRPr lang="en-US" sz="2000" dirty="0"/>
+          </a:p>
+          <a:p>
+            <a:pPr indent="0" marL="0">
+              <a:buNone/>
+            </a:pPr>
+            <a:r>
+              <a:rPr lang="en-US" sz="2000" dirty="0">
                 <a:solidFill>
                   <a:schemeClr val="bg1"/>
                 </a:solidFill>
               </a:rPr>
-              <a:t>T3</a:t>
-            </a:r>
-            <a:endParaRPr lang="en-US" sz="1300" dirty="0"/>
-          </a:p>
-        </p:txBody>
-      </p:sp>
-      <p:sp>
-        <p:nvSpPr>
-          <p:cNvPr id="18" name="Technique name T3"/>
-          <p:cNvSpPr txBox="1"/>
-          <p:nvPr/>
-        </p:nvSpPr>
-        <p:spPr>
-          <a:xfrm>
-            <a:off x="3840480" y="1920240"/>
-            <a:ext cx="1463040" cy="731520"/>
-          </a:xfrm>
-          <a:prstGeom prst="rect">
-            <a:avLst/>
-          </a:prstGeom>
-          <a:noFill/>
-          <a:ln/>
-        </p:spPr>
-        <p:txBody>
-          <a:bodyPr wrap="square" lIns="1016" tIns="1016" rIns="1016" bIns="1016" rtlCol="0" anchor="t"/>
-          <a:lstStyle/>
-          <a:p>
-            <a:pPr indent="0" marL="0">
-              <a:buNone/>
-            </a:pPr>
-            <a:r>
-              <a:rPr lang="en-US" sz="1400" b="1" dirty="0">
-                <a:solidFill>
-                  <a:schemeClr val="tx1"/>
-                </a:solidFill>
-              </a:rPr>
-              <a:t>Shifting button positions</a:t>
-            </a:r>
-            <a:endParaRPr lang="en-US" sz="1400" dirty="0"/>
-          </a:p>
-        </p:txBody>
-      </p:sp>
-      <p:sp>
-        <p:nvSpPr>
-          <p:cNvPr id="19" name="Technique ref T3"/>
-          <p:cNvSpPr txBox="1"/>
-          <p:nvPr/>
-        </p:nvSpPr>
-        <p:spPr>
-          <a:xfrm>
-            <a:off x="3840480" y="2697480"/>
-            <a:ext cx="1463040" cy="594360"/>
-          </a:xfrm>
-          <a:prstGeom prst="rect">
-            <a:avLst/>
-          </a:prstGeom>
-          <a:noFill/>
-          <a:ln/>
-        </p:spPr>
-        <p:txBody>
-          <a:bodyPr wrap="square" lIns="1016" tIns="1016" rIns="1016" bIns="1016" rtlCol="0" anchor="t"/>
-          <a:lstStyle/>
-          <a:p>
-            <a:pPr indent="0" marL="0">
-              <a:buNone/>
-            </a:pPr>
-            <a:r>
-              <a:rPr lang="en-US" sz="1100" dirty="0">
-                <a:solidFill>
-                  <a:schemeClr val="accent3"/>
-                </a:solidFill>
-              </a:rPr>
-              <a:t>McCarthy et al. 2003</a:t>
-            </a:r>
-            <a:endParaRPr lang="en-US" sz="1100" dirty="0"/>
-          </a:p>
-        </p:txBody>
-      </p:sp>
-      <p:sp>
-        <p:nvSpPr>
-          <p:cNvPr id="20" name="Technique card T4"/>
-          <p:cNvSpPr/>
-          <p:nvPr/>
-        </p:nvSpPr>
-        <p:spPr>
-          <a:xfrm>
-            <a:off x="5463540" y="1234440"/>
-            <a:ext cx="1554480" cy="2103120"/>
-          </a:xfrm>
-          <a:prstGeom prst="roundRect">
-            <a:avLst>
-              <a:gd name="adj" fmla="val 4706"/>
-            </a:avLst>
-          </a:prstGeom>
-          <a:solidFill>
-            <a:schemeClr val="bg2"/>
-          </a:solidFill>
-          <a:ln w="9525">
-            <a:solidFill>
-              <a:srgbClr val="CCCCCC"/>
-            </a:solidFill>
-            <a:prstDash val="solid"/>
-          </a:ln>
-        </p:spPr>
-      </p:sp>
-      <p:sp>
-        <p:nvSpPr>
-          <p:cNvPr id="21" name="Badge T4"/>
-          <p:cNvSpPr/>
-          <p:nvPr/>
-        </p:nvSpPr>
-        <p:spPr>
-          <a:xfrm>
-            <a:off x="5573268" y="1371600"/>
-            <a:ext cx="457200" cy="457200"/>
-          </a:xfrm>
-          <a:prstGeom prst="ellipse">
-            <a:avLst/>
-          </a:prstGeom>
-          <a:solidFill>
-            <a:schemeClr val="tx2"/>
-          </a:solidFill>
-          <a:ln w="12700">
-            <a:solidFill>
-              <a:schemeClr val="tx2"/>
-            </a:solidFill>
-            <a:prstDash val="solid"/>
-          </a:ln>
-        </p:spPr>
-      </p:sp>
-      <p:sp>
-        <p:nvSpPr>
-          <p:cNvPr id="22" name="Badge text T4"/>
-          <p:cNvSpPr txBox="1"/>
-          <p:nvPr/>
-        </p:nvSpPr>
-        <p:spPr>
-          <a:xfrm>
-            <a:off x="5573268" y="1371600"/>
-            <a:ext cx="457200" cy="457200"/>
-          </a:xfrm>
-          <a:prstGeom prst="rect">
-            <a:avLst/>
-          </a:prstGeom>
-          <a:noFill/>
-          <a:ln/>
-        </p:spPr>
-        <p:txBody>
-          <a:bodyPr wrap="square" lIns="0" tIns="0" rIns="0" bIns="0" rtlCol="0" anchor="ctr"/>
-          <a:lstStyle/>
-          <a:p>
-            <a:pPr algn="ctr" indent="0" marL="0">
-              <a:buNone/>
-            </a:pPr>
-            <a:r>
-              <a:rPr lang="en-US" sz="1300" b="1" dirty="0">
+              <a:t>1. Is recall and over-claim rate against human key points a sound evaluation?</a:t>
+            </a:r>
+            <a:endParaRPr lang="en-US" sz="2000" dirty="0"/>
+          </a:p>
+          <a:p>
+            <a:pPr indent="0" marL="0">
+              <a:buNone/>
+            </a:pPr>
+            <a:r>
+              <a:rPr lang="en-US" sz="2000" dirty="0">
                 <a:solidFill>
                   <a:schemeClr val="bg1"/>
                 </a:solidFill>
               </a:rPr>
-              <a:t>T4</a:t>
-            </a:r>
-            <a:endParaRPr lang="en-US" sz="1300" dirty="0"/>
-          </a:p>
-        </p:txBody>
-      </p:sp>
-      <p:sp>
-        <p:nvSpPr>
-          <p:cNvPr id="23" name="Technique name T4"/>
-          <p:cNvSpPr txBox="1"/>
-          <p:nvPr/>
-        </p:nvSpPr>
-        <p:spPr>
-          <a:xfrm>
-            <a:off x="5509260" y="1920240"/>
-            <a:ext cx="1463040" cy="731520"/>
-          </a:xfrm>
-          <a:prstGeom prst="rect">
-            <a:avLst/>
-          </a:prstGeom>
-          <a:noFill/>
-          <a:ln/>
-        </p:spPr>
-        <p:txBody>
-          <a:bodyPr wrap="square" lIns="1016" tIns="1016" rIns="1016" bIns="1016" rtlCol="0" anchor="t"/>
-          <a:lstStyle/>
-          <a:p>
-            <a:pPr indent="0" marL="0">
-              <a:buNone/>
-            </a:pPr>
-            <a:r>
-              <a:rPr lang="en-US" sz="1400" b="1" dirty="0">
-                <a:solidFill>
-                  <a:schemeClr val="tx1"/>
-                </a:solidFill>
-              </a:rPr>
-              <a:t>Inconsistent design</a:t>
-            </a:r>
-            <a:endParaRPr lang="en-US" sz="1400" dirty="0"/>
-          </a:p>
-        </p:txBody>
-      </p:sp>
-      <p:sp>
-        <p:nvSpPr>
-          <p:cNvPr id="24" name="Technique ref T4"/>
-          <p:cNvSpPr txBox="1"/>
-          <p:nvPr/>
-        </p:nvSpPr>
-        <p:spPr>
-          <a:xfrm>
-            <a:off x="5509260" y="2697480"/>
-            <a:ext cx="1463040" cy="594360"/>
-          </a:xfrm>
-          <a:prstGeom prst="rect">
-            <a:avLst/>
-          </a:prstGeom>
-          <a:noFill/>
-          <a:ln/>
-        </p:spPr>
-        <p:txBody>
-          <a:bodyPr wrap="square" lIns="1016" tIns="1016" rIns="1016" bIns="1016" rtlCol="0" anchor="t"/>
-          <a:lstStyle/>
-          <a:p>
-            <a:pPr indent="0" marL="0">
-              <a:buNone/>
-            </a:pPr>
-            <a:r>
-              <a:rPr lang="en-US" sz="1100" dirty="0">
-                <a:solidFill>
-                  <a:schemeClr val="accent3"/>
-                </a:solidFill>
-              </a:rPr>
-              <a:t>Mendel 2010/2012 etc.</a:t>
-            </a:r>
-            <a:endParaRPr lang="en-US" sz="1100" dirty="0"/>
-          </a:p>
-        </p:txBody>
-      </p:sp>
-      <p:sp>
-        <p:nvSpPr>
-          <p:cNvPr id="25" name="Technique card T5"/>
-          <p:cNvSpPr/>
-          <p:nvPr/>
-        </p:nvSpPr>
-        <p:spPr>
-          <a:xfrm>
-            <a:off x="7132320" y="1234440"/>
-            <a:ext cx="1554480" cy="2103120"/>
-          </a:xfrm>
-          <a:prstGeom prst="roundRect">
-            <a:avLst>
-              <a:gd name="adj" fmla="val 4706"/>
-            </a:avLst>
-          </a:prstGeom>
-          <a:solidFill>
-            <a:schemeClr val="bg2"/>
-          </a:solidFill>
-          <a:ln w="9525">
-            <a:solidFill>
-              <a:srgbClr val="CCCCCC"/>
-            </a:solidFill>
-            <a:prstDash val="solid"/>
-          </a:ln>
-        </p:spPr>
-      </p:sp>
-      <p:sp>
-        <p:nvSpPr>
-          <p:cNvPr id="26" name="Badge T5"/>
-          <p:cNvSpPr/>
-          <p:nvPr/>
-        </p:nvSpPr>
-        <p:spPr>
-          <a:xfrm>
-            <a:off x="7242048" y="1371600"/>
-            <a:ext cx="457200" cy="457200"/>
-          </a:xfrm>
-          <a:prstGeom prst="ellipse">
-            <a:avLst/>
-          </a:prstGeom>
-          <a:solidFill>
-            <a:schemeClr val="tx2"/>
-          </a:solidFill>
-          <a:ln w="12700">
-            <a:solidFill>
-              <a:schemeClr val="tx2"/>
-            </a:solidFill>
-            <a:prstDash val="solid"/>
-          </a:ln>
-        </p:spPr>
-      </p:sp>
-      <p:sp>
-        <p:nvSpPr>
-          <p:cNvPr id="27" name="Badge text T5"/>
-          <p:cNvSpPr txBox="1"/>
-          <p:nvPr/>
-        </p:nvSpPr>
-        <p:spPr>
-          <a:xfrm>
-            <a:off x="7242048" y="1371600"/>
-            <a:ext cx="457200" cy="457200"/>
-          </a:xfrm>
-          <a:prstGeom prst="rect">
-            <a:avLst/>
-          </a:prstGeom>
-          <a:noFill/>
-          <a:ln/>
-        </p:spPr>
-        <p:txBody>
-          <a:bodyPr wrap="square" lIns="0" tIns="0" rIns="0" bIns="0" rtlCol="0" anchor="ctr"/>
-          <a:lstStyle/>
-          <a:p>
-            <a:pPr algn="ctr" indent="0" marL="0">
-              <a:buNone/>
-            </a:pPr>
-            <a:r>
-              <a:rPr lang="en-US" sz="1300" b="1" dirty="0">
-                <a:solidFill>
-                  <a:schemeClr val="bg1"/>
-                </a:solidFill>
-              </a:rPr>
-              <a:t>T5</a:t>
-            </a:r>
-            <a:endParaRPr lang="en-US" sz="1300" dirty="0"/>
-          </a:p>
-        </p:txBody>
-      </p:sp>
-      <p:sp>
-        <p:nvSpPr>
-          <p:cNvPr id="28" name="Technique name T5"/>
-          <p:cNvSpPr txBox="1"/>
-          <p:nvPr/>
-        </p:nvSpPr>
-        <p:spPr>
-          <a:xfrm>
-            <a:off x="7178040" y="1920240"/>
-            <a:ext cx="1463040" cy="731520"/>
-          </a:xfrm>
-          <a:prstGeom prst="rect">
-            <a:avLst/>
-          </a:prstGeom>
-          <a:noFill/>
-          <a:ln/>
-        </p:spPr>
-        <p:txBody>
-          <a:bodyPr wrap="square" lIns="1016" tIns="1016" rIns="1016" bIns="1016" rtlCol="0" anchor="t"/>
-          <a:lstStyle/>
-          <a:p>
-            <a:pPr indent="0" marL="0">
-              <a:buNone/>
-            </a:pPr>
-            <a:r>
-              <a:rPr lang="en-US" sz="1400" b="1" dirty="0">
-                <a:solidFill>
-                  <a:schemeClr val="tx1"/>
-                </a:solidFill>
-              </a:rPr>
-              <a:t>Low-contrast progress indicator</a:t>
-            </a:r>
-            <a:endParaRPr lang="en-US" sz="1400" dirty="0"/>
-          </a:p>
-        </p:txBody>
-      </p:sp>
-      <p:sp>
-        <p:nvSpPr>
-          <p:cNvPr id="29" name="Technique ref T5"/>
-          <p:cNvSpPr txBox="1"/>
-          <p:nvPr/>
-        </p:nvSpPr>
-        <p:spPr>
-          <a:xfrm>
-            <a:off x="7178040" y="2697480"/>
-            <a:ext cx="1463040" cy="594360"/>
-          </a:xfrm>
-          <a:prstGeom prst="rect">
-            <a:avLst/>
-          </a:prstGeom>
-          <a:noFill/>
-          <a:ln/>
-        </p:spPr>
-        <p:txBody>
-          <a:bodyPr wrap="square" lIns="1016" tIns="1016" rIns="1016" bIns="1016" rtlCol="0" anchor="t"/>
-          <a:lstStyle/>
-          <a:p>
-            <a:pPr indent="0" marL="0">
-              <a:buNone/>
-            </a:pPr>
-            <a:r>
-              <a:rPr lang="en-US" sz="1100" dirty="0">
-                <a:solidFill>
-                  <a:schemeClr val="accent3"/>
-                </a:solidFill>
-              </a:rPr>
-              <a:t>Yu et al. 2022; Legge et al. 1997</a:t>
-            </a:r>
-            <a:endParaRPr lang="en-US" sz="1100" dirty="0"/>
-          </a:p>
-        </p:txBody>
-      </p:sp>
-      <p:sp>
-        <p:nvSpPr>
-          <p:cNvPr id="30" name="Fact 1"/>
-          <p:cNvSpPr/>
-          <p:nvPr/>
-        </p:nvSpPr>
-        <p:spPr>
-          <a:xfrm>
-            <a:off x="457200" y="3566160"/>
-            <a:ext cx="1947672" cy="1051560"/>
-          </a:xfrm>
-          <a:prstGeom prst="roundRect">
-            <a:avLst>
-              <a:gd name="adj" fmla="val 6957"/>
-            </a:avLst>
-          </a:prstGeom>
-          <a:solidFill>
-            <a:schemeClr val="accent6"/>
-          </a:solidFill>
-          <a:ln w="9525">
-            <a:solidFill>
-              <a:schemeClr val="accent5"/>
-            </a:solidFill>
-            <a:prstDash val="solid"/>
-          </a:ln>
-        </p:spPr>
-      </p:sp>
-      <p:sp>
-        <p:nvSpPr>
-          <p:cNvPr id="31" name="Fact num 1"/>
-          <p:cNvSpPr txBox="1"/>
-          <p:nvPr/>
-        </p:nvSpPr>
-        <p:spPr>
-          <a:xfrm>
-            <a:off x="502920" y="3566160"/>
-            <a:ext cx="685800" cy="1051560"/>
-          </a:xfrm>
-          <a:prstGeom prst="rect">
-            <a:avLst/>
-          </a:prstGeom>
-          <a:noFill/>
-          <a:ln/>
-        </p:spPr>
-        <p:txBody>
-          <a:bodyPr wrap="square" lIns="1016" tIns="1016" rIns="1016" bIns="1016" rtlCol="0" anchor="ctr"/>
-          <a:lstStyle/>
-          <a:p>
-            <a:pPr indent="0" marL="0">
-              <a:buNone/>
-            </a:pPr>
-            <a:r>
-              <a:rPr lang="en-US" sz="3000" b="1" dirty="0">
-                <a:solidFill>
-                  <a:schemeClr val="tx2"/>
-                </a:solidFill>
-              </a:rPr>
-              <a:t>7</a:t>
-            </a:r>
-            <a:endParaRPr lang="en-US" sz="3000" dirty="0"/>
-          </a:p>
-        </p:txBody>
-      </p:sp>
-      <p:sp>
-        <p:nvSpPr>
-          <p:cNvPr id="32" name="Fact label 1"/>
-          <p:cNvSpPr txBox="1"/>
-          <p:nvPr/>
-        </p:nvSpPr>
-        <p:spPr>
-          <a:xfrm>
-            <a:off x="1188720" y="3566160"/>
-            <a:ext cx="1188720" cy="1051560"/>
-          </a:xfrm>
-          <a:prstGeom prst="rect">
-            <a:avLst/>
-          </a:prstGeom>
-          <a:noFill/>
-          <a:ln/>
-        </p:spPr>
-        <p:txBody>
-          <a:bodyPr wrap="square" lIns="1016" tIns="1016" rIns="1016" bIns="1016" rtlCol="0" anchor="ctr"/>
-          <a:lstStyle/>
-          <a:p>
-            <a:pPr indent="0" marL="0">
-              <a:buNone/>
-            </a:pPr>
-            <a:r>
-              <a:rPr lang="en-US" sz="1200" dirty="0">
-                <a:solidFill>
-                  <a:schemeClr val="tx1"/>
-                </a:solidFill>
-              </a:rPr>
-              <a:t>versions per site: G, B-T1…T5, B-all</a:t>
-            </a:r>
-            <a:endParaRPr lang="en-US" sz="1200" dirty="0"/>
-          </a:p>
-        </p:txBody>
-      </p:sp>
-      <p:sp>
-        <p:nvSpPr>
-          <p:cNvPr id="33" name="Fact 2"/>
-          <p:cNvSpPr/>
-          <p:nvPr/>
-        </p:nvSpPr>
-        <p:spPr>
-          <a:xfrm>
-            <a:off x="2542032" y="3566160"/>
-            <a:ext cx="1947672" cy="1051560"/>
-          </a:xfrm>
-          <a:prstGeom prst="roundRect">
-            <a:avLst>
-              <a:gd name="adj" fmla="val 6957"/>
-            </a:avLst>
-          </a:prstGeom>
-          <a:solidFill>
-            <a:schemeClr val="accent6"/>
-          </a:solidFill>
-          <a:ln w="9525">
-            <a:solidFill>
-              <a:schemeClr val="accent5"/>
-            </a:solidFill>
-            <a:prstDash val="solid"/>
-          </a:ln>
-        </p:spPr>
-      </p:sp>
-      <p:sp>
-        <p:nvSpPr>
-          <p:cNvPr id="34" name="Fact num 2"/>
-          <p:cNvSpPr txBox="1"/>
-          <p:nvPr/>
-        </p:nvSpPr>
-        <p:spPr>
-          <a:xfrm>
-            <a:off x="2587752" y="3566160"/>
-            <a:ext cx="685800" cy="1051560"/>
-          </a:xfrm>
-          <a:prstGeom prst="rect">
-            <a:avLst/>
-          </a:prstGeom>
-          <a:noFill/>
-          <a:ln/>
-        </p:spPr>
-        <p:txBody>
-          <a:bodyPr wrap="square" lIns="1016" tIns="1016" rIns="1016" bIns="1016" rtlCol="0" anchor="ctr"/>
-          <a:lstStyle/>
-          <a:p>
-            <a:pPr indent="0" marL="0">
-              <a:buNone/>
-            </a:pPr>
-            <a:r>
-              <a:rPr lang="en-US" sz="3000" b="1" dirty="0">
-                <a:solidFill>
-                  <a:schemeClr val="tx2"/>
-                </a:solidFill>
-              </a:rPr>
-              <a:t>2</a:t>
-            </a:r>
-            <a:endParaRPr lang="en-US" sz="3000" dirty="0"/>
-          </a:p>
-        </p:txBody>
-      </p:sp>
-      <p:sp>
-        <p:nvSpPr>
-          <p:cNvPr id="35" name="Fact label 2"/>
-          <p:cNvSpPr txBox="1"/>
-          <p:nvPr/>
-        </p:nvSpPr>
-        <p:spPr>
-          <a:xfrm>
-            <a:off x="3273552" y="3566160"/>
-            <a:ext cx="1188720" cy="1051560"/>
-          </a:xfrm>
-          <a:prstGeom prst="rect">
-            <a:avLst/>
-          </a:prstGeom>
-          <a:noFill/>
-          <a:ln/>
-        </p:spPr>
-        <p:txBody>
-          <a:bodyPr wrap="square" lIns="1016" tIns="1016" rIns="1016" bIns="1016" rtlCol="0" anchor="ctr"/>
-          <a:lstStyle/>
-          <a:p>
-            <a:pPr indent="0" marL="0">
-              <a:buNone/>
-            </a:pPr>
-            <a:r>
-              <a:rPr lang="en-US" sz="1200" dirty="0">
-                <a:solidFill>
-                  <a:schemeClr val="tx1"/>
-                </a:solidFill>
-              </a:rPr>
-              <a:t>genres: shopping, job search</a:t>
-            </a:r>
-            <a:endParaRPr lang="en-US" sz="1200" dirty="0"/>
-          </a:p>
-        </p:txBody>
-      </p:sp>
-      <p:sp>
-        <p:nvSpPr>
-          <p:cNvPr id="36" name="Fact 3"/>
-          <p:cNvSpPr/>
-          <p:nvPr/>
-        </p:nvSpPr>
-        <p:spPr>
-          <a:xfrm>
-            <a:off x="4626864" y="3566160"/>
-            <a:ext cx="1947672" cy="1051560"/>
-          </a:xfrm>
-          <a:prstGeom prst="roundRect">
-            <a:avLst>
-              <a:gd name="adj" fmla="val 6957"/>
-            </a:avLst>
-          </a:prstGeom>
-          <a:solidFill>
-            <a:schemeClr val="accent6"/>
-          </a:solidFill>
-          <a:ln w="9525">
-            <a:solidFill>
-              <a:schemeClr val="accent5"/>
-            </a:solidFill>
-            <a:prstDash val="solid"/>
-          </a:ln>
-        </p:spPr>
-      </p:sp>
-      <p:sp>
-        <p:nvSpPr>
-          <p:cNvPr id="37" name="Fact num 3"/>
-          <p:cNvSpPr txBox="1"/>
-          <p:nvPr/>
-        </p:nvSpPr>
-        <p:spPr>
-          <a:xfrm>
-            <a:off x="4672584" y="3566160"/>
-            <a:ext cx="685800" cy="1051560"/>
-          </a:xfrm>
-          <a:prstGeom prst="rect">
-            <a:avLst/>
-          </a:prstGeom>
-          <a:noFill/>
-          <a:ln/>
-        </p:spPr>
-        <p:txBody>
-          <a:bodyPr wrap="square" lIns="1016" tIns="1016" rIns="1016" bIns="1016" rtlCol="0" anchor="ctr"/>
-          <a:lstStyle/>
-          <a:p>
-            <a:pPr indent="0" marL="0">
-              <a:buNone/>
-            </a:pPr>
-            <a:r>
-              <a:rPr lang="en-US" sz="3000" b="1" dirty="0">
-                <a:solidFill>
-                  <a:schemeClr val="tx2"/>
-                </a:solidFill>
-              </a:rPr>
-              <a:t>0</a:t>
-            </a:r>
-            <a:endParaRPr lang="en-US" sz="3000" dirty="0"/>
-          </a:p>
-        </p:txBody>
-      </p:sp>
-      <p:sp>
-        <p:nvSpPr>
-          <p:cNvPr id="38" name="Fact label 3"/>
-          <p:cNvSpPr txBox="1"/>
-          <p:nvPr/>
-        </p:nvSpPr>
-        <p:spPr>
-          <a:xfrm>
-            <a:off x="5358384" y="3566160"/>
-            <a:ext cx="1188720" cy="1051560"/>
-          </a:xfrm>
-          <a:prstGeom prst="rect">
-            <a:avLst/>
-          </a:prstGeom>
-          <a:noFill/>
-          <a:ln/>
-        </p:spPr>
-        <p:txBody>
-          <a:bodyPr wrap="square" lIns="1016" tIns="1016" rIns="1016" bIns="1016" rtlCol="0" anchor="ctr"/>
-          <a:lstStyle/>
-          <a:p>
-            <a:pPr indent="0" marL="0">
-              <a:buNone/>
-            </a:pPr>
-            <a:r>
-              <a:rPr lang="en-US" sz="1200" dirty="0">
-                <a:solidFill>
-                  <a:schemeClr val="tx1"/>
-                </a:solidFill>
-              </a:rPr>
-              <a:t>scrolling, so gaze stays reliable</a:t>
-            </a:r>
-            <a:endParaRPr lang="en-US" sz="1200" dirty="0"/>
-          </a:p>
-        </p:txBody>
-      </p:sp>
-      <p:sp>
-        <p:nvSpPr>
-          <p:cNvPr id="39" name="Fact 4"/>
-          <p:cNvSpPr/>
-          <p:nvPr/>
-        </p:nvSpPr>
-        <p:spPr>
-          <a:xfrm>
-            <a:off x="6711696" y="3566160"/>
-            <a:ext cx="1947672" cy="1051560"/>
-          </a:xfrm>
-          <a:prstGeom prst="roundRect">
-            <a:avLst>
-              <a:gd name="adj" fmla="val 6957"/>
-            </a:avLst>
-          </a:prstGeom>
-          <a:solidFill>
-            <a:schemeClr val="accent6"/>
-          </a:solidFill>
-          <a:ln w="9525">
-            <a:solidFill>
-              <a:schemeClr val="accent5"/>
-            </a:solidFill>
-            <a:prstDash val="solid"/>
-          </a:ln>
-        </p:spPr>
-      </p:sp>
-      <p:sp>
-        <p:nvSpPr>
-          <p:cNvPr id="40" name="Fact num 4"/>
-          <p:cNvSpPr txBox="1"/>
-          <p:nvPr/>
-        </p:nvSpPr>
-        <p:spPr>
-          <a:xfrm>
-            <a:off x="6757416" y="3566160"/>
-            <a:ext cx="685800" cy="1051560"/>
-          </a:xfrm>
-          <a:prstGeom prst="rect">
-            <a:avLst/>
-          </a:prstGeom>
-          <a:noFill/>
-          <a:ln/>
-        </p:spPr>
-        <p:txBody>
-          <a:bodyPr wrap="square" lIns="1016" tIns="1016" rIns="1016" bIns="1016" rtlCol="0" anchor="ctr"/>
-          <a:lstStyle/>
-          <a:p>
-            <a:pPr indent="0" marL="0">
-              <a:buNone/>
-            </a:pPr>
-            <a:r>
-              <a:rPr lang="en-US" sz="3000" b="1" dirty="0">
-                <a:solidFill>
-                  <a:schemeClr val="tx2"/>
-                </a:solidFill>
-              </a:rPr>
-              <a:t>20</a:t>
-            </a:r>
-            <a:endParaRPr lang="en-US" sz="3000" dirty="0"/>
-          </a:p>
-        </p:txBody>
-      </p:sp>
-      <p:sp>
-        <p:nvSpPr>
-          <p:cNvPr id="41" name="Fact label 4"/>
-          <p:cNvSpPr txBox="1"/>
-          <p:nvPr/>
-        </p:nvSpPr>
-        <p:spPr>
-          <a:xfrm>
-            <a:off x="7443216" y="3566160"/>
-            <a:ext cx="1188720" cy="1051560"/>
-          </a:xfrm>
-          <a:prstGeom prst="rect">
-            <a:avLst/>
-          </a:prstGeom>
-          <a:noFill/>
-          <a:ln/>
-        </p:spPr>
-        <p:txBody>
-          <a:bodyPr wrap="square" lIns="1016" tIns="1016" rIns="1016" bIns="1016" rtlCol="0" anchor="ctr"/>
-          <a:lstStyle/>
-          <a:p>
-            <a:pPr indent="0" marL="0">
-              <a:buNone/>
-            </a:pPr>
-            <a:r>
-              <a:rPr lang="en-US" sz="1200" dirty="0">
-                <a:solidFill>
-                  <a:schemeClr val="tx1"/>
-                </a:solidFill>
-              </a:rPr>
-              <a:t>areas of interest per site</a:t>
-            </a:r>
-            <a:endParaRPr lang="en-US" sz="1200" dirty="0"/>
+              <a:t>2. Is N = 40–64 adequate for the planned versions per site?</a:t>
+            </a:r>
+            <a:endParaRPr lang="en-US" sz="2000" dirty="0"/>
           </a:p>
         </p:txBody>
       </p:sp>
@@ -7326,8 +7926,8 @@
         </p:nvSpPr>
         <p:spPr>
           <a:xfrm>
-            <a:off x="8321040" y="4800600"/>
-            <a:ext cx="365760" cy="228600"/>
+            <a:off x="11155680" y="6382512"/>
+            <a:ext cx="411480" cy="292608"/>
           </a:xfrm>
           <a:prstGeom prst="rect">
             <a:avLst/>
@@ -7342,7 +7942,7 @@
           <a:bodyPr/>
           <a:lstStyle>
             <a:lvl1pPr>
-              <a:defRPr sz="900">
+              <a:defRPr sz="1800">
                 <a:solidFill>
                   <a:schemeClr val="tx1"/>
                 </a:solidFill>
@@ -7354,620 +7954,6 @@
             <a:fld id="{F7021451-1387-4CA6-816F-3879F97B5CBC}" type="slidenum">
               <a:rPr b="0" lang="en-US"/>
               <a:t>8</a:t>
-            </a:fld>
-            <a:endParaRPr lang="en-US"/>
-          </a:p>
-        </p:txBody>
-      </p:sp>
-    </p:spTree>
-  </p:cSld>
-  <p:clrMapOvr>
-    <a:masterClrMapping/>
-  </p:clrMapOvr>
-</p:sld>
-</file>
-
-<file path=ppt/slides/slide9.xml><?xml version="1.0" encoding="utf-8"?>
-<p:sld xmlns:a="http://schemas.openxmlformats.org/drawingml/2006/main" xmlns:r="http://schemas.openxmlformats.org/officeDocument/2006/relationships" xmlns:p="http://schemas.openxmlformats.org/presentationml/2006/main">
-  <p:cSld name="Slide 9">
-    <p:spTree>
-      <p:nvGrpSpPr>
-        <p:cNvPr id="1" name=""/>
-        <p:cNvGrpSpPr/>
-        <p:nvPr/>
-      </p:nvGrpSpPr>
-      <p:grpSpPr>
-        <a:xfrm>
-          <a:off x="0" y="0"/>
-          <a:ext cx="0" cy="0"/>
-          <a:chOff x="0" y="0"/>
-          <a:chExt cx="0" cy="0"/>
-        </a:xfrm>
-      </p:grpSpPr>
-      <p:sp>
-        <p:nvSpPr>
-          <p:cNvPr id="2" name="Section label"/>
-          <p:cNvSpPr txBox="1"/>
-          <p:nvPr/>
-        </p:nvSpPr>
-        <p:spPr>
-          <a:xfrm>
-            <a:off x="457200" y="219456"/>
-            <a:ext cx="5486400" cy="237744"/>
-          </a:xfrm>
-          <a:prstGeom prst="rect">
-            <a:avLst/>
-          </a:prstGeom>
-          <a:noFill/>
-          <a:ln/>
-        </p:spPr>
-        <p:txBody>
-          <a:bodyPr wrap="square" lIns="0" tIns="0" rIns="0" bIns="0" rtlCol="0" anchor="ctr"/>
-          <a:lstStyle/>
-          <a:p>
-            <a:pPr indent="0" marL="0">
-              <a:buNone/>
-            </a:pPr>
-            <a:r>
-              <a:rPr lang="en-US" sz="1200" b="1" dirty="0">
-                <a:solidFill>
-                  <a:schemeClr val="tx2"/>
-                </a:solidFill>
-              </a:rPr>
-              <a:t>Master's · 3/3</a:t>
-            </a:r>
-            <a:endParaRPr lang="en-US" sz="1200" dirty="0"/>
-          </a:p>
-        </p:txBody>
-      </p:sp>
-      <p:sp>
-        <p:nvSpPr>
-          <p:cNvPr id="3" name="Text 1"/>
-          <p:cNvSpPr/>
-          <p:nvPr/>
-        </p:nvSpPr>
-        <p:spPr>
-          <a:xfrm>
-            <a:off x="457200" y="457200"/>
-            <a:ext cx="8229600" cy="594360"/>
-          </a:xfrm>
-          <a:prstGeom prst="rect">
-            <a:avLst/>
-          </a:prstGeom>
-          <a:noFill/>
-          <a:ln/>
-        </p:spPr>
-        <p:txBody>
-          <a:bodyPr wrap="square" lIns="0" tIns="0" rIns="0" bIns="0" rtlCol="0" anchor="ctr"/>
-          <a:lstStyle/>
-          <a:p>
-            <a:pPr indent="0" marL="0">
-              <a:buNone/>
-            </a:pPr>
-            <a:r>
-              <a:rPr lang="en-US" sz="2600" b="1" dirty="0">
-                <a:solidFill>
-                  <a:schemeClr val="tx2"/>
-                </a:solidFill>
-              </a:rPr>
-              <a:t>Status and take-away</a:t>
-            </a:r>
-            <a:endParaRPr lang="en-US" sz="2600" dirty="0"/>
-          </a:p>
-        </p:txBody>
-      </p:sp>
-      <p:sp>
-        <p:nvSpPr>
-          <p:cNvPr id="5" name="Step 1"/>
-          <p:cNvSpPr/>
-          <p:nvPr/>
-        </p:nvSpPr>
-        <p:spPr>
-          <a:xfrm>
-            <a:off x="457200" y="1280160"/>
-            <a:ext cx="2468880" cy="1188720"/>
-          </a:xfrm>
-          <a:prstGeom prst="roundRect">
-            <a:avLst>
-              <a:gd name="adj" fmla="val 6154"/>
-            </a:avLst>
-          </a:prstGeom>
-          <a:solidFill>
-            <a:schemeClr val="tx2"/>
-          </a:solidFill>
-          <a:ln w="9525">
-            <a:solidFill>
-              <a:schemeClr val="tx2"/>
-            </a:solidFill>
-            <a:prstDash val="solid"/>
-          </a:ln>
-        </p:spPr>
-      </p:sp>
-      <p:sp>
-        <p:nvSpPr>
-          <p:cNvPr id="6" name="Step text 1"/>
-          <p:cNvSpPr txBox="1"/>
-          <p:nvPr/>
-        </p:nvSpPr>
-        <p:spPr>
-          <a:xfrm>
-            <a:off x="566928" y="1280160"/>
-            <a:ext cx="2286000" cy="1188720"/>
-          </a:xfrm>
-          <a:prstGeom prst="rect">
-            <a:avLst/>
-          </a:prstGeom>
-          <a:noFill/>
-          <a:ln/>
-        </p:spPr>
-        <p:txBody>
-          <a:bodyPr wrap="square" lIns="1016" tIns="1016" rIns="1016" bIns="1016" rtlCol="0" anchor="ctr"/>
-          <a:lstStyle/>
-          <a:p>
-            <a:pPr indent="0" marL="0">
-              <a:buNone/>
-            </a:pPr>
-            <a:r>
-              <a:rPr lang="en-US" sz="1100" b="1" dirty="0">
-                <a:solidFill>
-                  <a:schemeClr val="bg1"/>
-                </a:solidFill>
-              </a:rPr>
-              <a:t>DONE</a:t>
-            </a:r>
-            <a:endParaRPr lang="en-US" sz="1400" dirty="0"/>
-          </a:p>
-          <a:p>
-            <a:pPr indent="0" marL="0">
-              <a:buNone/>
-            </a:pPr>
-            <a:r>
-              <a:rPr lang="en-US" sz="2000" b="1" dirty="0">
-                <a:solidFill>
-                  <a:schemeClr val="bg1"/>
-                </a:solidFill>
-              </a:rPr>
-              <a:t>Prototypes</a:t>
-            </a:r>
-            <a:endParaRPr lang="en-US" sz="1400" dirty="0"/>
-          </a:p>
-          <a:p>
-            <a:pPr indent="0" marL="0">
-              <a:buNone/>
-            </a:pPr>
-            <a:r>
-              <a:rPr lang="en-US" sz="1400" dirty="0">
-                <a:solidFill>
-                  <a:schemeClr val="bg1"/>
-                </a:solidFill>
-              </a:rPr>
-              <a:t>Both sites complete</a:t>
-            </a:r>
-            <a:endParaRPr lang="en-US" sz="1400" dirty="0"/>
-          </a:p>
-        </p:txBody>
-      </p:sp>
-      <p:sp>
-        <p:nvSpPr>
-          <p:cNvPr id="7" name="Step arrow 1"/>
-          <p:cNvSpPr/>
-          <p:nvPr/>
-        </p:nvSpPr>
-        <p:spPr>
-          <a:xfrm>
-            <a:off x="2971800" y="1874520"/>
-            <a:ext cx="320040" cy="0"/>
-          </a:xfrm>
-          <a:prstGeom prst="line">
-            <a:avLst/>
-          </a:prstGeom>
-          <a:noFill/>
-          <a:ln w="15875">
-            <a:solidFill>
-              <a:schemeClr val="tx1"/>
-            </a:solidFill>
-            <a:prstDash val="solid"/>
-            <a:tailEnd type="triangle"/>
-          </a:ln>
-        </p:spPr>
-      </p:sp>
-      <p:sp>
-        <p:nvSpPr>
-          <p:cNvPr id="8" name="Step 2"/>
-          <p:cNvSpPr/>
-          <p:nvPr/>
-        </p:nvSpPr>
-        <p:spPr>
-          <a:xfrm>
-            <a:off x="3337560" y="1280160"/>
-            <a:ext cx="2468880" cy="1188720"/>
-          </a:xfrm>
-          <a:prstGeom prst="roundRect">
-            <a:avLst>
-              <a:gd name="adj" fmla="val 6154"/>
-            </a:avLst>
-          </a:prstGeom>
-          <a:solidFill>
-            <a:schemeClr val="accent6"/>
-          </a:solidFill>
-          <a:ln w="9525">
-            <a:solidFill>
-              <a:schemeClr val="accent5"/>
-            </a:solidFill>
-            <a:prstDash val="solid"/>
-          </a:ln>
-        </p:spPr>
-      </p:sp>
-      <p:sp>
-        <p:nvSpPr>
-          <p:cNvPr id="9" name="Step text 2"/>
-          <p:cNvSpPr txBox="1"/>
-          <p:nvPr/>
-        </p:nvSpPr>
-        <p:spPr>
-          <a:xfrm>
-            <a:off x="3447288" y="1280160"/>
-            <a:ext cx="2286000" cy="1188720"/>
-          </a:xfrm>
-          <a:prstGeom prst="rect">
-            <a:avLst/>
-          </a:prstGeom>
-          <a:noFill/>
-          <a:ln/>
-        </p:spPr>
-        <p:txBody>
-          <a:bodyPr wrap="square" lIns="1016" tIns="1016" rIns="1016" bIns="1016" rtlCol="0" anchor="ctr"/>
-          <a:lstStyle/>
-          <a:p>
-            <a:pPr indent="0" marL="0">
-              <a:buNone/>
-            </a:pPr>
-            <a:r>
-              <a:rPr lang="en-US" sz="1100" b="1" dirty="0">
-                <a:solidFill>
-                  <a:schemeClr val="tx1"/>
-                </a:solidFill>
-              </a:rPr>
-              <a:t>PLANNED</a:t>
-            </a:r>
-            <a:endParaRPr lang="en-US" sz="1400" dirty="0"/>
-          </a:p>
-          <a:p>
-            <a:pPr indent="0" marL="0">
-              <a:buNone/>
-            </a:pPr>
-            <a:r>
-              <a:rPr lang="en-US" sz="2000" b="1" dirty="0">
-                <a:solidFill>
-                  <a:schemeClr val="tx1"/>
-                </a:solidFill>
-              </a:rPr>
-              <a:t>Pilot</a:t>
-            </a:r>
-            <a:endParaRPr lang="en-US" sz="1400" dirty="0"/>
-          </a:p>
-          <a:p>
-            <a:pPr indent="0" marL="0">
-              <a:buNone/>
-            </a:pPr>
-            <a:r>
-              <a:rPr lang="en-US" sz="1400" dirty="0">
-                <a:solidFill>
-                  <a:schemeClr val="tx1"/>
-                </a:solidFill>
-              </a:rPr>
-              <a:t>N = 6</a:t>
-            </a:r>
-            <a:endParaRPr lang="en-US" sz="1400" dirty="0"/>
-          </a:p>
-        </p:txBody>
-      </p:sp>
-      <p:sp>
-        <p:nvSpPr>
-          <p:cNvPr id="10" name="Step arrow 2"/>
-          <p:cNvSpPr/>
-          <p:nvPr/>
-        </p:nvSpPr>
-        <p:spPr>
-          <a:xfrm>
-            <a:off x="5852160" y="1874520"/>
-            <a:ext cx="320040" cy="0"/>
-          </a:xfrm>
-          <a:prstGeom prst="line">
-            <a:avLst/>
-          </a:prstGeom>
-          <a:noFill/>
-          <a:ln w="15875">
-            <a:solidFill>
-              <a:schemeClr val="tx1"/>
-            </a:solidFill>
-            <a:prstDash val="solid"/>
-            <a:tailEnd type="triangle"/>
-          </a:ln>
-        </p:spPr>
-      </p:sp>
-      <p:sp>
-        <p:nvSpPr>
-          <p:cNvPr id="11" name="Step 3"/>
-          <p:cNvSpPr/>
-          <p:nvPr/>
-        </p:nvSpPr>
-        <p:spPr>
-          <a:xfrm>
-            <a:off x="6217920" y="1280160"/>
-            <a:ext cx="2468880" cy="1188720"/>
-          </a:xfrm>
-          <a:prstGeom prst="roundRect">
-            <a:avLst>
-              <a:gd name="adj" fmla="val 6154"/>
-            </a:avLst>
-          </a:prstGeom>
-          <a:solidFill>
-            <a:schemeClr val="accent6"/>
-          </a:solidFill>
-          <a:ln w="9525">
-            <a:solidFill>
-              <a:schemeClr val="accent5"/>
-            </a:solidFill>
-            <a:prstDash val="solid"/>
-          </a:ln>
-        </p:spPr>
-      </p:sp>
-      <p:sp>
-        <p:nvSpPr>
-          <p:cNvPr id="12" name="Step text 3"/>
-          <p:cNvSpPr txBox="1"/>
-          <p:nvPr/>
-        </p:nvSpPr>
-        <p:spPr>
-          <a:xfrm>
-            <a:off x="6327648" y="1280160"/>
-            <a:ext cx="2286000" cy="1188720"/>
-          </a:xfrm>
-          <a:prstGeom prst="rect">
-            <a:avLst/>
-          </a:prstGeom>
-          <a:noFill/>
-          <a:ln/>
-        </p:spPr>
-        <p:txBody>
-          <a:bodyPr wrap="square" lIns="1016" tIns="1016" rIns="1016" bIns="1016" rtlCol="0" anchor="ctr"/>
-          <a:lstStyle/>
-          <a:p>
-            <a:pPr indent="0" marL="0">
-              <a:buNone/>
-            </a:pPr>
-            <a:r>
-              <a:rPr lang="en-US" sz="1100" b="1" dirty="0">
-                <a:solidFill>
-                  <a:schemeClr val="tx1"/>
-                </a:solidFill>
-              </a:rPr>
-              <a:t>PLANNED</a:t>
-            </a:r>
-            <a:endParaRPr lang="en-US" sz="1400" dirty="0"/>
-          </a:p>
-          <a:p>
-            <a:pPr indent="0" marL="0">
-              <a:buNone/>
-            </a:pPr>
-            <a:r>
-              <a:rPr lang="en-US" sz="2000" b="1" dirty="0">
-                <a:solidFill>
-                  <a:schemeClr val="tx1"/>
-                </a:solidFill>
-              </a:rPr>
-              <a:t>Main study</a:t>
-            </a:r>
-            <a:endParaRPr lang="en-US" sz="1400" dirty="0"/>
-          </a:p>
-          <a:p>
-            <a:pPr indent="0" marL="0">
-              <a:buNone/>
-            </a:pPr>
-            <a:r>
-              <a:rPr lang="en-US" sz="1400" dirty="0">
-                <a:solidFill>
-                  <a:schemeClr val="tx1"/>
-                </a:solidFill>
-              </a:rPr>
-              <a:t>N = 40–64</a:t>
-            </a:r>
-            <a:endParaRPr lang="en-US" sz="1400" dirty="0"/>
-          </a:p>
-        </p:txBody>
-      </p:sp>
-      <p:sp>
-        <p:nvSpPr>
-          <p:cNvPr id="13" name="Status box"/>
-          <p:cNvSpPr/>
-          <p:nvPr/>
-        </p:nvSpPr>
-        <p:spPr>
-          <a:xfrm>
-            <a:off x="457200" y="2697480"/>
-            <a:ext cx="8229600" cy="777240"/>
-          </a:xfrm>
-          <a:prstGeom prst="roundRect">
-            <a:avLst>
-              <a:gd name="adj" fmla="val 9412"/>
-            </a:avLst>
-          </a:prstGeom>
-          <a:solidFill>
-            <a:srgbClr val="FDEEEE"/>
-          </a:solidFill>
-          <a:ln w="9525">
-            <a:solidFill>
-              <a:srgbClr val="FE3939"/>
-            </a:solidFill>
-            <a:prstDash val="solid"/>
-          </a:ln>
-        </p:spPr>
-      </p:sp>
-      <p:sp>
-        <p:nvSpPr>
-          <p:cNvPr id="14" name="Status text"/>
-          <p:cNvSpPr txBox="1"/>
-          <p:nvPr/>
-        </p:nvSpPr>
-        <p:spPr>
-          <a:xfrm>
-            <a:off x="594360" y="2697480"/>
-            <a:ext cx="7955280" cy="777240"/>
-          </a:xfrm>
-          <a:prstGeom prst="rect">
-            <a:avLst/>
-          </a:prstGeom>
-          <a:noFill/>
-          <a:ln/>
-        </p:spPr>
-        <p:txBody>
-          <a:bodyPr wrap="square" lIns="1016" tIns="1016" rIns="1016" bIns="1016" rtlCol="0" anchor="ctr"/>
-          <a:lstStyle/>
-          <a:p>
-            <a:pPr indent="0" marL="0">
-              <a:buNone/>
-            </a:pPr>
-            <a:r>
-              <a:rPr lang="en-US" sz="1500" b="1" dirty="0">
-                <a:solidFill>
-                  <a:schemeClr val="accent4"/>
-                </a:solidFill>
-              </a:rPr>
-              <a:t>So far: </a:t>
-            </a:r>
-            <a:pPr indent="0" marL="0">
-              <a:buNone/>
-            </a:pPr>
-            <a:r>
-              <a:rPr lang="en-US" sz="1500" dirty="0">
-                <a:solidFill>
-                  <a:schemeClr val="tx1"/>
-                </a:solidFill>
-              </a:rPr>
-              <a:t>N = 3 preliminary study and a wiring check with mock LLM responses. No results are claimed yet.</a:t>
-            </a:r>
-            <a:endParaRPr lang="en-US" sz="1500" dirty="0"/>
-          </a:p>
-        </p:txBody>
-      </p:sp>
-      <p:sp>
-        <p:nvSpPr>
-          <p:cNvPr id="15" name="Take-away"/>
-          <p:cNvSpPr/>
-          <p:nvPr/>
-        </p:nvSpPr>
-        <p:spPr>
-          <a:xfrm>
-            <a:off x="457200" y="3657600"/>
-            <a:ext cx="8229600" cy="960120"/>
-          </a:xfrm>
-          <a:prstGeom prst="roundRect">
-            <a:avLst>
-              <a:gd name="adj" fmla="val 7619"/>
-            </a:avLst>
-          </a:prstGeom>
-          <a:solidFill>
-            <a:schemeClr val="tx2"/>
-          </a:solidFill>
-          <a:ln w="9525">
-            <a:solidFill>
-              <a:schemeClr val="tx2"/>
-            </a:solidFill>
-            <a:prstDash val="solid"/>
-          </a:ln>
-        </p:spPr>
-      </p:sp>
-      <p:sp>
-        <p:nvSpPr>
-          <p:cNvPr id="16" name="Take-away text"/>
-          <p:cNvSpPr txBox="1"/>
-          <p:nvPr/>
-        </p:nvSpPr>
-        <p:spPr>
-          <a:xfrm>
-            <a:off x="594360" y="3657600"/>
-            <a:ext cx="7955280" cy="960120"/>
-          </a:xfrm>
-          <a:prstGeom prst="rect">
-            <a:avLst/>
-          </a:prstGeom>
-          <a:noFill/>
-          <a:ln/>
-        </p:spPr>
-        <p:txBody>
-          <a:bodyPr wrap="square" lIns="1016" tIns="1016" rIns="1016" bIns="1016" rtlCol="0" anchor="ctr"/>
-          <a:lstStyle/>
-          <a:p>
-            <a:pPr indent="0" marL="0">
-              <a:buNone/>
-            </a:pPr>
-            <a:r>
-              <a:rPr lang="en-US" sz="1700" b="1" dirty="0">
-                <a:solidFill>
-                  <a:schemeClr val="bg1"/>
-                </a:solidFill>
-              </a:rPr>
-              <a:t>Help UX teams find where and why users hesitate, with less burden on users.</a:t>
-            </a:r>
-            <a:endParaRPr lang="en-US" sz="1400" dirty="0"/>
-          </a:p>
-          <a:p>
-            <a:pPr indent="0" marL="0">
-              <a:buNone/>
-            </a:pPr>
-            <a:r>
-              <a:rPr lang="en-US" sz="1300" dirty="0">
-                <a:solidFill>
-                  <a:schemeClr val="bg1"/>
-                </a:solidFill>
-              </a:rPr>
-              <a:t>Showing where an LLM's interpretation breaks down is itself a useful finding.</a:t>
-            </a:r>
-            <a:endParaRPr lang="en-US" sz="1400" dirty="0"/>
-          </a:p>
-        </p:txBody>
-      </p:sp>
-      <p:sp>
-        <p:nvSpPr>
-          <p:cNvPr id="25" name="Slide Number Placeholder 0"/>
-          <p:cNvSpPr>
-            <a:spLocks noGrp="1"/>
-          </p:cNvSpPr>
-          <p:nvPr>
-            <p:ph type="sldNum" sz="quarter" idx="4294967295"/>
-          </p:nvPr>
-        </p:nvSpPr>
-        <p:spPr>
-          <a:xfrm>
-            <a:off x="8321040" y="4800600"/>
-            <a:ext cx="365760" cy="228600"/>
-          </a:xfrm>
-          <a:prstGeom prst="rect">
-            <a:avLst/>
-          </a:prstGeom>
-          <a:extLst>
-            <a:ext uri="{C572A759-6A51-4108-AA02-DFA0A04FC94B}">
-              <ma14:wrappingTextBoxFlag xmlns:ma14="http://schemas.microsoft.com/office/mac/drawingml/2011/main" val="0"/>
-            </a:ext>
-          </a:extLst>
-        </p:spPr>
-        <p:txBody>
-          <a:bodyPr/>
-          <a:lstStyle>
-            <a:lvl1pPr>
-              <a:defRPr sz="900">
-                <a:solidFill>
-                  <a:schemeClr val="tx1"/>
-                </a:solidFill>
-              </a:defRPr>
-            </a:lvl1pPr>
-          </a:lstStyle>
-          <a:p>
-            <a:pPr algn="r"/>
-            <a:fld id="{F7021451-1387-4CA6-816F-3879F97B5CBC}" type="slidenum">
-              <a:rPr b="0" lang="en-US"/>
-              <a:t>9</a:t>
             </a:fld>
             <a:endParaRPr lang="en-US"/>
           </a:p>
@@ -8001,7 +7987,7 @@
         <a:srgbClr val="0017C1"/>
       </a:accent1>
       <a:accent2>
-        <a:srgbClr val="D2A400"/>
+        <a:srgbClr val="666666"/>
       </a:accent2>
       <a:accent3>
         <a:srgbClr val="626264"/>
